--- a/docs/Disertatie_prezentare.pptx
+++ b/docs/Disertatie_prezentare.pptx
@@ -22,6 +22,8 @@
     <p:sldId id="270" r:id="rId21"/>
     <p:sldId id="271" r:id="rId22"/>
     <p:sldId id="272" r:id="rId23"/>
+    <p:sldId id="273" r:id="rId24"/>
+    <p:sldId id="274" r:id="rId25"/>
   </p:sldIdLst>
   <p:sldSz cx="12191695" cy="6858000" type="screen4x3"/>
   <p:notesSz cx="6858000" cy="9144000"/>
@@ -121,6 +123,1686 @@
     </a:lvl9pPr>
   </p:defaultTextStyle>
 </p:presentation>
+</file>
+
+<file path=ppt/notesMasters/notesMaster1.xml><?xml version="1.0" encoding="utf-8"?>
+<p:notesMaster xmlns:a="http://schemas.openxmlformats.org/drawingml/2006/main" xmlns:p="http://schemas.openxmlformats.org/presentationml/2006/main" xmlns:r="http://schemas.openxmlformats.org/officeDocument/2006/relationships">
+  <p:cSld>
+    <p:bg>
+      <p:bgRef idx="1001">
+        <a:schemeClr val="bg1"/>
+      </p:bgRef>
+    </p:bg>
+    <p:spTree>
+      <p:nvGrpSpPr>
+        <p:cNvPr id="1" name=""/>
+        <p:cNvGrpSpPr/>
+        <p:nvPr/>
+      </p:nvGrpSpPr>
+      <p:grpSpPr>
+        <a:xfrm>
+          <a:off x="0" y="0"/>
+          <a:ext cx="0" cy="0"/>
+          <a:chOff x="0" y="0"/>
+          <a:chExt cx="0" cy="0"/>
+        </a:xfrm>
+      </p:grpSpPr>
+      <p:sp>
+        <p:nvSpPr>
+          <p:cNvPr id="2" name="Header Placeholder 1"/>
+          <p:cNvSpPr>
+            <a:spLocks noGrp="1"/>
+          </p:cNvSpPr>
+          <p:nvPr>
+            <p:ph type="hdr" sz="quarter"/>
+          </p:nvPr>
+        </p:nvSpPr>
+        <p:spPr>
+          <a:xfrm>
+            <a:off x="0" y="0"/>
+            <a:ext cx="2971800" cy="457200"/>
+          </a:xfrm>
+          <a:prstGeom prst="rect">
+            <a:avLst/>
+          </a:prstGeom>
+        </p:spPr>
+        <p:txBody>
+          <a:bodyPr vert="horz" lIns="91440" tIns="45720" rIns="91440" bIns="45720" rtlCol="0"/>
+          <a:lstStyle>
+            <a:lvl1pPr algn="l">
+              <a:defRPr sz="1200"/>
+            </a:lvl1pPr>
+          </a:lstStyle>
+          <a:p>
+            <a:endParaRPr lang="en-US"/>
+          </a:p>
+        </p:txBody>
+      </p:sp>
+      <p:sp>
+        <p:nvSpPr>
+          <p:cNvPr id="3" name="Date Placeholder 2"/>
+          <p:cNvSpPr>
+            <a:spLocks noGrp="1"/>
+          </p:cNvSpPr>
+          <p:nvPr>
+            <p:ph type="dt" idx="1"/>
+          </p:nvPr>
+        </p:nvSpPr>
+        <p:spPr>
+          <a:xfrm>
+            <a:off x="3884613" y="0"/>
+            <a:ext cx="2971800" cy="457200"/>
+          </a:xfrm>
+          <a:prstGeom prst="rect">
+            <a:avLst/>
+          </a:prstGeom>
+        </p:spPr>
+        <p:txBody>
+          <a:bodyPr vert="horz" lIns="91440" tIns="45720" rIns="91440" bIns="45720" rtlCol="0"/>
+          <a:lstStyle>
+            <a:lvl1pPr algn="r">
+              <a:defRPr sz="1200"/>
+            </a:lvl1pPr>
+          </a:lstStyle>
+          <a:p>
+            <a:fld id="{0F89C1C7-3DCD-1040-A9CF-14679D8B5DDD}" type="datetimeFigureOut">
+              <a:rPr lang="en-US" smtClean="0"/>
+              <a:t>10/17/16</a:t>
+            </a:fld>
+            <a:endParaRPr lang="en-US"/>
+          </a:p>
+        </p:txBody>
+      </p:sp>
+      <p:sp>
+        <p:nvSpPr>
+          <p:cNvPr id="4" name="Slide Image Placeholder 3"/>
+          <p:cNvSpPr>
+            <a:spLocks noGrp="1" noRot="1" noChangeAspect="1"/>
+          </p:cNvSpPr>
+          <p:nvPr>
+            <p:ph type="sldImg" idx="2"/>
+          </p:nvPr>
+        </p:nvSpPr>
+        <p:spPr>
+          <a:xfrm>
+            <a:off x="1143000" y="685800"/>
+            <a:ext cx="4572000" cy="3429000"/>
+          </a:xfrm>
+          <a:prstGeom prst="rect">
+            <a:avLst/>
+          </a:prstGeom>
+          <a:noFill/>
+          <a:ln w="12700">
+            <a:solidFill>
+              <a:prstClr val="black"/>
+            </a:solidFill>
+          </a:ln>
+        </p:spPr>
+        <p:txBody>
+          <a:bodyPr vert="horz" lIns="91440" tIns="45720" rIns="91440" bIns="45720" rtlCol="0" anchor="ctr"/>
+          <a:lstStyle/>
+          <a:p>
+            <a:endParaRPr lang="en-US"/>
+          </a:p>
+        </p:txBody>
+      </p:sp>
+      <p:sp>
+        <p:nvSpPr>
+          <p:cNvPr id="5" name="Notes Placeholder 4"/>
+          <p:cNvSpPr>
+            <a:spLocks noGrp="1"/>
+          </p:cNvSpPr>
+          <p:nvPr>
+            <p:ph type="body" sz="quarter" idx="3"/>
+          </p:nvPr>
+        </p:nvSpPr>
+        <p:spPr>
+          <a:xfrm>
+            <a:off x="685800" y="4343400"/>
+            <a:ext cx="5486400" cy="4114800"/>
+          </a:xfrm>
+          <a:prstGeom prst="rect">
+            <a:avLst/>
+          </a:prstGeom>
+        </p:spPr>
+        <p:txBody>
+          <a:bodyPr vert="horz" lIns="91440" tIns="45720" rIns="91440" bIns="45720" rtlCol="0"/>
+          <a:lstStyle/>
+          <a:p>
+            <a:pPr lvl="0"/>
+            <a:r>
+              <a:rPr lang="en-US" smtClean="0"/>
+              <a:t>Click to edit Master text styles</a:t>
+            </a:r>
+          </a:p>
+          <a:p>
+            <a:pPr lvl="1"/>
+            <a:r>
+              <a:rPr lang="en-US" smtClean="0"/>
+              <a:t>Second level</a:t>
+            </a:r>
+          </a:p>
+          <a:p>
+            <a:pPr lvl="2"/>
+            <a:r>
+              <a:rPr lang="en-US" smtClean="0"/>
+              <a:t>Third level</a:t>
+            </a:r>
+          </a:p>
+          <a:p>
+            <a:pPr lvl="3"/>
+            <a:r>
+              <a:rPr lang="en-US" smtClean="0"/>
+              <a:t>Fourth level</a:t>
+            </a:r>
+          </a:p>
+          <a:p>
+            <a:pPr lvl="4"/>
+            <a:r>
+              <a:rPr lang="en-US" smtClean="0"/>
+              <a:t>Fifth level</a:t>
+            </a:r>
+            <a:endParaRPr lang="en-US"/>
+          </a:p>
+        </p:txBody>
+      </p:sp>
+      <p:sp>
+        <p:nvSpPr>
+          <p:cNvPr id="6" name="Footer Placeholder 5"/>
+          <p:cNvSpPr>
+            <a:spLocks noGrp="1"/>
+          </p:cNvSpPr>
+          <p:nvPr>
+            <p:ph type="ftr" sz="quarter" idx="4"/>
+          </p:nvPr>
+        </p:nvSpPr>
+        <p:spPr>
+          <a:xfrm>
+            <a:off x="0" y="8685213"/>
+            <a:ext cx="2971800" cy="457200"/>
+          </a:xfrm>
+          <a:prstGeom prst="rect">
+            <a:avLst/>
+          </a:prstGeom>
+        </p:spPr>
+        <p:txBody>
+          <a:bodyPr vert="horz" lIns="91440" tIns="45720" rIns="91440" bIns="45720" rtlCol="0" anchor="b"/>
+          <a:lstStyle>
+            <a:lvl1pPr algn="l">
+              <a:defRPr sz="1200"/>
+            </a:lvl1pPr>
+          </a:lstStyle>
+          <a:p>
+            <a:endParaRPr lang="en-US"/>
+          </a:p>
+        </p:txBody>
+      </p:sp>
+      <p:sp>
+        <p:nvSpPr>
+          <p:cNvPr id="7" name="Slide Number Placeholder 6"/>
+          <p:cNvSpPr>
+            <a:spLocks noGrp="1"/>
+          </p:cNvSpPr>
+          <p:nvPr>
+            <p:ph type="sldNum" sz="quarter" idx="5"/>
+          </p:nvPr>
+        </p:nvSpPr>
+        <p:spPr>
+          <a:xfrm>
+            <a:off x="3884613" y="8685213"/>
+            <a:ext cx="2971800" cy="457200"/>
+          </a:xfrm>
+          <a:prstGeom prst="rect">
+            <a:avLst/>
+          </a:prstGeom>
+        </p:spPr>
+        <p:txBody>
+          <a:bodyPr vert="horz" lIns="91440" tIns="45720" rIns="91440" bIns="45720" rtlCol="0" anchor="b"/>
+          <a:lstStyle>
+            <a:lvl1pPr algn="r">
+              <a:defRPr sz="1200"/>
+            </a:lvl1pPr>
+          </a:lstStyle>
+          <a:p>
+            <a:fld id="{BB5E49A5-4136-284D-997B-48E1D791AD67}" type="slidenum">
+              <a:rPr lang="en-US" smtClean="0"/>
+              <a:t>‹#›</a:t>
+            </a:fld>
+            <a:endParaRPr lang="en-US"/>
+          </a:p>
+        </p:txBody>
+      </p:sp>
+    </p:spTree>
+    <p:extLst>
+      <p:ext uri="{BB962C8B-B14F-4D97-AF65-F5344CB8AC3E}">
+        <p14:creationId xmlns:p14="http://schemas.microsoft.com/office/powerpoint/2010/main" val="2623252185"/>
+      </p:ext>
+    </p:extLst>
+  </p:cSld>
+  <p:clrMap bg1="lt1" tx1="dk1" bg2="lt2" tx2="dk2" accent1="accent1" accent2="accent2" accent3="accent3" accent4="accent4" accent5="accent5" accent6="accent6" hlink="hlink" folHlink="folHlink"/>
+  <p:notesStyle>
+    <a:lvl1pPr marL="0" algn="l" defTabSz="457200" rtl="0" eaLnBrk="1" latinLnBrk="0" hangingPunct="1">
+      <a:defRPr sz="1200" kern="1200">
+        <a:solidFill>
+          <a:schemeClr val="tx1"/>
+        </a:solidFill>
+        <a:latin typeface="+mn-lt"/>
+        <a:ea typeface="+mn-ea"/>
+        <a:cs typeface="+mn-cs"/>
+      </a:defRPr>
+    </a:lvl1pPr>
+    <a:lvl2pPr marL="457200" algn="l" defTabSz="457200" rtl="0" eaLnBrk="1" latinLnBrk="0" hangingPunct="1">
+      <a:defRPr sz="1200" kern="1200">
+        <a:solidFill>
+          <a:schemeClr val="tx1"/>
+        </a:solidFill>
+        <a:latin typeface="+mn-lt"/>
+        <a:ea typeface="+mn-ea"/>
+        <a:cs typeface="+mn-cs"/>
+      </a:defRPr>
+    </a:lvl2pPr>
+    <a:lvl3pPr marL="914400" algn="l" defTabSz="457200" rtl="0" eaLnBrk="1" latinLnBrk="0" hangingPunct="1">
+      <a:defRPr sz="1200" kern="1200">
+        <a:solidFill>
+          <a:schemeClr val="tx1"/>
+        </a:solidFill>
+        <a:latin typeface="+mn-lt"/>
+        <a:ea typeface="+mn-ea"/>
+        <a:cs typeface="+mn-cs"/>
+      </a:defRPr>
+    </a:lvl3pPr>
+    <a:lvl4pPr marL="1371600" algn="l" defTabSz="457200" rtl="0" eaLnBrk="1" latinLnBrk="0" hangingPunct="1">
+      <a:defRPr sz="1200" kern="1200">
+        <a:solidFill>
+          <a:schemeClr val="tx1"/>
+        </a:solidFill>
+        <a:latin typeface="+mn-lt"/>
+        <a:ea typeface="+mn-ea"/>
+        <a:cs typeface="+mn-cs"/>
+      </a:defRPr>
+    </a:lvl4pPr>
+    <a:lvl5pPr marL="1828800" algn="l" defTabSz="457200" rtl="0" eaLnBrk="1" latinLnBrk="0" hangingPunct="1">
+      <a:defRPr sz="1200" kern="1200">
+        <a:solidFill>
+          <a:schemeClr val="tx1"/>
+        </a:solidFill>
+        <a:latin typeface="+mn-lt"/>
+        <a:ea typeface="+mn-ea"/>
+        <a:cs typeface="+mn-cs"/>
+      </a:defRPr>
+    </a:lvl5pPr>
+    <a:lvl6pPr marL="2286000" algn="l" defTabSz="457200" rtl="0" eaLnBrk="1" latinLnBrk="0" hangingPunct="1">
+      <a:defRPr sz="1200" kern="1200">
+        <a:solidFill>
+          <a:schemeClr val="tx1"/>
+        </a:solidFill>
+        <a:latin typeface="+mn-lt"/>
+        <a:ea typeface="+mn-ea"/>
+        <a:cs typeface="+mn-cs"/>
+      </a:defRPr>
+    </a:lvl6pPr>
+    <a:lvl7pPr marL="2743200" algn="l" defTabSz="457200" rtl="0" eaLnBrk="1" latinLnBrk="0" hangingPunct="1">
+      <a:defRPr sz="1200" kern="1200">
+        <a:solidFill>
+          <a:schemeClr val="tx1"/>
+        </a:solidFill>
+        <a:latin typeface="+mn-lt"/>
+        <a:ea typeface="+mn-ea"/>
+        <a:cs typeface="+mn-cs"/>
+      </a:defRPr>
+    </a:lvl7pPr>
+    <a:lvl8pPr marL="3200400" algn="l" defTabSz="457200" rtl="0" eaLnBrk="1" latinLnBrk="0" hangingPunct="1">
+      <a:defRPr sz="1200" kern="1200">
+        <a:solidFill>
+          <a:schemeClr val="tx1"/>
+        </a:solidFill>
+        <a:latin typeface="+mn-lt"/>
+        <a:ea typeface="+mn-ea"/>
+        <a:cs typeface="+mn-cs"/>
+      </a:defRPr>
+    </a:lvl8pPr>
+    <a:lvl9pPr marL="3657600" algn="l" defTabSz="457200" rtl="0" eaLnBrk="1" latinLnBrk="0" hangingPunct="1">
+      <a:defRPr sz="1200" kern="1200">
+        <a:solidFill>
+          <a:schemeClr val="tx1"/>
+        </a:solidFill>
+        <a:latin typeface="+mn-lt"/>
+        <a:ea typeface="+mn-ea"/>
+        <a:cs typeface="+mn-cs"/>
+      </a:defRPr>
+    </a:lvl9pPr>
+  </p:notesStyle>
+</p:notesMaster>
+</file>
+
+<file path=ppt/notesSlides/notesSlide1.xml><?xml version="1.0" encoding="utf-8"?>
+<p:notes xmlns:a="http://schemas.openxmlformats.org/drawingml/2006/main" xmlns:p="http://schemas.openxmlformats.org/presentationml/2006/main" xmlns:r="http://schemas.openxmlformats.org/officeDocument/2006/relationships">
+  <p:cSld>
+    <p:spTree>
+      <p:nvGrpSpPr>
+        <p:cNvPr id="1" name=""/>
+        <p:cNvGrpSpPr/>
+        <p:nvPr/>
+      </p:nvGrpSpPr>
+      <p:grpSpPr>
+        <a:xfrm>
+          <a:off x="0" y="0"/>
+          <a:ext cx="0" cy="0"/>
+          <a:chOff x="0" y="0"/>
+          <a:chExt cx="0" cy="0"/>
+        </a:xfrm>
+      </p:grpSpPr>
+      <p:sp>
+        <p:nvSpPr>
+          <p:cNvPr id="2" name="Slide Image Placeholder 1"/>
+          <p:cNvSpPr>
+            <a:spLocks noGrp="1"/>
+          </p:cNvSpPr>
+          <p:nvPr>
+            <p:ph type="sldImg" idx="2"/>
+          </p:nvPr>
+        </p:nvSpPr>
+        <p:spPr/>
+      </p:sp>
+      <p:sp>
+        <p:nvSpPr>
+          <p:cNvPr id="3" name="Notes Placeholder 2"/>
+          <p:cNvSpPr>
+            <a:spLocks noGrp="1"/>
+          </p:cNvSpPr>
+          <p:nvPr>
+            <p:ph type="body" idx="3" sz="quarter"/>
+          </p:nvPr>
+        </p:nvSpPr>
+        <p:spPr/>
+        <p:txBody>
+          <a:bodyPr/>
+          <a:lstStyle/>
+          <a:p>
+            <a:r>
+              <a:t>Bună ziua. Mă numesc Geană Tudor-Bogdan și vă voi prezenta lucrarea mea de disertație, intitulată „Sisteme e-medicine de gestionare și monitorizare a datelor epidemiologice”, realizată sub coordonarea domnului profesor Radu Rădescu. Pe scurt, lucrarea pornește de la o întrebare practică: cum putem trece de la ecuațiile matematice ale unei epidemii la un sistem software real, distribuit, care să le ruleze, să le compare și să le facă utilizabile. În continuare voi parcurge motivația, modelele folosite, arhitectura sistemului, rezultatele experimentale și, la final, contribuțiile mele originale.</a:t>
+            </a:r>
+          </a:p>
+        </p:txBody>
+      </p:sp>
+      <p:sp>
+        <p:nvSpPr>
+          <p:cNvPr id="4" name="Slide Number Placeholder 3"/>
+          <p:cNvSpPr>
+            <a:spLocks noGrp="1"/>
+          </p:cNvSpPr>
+          <p:nvPr>
+            <p:ph type="sldNum" idx="5" sz="quarter"/>
+          </p:nvPr>
+        </p:nvSpPr>
+        <p:spPr/>
+      </p:sp>
+    </p:spTree>
+  </p:cSld>
+  <p:clrMapOvr>
+    <a:masterClrMapping/>
+  </p:clrMapOvr>
+</p:notes>
+</file>
+
+<file path=ppt/notesSlides/notesSlide10.xml><?xml version="1.0" encoding="utf-8"?>
+<p:notes xmlns:a="http://schemas.openxmlformats.org/drawingml/2006/main" xmlns:p="http://schemas.openxmlformats.org/presentationml/2006/main" xmlns:r="http://schemas.openxmlformats.org/officeDocument/2006/relationships">
+  <p:cSld>
+    <p:spTree>
+      <p:nvGrpSpPr>
+        <p:cNvPr id="1" name=""/>
+        <p:cNvGrpSpPr/>
+        <p:nvPr/>
+      </p:nvGrpSpPr>
+      <p:grpSpPr>
+        <a:xfrm>
+          <a:off x="0" y="0"/>
+          <a:ext cx="0" cy="0"/>
+          <a:chOff x="0" y="0"/>
+          <a:chExt cx="0" cy="0"/>
+        </a:xfrm>
+      </p:grpSpPr>
+      <p:sp>
+        <p:nvSpPr>
+          <p:cNvPr id="2" name="Slide Image Placeholder 1"/>
+          <p:cNvSpPr>
+            <a:spLocks noGrp="1"/>
+          </p:cNvSpPr>
+          <p:nvPr>
+            <p:ph type="sldImg" idx="2"/>
+          </p:nvPr>
+        </p:nvSpPr>
+        <p:spPr/>
+      </p:sp>
+      <p:sp>
+        <p:nvSpPr>
+          <p:cNvPr id="3" name="Notes Placeholder 2"/>
+          <p:cNvSpPr>
+            <a:spLocks noGrp="1"/>
+          </p:cNvSpPr>
+          <p:nvPr>
+            <p:ph type="body" idx="3" sz="quarter"/>
+          </p:nvPr>
+        </p:nvSpPr>
+        <p:spPr/>
+        <p:txBody>
+          <a:bodyPr/>
+          <a:lstStyle/>
+          <a:p>
+            <a:r>
+              <a:t>Pe această figură se vede concret comportamentul, pe seria de cazuri active din România. Linia neagră este seria observată reală. Predicțiile o-zi-înainte, cele pe care rețeaua le face cunoscând trecutul, urmăresc destul de bine seria, atât pe fereastra de antrenare cât și pe cea de test. În schimb, prognoza autoregresivă, în care rețeaua își reintroduce propriile ieșiri pentru a prezice tot mai departe, se aplatizează rapid către zero. Este o limitare cunoscută a LSTM-urilor compacte univariate, care nu au mecanisme explicite pentru tendințe și sezonalitate pe termen lung.</a:t>
+            </a:r>
+          </a:p>
+        </p:txBody>
+      </p:sp>
+      <p:sp>
+        <p:nvSpPr>
+          <p:cNvPr id="4" name="Slide Number Placeholder 3"/>
+          <p:cNvSpPr>
+            <a:spLocks noGrp="1"/>
+          </p:cNvSpPr>
+          <p:nvPr>
+            <p:ph type="sldNum" idx="5" sz="quarter"/>
+          </p:nvPr>
+        </p:nvSpPr>
+        <p:spPr/>
+      </p:sp>
+    </p:spTree>
+  </p:cSld>
+  <p:clrMapOvr>
+    <a:masterClrMapping/>
+  </p:clrMapOvr>
+</p:notes>
+</file>
+
+<file path=ppt/notesSlides/notesSlide11.xml><?xml version="1.0" encoding="utf-8"?>
+<p:notes xmlns:a="http://schemas.openxmlformats.org/drawingml/2006/main" xmlns:p="http://schemas.openxmlformats.org/presentationml/2006/main" xmlns:r="http://schemas.openxmlformats.org/officeDocument/2006/relationships">
+  <p:cSld>
+    <p:spTree>
+      <p:nvGrpSpPr>
+        <p:cNvPr id="1" name=""/>
+        <p:cNvGrpSpPr/>
+        <p:nvPr/>
+      </p:nvGrpSpPr>
+      <p:grpSpPr>
+        <a:xfrm>
+          <a:off x="0" y="0"/>
+          <a:ext cx="0" cy="0"/>
+          <a:chOff x="0" y="0"/>
+          <a:chExt cx="0" cy="0"/>
+        </a:xfrm>
+      </p:grpSpPr>
+      <p:sp>
+        <p:nvSpPr>
+          <p:cNvPr id="2" name="Slide Image Placeholder 1"/>
+          <p:cNvSpPr>
+            <a:spLocks noGrp="1"/>
+          </p:cNvSpPr>
+          <p:nvPr>
+            <p:ph type="sldImg" idx="2"/>
+          </p:nvPr>
+        </p:nvSpPr>
+        <p:spPr/>
+      </p:sp>
+      <p:sp>
+        <p:nvSpPr>
+          <p:cNvPr id="3" name="Notes Placeholder 2"/>
+          <p:cNvSpPr>
+            <a:spLocks noGrp="1"/>
+          </p:cNvSpPr>
+          <p:nvPr>
+            <p:ph type="body" idx="3" sz="quarter"/>
+          </p:nvPr>
+        </p:nvSpPr>
+        <p:spPr/>
+        <p:txBody>
+          <a:bodyPr/>
+          <a:lstStyle/>
+          <a:p>
+            <a:r>
+              <a:t>Acum, metodologia de comparație și calibrare, care a fost al treilea obiectiv. Prima problemă este că datele reale nu conțin toate compartimentele modelului. De aceea folosesc un operator de observație, o funcție care transformă starea internă a modelului într-o mărime direct comparabilă cu datele — de exemplu cazurile active observate. Apoi măsor eroarea cu trei metrici: eroarea medie absolută MAE, eroarea pătratică medie RMSE, și varianta normalizată nRMSE, ca să pot compara regiuni cu populații diferite. Foarte important, calculez eroarea separat pe fereastra de antrenare și pe cea de test, ca să măsor capacitatea reală de generalizare, nu doar potrivirea pe trecut. Calibrarea propriu-zisă o formulez ca o problemă de optimizare a parametrilor, rezolvată cu metoda Nelder-Mead, cu mai multe restartări. Și separ deliberat două planuri de analiză: comparația epidemiologică, de fond, și comparația software, de cost — pentru că un model cu eroare mai mică nu este automat mai bun, dacă o obține cu mult mai mulți parametri neobservabili.</a:t>
+            </a:r>
+          </a:p>
+        </p:txBody>
+      </p:sp>
+      <p:sp>
+        <p:nvSpPr>
+          <p:cNvPr id="4" name="Slide Number Placeholder 3"/>
+          <p:cNvSpPr>
+            <a:spLocks noGrp="1"/>
+          </p:cNvSpPr>
+          <p:nvPr>
+            <p:ph type="sldNum" idx="5" sz="quarter"/>
+          </p:nvPr>
+        </p:nvSpPr>
+        <p:spPr/>
+      </p:sp>
+    </p:spTree>
+  </p:cSld>
+  <p:clrMapOvr>
+    <a:masterClrMapping/>
+  </p:clrMapOvr>
+</p:notes>
+</file>
+
+<file path=ppt/notesSlides/notesSlide12.xml><?xml version="1.0" encoding="utf-8"?>
+<p:notes xmlns:a="http://schemas.openxmlformats.org/drawingml/2006/main" xmlns:p="http://schemas.openxmlformats.org/presentationml/2006/main" xmlns:r="http://schemas.openxmlformats.org/officeDocument/2006/relationships">
+  <p:cSld>
+    <p:spTree>
+      <p:nvGrpSpPr>
+        <p:cNvPr id="1" name=""/>
+        <p:cNvGrpSpPr/>
+        <p:nvPr/>
+      </p:nvGrpSpPr>
+      <p:grpSpPr>
+        <a:xfrm>
+          <a:off x="0" y="0"/>
+          <a:ext cx="0" cy="0"/>
+          <a:chOff x="0" y="0"/>
+          <a:chExt cx="0" cy="0"/>
+        </a:xfrm>
+      </p:grpSpPr>
+      <p:sp>
+        <p:nvSpPr>
+          <p:cNvPr id="2" name="Slide Image Placeholder 1"/>
+          <p:cNvSpPr>
+            <a:spLocks noGrp="1"/>
+          </p:cNvSpPr>
+          <p:nvPr>
+            <p:ph type="sldImg" idx="2"/>
+          </p:nvPr>
+        </p:nvSpPr>
+        <p:spPr/>
+      </p:sp>
+      <p:sp>
+        <p:nvSpPr>
+          <p:cNvPr id="3" name="Notes Placeholder 2"/>
+          <p:cNvSpPr>
+            <a:spLocks noGrp="1"/>
+          </p:cNvSpPr>
+          <p:nvPr>
+            <p:ph type="body" idx="3" sz="quarter"/>
+          </p:nvPr>
+        </p:nvSpPr>
+        <p:spPr/>
+        <p:txBody>
+          <a:bodyPr/>
+          <a:lstStyle/>
+          <a:p>
+            <a:r>
+              <a:t>Am aplicat această procedură concret, nu doar teoretic. Figura arată calibrarea modelului SIR pe valul 1 al pandemiei COVID-19, în patru țări europene — România, Italia, Germania și Spania — cu gama fixat la valoarea din literatura clinică, de unu supra paisprezece zile. Pentru fiecare țară se văd seria observată, fitul pe fereastra de antrenare și prognoza pe luna următoare. R-zero estimat variază între 0,94 la Italia și 1,45 la România. Toate valorile sunt sub intervalul clasic din literatură, de 2 până la 3, ceea ce este consistent cu faptul că intervențiile non-farmaceutice erau deja active în acea fereastră. Observați că la Spania prognoza pe test diverge mai mult — dar asta vine din pornirea valului 2 la finalul ferestrei de test, deci este o limitare structurală a modelului SIR cu coeficienți constanți, nu o eroare de calibrare.</a:t>
+            </a:r>
+          </a:p>
+        </p:txBody>
+      </p:sp>
+      <p:sp>
+        <p:nvSpPr>
+          <p:cNvPr id="4" name="Slide Number Placeholder 3"/>
+          <p:cNvSpPr>
+            <a:spLocks noGrp="1"/>
+          </p:cNvSpPr>
+          <p:nvPr>
+            <p:ph type="sldNum" idx="5" sz="quarter"/>
+          </p:nvPr>
+        </p:nvSpPr>
+        <p:spPr/>
+      </p:sp>
+    </p:spTree>
+  </p:cSld>
+  <p:clrMapOvr>
+    <a:masterClrMapping/>
+  </p:clrMapOvr>
+</p:notes>
+</file>
+
+<file path=ppt/notesSlides/notesSlide13.xml><?xml version="1.0" encoding="utf-8"?>
+<p:notes xmlns:a="http://schemas.openxmlformats.org/drawingml/2006/main" xmlns:p="http://schemas.openxmlformats.org/presentationml/2006/main" xmlns:r="http://schemas.openxmlformats.org/officeDocument/2006/relationships">
+  <p:cSld>
+    <p:spTree>
+      <p:nvGrpSpPr>
+        <p:cNvPr id="1" name=""/>
+        <p:cNvGrpSpPr/>
+        <p:nvPr/>
+      </p:nvGrpSpPr>
+      <p:grpSpPr>
+        <a:xfrm>
+          <a:off x="0" y="0"/>
+          <a:ext cx="0" cy="0"/>
+          <a:chOff x="0" y="0"/>
+          <a:chExt cx="0" cy="0"/>
+        </a:xfrm>
+      </p:grpSpPr>
+      <p:sp>
+        <p:nvSpPr>
+          <p:cNvPr id="2" name="Slide Image Placeholder 1"/>
+          <p:cNvSpPr>
+            <a:spLocks noGrp="1"/>
+          </p:cNvSpPr>
+          <p:nvPr>
+            <p:ph type="sldImg" idx="2"/>
+          </p:nvPr>
+        </p:nvSpPr>
+        <p:spPr/>
+      </p:sp>
+      <p:sp>
+        <p:nvSpPr>
+          <p:cNvPr id="3" name="Notes Placeholder 2"/>
+          <p:cNvSpPr>
+            <a:spLocks noGrp="1"/>
+          </p:cNvSpPr>
+          <p:nvPr>
+            <p:ph type="body" idx="3" sz="quarter"/>
+          </p:nvPr>
+        </p:nvSpPr>
+        <p:spPr/>
+        <p:txBody>
+          <a:bodyPr/>
+          <a:lstStyle/>
+          <a:p>
+            <a:r>
+              <a:t>Trecem la partea de evaluare a performanței, care este una dintre cele mai consistente părți empirice ale lucrării. Am executat o campanie reală de benchmark, prin aplicație, nu izolat: cinci modele, trei limbaje, patru orizonturi temporale, cu repetări — în total 180 de rulări ODE plus 4 rulări LSTM, toate finalizate fără niciun eșec, pe clusterul Kubernetes. Tabelul rezumă cele trei regimuri de cost calitativ diferite care au reieșit. Julia este cel mai rapid solver, 5-6 milisecunde la orizonturi mari, indiferent de model — dar plătește un cost de pornire JIT de aproape o secundă la prima rulare, pe care îl amortizează abia după mai multe rulări succesive. Python este cel mai stabil ca performanță, între 4 și 9 milisecunde, fără cold-start vizibil. Iar R apare de două-trei ordine de mărime mai lent la orizonturi mari — dar, și acesta este un punct important, nu din cauza solverului deSolve, care este rapid, ci din cauza inserărilor rând-cu-rând în baza de date. Este un punct concret de optimizare, nu o limitare intrinsecă a limbajului. Concluzia practică: Python pentru utilizare interactivă, Julia pentru calibrări lungi, unde costul JIT se amortizează.</a:t>
+            </a:r>
+          </a:p>
+        </p:txBody>
+      </p:sp>
+      <p:sp>
+        <p:nvSpPr>
+          <p:cNvPr id="4" name="Slide Number Placeholder 3"/>
+          <p:cNvSpPr>
+            <a:spLocks noGrp="1"/>
+          </p:cNvSpPr>
+          <p:nvPr>
+            <p:ph type="sldNum" idx="5" sz="quarter"/>
+          </p:nvPr>
+        </p:nvSpPr>
+        <p:spPr/>
+      </p:sp>
+    </p:spTree>
+  </p:cSld>
+  <p:clrMapOvr>
+    <a:masterClrMapping/>
+  </p:clrMapOvr>
+</p:notes>
+</file>
+
+<file path=ppt/notesSlides/notesSlide14.xml><?xml version="1.0" encoding="utf-8"?>
+<p:notes xmlns:a="http://schemas.openxmlformats.org/drawingml/2006/main" xmlns:p="http://schemas.openxmlformats.org/presentationml/2006/main" xmlns:r="http://schemas.openxmlformats.org/officeDocument/2006/relationships">
+  <p:cSld>
+    <p:spTree>
+      <p:nvGrpSpPr>
+        <p:cNvPr id="1" name=""/>
+        <p:cNvGrpSpPr/>
+        <p:nvPr/>
+      </p:nvGrpSpPr>
+      <p:grpSpPr>
+        <a:xfrm>
+          <a:off x="0" y="0"/>
+          <a:ext cx="0" cy="0"/>
+          <a:chOff x="0" y="0"/>
+          <a:chExt cx="0" cy="0"/>
+        </a:xfrm>
+      </p:grpSpPr>
+      <p:sp>
+        <p:nvSpPr>
+          <p:cNvPr id="2" name="Slide Image Placeholder 1"/>
+          <p:cNvSpPr>
+            <a:spLocks noGrp="1"/>
+          </p:cNvSpPr>
+          <p:nvPr>
+            <p:ph type="sldImg" idx="2"/>
+          </p:nvPr>
+        </p:nvSpPr>
+        <p:spPr/>
+      </p:sp>
+      <p:sp>
+        <p:nvSpPr>
+          <p:cNvPr id="3" name="Notes Placeholder 2"/>
+          <p:cNvSpPr>
+            <a:spLocks noGrp="1"/>
+          </p:cNvSpPr>
+          <p:nvPr>
+            <p:ph type="body" idx="3" sz="quarter"/>
+          </p:nvPr>
+        </p:nvSpPr>
+        <p:spPr/>
+        <p:txBody>
+          <a:bodyPr/>
+          <a:lstStyle/>
+          <a:p>
+            <a:r>
+              <a:t>Figura aceasta arată vizual scalarea, pe o scară logaritmică pe ambele axe. Se văd cele trei regimuri dintr-o privire: R crește aproape liniar cu orizontul de integrare, pentru că este dominat de scrierile în baza de date, în timp ce Julia și Python rămân practic plate. Tot la capitolul acuratețe, am făcut și o verificare de regresie cross-limbaj: am confirmat că Julia și Python produc traiectorii practic identice, la nivelul preciziei flotante, de ordinul 10 la minus 8, pentru că ambele folosesc solvere Runge-Kutta adaptive cu toleranțe similare. Implementarea R deviază controlat, cu 10 la minus 4 — adică sub 0,02% din populație — din cauza solverului cu pas fix. Este o diferență deliberată, nu o eroare, și îmi dă o limită cantitativă a interschimbabilității runnerelor.</a:t>
+            </a:r>
+          </a:p>
+        </p:txBody>
+      </p:sp>
+      <p:sp>
+        <p:nvSpPr>
+          <p:cNvPr id="4" name="Slide Number Placeholder 3"/>
+          <p:cNvSpPr>
+            <a:spLocks noGrp="1"/>
+          </p:cNvSpPr>
+          <p:nvPr>
+            <p:ph type="sldNum" idx="5" sz="quarter"/>
+          </p:nvPr>
+        </p:nvSpPr>
+        <p:spPr/>
+      </p:sp>
+    </p:spTree>
+  </p:cSld>
+  <p:clrMapOvr>
+    <a:masterClrMapping/>
+  </p:clrMapOvr>
+</p:notes>
+</file>
+
+<file path=ppt/notesSlides/notesSlide15.xml><?xml version="1.0" encoding="utf-8"?>
+<p:notes xmlns:a="http://schemas.openxmlformats.org/drawingml/2006/main" xmlns:p="http://schemas.openxmlformats.org/presentationml/2006/main" xmlns:r="http://schemas.openxmlformats.org/officeDocument/2006/relationships">
+  <p:cSld>
+    <p:spTree>
+      <p:nvGrpSpPr>
+        <p:cNvPr id="1" name=""/>
+        <p:cNvGrpSpPr/>
+        <p:nvPr/>
+      </p:nvGrpSpPr>
+      <p:grpSpPr>
+        <a:xfrm>
+          <a:off x="0" y="0"/>
+          <a:ext cx="0" cy="0"/>
+          <a:chOff x="0" y="0"/>
+          <a:chExt cx="0" cy="0"/>
+        </a:xfrm>
+      </p:grpSpPr>
+      <p:sp>
+        <p:nvSpPr>
+          <p:cNvPr id="2" name="Slide Image Placeholder 1"/>
+          <p:cNvSpPr>
+            <a:spLocks noGrp="1"/>
+          </p:cNvSpPr>
+          <p:nvPr>
+            <p:ph type="sldImg" idx="2"/>
+          </p:nvPr>
+        </p:nvSpPr>
+        <p:spPr/>
+      </p:sp>
+      <p:sp>
+        <p:nvSpPr>
+          <p:cNvPr id="3" name="Notes Placeholder 2"/>
+          <p:cNvSpPr>
+            <a:spLocks noGrp="1"/>
+          </p:cNvSpPr>
+          <p:nvPr>
+            <p:ph type="body" idx="3" sz="quarter"/>
+          </p:nvPr>
+        </p:nvSpPr>
+        <p:spPr/>
+        <p:txBody>
+          <a:bodyPr/>
+          <a:lstStyle/>
+          <a:p>
+            <a:r>
+              <a:t>Aplicația web este interfața prin care tot acest sistem devine efectiv utilizabil. Are două aplicații Vue 3 separate: una pentru cercetători și colaboratori, și o consolă separată pentru super-admini. Accesul este controlat printr-un sistem RBAC la nivel de studiu, cu patru roluri — admin, researcher, contributor și viewer — plus un flag global de super-admin. Fluxul de lucru este complet, apropiat de un scenariu real de cercetare colaborativă: creezi un studiu, acorzi roluri membrilor, încarci un set de date, alegi modelul și parametrii, lansezi simularea asincron și apoi vizualizezi traiectoriile și compari mai multe rulări. Securitatea am tratat-o ca cerință funcțională, nu ca adaos ulterior: autentificare cu token JWT semnat și verificat explicit, inclusiv împotriva atacului de confuzie de algoritm, parole stocate ca hash bcrypt, izolare împotriva atacurilor de tip IDOR — adică nu poți accesa datele altui studiu prin simpla schimbare a identificatorului din URL — și toate interogările SQL parametrizate, ceea ce elimină injecția SQL.</a:t>
+            </a:r>
+          </a:p>
+        </p:txBody>
+      </p:sp>
+      <p:sp>
+        <p:nvSpPr>
+          <p:cNvPr id="4" name="Slide Number Placeholder 3"/>
+          <p:cNvSpPr>
+            <a:spLocks noGrp="1"/>
+          </p:cNvSpPr>
+          <p:nvPr>
+            <p:ph type="sldNum" idx="5" sz="quarter"/>
+          </p:nvPr>
+        </p:nvSpPr>
+        <p:spPr/>
+      </p:sp>
+    </p:spTree>
+  </p:cSld>
+  <p:clrMapOvr>
+    <a:masterClrMapping/>
+  </p:clrMapOvr>
+</p:notes>
+</file>
+
+<file path=ppt/notesSlides/notesSlide16.xml><?xml version="1.0" encoding="utf-8"?>
+<p:notes xmlns:a="http://schemas.openxmlformats.org/drawingml/2006/main" xmlns:p="http://schemas.openxmlformats.org/presentationml/2006/main" xmlns:r="http://schemas.openxmlformats.org/officeDocument/2006/relationships">
+  <p:cSld>
+    <p:spTree>
+      <p:nvGrpSpPr>
+        <p:cNvPr id="1" name=""/>
+        <p:cNvGrpSpPr/>
+        <p:nvPr/>
+      </p:nvGrpSpPr>
+      <p:grpSpPr>
+        <a:xfrm>
+          <a:off x="0" y="0"/>
+          <a:ext cx="0" cy="0"/>
+          <a:chOff x="0" y="0"/>
+          <a:chExt cx="0" cy="0"/>
+        </a:xfrm>
+      </p:grpSpPr>
+      <p:sp>
+        <p:nvSpPr>
+          <p:cNvPr id="2" name="Slide Image Placeholder 1"/>
+          <p:cNvSpPr>
+            <a:spLocks noGrp="1"/>
+          </p:cNvSpPr>
+          <p:nvPr>
+            <p:ph type="sldImg" idx="2"/>
+          </p:nvPr>
+        </p:nvSpPr>
+        <p:spPr/>
+      </p:sp>
+      <p:sp>
+        <p:nvSpPr>
+          <p:cNvPr id="3" name="Notes Placeholder 2"/>
+          <p:cNvSpPr>
+            <a:spLocks noGrp="1"/>
+          </p:cNvSpPr>
+          <p:nvPr>
+            <p:ph type="body" idx="3" sz="quarter"/>
+          </p:nvPr>
+        </p:nvSpPr>
+        <p:spPr/>
+        <p:txBody>
+          <a:bodyPr/>
+          <a:lstStyle/>
+          <a:p>
+            <a:r>
+              <a:t>Vreau să subliniez că sistemul nu este doar conceptual sau rulat local — l-am deployat efectiv pe un cluster Kubernetes real, numit kube-4kdhb, găzduit pe o platformă cloud privată OpenStack. Topologia din figură arată configurația: trei noduri de control plane și trei noduri worker, cu YugabyteDB rulând la factor de replicare 3, gestionat prin Helm. Această experiență de deployment real confirmă portabilitatea arhitecturii într-un mediu distribuit și a scos la iveală câteva ajustări practice specifice mediilor distribuite, cum ar fi aplicarea migrațiilor de bază de date, pe care le-am documentat în capitolul de concluzii.</a:t>
+            </a:r>
+          </a:p>
+        </p:txBody>
+      </p:sp>
+      <p:sp>
+        <p:nvSpPr>
+          <p:cNvPr id="4" name="Slide Number Placeholder 3"/>
+          <p:cNvSpPr>
+            <a:spLocks noGrp="1"/>
+          </p:cNvSpPr>
+          <p:nvPr>
+            <p:ph type="sldNum" idx="5" sz="quarter"/>
+          </p:nvPr>
+        </p:nvSpPr>
+        <p:spPr/>
+      </p:sp>
+    </p:spTree>
+  </p:cSld>
+  <p:clrMapOvr>
+    <a:masterClrMapping/>
+  </p:clrMapOvr>
+</p:notes>
+</file>
+
+<file path=ppt/notesSlides/notesSlide17.xml><?xml version="1.0" encoding="utf-8"?>
+<p:notes xmlns:a="http://schemas.openxmlformats.org/drawingml/2006/main" xmlns:p="http://schemas.openxmlformats.org/presentationml/2006/main" xmlns:r="http://schemas.openxmlformats.org/officeDocument/2006/relationships">
+  <p:cSld>
+    <p:spTree>
+      <p:nvGrpSpPr>
+        <p:cNvPr id="1" name=""/>
+        <p:cNvGrpSpPr/>
+        <p:nvPr/>
+      </p:nvGrpSpPr>
+      <p:grpSpPr>
+        <a:xfrm>
+          <a:off x="0" y="0"/>
+          <a:ext cx="0" cy="0"/>
+          <a:chOff x="0" y="0"/>
+          <a:chExt cx="0" cy="0"/>
+        </a:xfrm>
+      </p:grpSpPr>
+      <p:sp>
+        <p:nvSpPr>
+          <p:cNvPr id="2" name="Slide Image Placeholder 1"/>
+          <p:cNvSpPr>
+            <a:spLocks noGrp="1"/>
+          </p:cNvSpPr>
+          <p:nvPr>
+            <p:ph type="sldImg" idx="2"/>
+          </p:nvPr>
+        </p:nvSpPr>
+        <p:spPr/>
+      </p:sp>
+      <p:sp>
+        <p:nvSpPr>
+          <p:cNvPr id="3" name="Notes Placeholder 2"/>
+          <p:cNvSpPr>
+            <a:spLocks noGrp="1"/>
+          </p:cNvSpPr>
+          <p:nvPr>
+            <p:ph type="body" idx="3" sz="quarter"/>
+          </p:nvPr>
+        </p:nvSpPr>
+        <p:spPr/>
+        <p:txBody>
+          <a:bodyPr/>
+          <a:lstStyle/>
+          <a:p>
+            <a:r>
+              <a:t>Ajungem la concluzii. Cred că rezultatul principal al lucrării este că am construit un lanț complet și coerent: de la formalismul matematic al modelelor, prin implementarea efectivă în trei limbaje, până la o arhitectură software distribuită care le pune cap la cap. Și, foarte important, niciuna dintre afirmațiile cantitative din lucrare nu este speculativă — toate sunt validate empiric, prin campania reală de benchmark și prin calibrarea pe date reale, cross-regiune. Componenta LSTM am evaluat-o onest, delimitându-i clar regimul în care are sens. Iar întregul sistem a fost deployat și verificat pe un cluster Kubernetes real. Pe scurt, cele patru obiective propuse la început au fost atinse concret, fiecare cu rezultate măsurabile.</a:t>
+            </a:r>
+          </a:p>
+        </p:txBody>
+      </p:sp>
+      <p:sp>
+        <p:nvSpPr>
+          <p:cNvPr id="4" name="Slide Number Placeholder 3"/>
+          <p:cNvSpPr>
+            <a:spLocks noGrp="1"/>
+          </p:cNvSpPr>
+          <p:nvPr>
+            <p:ph type="sldNum" idx="5" sz="quarter"/>
+          </p:nvPr>
+        </p:nvSpPr>
+        <p:spPr/>
+      </p:sp>
+    </p:spTree>
+  </p:cSld>
+  <p:clrMapOvr>
+    <a:masterClrMapping/>
+  </p:clrMapOvr>
+</p:notes>
+</file>
+
+<file path=ppt/notesSlides/notesSlide18.xml><?xml version="1.0" encoding="utf-8"?>
+<p:notes xmlns:a="http://schemas.openxmlformats.org/drawingml/2006/main" xmlns:p="http://schemas.openxmlformats.org/presentationml/2006/main" xmlns:r="http://schemas.openxmlformats.org/officeDocument/2006/relationships">
+  <p:cSld>
+    <p:spTree>
+      <p:nvGrpSpPr>
+        <p:cNvPr id="1" name=""/>
+        <p:cNvGrpSpPr/>
+        <p:nvPr/>
+      </p:nvGrpSpPr>
+      <p:grpSpPr>
+        <a:xfrm>
+          <a:off x="0" y="0"/>
+          <a:ext cx="0" cy="0"/>
+          <a:chOff x="0" y="0"/>
+          <a:chExt cx="0" cy="0"/>
+        </a:xfrm>
+      </p:grpSpPr>
+      <p:sp>
+        <p:nvSpPr>
+          <p:cNvPr id="2" name="Slide Image Placeholder 1"/>
+          <p:cNvSpPr>
+            <a:spLocks noGrp="1"/>
+          </p:cNvSpPr>
+          <p:nvPr>
+            <p:ph type="sldImg" idx="2"/>
+          </p:nvPr>
+        </p:nvSpPr>
+        <p:spPr/>
+      </p:sp>
+      <p:sp>
+        <p:nvSpPr>
+          <p:cNvPr id="3" name="Notes Placeholder 2"/>
+          <p:cNvSpPr>
+            <a:spLocks noGrp="1"/>
+          </p:cNvSpPr>
+          <p:nvPr>
+            <p:ph type="body" idx="3" sz="quarter"/>
+          </p:nvPr>
+        </p:nvSpPr>
+        <p:spPr/>
+        <p:txBody>
+          <a:bodyPr/>
+          <a:lstStyle/>
+          <a:p>
+            <a:r>
+              <a:t>Și acum slide-ul cel mai important pentru o susținere — contribuțiile mele originale, sintetizate. Sunt cinci. Prima: un benchmarking comparativ cross-limbaj al aceluiași model, implementat și măsurat sistematic în R, Julia și Python, în condiții identice — ceva ce bibliotecile mono-limbaj de rezolvare a ecuațiilor pur și simplu nu oferă. A doua: o metodologie unitară de colectare a metricilor, în care fiecare runner marchează explicit stările simulării și scrie în aceeași schemă de bază de date, ceea ce evită comparațiile informale, influențate de diferențe de infrastructură. A treia: separarea explicită a comparației epidemiologice de comparația software, susținută de operatori de observație definiți per model. A patra: o platformă web colaborativă completă, cu control al accesului bazat pe roluri la nivel de studiu. Și a cincea, cea mai importantă din punct de vedere arhitectural: un sistem de plug-in-uri pentru algoritmi — un super-admin poate înregistra fie un script Python, fie o imagine container construită extern, iar API-ul provisionează automat un Deployment Kubernetes dedicat. Practic, asta deschide sistemul de la cele cinci modele plus LSTM la orice algoritm care respectă un contract minimal de intrare-ieșire, fără nicio modificare de cod în API sau în schema bazei de date.</a:t>
+            </a:r>
+          </a:p>
+        </p:txBody>
+      </p:sp>
+      <p:sp>
+        <p:nvSpPr>
+          <p:cNvPr id="4" name="Slide Number Placeholder 3"/>
+          <p:cNvSpPr>
+            <a:spLocks noGrp="1"/>
+          </p:cNvSpPr>
+          <p:nvPr>
+            <p:ph type="sldNum" idx="5" sz="quarter"/>
+          </p:nvPr>
+        </p:nvSpPr>
+        <p:spPr/>
+      </p:sp>
+    </p:spTree>
+  </p:cSld>
+  <p:clrMapOvr>
+    <a:masterClrMapping/>
+  </p:clrMapOvr>
+</p:notes>
+</file>
+
+<file path=ppt/notesSlides/notesSlide19.xml><?xml version="1.0" encoding="utf-8"?>
+<p:notes xmlns:a="http://schemas.openxmlformats.org/drawingml/2006/main" xmlns:p="http://schemas.openxmlformats.org/presentationml/2006/main" xmlns:r="http://schemas.openxmlformats.org/officeDocument/2006/relationships">
+  <p:cSld>
+    <p:spTree>
+      <p:nvGrpSpPr>
+        <p:cNvPr id="1" name=""/>
+        <p:cNvGrpSpPr/>
+        <p:nvPr/>
+      </p:nvGrpSpPr>
+      <p:grpSpPr>
+        <a:xfrm>
+          <a:off x="0" y="0"/>
+          <a:ext cx="0" cy="0"/>
+          <a:chOff x="0" y="0"/>
+          <a:chExt cx="0" cy="0"/>
+        </a:xfrm>
+      </p:grpSpPr>
+      <p:sp>
+        <p:nvSpPr>
+          <p:cNvPr id="2" name="Slide Image Placeholder 1"/>
+          <p:cNvSpPr>
+            <a:spLocks noGrp="1"/>
+          </p:cNvSpPr>
+          <p:nvPr>
+            <p:ph type="sldImg" idx="2"/>
+          </p:nvPr>
+        </p:nvSpPr>
+        <p:spPr/>
+      </p:sp>
+      <p:sp>
+        <p:nvSpPr>
+          <p:cNvPr id="3" name="Notes Placeholder 2"/>
+          <p:cNvSpPr>
+            <a:spLocks noGrp="1"/>
+          </p:cNvSpPr>
+          <p:nvPr>
+            <p:ph type="body" idx="3" sz="quarter"/>
+          </p:nvPr>
+        </p:nvSpPr>
+        <p:spPr/>
+        <p:txBody>
+          <a:bodyPr/>
+          <a:lstStyle/>
+          <a:p>
+            <a:r>
+              <a:t>Cu aceasta închei prezentarea. Vă mulțumesc pentru atenție și sunt pregătit să răspund la întrebările dumneavoastră. Vă stau la dispoziție pentru orice clarificare legată de modelele matematice, de implementarea în cele trei limbaje sau de rezultatele experimentale.</a:t>
+            </a:r>
+          </a:p>
+        </p:txBody>
+      </p:sp>
+      <p:sp>
+        <p:nvSpPr>
+          <p:cNvPr id="4" name="Slide Number Placeholder 3"/>
+          <p:cNvSpPr>
+            <a:spLocks noGrp="1"/>
+          </p:cNvSpPr>
+          <p:nvPr>
+            <p:ph type="sldNum" idx="5" sz="quarter"/>
+          </p:nvPr>
+        </p:nvSpPr>
+        <p:spPr/>
+      </p:sp>
+    </p:spTree>
+  </p:cSld>
+  <p:clrMapOvr>
+    <a:masterClrMapping/>
+  </p:clrMapOvr>
+</p:notes>
+</file>
+
+<file path=ppt/notesSlides/notesSlide2.xml><?xml version="1.0" encoding="utf-8"?>
+<p:notes xmlns:a="http://schemas.openxmlformats.org/drawingml/2006/main" xmlns:p="http://schemas.openxmlformats.org/presentationml/2006/main" xmlns:r="http://schemas.openxmlformats.org/officeDocument/2006/relationships">
+  <p:cSld>
+    <p:spTree>
+      <p:nvGrpSpPr>
+        <p:cNvPr id="1" name=""/>
+        <p:cNvGrpSpPr/>
+        <p:nvPr/>
+      </p:nvGrpSpPr>
+      <p:grpSpPr>
+        <a:xfrm>
+          <a:off x="0" y="0"/>
+          <a:ext cx="0" cy="0"/>
+          <a:chOff x="0" y="0"/>
+          <a:chExt cx="0" cy="0"/>
+        </a:xfrm>
+      </p:grpSpPr>
+      <p:sp>
+        <p:nvSpPr>
+          <p:cNvPr id="2" name="Slide Image Placeholder 1"/>
+          <p:cNvSpPr>
+            <a:spLocks noGrp="1"/>
+          </p:cNvSpPr>
+          <p:nvPr>
+            <p:ph type="sldImg" idx="2"/>
+          </p:nvPr>
+        </p:nvSpPr>
+        <p:spPr/>
+      </p:sp>
+      <p:sp>
+        <p:nvSpPr>
+          <p:cNvPr id="3" name="Notes Placeholder 2"/>
+          <p:cNvSpPr>
+            <a:spLocks noGrp="1"/>
+          </p:cNvSpPr>
+          <p:nvPr>
+            <p:ph type="body" idx="3" sz="quarter"/>
+          </p:nvPr>
+        </p:nvSpPr>
+        <p:spPr/>
+        <p:txBody>
+          <a:bodyPr/>
+          <a:lstStyle/>
+          <a:p>
+            <a:r>
+              <a:t>Pornesc de la o observație simplă, dar importantă: bolile infecțioase nu sunt doar un fenomen clinic, ci unul populațional. Felul în care se răspândește un agent patogen depinde de contacte, de mobilitate, de modul de raportare și de capacitatea de răspuns a sistemului sanitar. Pandemiile recente — gripa din 1918, SARS-ul din 2003, COVID-19 — au arătat asta foarte clar. Modelele compartimentale, începând cu modelul SIR formulat de Kermack și McKendrick în 1927, ne oferă un limbaj matematic riguros pentru a descrie această dinamică prin ecuații diferențiale. Însă în practica reală problema nu se oprește la scrierea ecuațiilor. Datele epidemiologice vin din surse eterogene, au goluri și corecții administrative. Iar implementarea numerică poate fi făcută în limbaje diferite — R, Julia, Python — fiecare cu costuri proprii de timp, de memorie și de reproductibilitate. De aceea, ideea centrală a lucrării este să leg explicit partea de modelare matematică de partea de implementare software, într-un cadru unitar și reproductibil.</a:t>
+            </a:r>
+          </a:p>
+        </p:txBody>
+      </p:sp>
+      <p:sp>
+        <p:nvSpPr>
+          <p:cNvPr id="4" name="Slide Number Placeholder 3"/>
+          <p:cNvSpPr>
+            <a:spLocks noGrp="1"/>
+          </p:cNvSpPr>
+          <p:nvPr>
+            <p:ph type="sldNum" idx="5" sz="quarter"/>
+          </p:nvPr>
+        </p:nvSpPr>
+        <p:spPr/>
+      </p:sp>
+    </p:spTree>
+  </p:cSld>
+  <p:clrMapOvr>
+    <a:masterClrMapping/>
+  </p:clrMapOvr>
+</p:notes>
+</file>
+
+<file path=ppt/notesSlides/notesSlide3.xml><?xml version="1.0" encoding="utf-8"?>
+<p:notes xmlns:a="http://schemas.openxmlformats.org/drawingml/2006/main" xmlns:p="http://schemas.openxmlformats.org/presentationml/2006/main" xmlns:r="http://schemas.openxmlformats.org/officeDocument/2006/relationships">
+  <p:cSld>
+    <p:spTree>
+      <p:nvGrpSpPr>
+        <p:cNvPr id="1" name=""/>
+        <p:cNvGrpSpPr/>
+        <p:nvPr/>
+      </p:nvGrpSpPr>
+      <p:grpSpPr>
+        <a:xfrm>
+          <a:off x="0" y="0"/>
+          <a:ext cx="0" cy="0"/>
+          <a:chOff x="0" y="0"/>
+          <a:chExt cx="0" cy="0"/>
+        </a:xfrm>
+      </p:grpSpPr>
+      <p:sp>
+        <p:nvSpPr>
+          <p:cNvPr id="2" name="Slide Image Placeholder 1"/>
+          <p:cNvSpPr>
+            <a:spLocks noGrp="1"/>
+          </p:cNvSpPr>
+          <p:nvPr>
+            <p:ph type="sldImg" idx="2"/>
+          </p:nvPr>
+        </p:nvSpPr>
+        <p:spPr/>
+      </p:sp>
+      <p:sp>
+        <p:nvSpPr>
+          <p:cNvPr id="3" name="Notes Placeholder 2"/>
+          <p:cNvSpPr>
+            <a:spLocks noGrp="1"/>
+          </p:cNvSpPr>
+          <p:nvPr>
+            <p:ph type="body" idx="3" sz="quarter"/>
+          </p:nvPr>
+        </p:nvSpPr>
+        <p:spPr/>
+        <p:txBody>
+          <a:bodyPr/>
+          <a:lstStyle/>
+          <a:p>
+            <a:r>
+              <a:t>Pornind de aici, lucrarea are patru obiective. Primul, și cel principal, este proiectarea unui sistem care folosește modelul clinic SIDARTHE ca model de lucru principal, păstrând familia clasică SIR, SIS, SEIR și SIRS ca repere de comparație. Al doilea obiectiv este implementarea exact a aceluiași contract de simulare în trei limbaje — R, Julia și Python — folosind biblioteca uzuală a fiecăruia, ca să pot face o comparație corectă, nu doar de sintaxă, ci de cost real de execuție. Al treilea obiectiv este definirea unei metodologii explicite de comparație și calibrare: nu evaluez modelele doar vizual, ci prin metrici de eroare și prin separarea ferestrei de antrenare de cea de test. Iar al patrulea obiectiv este integrarea unei extensii predictive bazate pe rețele neuronale LSTM, pentru prognoza pe termen scurt.</a:t>
+            </a:r>
+          </a:p>
+        </p:txBody>
+      </p:sp>
+      <p:sp>
+        <p:nvSpPr>
+          <p:cNvPr id="4" name="Slide Number Placeholder 3"/>
+          <p:cNvSpPr>
+            <a:spLocks noGrp="1"/>
+          </p:cNvSpPr>
+          <p:nvPr>
+            <p:ph type="sldNum" idx="5" sz="quarter"/>
+          </p:nvPr>
+        </p:nvSpPr>
+        <p:spPr/>
+      </p:sp>
+    </p:spTree>
+  </p:cSld>
+  <p:clrMapOvr>
+    <a:masterClrMapping/>
+  </p:clrMapOvr>
+</p:notes>
+</file>
+
+<file path=ppt/notesSlides/notesSlide4.xml><?xml version="1.0" encoding="utf-8"?>
+<p:notes xmlns:a="http://schemas.openxmlformats.org/drawingml/2006/main" xmlns:p="http://schemas.openxmlformats.org/presentationml/2006/main" xmlns:r="http://schemas.openxmlformats.org/officeDocument/2006/relationships">
+  <p:cSld>
+    <p:spTree>
+      <p:nvGrpSpPr>
+        <p:cNvPr id="1" name=""/>
+        <p:cNvGrpSpPr/>
+        <p:nvPr/>
+      </p:nvGrpSpPr>
+      <p:grpSpPr>
+        <a:xfrm>
+          <a:off x="0" y="0"/>
+          <a:ext cx="0" cy="0"/>
+          <a:chOff x="0" y="0"/>
+          <a:chExt cx="0" cy="0"/>
+        </a:xfrm>
+      </p:grpSpPr>
+      <p:sp>
+        <p:nvSpPr>
+          <p:cNvPr id="2" name="Slide Image Placeholder 1"/>
+          <p:cNvSpPr>
+            <a:spLocks noGrp="1"/>
+          </p:cNvSpPr>
+          <p:nvPr>
+            <p:ph type="sldImg" idx="2"/>
+          </p:nvPr>
+        </p:nvSpPr>
+        <p:spPr/>
+      </p:sp>
+      <p:sp>
+        <p:nvSpPr>
+          <p:cNvPr id="3" name="Notes Placeholder 2"/>
+          <p:cNvSpPr>
+            <a:spLocks noGrp="1"/>
+          </p:cNvSpPr>
+          <p:nvPr>
+            <p:ph type="body" idx="3" sz="quarter"/>
+          </p:nvPr>
+        </p:nvSpPr>
+        <p:spPr/>
+        <p:txBody>
+          <a:bodyPr/>
+          <a:lstStyle/>
+          <a:p>
+            <a:r>
+              <a:t>Înainte de a trece la sistem, fundamentul teoretic, foarte concentrat. Ideea modelelor compartimentale este să împărțim populația în câteva stări epidemiologice relevante — la SIR avem susceptibili, infectați și recuperați — și să descriem trecerea dintre ele printr-un sistem de ecuații diferențiale ordinare. Parametrul cel mai important al întregii epidemiologii matematice este numărul de reproducere de bază, R-zero, care la modelul SIR este egal cu raportul beta supra gama. Interpretarea lui e directă: dacă R-zero este supraunitar, fiecare infectat produce în medie mai mult de un caz nou și avem epidemie; dacă este subunitar, epidemia se stinge spontan. În lucrare nu am tratat SIR doar descriptiv — am demonstrat riguros proprietățile lui fundamentale: existența și unicitatea soluției, conservarea populației totale, pozitivitatea soluției, și am dedus inclusiv ecuația dimensiunii finale a epidemiei, adică ce fracție din populație ajunge să fie infectată până la final.</a:t>
+            </a:r>
+          </a:p>
+        </p:txBody>
+      </p:sp>
+      <p:sp>
+        <p:nvSpPr>
+          <p:cNvPr id="4" name="Slide Number Placeholder 3"/>
+          <p:cNvSpPr>
+            <a:spLocks noGrp="1"/>
+          </p:cNvSpPr>
+          <p:nvPr>
+            <p:ph type="sldNum" idx="5" sz="quarter"/>
+          </p:nvPr>
+        </p:nvSpPr>
+        <p:spPr/>
+      </p:sp>
+    </p:spTree>
+  </p:cSld>
+  <p:clrMapOvr>
+    <a:masterClrMapping/>
+  </p:clrMapOvr>
+</p:notes>
+</file>
+
+<file path=ppt/notesSlides/notesSlide5.xml><?xml version="1.0" encoding="utf-8"?>
+<p:notes xmlns:a="http://schemas.openxmlformats.org/drawingml/2006/main" xmlns:p="http://schemas.openxmlformats.org/presentationml/2006/main" xmlns:r="http://schemas.openxmlformats.org/officeDocument/2006/relationships">
+  <p:cSld>
+    <p:spTree>
+      <p:nvGrpSpPr>
+        <p:cNvPr id="1" name=""/>
+        <p:cNvGrpSpPr/>
+        <p:nvPr/>
+      </p:nvGrpSpPr>
+      <p:grpSpPr>
+        <a:xfrm>
+          <a:off x="0" y="0"/>
+          <a:ext cx="0" cy="0"/>
+          <a:chOff x="0" y="0"/>
+          <a:chExt cx="0" cy="0"/>
+        </a:xfrm>
+      </p:grpSpPr>
+      <p:sp>
+        <p:nvSpPr>
+          <p:cNvPr id="2" name="Slide Image Placeholder 1"/>
+          <p:cNvSpPr>
+            <a:spLocks noGrp="1"/>
+          </p:cNvSpPr>
+          <p:nvPr>
+            <p:ph type="sldImg" idx="2"/>
+          </p:nvPr>
+        </p:nvSpPr>
+        <p:spPr/>
+      </p:sp>
+      <p:sp>
+        <p:nvSpPr>
+          <p:cNvPr id="3" name="Notes Placeholder 2"/>
+          <p:cNvSpPr>
+            <a:spLocks noGrp="1"/>
+          </p:cNvSpPr>
+          <p:nvPr>
+            <p:ph type="body" idx="3" sz="quarter"/>
+          </p:nvPr>
+        </p:nvSpPr>
+        <p:spPr/>
+        <p:txBody>
+          <a:bodyPr/>
+          <a:lstStyle/>
+          <a:p>
+            <a:r>
+              <a:t>Aceasta este diagrama de flux a modelului SIR, cea mai simplă din lucrare. Se citește de la stânga la dreapta: susceptibilii trec în infectați cu rata beta-S-I-pe-N, care reprezintă noile infecții produse prin contact, iar infectații trec apoi în recuperați cu rata gama, unde unu-supra-gama este durata medie a perioadei infecțioase. Vreau să rețineți această structură, pentru că toate celelalte modele din lucrare, inclusiv SIDARTHE, sunt extensii ale ei.</a:t>
+            </a:r>
+          </a:p>
+        </p:txBody>
+      </p:sp>
+      <p:sp>
+        <p:nvSpPr>
+          <p:cNvPr id="4" name="Slide Number Placeholder 3"/>
+          <p:cNvSpPr>
+            <a:spLocks noGrp="1"/>
+          </p:cNvSpPr>
+          <p:nvPr>
+            <p:ph type="sldNum" idx="5" sz="quarter"/>
+          </p:nvPr>
+        </p:nvSpPr>
+        <p:spPr/>
+      </p:sp>
+    </p:spTree>
+  </p:cSld>
+  <p:clrMapOvr>
+    <a:masterClrMapping/>
+  </p:clrMapOvr>
+</p:notes>
+</file>
+
+<file path=ppt/notesSlides/notesSlide6.xml><?xml version="1.0" encoding="utf-8"?>
+<p:notes xmlns:a="http://schemas.openxmlformats.org/drawingml/2006/main" xmlns:p="http://schemas.openxmlformats.org/presentationml/2006/main" xmlns:r="http://schemas.openxmlformats.org/officeDocument/2006/relationships">
+  <p:cSld>
+    <p:spTree>
+      <p:nvGrpSpPr>
+        <p:cNvPr id="1" name=""/>
+        <p:cNvGrpSpPr/>
+        <p:nvPr/>
+      </p:nvGrpSpPr>
+      <p:grpSpPr>
+        <a:xfrm>
+          <a:off x="0" y="0"/>
+          <a:ext cx="0" cy="0"/>
+          <a:chOff x="0" y="0"/>
+          <a:chExt cx="0" cy="0"/>
+        </a:xfrm>
+      </p:grpSpPr>
+      <p:sp>
+        <p:nvSpPr>
+          <p:cNvPr id="2" name="Slide Image Placeholder 1"/>
+          <p:cNvSpPr>
+            <a:spLocks noGrp="1"/>
+          </p:cNvSpPr>
+          <p:nvPr>
+            <p:ph type="sldImg" idx="2"/>
+          </p:nvPr>
+        </p:nvSpPr>
+        <p:spPr/>
+      </p:sp>
+      <p:sp>
+        <p:nvSpPr>
+          <p:cNvPr id="3" name="Notes Placeholder 2"/>
+          <p:cNvSpPr>
+            <a:spLocks noGrp="1"/>
+          </p:cNvSpPr>
+          <p:nvPr>
+            <p:ph type="body" idx="3" sz="quarter"/>
+          </p:nvPr>
+        </p:nvSpPr>
+        <p:spPr/>
+        <p:txBody>
+          <a:bodyPr/>
+          <a:lstStyle/>
+          <a:p>
+            <a:r>
+              <a:t>Modelul principal al lucrării este însă SIDARTHE, propus pentru analiza COVID-19, cu opt compartimente și șaisprezece rate de tranziție. Avantajul lui față de SIR este că separă două dimensiuni care lipsesc complet din modelele simple: statutul de diagnosticare și severitatea clinică. Concret, separă infectații nedepistați de cei diagnosticați, formele ușoare de cele severe, și — foarte important — separă vindecările de decese, tratând mortalitatea explicit, ca un compartiment distinct. Asta îl face mult mai apropiat de structura reală a raportării epidemiologice, unde testarea, diagnosticul și severitatea schimbă puternic ceea ce observăm. Costul acestei bogății este că avem mai mulți parametri, deci calibrarea devine mai dificilă — și voi reveni la acest aspect. La fel ca la SIR, am verificat și pentru SIDARTHE proprietățile matematice esențiale: conservarea populației, prin însumarea ecuațiilor, și pozitivitatea soluției.</a:t>
+            </a:r>
+          </a:p>
+        </p:txBody>
+      </p:sp>
+      <p:sp>
+        <p:nvSpPr>
+          <p:cNvPr id="4" name="Slide Number Placeholder 3"/>
+          <p:cNvSpPr>
+            <a:spLocks noGrp="1"/>
+          </p:cNvSpPr>
+          <p:nvPr>
+            <p:ph type="sldNum" idx="5" sz="quarter"/>
+          </p:nvPr>
+        </p:nvSpPr>
+        <p:spPr/>
+      </p:sp>
+    </p:spTree>
+  </p:cSld>
+  <p:clrMapOvr>
+    <a:masterClrMapping/>
+  </p:clrMapOvr>
+</p:notes>
+</file>
+
+<file path=ppt/notesSlides/notesSlide7.xml><?xml version="1.0" encoding="utf-8"?>
+<p:notes xmlns:a="http://schemas.openxmlformats.org/drawingml/2006/main" xmlns:p="http://schemas.openxmlformats.org/presentationml/2006/main" xmlns:r="http://schemas.openxmlformats.org/officeDocument/2006/relationships">
+  <p:cSld>
+    <p:spTree>
+      <p:nvGrpSpPr>
+        <p:cNvPr id="1" name=""/>
+        <p:cNvGrpSpPr/>
+        <p:nvPr/>
+      </p:nvGrpSpPr>
+      <p:grpSpPr>
+        <a:xfrm>
+          <a:off x="0" y="0"/>
+          <a:ext cx="0" cy="0"/>
+          <a:chOff x="0" y="0"/>
+          <a:chExt cx="0" cy="0"/>
+        </a:xfrm>
+      </p:grpSpPr>
+      <p:sp>
+        <p:nvSpPr>
+          <p:cNvPr id="2" name="Slide Image Placeholder 1"/>
+          <p:cNvSpPr>
+            <a:spLocks noGrp="1"/>
+          </p:cNvSpPr>
+          <p:nvPr>
+            <p:ph type="sldImg" idx="2"/>
+          </p:nvPr>
+        </p:nvSpPr>
+        <p:spPr/>
+      </p:sp>
+      <p:sp>
+        <p:nvSpPr>
+          <p:cNvPr id="3" name="Notes Placeholder 2"/>
+          <p:cNvSpPr>
+            <a:spLocks noGrp="1"/>
+          </p:cNvSpPr>
+          <p:nvPr>
+            <p:ph type="body" idx="3" sz="quarter"/>
+          </p:nvPr>
+        </p:nvSpPr>
+        <p:spPr/>
+        <p:txBody>
+          <a:bodyPr/>
+          <a:lstStyle/>
+          <a:p>
+            <a:r>
+              <a:t>Trecem acum la sistemul propriu-zis. Aceasta este arhitectura globală, organizată pe straturi. Sus, utilizatorul accesează totul printr-un browser, prin HTTPS. Cererea ajunge la un ingress Nginx, care joacă rol de gateway și rutează către cele două interfețe Vue.js — una pentru cercetători, una pentru administratori — și către API-ul backend scris în Go. Punctul-cheie al fluxului este decuplarea: API-ul nu rulează simularea direct, ci publică un job într-o coadă Redis. De acolo, cele trei runnere — R, Julia și Python — preiau joburile, fiecare de pe coada lui, execută solverul și scriu rezultatele în baza de date distribuită YugabyteDB, replicată pe trei noduri pentru disponibilitate. Avantajul acestei arhitecturi este că totul rulează asincron: utilizatorul lansează o simulare, primește imediat un identificator, iar interfața interoghează periodic statusul până când rezultatul e gata. Asta permite și rularea mai multor simulări în paralel.</a:t>
+            </a:r>
+          </a:p>
+        </p:txBody>
+      </p:sp>
+      <p:sp>
+        <p:nvSpPr>
+          <p:cNvPr id="4" name="Slide Number Placeholder 3"/>
+          <p:cNvSpPr>
+            <a:spLocks noGrp="1"/>
+          </p:cNvSpPr>
+          <p:nvPr>
+            <p:ph type="sldNum" idx="5" sz="quarter"/>
+          </p:nvPr>
+        </p:nvSpPr>
+        <p:spPr/>
+      </p:sp>
+    </p:spTree>
+  </p:cSld>
+  <p:clrMapOvr>
+    <a:masterClrMapping/>
+  </p:clrMapOvr>
+</p:notes>
+</file>
+
+<file path=ppt/notesSlides/notesSlide8.xml><?xml version="1.0" encoding="utf-8"?>
+<p:notes xmlns:a="http://schemas.openxmlformats.org/drawingml/2006/main" xmlns:p="http://schemas.openxmlformats.org/presentationml/2006/main" xmlns:r="http://schemas.openxmlformats.org/officeDocument/2006/relationships">
+  <p:cSld>
+    <p:spTree>
+      <p:nvGrpSpPr>
+        <p:cNvPr id="1" name=""/>
+        <p:cNvGrpSpPr/>
+        <p:nvPr/>
+      </p:nvGrpSpPr>
+      <p:grpSpPr>
+        <a:xfrm>
+          <a:off x="0" y="0"/>
+          <a:ext cx="0" cy="0"/>
+          <a:chOff x="0" y="0"/>
+          <a:chExt cx="0" cy="0"/>
+        </a:xfrm>
+      </p:grpSpPr>
+      <p:sp>
+        <p:nvSpPr>
+          <p:cNvPr id="2" name="Slide Image Placeholder 1"/>
+          <p:cNvSpPr>
+            <a:spLocks noGrp="1"/>
+          </p:cNvSpPr>
+          <p:nvPr>
+            <p:ph type="sldImg" idx="2"/>
+          </p:nvPr>
+        </p:nvSpPr>
+        <p:spPr/>
+      </p:sp>
+      <p:sp>
+        <p:nvSpPr>
+          <p:cNvPr id="3" name="Notes Placeholder 2"/>
+          <p:cNvSpPr>
+            <a:spLocks noGrp="1"/>
+          </p:cNvSpPr>
+          <p:nvPr>
+            <p:ph type="body" idx="3" sz="quarter"/>
+          </p:nvPr>
+        </p:nvSpPr>
+        <p:spPr/>
+        <p:txBody>
+          <a:bodyPr/>
+          <a:lstStyle/>
+          <a:p>
+            <a:r>
+              <a:t>Să detaliez puțin cele trei runnere, pentru că aici se află una dintre contribuțiile centrale. Toate trei implementează exact același contract de simulare, dar fiecare folosește biblioteca consacrată a ecosistemului său: deSolve în R, cu metoda Runge-Kutta de ordin 4; DifferentialEquations.jl în Julia, cu solverul Tsit5, adaptiv; și SciPy în Python, cu RK45, tot adaptiv. Esențialul este că, deși algoritmii numerici diferă ușor, toate trei comunică prin același format de mesaj Redis și scriu în aceeași schemă de rezultate, un obiect JSONB cu compartimentele. Asta le face complet interschimbabile din punctul de vedere al sistemului. Iar pentru mine, ca cercetător, este exact ce trebuie: pot rula același model, pe aceleași date, în trei ecosisteme diferite, și pot măsura corect diferențele de cost, fără ca rezultatele să fie distorsionate de diferențe de infrastructură.</a:t>
+            </a:r>
+          </a:p>
+        </p:txBody>
+      </p:sp>
+      <p:sp>
+        <p:nvSpPr>
+          <p:cNvPr id="4" name="Slide Number Placeholder 3"/>
+          <p:cNvSpPr>
+            <a:spLocks noGrp="1"/>
+          </p:cNvSpPr>
+          <p:nvPr>
+            <p:ph type="sldNum" idx="5" sz="quarter"/>
+          </p:nvPr>
+        </p:nvSpPr>
+        <p:spPr/>
+      </p:sp>
+    </p:spTree>
+  </p:cSld>
+  <p:clrMapOvr>
+    <a:masterClrMapping/>
+  </p:clrMapOvr>
+</p:notes>
+</file>
+
+<file path=ppt/notesSlides/notesSlide9.xml><?xml version="1.0" encoding="utf-8"?>
+<p:notes xmlns:a="http://schemas.openxmlformats.org/drawingml/2006/main" xmlns:p="http://schemas.openxmlformats.org/presentationml/2006/main" xmlns:r="http://schemas.openxmlformats.org/officeDocument/2006/relationships">
+  <p:cSld>
+    <p:spTree>
+      <p:nvGrpSpPr>
+        <p:cNvPr id="1" name=""/>
+        <p:cNvGrpSpPr/>
+        <p:nvPr/>
+      </p:nvGrpSpPr>
+      <p:grpSpPr>
+        <a:xfrm>
+          <a:off x="0" y="0"/>
+          <a:ext cx="0" cy="0"/>
+          <a:chOff x="0" y="0"/>
+          <a:chExt cx="0" cy="0"/>
+        </a:xfrm>
+      </p:grpSpPr>
+      <p:sp>
+        <p:nvSpPr>
+          <p:cNvPr id="2" name="Slide Image Placeholder 1"/>
+          <p:cNvSpPr>
+            <a:spLocks noGrp="1"/>
+          </p:cNvSpPr>
+          <p:nvPr>
+            <p:ph type="sldImg" idx="2"/>
+          </p:nvPr>
+        </p:nvSpPr>
+        <p:spPr/>
+      </p:sp>
+      <p:sp>
+        <p:nvSpPr>
+          <p:cNvPr id="3" name="Notes Placeholder 2"/>
+          <p:cNvSpPr>
+            <a:spLocks noGrp="1"/>
+          </p:cNvSpPr>
+          <p:nvPr>
+            <p:ph type="body" idx="3" sz="quarter"/>
+          </p:nvPr>
+        </p:nvSpPr>
+        <p:spPr/>
+        <p:txBody>
+          <a:bodyPr/>
+          <a:lstStyle/>
+          <a:p>
+            <a:r>
+              <a:t>Pe lângă modelele compartimentale, care sunt interpretabile, am adăugat o componentă complet diferită ca natură: o rețea neuronală LSTM, pentru predicție pe serii temporale. Am implementat-o manual, în NumPy, fără bibliotecă de învățare automată, tocmai ca fiecare ecuație — porțile, propagarea înapoi în timp — să fie vizibilă și verificabilă în cod. Dar partea pe care vreau să o subliniez este onestitatea evaluării. O rețea trebuie întotdeauna comparată cu repere simple, altfel o eroare mică pare performanță. Am comparat-o cu persistența — adică predicția „mâine va fi ca azi”. Și rezultatul, pe seria României, este că persistența bate de fapt rețeaua LSTM la orizontul de o zi. Motivul nu este un defect de antrenare, ci o proprietate a datelor: 85% din zilele de test sunt identice cu ziua precedentă, din cauza raportării săptămânale din sursa OWID. Concluzia mea, asumată în lucrare, este că LSTM-ul are valoare doar ca prognoză pe termen scurt sau ca corecție de reziduuri, nu ca înlocuitor al modelelor epidemiologice interpretabile.</a:t>
+            </a:r>
+          </a:p>
+        </p:txBody>
+      </p:sp>
+      <p:sp>
+        <p:nvSpPr>
+          <p:cNvPr id="4" name="Slide Number Placeholder 3"/>
+          <p:cNvSpPr>
+            <a:spLocks noGrp="1"/>
+          </p:cNvSpPr>
+          <p:nvPr>
+            <p:ph type="sldNum" idx="5" sz="quarter"/>
+          </p:nvPr>
+        </p:nvSpPr>
+        <p:spPr/>
+      </p:sp>
+    </p:spTree>
+  </p:cSld>
+  <p:clrMapOvr>
+    <a:masterClrMapping/>
+  </p:clrMapOvr>
+</p:notes>
 </file>
 
 <file path=ppt/slideLayouts/slideLayout1.xml><?xml version="1.0" encoding="utf-8"?>
@@ -3157,7 +4839,7 @@
         <p:spPr>
           <a:xfrm>
             <a:off x="0" y="0"/>
-            <a:ext cx="12191695" cy="1874519"/>
+            <a:ext cx="12191695" cy="1965960"/>
           </a:xfrm>
           <a:prstGeom prst="rect">
             <a:avLst/>
@@ -3200,7 +4882,7 @@
         </p:nvSpPr>
         <p:spPr>
           <a:xfrm>
-            <a:off x="0" y="1874519"/>
+            <a:off x="0" y="1965960"/>
             <a:ext cx="12191695" cy="73152"/>
           </a:xfrm>
           <a:prstGeom prst="rect">
@@ -3244,7 +4926,7 @@
         </p:nvSpPr>
         <p:spPr>
           <a:xfrm>
-            <a:off x="640080" y="411480"/>
+            <a:off x="640080" y="457200"/>
             <a:ext cx="10972800" cy="1371600"/>
           </a:xfrm>
           <a:prstGeom prst="rect">
@@ -3253,7 +4935,7 @@
           <a:noFill/>
         </p:spPr>
         <p:txBody>
-          <a:bodyPr wrap="square" anchor="ctr" lIns="45720" rIns="45720" tIns="18288" bIns="18288">
+          <a:bodyPr wrap="square" anchor="ctr" lIns="36576" rIns="36576" tIns="36576" bIns="36576">
             <a:spAutoFit/>
           </a:bodyPr>
           <a:lstStyle/>
@@ -3300,8 +4982,8 @@
         </p:nvSpPr>
         <p:spPr>
           <a:xfrm>
-            <a:off x="640080" y="2331720"/>
-            <a:ext cx="10972800" cy="1828800"/>
+            <a:off x="640080" y="2468880"/>
+            <a:ext cx="10972800" cy="1645920"/>
           </a:xfrm>
           <a:prstGeom prst="rect">
             <a:avLst/>
@@ -3309,13 +4991,13 @@
           <a:noFill/>
         </p:spPr>
         <p:txBody>
-          <a:bodyPr wrap="square" anchor="t" lIns="45720" rIns="45720" tIns="18288" bIns="18288">
+          <a:bodyPr wrap="square" anchor="t" lIns="36576" rIns="36576" tIns="36576" bIns="36576">
             <a:spAutoFit/>
           </a:bodyPr>
           <a:lstStyle/>
           <a:p>
             <a:r>
-              <a:rPr sz="3000" b="1" i="0">
+              <a:rPr sz="3300" b="1" i="0">
                 <a:solidFill>
                   <a:srgbClr val="124A63"/>
                 </a:solidFill>
@@ -3327,11 +5009,11 @@
           <a:p>
             <a:pPr>
               <a:spcBef>
-                <a:spcPts val="1000"/>
+                <a:spcPts val="1200"/>
               </a:spcBef>
             </a:pPr>
             <a:r>
-              <a:rPr sz="1700" b="0" i="1">
+              <a:rPr sz="1800" b="0" i="1">
                 <a:solidFill>
                   <a:srgbClr val="1E88A8"/>
                 </a:solidFill>
@@ -3350,8 +5032,8 @@
         </p:nvSpPr>
         <p:spPr>
           <a:xfrm>
-            <a:off x="640080" y="5029200"/>
-            <a:ext cx="10972800" cy="1188720"/>
+            <a:off x="640080" y="4937760"/>
+            <a:ext cx="10972800" cy="1371600"/>
           </a:xfrm>
           <a:prstGeom prst="rect">
             <a:avLst/>
@@ -3359,13 +5041,13 @@
           <a:noFill/>
         </p:spPr>
         <p:txBody>
-          <a:bodyPr wrap="square" anchor="t" lIns="45720" rIns="45720" tIns="18288" bIns="18288">
+          <a:bodyPr wrap="square" anchor="t" lIns="36576" rIns="36576" tIns="36576" bIns="36576">
             <a:spAutoFit/>
           </a:bodyPr>
           <a:lstStyle/>
           <a:p>
             <a:r>
-              <a:rPr sz="1500" b="1" i="0">
+              <a:rPr sz="1600" b="1" i="0">
                 <a:solidFill>
                   <a:srgbClr val="6B767C"/>
                 </a:solidFill>
@@ -3374,9 +5056,9 @@
               <a:t>Absolvent:  </a:t>
             </a:r>
             <a:r>
-              <a:rPr sz="1500" b="1" i="0">
-                <a:solidFill>
-                  <a:srgbClr val="232A2E"/>
+              <a:rPr sz="1600" b="1" i="0">
+                <a:solidFill>
+                  <a:srgbClr val="20282C"/>
                 </a:solidFill>
                 <a:latin typeface="Calibri"/>
               </a:rPr>
@@ -3386,11 +5068,11 @@
           <a:p>
             <a:pPr>
               <a:spcBef>
-                <a:spcPts val="400"/>
+                <a:spcPts val="500"/>
               </a:spcBef>
             </a:pPr>
             <a:r>
-              <a:rPr sz="1500" b="1" i="0">
+              <a:rPr sz="1600" b="1" i="0">
                 <a:solidFill>
                   <a:srgbClr val="6B767C"/>
                 </a:solidFill>
@@ -3399,9 +5081,9 @@
               <a:t>Coordonator științific:  </a:t>
             </a:r>
             <a:r>
-              <a:rPr sz="1500" b="1" i="0">
-                <a:solidFill>
-                  <a:srgbClr val="232A2E"/>
+              <a:rPr sz="1600" b="1" i="0">
+                <a:solidFill>
+                  <a:srgbClr val="20282C"/>
                 </a:solidFill>
                 <a:latin typeface="Calibri"/>
               </a:rPr>
@@ -3411,7 +5093,7 @@
           <a:p>
             <a:pPr>
               <a:spcBef>
-                <a:spcPts val="1000"/>
+                <a:spcPts val="1100"/>
               </a:spcBef>
             </a:pPr>
             <a:r>
@@ -3453,7 +5135,7 @@
         <p:spPr>
           <a:xfrm>
             <a:off x="0" y="0"/>
-            <a:ext cx="12191695" cy="1051560"/>
+            <a:ext cx="12191695" cy="960120"/>
           </a:xfrm>
           <a:prstGeom prst="rect">
             <a:avLst/>
@@ -3496,8 +5178,8 @@
         </p:nvSpPr>
         <p:spPr>
           <a:xfrm>
-            <a:off x="0" y="1051560"/>
-            <a:ext cx="12191695" cy="50292"/>
+            <a:off x="0" y="960120"/>
+            <a:ext cx="12191695" cy="45720"/>
           </a:xfrm>
           <a:prstGeom prst="rect">
             <a:avLst/>
@@ -3540,8 +5222,8 @@
         </p:nvSpPr>
         <p:spPr>
           <a:xfrm>
-            <a:off x="502920" y="109728"/>
-            <a:ext cx="11155680" cy="868680"/>
+            <a:off x="502920" y="73152"/>
+            <a:ext cx="11155680" cy="822960"/>
           </a:xfrm>
           <a:prstGeom prst="rect">
             <a:avLst/>
@@ -3549,13 +5231,13 @@
           <a:noFill/>
         </p:spPr>
         <p:txBody>
-          <a:bodyPr wrap="square" anchor="ctr" lIns="45720" rIns="45720" tIns="18288" bIns="18288">
+          <a:bodyPr wrap="square" anchor="ctr" lIns="36576" rIns="36576" tIns="36576" bIns="36576">
             <a:spAutoFit/>
           </a:bodyPr>
           <a:lstStyle/>
           <a:p>
             <a:r>
-              <a:rPr sz="1200" b="1" i="0">
+              <a:rPr sz="1300" b="1" i="0">
                 <a:solidFill>
                   <a:srgbClr val="BFDDE6"/>
                 </a:solidFill>
@@ -3566,20 +5248,20 @@
           </a:p>
           <a:p>
             <a:r>
-              <a:rPr sz="2700" b="1" i="0">
+              <a:rPr sz="3000" b="1" i="0">
                 <a:solidFill>
                   <a:srgbClr val="FFFFFF"/>
                 </a:solidFill>
                 <a:latin typeface="Calibri"/>
               </a:rPr>
-              <a:t>Calibrare pe date reale</a:t>
+              <a:t>Predicții LSTM pe seria României</a:t>
             </a:r>
           </a:p>
         </p:txBody>
       </p:sp>
       <p:pic>
         <p:nvPicPr>
-          <p:cNvPr id="5" name="Picture 4" descr="calibration_multiregion.png"/>
+          <p:cNvPr id="5" name="Picture 4" descr="lstm_trajectory.png"/>
           <p:cNvPicPr>
             <a:picLocks noChangeAspect="1"/>
           </p:cNvPicPr>
@@ -3593,8 +5275,8 @@
         </p:blipFill>
         <p:spPr>
           <a:xfrm>
-            <a:off x="799150" y="1280160"/>
-            <a:ext cx="6905620" cy="4937760"/>
+            <a:off x="320040" y="1301431"/>
+            <a:ext cx="11548872" cy="4849498"/>
           </a:xfrm>
           <a:prstGeom prst="rect">
             <a:avLst/>
@@ -3609,8 +5291,8 @@
         </p:nvSpPr>
         <p:spPr>
           <a:xfrm>
-            <a:off x="8229600" y="1554480"/>
-            <a:ext cx="3657600" cy="4572000"/>
+            <a:off x="457200" y="6327648"/>
+            <a:ext cx="10515600" cy="411480"/>
           </a:xfrm>
           <a:prstGeom prst="rect">
             <a:avLst/>
@@ -3618,120 +5300,20 @@
           <a:noFill/>
         </p:spPr>
         <p:txBody>
-          <a:bodyPr wrap="square" anchor="t" lIns="45720" rIns="45720" tIns="18288" bIns="18288">
+          <a:bodyPr wrap="square" anchor="t" lIns="36576" rIns="36576" tIns="36576" bIns="36576">
             <a:spAutoFit/>
           </a:bodyPr>
           <a:lstStyle/>
           <a:p>
-            <a:pPr>
-              <a:spcBef>
-                <a:spcPts val="0"/>
-              </a:spcBef>
-              <a:spcAft>
-                <a:spcPts val="1200"/>
-              </a:spcAft>
-            </a:pPr>
-            <a:r>
-              <a:rPr sz="1400" b="1" i="0">
-                <a:solidFill>
-                  <a:srgbClr val="1E88A8"/>
-                </a:solidFill>
-                <a:latin typeface="Calibri"/>
-              </a:rPr>
-              <a:t>▸ </a:t>
-            </a:r>
-            <a:r>
-              <a:rPr sz="1400" b="0" i="0">
-                <a:solidFill>
-                  <a:srgbClr val="232A2E"/>
-                </a:solidFill>
-                <a:latin typeface="Calibri"/>
-              </a:rPr>
-              <a:t>SIR cu γ = 1/14 pe valul 1 COVID-19, patru țări europene.</a:t>
-            </a:r>
-          </a:p>
-          <a:p>
-            <a:pPr>
-              <a:spcBef>
-                <a:spcPts val="0"/>
-              </a:spcBef>
-              <a:spcAft>
-                <a:spcPts val="1200"/>
-              </a:spcAft>
-            </a:pPr>
-            <a:r>
-              <a:rPr sz="1400" b="1" i="0">
-                <a:solidFill>
-                  <a:srgbClr val="1E88A8"/>
-                </a:solidFill>
-                <a:latin typeface="Calibri"/>
-              </a:rPr>
-              <a:t>▸ </a:t>
-            </a:r>
-            <a:r>
-              <a:rPr sz="1400" b="0" i="0">
-                <a:solidFill>
-                  <a:srgbClr val="232A2E"/>
-                </a:solidFill>
-                <a:latin typeface="Calibri"/>
-              </a:rPr>
-              <a:t>R₀ estimat între 0,94 (Italia) și 1,45 (România).</a:t>
-            </a:r>
-          </a:p>
-          <a:p>
-            <a:pPr>
-              <a:spcBef>
-                <a:spcPts val="0"/>
-              </a:spcBef>
-              <a:spcAft>
-                <a:spcPts val="1200"/>
-              </a:spcAft>
-            </a:pPr>
-            <a:r>
-              <a:rPr sz="1400" b="1" i="0">
-                <a:solidFill>
-                  <a:srgbClr val="1E88A8"/>
-                </a:solidFill>
-                <a:latin typeface="Calibri"/>
-              </a:rPr>
-              <a:t>▸ </a:t>
-            </a:r>
-            <a:r>
-              <a:rPr sz="1400" b="0" i="0">
-                <a:solidFill>
-                  <a:srgbClr val="232A2E"/>
-                </a:solidFill>
-                <a:latin typeface="Calibri"/>
-              </a:rPr>
-              <a:t>Valori sub intervalul de literatură (2–3): intervenții deja active.</a:t>
-            </a:r>
-          </a:p>
-          <a:p>
-            <a:pPr>
-              <a:spcBef>
-                <a:spcPts val="0"/>
-              </a:spcBef>
-              <a:spcAft>
-                <a:spcPts val="1200"/>
-              </a:spcAft>
-            </a:pPr>
-            <a:r>
-              <a:rPr sz="1400" b="1" i="0">
-                <a:solidFill>
-                  <a:srgbClr val="1E88A8"/>
-                </a:solidFill>
-                <a:latin typeface="Calibri"/>
-              </a:rPr>
-              <a:t>▸ </a:t>
-            </a:r>
-            <a:r>
-              <a:rPr sz="1400" b="0" i="0">
-                <a:solidFill>
-                  <a:srgbClr val="232A2E"/>
-                </a:solidFill>
-                <a:latin typeface="Calibri"/>
-              </a:rPr>
-              <a:t>Identifiabilitate practică slabă: date insuficiente disting combinații (β, γ).</a:t>
+            <a:pPr algn="ctr"/>
+            <a:r>
+              <a:rPr sz="1400" b="0" i="1">
+                <a:solidFill>
+                  <a:srgbClr val="6B767C"/>
+                </a:solidFill>
+                <a:latin typeface="Calibri"/>
+              </a:rPr>
+              <a:t>Observat / fitted / predicted — prognoza autoregresivă se aplatizează</a:t>
             </a:r>
           </a:p>
         </p:txBody>
@@ -3744,8 +5326,8 @@
         </p:nvSpPr>
         <p:spPr>
           <a:xfrm>
-            <a:off x="502920" y="6419088"/>
-            <a:ext cx="8229600" cy="365760"/>
+            <a:off x="11247120" y="6437376"/>
+            <a:ext cx="822960" cy="365760"/>
           </a:xfrm>
           <a:prstGeom prst="rect">
             <a:avLst/>
@@ -3753,48 +5335,14 @@
           <a:noFill/>
         </p:spPr>
         <p:txBody>
-          <a:bodyPr wrap="square" anchor="t" lIns="45720" rIns="45720" tIns="18288" bIns="18288">
+          <a:bodyPr wrap="square" anchor="t" lIns="36576" rIns="36576" tIns="36576" bIns="36576">
             <a:spAutoFit/>
           </a:bodyPr>
           <a:lstStyle/>
           <a:p>
-            <a:r>
-              <a:rPr sz="900" b="0" i="0">
-                <a:solidFill>
-                  <a:srgbClr val="6B767C"/>
-                </a:solidFill>
-                <a:latin typeface="Calibri"/>
-              </a:rPr>
-              <a:t>Sisteme e-medicine pentru date epidemiologice  ·  Geană Tudor-Bogdan</a:t>
-            </a:r>
-          </a:p>
-        </p:txBody>
-      </p:sp>
-      <p:sp>
-        <p:nvSpPr>
-          <p:cNvPr id="8" name="TextBox 7"/>
-          <p:cNvSpPr txBox="1"/>
-          <p:nvPr/>
-        </p:nvSpPr>
-        <p:spPr>
-          <a:xfrm>
-            <a:off x="11155680" y="6419088"/>
-            <a:ext cx="822960" cy="365760"/>
-          </a:xfrm>
-          <a:prstGeom prst="rect">
-            <a:avLst/>
-          </a:prstGeom>
-          <a:noFill/>
-        </p:spPr>
-        <p:txBody>
-          <a:bodyPr wrap="square" anchor="t" lIns="45720" rIns="45720" tIns="18288" bIns="18288">
-            <a:spAutoFit/>
-          </a:bodyPr>
-          <a:lstStyle/>
-          <a:p>
             <a:pPr algn="r"/>
             <a:r>
-              <a:rPr sz="1000" b="1" i="0">
+              <a:rPr sz="1200" b="1" i="0">
                 <a:solidFill>
                   <a:srgbClr val="6B767C"/>
                 </a:solidFill>
@@ -3832,7 +5380,7 @@
         <p:spPr>
           <a:xfrm>
             <a:off x="0" y="0"/>
-            <a:ext cx="12191695" cy="1051560"/>
+            <a:ext cx="12191695" cy="960120"/>
           </a:xfrm>
           <a:prstGeom prst="rect">
             <a:avLst/>
@@ -3875,8 +5423,8 @@
         </p:nvSpPr>
         <p:spPr>
           <a:xfrm>
-            <a:off x="0" y="1051560"/>
-            <a:ext cx="12191695" cy="50292"/>
+            <a:off x="0" y="960120"/>
+            <a:ext cx="12191695" cy="45720"/>
           </a:xfrm>
           <a:prstGeom prst="rect">
             <a:avLst/>
@@ -3919,8 +5467,8 @@
         </p:nvSpPr>
         <p:spPr>
           <a:xfrm>
-            <a:off x="502920" y="109728"/>
-            <a:ext cx="11155680" cy="868680"/>
+            <a:off x="502920" y="73152"/>
+            <a:ext cx="11155680" cy="822960"/>
           </a:xfrm>
           <a:prstGeom prst="rect">
             <a:avLst/>
@@ -3928,30 +5476,30 @@
           <a:noFill/>
         </p:spPr>
         <p:txBody>
-          <a:bodyPr wrap="square" anchor="ctr" lIns="45720" rIns="45720" tIns="18288" bIns="18288">
+          <a:bodyPr wrap="square" anchor="ctr" lIns="36576" rIns="36576" tIns="36576" bIns="36576">
             <a:spAutoFit/>
           </a:bodyPr>
           <a:lstStyle/>
           <a:p>
             <a:r>
-              <a:rPr sz="1200" b="1" i="0">
+              <a:rPr sz="1300" b="1" i="0">
                 <a:solidFill>
                   <a:srgbClr val="BFDDE6"/>
                 </a:solidFill>
                 <a:latin typeface="Calibri"/>
               </a:rPr>
-              <a:t>Evaluare — campanie reală</a:t>
-            </a:r>
-          </a:p>
-          <a:p>
-            <a:r>
-              <a:rPr sz="2700" b="1" i="0">
+              <a:t>Metodologie</a:t>
+            </a:r>
+          </a:p>
+          <a:p>
+            <a:r>
+              <a:rPr sz="3000" b="1" i="0">
                 <a:solidFill>
                   <a:srgbClr val="FFFFFF"/>
                 </a:solidFill>
                 <a:latin typeface="Calibri"/>
               </a:rPr>
-              <a:t>Rezultate benchmark</a:t>
+              <a:t>Comparație și calibrare</a:t>
             </a:r>
           </a:p>
         </p:txBody>
@@ -3964,8 +5512,8 @@
         </p:nvSpPr>
         <p:spPr>
           <a:xfrm>
-            <a:off x="594360" y="1234440"/>
-            <a:ext cx="10972800" cy="548640"/>
+            <a:off x="731520" y="1371600"/>
+            <a:ext cx="10789920" cy="4754880"/>
           </a:xfrm>
           <a:prstGeom prst="rect">
             <a:avLst/>
@@ -3973,19 +5521,585 @@
           <a:noFill/>
         </p:spPr>
         <p:txBody>
-          <a:bodyPr wrap="square" anchor="t" lIns="45720" rIns="45720" tIns="18288" bIns="18288">
+          <a:bodyPr wrap="square" anchor="ctr" lIns="36576" rIns="36576" tIns="36576" bIns="36576">
             <a:spAutoFit/>
           </a:bodyPr>
           <a:lstStyle/>
           <a:p>
-            <a:r>
-              <a:rPr sz="1600" b="0" i="0">
-                <a:solidFill>
-                  <a:srgbClr val="232A2E"/>
-                </a:solidFill>
-                <a:latin typeface="Calibri"/>
-              </a:rPr>
-              <a:t>180 rulări ODE + 4 LSTM, fără eșecuri, pe cluster Kubernetes — trei regimuri de cost distincte:</a:t>
+            <a:pPr>
+              <a:spcBef>
+                <a:spcPts val="0"/>
+              </a:spcBef>
+              <a:spcAft>
+                <a:spcPts val="1800"/>
+              </a:spcAft>
+            </a:pPr>
+            <a:r>
+              <a:rPr sz="2700" b="1" i="0">
+                <a:solidFill>
+                  <a:srgbClr val="1E88A8"/>
+                </a:solidFill>
+                <a:latin typeface="Calibri"/>
+              </a:rPr>
+              <a:t>▸  </a:t>
+            </a:r>
+            <a:r>
+              <a:rPr sz="2700" b="0" i="0">
+                <a:solidFill>
+                  <a:srgbClr val="20282C"/>
+                </a:solidFill>
+                <a:latin typeface="Calibri"/>
+              </a:rPr>
+              <a:t>Operator de observație  g_m(x)</a:t>
+            </a:r>
+          </a:p>
+          <a:p>
+            <a:pPr>
+              <a:spcBef>
+                <a:spcPts val="0"/>
+              </a:spcBef>
+              <a:spcAft>
+                <a:spcPts val="1800"/>
+              </a:spcAft>
+            </a:pPr>
+            <a:r>
+              <a:rPr sz="2700" b="1" i="0">
+                <a:solidFill>
+                  <a:srgbClr val="1E88A8"/>
+                </a:solidFill>
+                <a:latin typeface="Calibri"/>
+              </a:rPr>
+              <a:t>▸  </a:t>
+            </a:r>
+            <a:r>
+              <a:rPr sz="2700" b="0" i="0">
+                <a:solidFill>
+                  <a:srgbClr val="20282C"/>
+                </a:solidFill>
+                <a:latin typeface="Calibri"/>
+              </a:rPr>
+              <a:t>Erori: MAE / RMSE / nRMSE (antrenare vs test)</a:t>
+            </a:r>
+          </a:p>
+          <a:p>
+            <a:pPr>
+              <a:spcBef>
+                <a:spcPts val="0"/>
+              </a:spcBef>
+              <a:spcAft>
+                <a:spcPts val="1800"/>
+              </a:spcAft>
+            </a:pPr>
+            <a:r>
+              <a:rPr sz="2700" b="1" i="0">
+                <a:solidFill>
+                  <a:srgbClr val="1E88A8"/>
+                </a:solidFill>
+                <a:latin typeface="Calibri"/>
+              </a:rPr>
+              <a:t>▸  </a:t>
+            </a:r>
+            <a:r>
+              <a:rPr sz="2700" b="0" i="0">
+                <a:solidFill>
+                  <a:srgbClr val="20282C"/>
+                </a:solidFill>
+                <a:latin typeface="Calibri"/>
+              </a:rPr>
+              <a:t>Calibrare = optimizare (Nelder–Mead)</a:t>
+            </a:r>
+          </a:p>
+          <a:p>
+            <a:pPr>
+              <a:spcBef>
+                <a:spcPts val="0"/>
+              </a:spcBef>
+              <a:spcAft>
+                <a:spcPts val="1800"/>
+              </a:spcAft>
+            </a:pPr>
+            <a:r>
+              <a:rPr sz="2700" b="1" i="0">
+                <a:solidFill>
+                  <a:srgbClr val="1E88A8"/>
+                </a:solidFill>
+                <a:latin typeface="Calibri"/>
+              </a:rPr>
+              <a:t>▸  </a:t>
+            </a:r>
+            <a:r>
+              <a:rPr sz="2700" b="0" i="0">
+                <a:solidFill>
+                  <a:srgbClr val="20282C"/>
+                </a:solidFill>
+                <a:latin typeface="Calibri"/>
+              </a:rPr>
+              <a:t>Separare: comparație epidemiologică vs software</a:t>
+            </a:r>
+          </a:p>
+        </p:txBody>
+      </p:sp>
+      <p:sp>
+        <p:nvSpPr>
+          <p:cNvPr id="6" name="TextBox 5"/>
+          <p:cNvSpPr txBox="1"/>
+          <p:nvPr/>
+        </p:nvSpPr>
+        <p:spPr>
+          <a:xfrm>
+            <a:off x="11247120" y="6437376"/>
+            <a:ext cx="822960" cy="365760"/>
+          </a:xfrm>
+          <a:prstGeom prst="rect">
+            <a:avLst/>
+          </a:prstGeom>
+          <a:noFill/>
+        </p:spPr>
+        <p:txBody>
+          <a:bodyPr wrap="square" anchor="t" lIns="36576" rIns="36576" tIns="36576" bIns="36576">
+            <a:spAutoFit/>
+          </a:bodyPr>
+          <a:lstStyle/>
+          <a:p>
+            <a:pPr algn="r"/>
+            <a:r>
+              <a:rPr sz="1200" b="1" i="0">
+                <a:solidFill>
+                  <a:srgbClr val="6B767C"/>
+                </a:solidFill>
+                <a:latin typeface="Calibri"/>
+              </a:rPr>
+              <a:t>10</a:t>
+            </a:r>
+          </a:p>
+        </p:txBody>
+      </p:sp>
+    </p:spTree>
+  </p:cSld>
+  <p:clrMapOvr>
+    <a:masterClrMapping/>
+  </p:clrMapOvr>
+</p:sld>
+</file>
+
+<file path=ppt/slides/slide12.xml><?xml version="1.0" encoding="utf-8"?>
+<p:sld xmlns:a="http://schemas.openxmlformats.org/drawingml/2006/main" xmlns:p="http://schemas.openxmlformats.org/presentationml/2006/main" xmlns:r="http://schemas.openxmlformats.org/officeDocument/2006/relationships">
+  <p:cSld>
+    <p:spTree>
+      <p:nvGrpSpPr>
+        <p:cNvPr id="1" name=""/>
+        <p:cNvGrpSpPr/>
+        <p:nvPr/>
+      </p:nvGrpSpPr>
+      <p:grpSpPr/>
+      <p:sp>
+        <p:nvSpPr>
+          <p:cNvPr id="2" name="Rectangle 1"/>
+          <p:cNvSpPr/>
+          <p:nvPr/>
+        </p:nvSpPr>
+        <p:spPr>
+          <a:xfrm>
+            <a:off x="0" y="0"/>
+            <a:ext cx="12191695" cy="960120"/>
+          </a:xfrm>
+          <a:prstGeom prst="rect">
+            <a:avLst/>
+          </a:prstGeom>
+          <a:solidFill>
+            <a:srgbClr val="124A63"/>
+          </a:solidFill>
+          <a:ln>
+            <a:noFill/>
+          </a:ln>
+          <a:effectLst/>
+        </p:spPr>
+        <p:style>
+          <a:lnRef idx="1">
+            <a:schemeClr val="accent1"/>
+          </a:lnRef>
+          <a:fillRef idx="3">
+            <a:schemeClr val="accent1"/>
+          </a:fillRef>
+          <a:effectRef idx="2">
+            <a:schemeClr val="accent1"/>
+          </a:effectRef>
+          <a:fontRef idx="minor">
+            <a:schemeClr val="lt1"/>
+          </a:fontRef>
+        </p:style>
+        <p:txBody>
+          <a:bodyPr rtlCol="0" anchor="ctr"/>
+          <a:lstStyle/>
+          <a:p>
+            <a:pPr algn="ctr"/>
+          </a:p>
+        </p:txBody>
+      </p:sp>
+      <p:sp>
+        <p:nvSpPr>
+          <p:cNvPr id="3" name="Rectangle 2"/>
+          <p:cNvSpPr/>
+          <p:nvPr/>
+        </p:nvSpPr>
+        <p:spPr>
+          <a:xfrm>
+            <a:off x="0" y="960120"/>
+            <a:ext cx="12191695" cy="45720"/>
+          </a:xfrm>
+          <a:prstGeom prst="rect">
+            <a:avLst/>
+          </a:prstGeom>
+          <a:solidFill>
+            <a:srgbClr val="1E88A8"/>
+          </a:solidFill>
+          <a:ln>
+            <a:noFill/>
+          </a:ln>
+          <a:effectLst/>
+        </p:spPr>
+        <p:style>
+          <a:lnRef idx="1">
+            <a:schemeClr val="accent1"/>
+          </a:lnRef>
+          <a:fillRef idx="3">
+            <a:schemeClr val="accent1"/>
+          </a:fillRef>
+          <a:effectRef idx="2">
+            <a:schemeClr val="accent1"/>
+          </a:effectRef>
+          <a:fontRef idx="minor">
+            <a:schemeClr val="lt1"/>
+          </a:fontRef>
+        </p:style>
+        <p:txBody>
+          <a:bodyPr rtlCol="0" anchor="ctr"/>
+          <a:lstStyle/>
+          <a:p>
+            <a:pPr algn="ctr"/>
+          </a:p>
+        </p:txBody>
+      </p:sp>
+      <p:sp>
+        <p:nvSpPr>
+          <p:cNvPr id="4" name="TextBox 3"/>
+          <p:cNvSpPr txBox="1"/>
+          <p:nvPr/>
+        </p:nvSpPr>
+        <p:spPr>
+          <a:xfrm>
+            <a:off x="502920" y="73152"/>
+            <a:ext cx="11155680" cy="822960"/>
+          </a:xfrm>
+          <a:prstGeom prst="rect">
+            <a:avLst/>
+          </a:prstGeom>
+          <a:noFill/>
+        </p:spPr>
+        <p:txBody>
+          <a:bodyPr wrap="square" anchor="ctr" lIns="36576" rIns="36576" tIns="36576" bIns="36576">
+            <a:spAutoFit/>
+          </a:bodyPr>
+          <a:lstStyle/>
+          <a:p>
+            <a:r>
+              <a:rPr sz="1300" b="1" i="0">
+                <a:solidFill>
+                  <a:srgbClr val="BFDDE6"/>
+                </a:solidFill>
+                <a:latin typeface="Calibri"/>
+              </a:rPr>
+              <a:t>Rezultate</a:t>
+            </a:r>
+          </a:p>
+          <a:p>
+            <a:r>
+              <a:rPr sz="3000" b="1" i="0">
+                <a:solidFill>
+                  <a:srgbClr val="FFFFFF"/>
+                </a:solidFill>
+                <a:latin typeface="Calibri"/>
+              </a:rPr>
+              <a:t>Calibrare SIR pe 4 țări europene</a:t>
+            </a:r>
+          </a:p>
+        </p:txBody>
+      </p:sp>
+      <p:pic>
+        <p:nvPicPr>
+          <p:cNvPr id="5" name="Picture 4" descr="calibration_multiregion.png"/>
+          <p:cNvPicPr>
+            <a:picLocks noChangeAspect="1"/>
+          </p:cNvPicPr>
+          <p:nvPr/>
+        </p:nvPicPr>
+        <p:blipFill>
+          <a:blip r:embed="rId2"/>
+          <a:stretch>
+            <a:fillRect/>
+          </a:stretch>
+        </p:blipFill>
+        <p:spPr>
+          <a:xfrm>
+            <a:off x="2542860" y="1188720"/>
+            <a:ext cx="7103232" cy="5074920"/>
+          </a:xfrm>
+          <a:prstGeom prst="rect">
+            <a:avLst/>
+          </a:prstGeom>
+        </p:spPr>
+      </p:pic>
+      <p:sp>
+        <p:nvSpPr>
+          <p:cNvPr id="6" name="TextBox 5"/>
+          <p:cNvSpPr txBox="1"/>
+          <p:nvPr/>
+        </p:nvSpPr>
+        <p:spPr>
+          <a:xfrm>
+            <a:off x="457200" y="6327648"/>
+            <a:ext cx="10515600" cy="411480"/>
+          </a:xfrm>
+          <a:prstGeom prst="rect">
+            <a:avLst/>
+          </a:prstGeom>
+          <a:noFill/>
+        </p:spPr>
+        <p:txBody>
+          <a:bodyPr wrap="square" anchor="t" lIns="36576" rIns="36576" tIns="36576" bIns="36576">
+            <a:spAutoFit/>
+          </a:bodyPr>
+          <a:lstStyle/>
+          <a:p>
+            <a:pPr algn="ctr"/>
+            <a:r>
+              <a:rPr sz="1400" b="0" i="1">
+                <a:solidFill>
+                  <a:srgbClr val="6B767C"/>
+                </a:solidFill>
+                <a:latin typeface="Calibri"/>
+              </a:rPr>
+              <a:t>γ = 1/14, valul 1 COVID-19 · R₀ între 0,94 și 1,45</a:t>
+            </a:r>
+          </a:p>
+        </p:txBody>
+      </p:sp>
+      <p:sp>
+        <p:nvSpPr>
+          <p:cNvPr id="7" name="TextBox 6"/>
+          <p:cNvSpPr txBox="1"/>
+          <p:nvPr/>
+        </p:nvSpPr>
+        <p:spPr>
+          <a:xfrm>
+            <a:off x="11247120" y="6437376"/>
+            <a:ext cx="822960" cy="365760"/>
+          </a:xfrm>
+          <a:prstGeom prst="rect">
+            <a:avLst/>
+          </a:prstGeom>
+          <a:noFill/>
+        </p:spPr>
+        <p:txBody>
+          <a:bodyPr wrap="square" anchor="t" lIns="36576" rIns="36576" tIns="36576" bIns="36576">
+            <a:spAutoFit/>
+          </a:bodyPr>
+          <a:lstStyle/>
+          <a:p>
+            <a:pPr algn="r"/>
+            <a:r>
+              <a:rPr sz="1200" b="1" i="0">
+                <a:solidFill>
+                  <a:srgbClr val="6B767C"/>
+                </a:solidFill>
+                <a:latin typeface="Calibri"/>
+              </a:rPr>
+              <a:t>11</a:t>
+            </a:r>
+          </a:p>
+        </p:txBody>
+      </p:sp>
+    </p:spTree>
+  </p:cSld>
+  <p:clrMapOvr>
+    <a:masterClrMapping/>
+  </p:clrMapOvr>
+</p:sld>
+</file>
+
+<file path=ppt/slides/slide13.xml><?xml version="1.0" encoding="utf-8"?>
+<p:sld xmlns:a="http://schemas.openxmlformats.org/drawingml/2006/main" xmlns:p="http://schemas.openxmlformats.org/presentationml/2006/main" xmlns:r="http://schemas.openxmlformats.org/officeDocument/2006/relationships">
+  <p:cSld>
+    <p:spTree>
+      <p:nvGrpSpPr>
+        <p:cNvPr id="1" name=""/>
+        <p:cNvGrpSpPr/>
+        <p:nvPr/>
+      </p:nvGrpSpPr>
+      <p:grpSpPr/>
+      <p:sp>
+        <p:nvSpPr>
+          <p:cNvPr id="2" name="Rectangle 1"/>
+          <p:cNvSpPr/>
+          <p:nvPr/>
+        </p:nvSpPr>
+        <p:spPr>
+          <a:xfrm>
+            <a:off x="0" y="0"/>
+            <a:ext cx="12191695" cy="960120"/>
+          </a:xfrm>
+          <a:prstGeom prst="rect">
+            <a:avLst/>
+          </a:prstGeom>
+          <a:solidFill>
+            <a:srgbClr val="124A63"/>
+          </a:solidFill>
+          <a:ln>
+            <a:noFill/>
+          </a:ln>
+          <a:effectLst/>
+        </p:spPr>
+        <p:style>
+          <a:lnRef idx="1">
+            <a:schemeClr val="accent1"/>
+          </a:lnRef>
+          <a:fillRef idx="3">
+            <a:schemeClr val="accent1"/>
+          </a:fillRef>
+          <a:effectRef idx="2">
+            <a:schemeClr val="accent1"/>
+          </a:effectRef>
+          <a:fontRef idx="minor">
+            <a:schemeClr val="lt1"/>
+          </a:fontRef>
+        </p:style>
+        <p:txBody>
+          <a:bodyPr rtlCol="0" anchor="ctr"/>
+          <a:lstStyle/>
+          <a:p>
+            <a:pPr algn="ctr"/>
+          </a:p>
+        </p:txBody>
+      </p:sp>
+      <p:sp>
+        <p:nvSpPr>
+          <p:cNvPr id="3" name="Rectangle 2"/>
+          <p:cNvSpPr/>
+          <p:nvPr/>
+        </p:nvSpPr>
+        <p:spPr>
+          <a:xfrm>
+            <a:off x="0" y="960120"/>
+            <a:ext cx="12191695" cy="45720"/>
+          </a:xfrm>
+          <a:prstGeom prst="rect">
+            <a:avLst/>
+          </a:prstGeom>
+          <a:solidFill>
+            <a:srgbClr val="1E88A8"/>
+          </a:solidFill>
+          <a:ln>
+            <a:noFill/>
+          </a:ln>
+          <a:effectLst/>
+        </p:spPr>
+        <p:style>
+          <a:lnRef idx="1">
+            <a:schemeClr val="accent1"/>
+          </a:lnRef>
+          <a:fillRef idx="3">
+            <a:schemeClr val="accent1"/>
+          </a:fillRef>
+          <a:effectRef idx="2">
+            <a:schemeClr val="accent1"/>
+          </a:effectRef>
+          <a:fontRef idx="minor">
+            <a:schemeClr val="lt1"/>
+          </a:fontRef>
+        </p:style>
+        <p:txBody>
+          <a:bodyPr rtlCol="0" anchor="ctr"/>
+          <a:lstStyle/>
+          <a:p>
+            <a:pPr algn="ctr"/>
+          </a:p>
+        </p:txBody>
+      </p:sp>
+      <p:sp>
+        <p:nvSpPr>
+          <p:cNvPr id="4" name="TextBox 3"/>
+          <p:cNvSpPr txBox="1"/>
+          <p:nvPr/>
+        </p:nvSpPr>
+        <p:spPr>
+          <a:xfrm>
+            <a:off x="502920" y="73152"/>
+            <a:ext cx="11155680" cy="822960"/>
+          </a:xfrm>
+          <a:prstGeom prst="rect">
+            <a:avLst/>
+          </a:prstGeom>
+          <a:noFill/>
+        </p:spPr>
+        <p:txBody>
+          <a:bodyPr wrap="square" anchor="ctr" lIns="36576" rIns="36576" tIns="36576" bIns="36576">
+            <a:spAutoFit/>
+          </a:bodyPr>
+          <a:lstStyle/>
+          <a:p>
+            <a:r>
+              <a:rPr sz="1300" b="1" i="0">
+                <a:solidFill>
+                  <a:srgbClr val="BFDDE6"/>
+                </a:solidFill>
+                <a:latin typeface="Calibri"/>
+              </a:rPr>
+              <a:t>Evaluare</a:t>
+            </a:r>
+          </a:p>
+          <a:p>
+            <a:r>
+              <a:rPr sz="3000" b="1" i="0">
+                <a:solidFill>
+                  <a:srgbClr val="FFFFFF"/>
+                </a:solidFill>
+                <a:latin typeface="Calibri"/>
+              </a:rPr>
+              <a:t>Rezultate benchmark</a:t>
+            </a:r>
+          </a:p>
+        </p:txBody>
+      </p:sp>
+      <p:sp>
+        <p:nvSpPr>
+          <p:cNvPr id="5" name="TextBox 4"/>
+          <p:cNvSpPr txBox="1"/>
+          <p:nvPr/>
+        </p:nvSpPr>
+        <p:spPr>
+          <a:xfrm>
+            <a:off x="548640" y="1143000"/>
+            <a:ext cx="10972800" cy="548640"/>
+          </a:xfrm>
+          <a:prstGeom prst="rect">
+            <a:avLst/>
+          </a:prstGeom>
+          <a:noFill/>
+        </p:spPr>
+        <p:txBody>
+          <a:bodyPr wrap="square" anchor="t" lIns="36576" rIns="36576" tIns="36576" bIns="36576">
+            <a:spAutoFit/>
+          </a:bodyPr>
+          <a:lstStyle/>
+          <a:p>
+            <a:r>
+              <a:rPr sz="2200" b="1" i="0">
+                <a:solidFill>
+                  <a:srgbClr val="20282C"/>
+                </a:solidFill>
+                <a:latin typeface="Calibri"/>
+              </a:rPr>
+              <a:t>180 rulări ODE + 4 LSTM · 0 eșecuri · cluster Kubernetes</a:t>
             </a:r>
           </a:p>
         </p:txBody>
@@ -3999,8 +6113,8 @@
           <p:nvPr/>
         </p:nvGraphicFramePr>
         <p:xfrm>
-          <a:off x="594360" y="1965960"/>
-          <a:ext cx="11018520" cy="2377440"/>
+          <a:off x="548640" y="2011680"/>
+          <a:ext cx="11064240" cy="2743200"/>
         </p:xfrm>
         <a:graphic>
           <a:graphicData uri="http://schemas.openxmlformats.org/drawingml/2006/table">
@@ -4009,20 +6123,18 @@
                 <a:tableStyleId>{5C22544A-7EE6-4342-B048-85BDC9FD1C3A}</a:tableStyleId>
               </a:tblPr>
               <a:tblGrid>
-                <a:gridCol w="1280160"/>
-                <a:gridCol w="2651760"/>
-                <a:gridCol w="2286000"/>
-                <a:gridCol w="1463040"/>
-                <a:gridCol w="3337560"/>
+                <a:gridCol w="2377440"/>
+                <a:gridCol w="3383280"/>
+                <a:gridCol w="5303520"/>
               </a:tblGrid>
-              <a:tr h="594360">
+              <a:tr h="685800">
                 <a:tc>
                   <a:txBody>
                     <a:bodyPr/>
                     <a:lstStyle/>
                     <a:p>
                       <a:r>
-                        <a:rPr sz="1300" b="1">
+                        <a:rPr sz="2000" b="1" i="0">
                           <a:solidFill>
                             <a:srgbClr val="FFFFFF"/>
                           </a:solidFill>
@@ -4044,13 +6156,13 @@
                     <a:lstStyle/>
                     <a:p>
                       <a:r>
-                        <a:rPr sz="1300" b="1">
+                        <a:rPr sz="2000" b="1" i="0">
                           <a:solidFill>
                             <a:srgbClr val="FFFFFF"/>
                           </a:solidFill>
                           <a:latin typeface="Calibri"/>
                         </a:rPr>
-                        <a:t>Solver</a:t>
+                        <a:t>Wall-time @ 10k</a:t>
                       </a:r>
                     </a:p>
                   </a:txBody>
@@ -4066,57 +6178,13 @@
                     <a:lstStyle/>
                     <a:p>
                       <a:r>
-                        <a:rPr sz="1300" b="1">
+                        <a:rPr sz="2000" b="1" i="0">
                           <a:solidFill>
                             <a:srgbClr val="FFFFFF"/>
                           </a:solidFill>
                           <a:latin typeface="Calibri"/>
                         </a:rPr>
-                        <a:t>Wall-time @ t_max=10k</a:t>
-                      </a:r>
-                    </a:p>
-                  </a:txBody>
-                  <a:tcPr>
-                    <a:solidFill>
-                      <a:srgbClr val="124A63"/>
-                    </a:solidFill>
-                  </a:tcPr>
-                </a:tc>
-                <a:tc>
-                  <a:txBody>
-                    <a:bodyPr/>
-                    <a:lstStyle/>
-                    <a:p>
-                      <a:r>
-                        <a:rPr sz="1300" b="1">
-                          <a:solidFill>
-                            <a:srgbClr val="FFFFFF"/>
-                          </a:solidFill>
-                          <a:latin typeface="Calibri"/>
-                        </a:rPr>
-                        <a:t>Memorie</a:t>
-                      </a:r>
-                    </a:p>
-                  </a:txBody>
-                  <a:tcPr>
-                    <a:solidFill>
-                      <a:srgbClr val="124A63"/>
-                    </a:solidFill>
-                  </a:tcPr>
-                </a:tc>
-                <a:tc>
-                  <a:txBody>
-                    <a:bodyPr/>
-                    <a:lstStyle/>
-                    <a:p>
-                      <a:r>
-                        <a:rPr sz="1300" b="1">
-                          <a:solidFill>
-                            <a:srgbClr val="FFFFFF"/>
-                          </a:solidFill>
-                          <a:latin typeface="Calibri"/>
-                        </a:rPr>
-                        <a:t>Caracteristică</a:t>
+                        <a:t>Profil</a:t>
                       </a:r>
                     </a:p>
                   </a:txBody>
@@ -4127,14 +6195,14 @@
                   </a:tcPr>
                 </a:tc>
               </a:tr>
-              <a:tr h="594360">
+              <a:tr h="685800">
                 <a:tc>
                   <a:txBody>
                     <a:bodyPr/>
                     <a:lstStyle/>
                     <a:p>
                       <a:r>
-                        <a:rPr sz="1250" b="1">
+                        <a:rPr sz="1900" b="1" i="0">
                           <a:solidFill>
                             <a:srgbClr val="124A63"/>
                           </a:solidFill>
@@ -4156,31 +6224,9 @@
                     <a:lstStyle/>
                     <a:p>
                       <a:r>
-                        <a:rPr sz="1250" b="0">
+                        <a:rPr sz="1900" b="0" i="0">
                           <a:solidFill>
-                            <a:srgbClr val="232A2E"/>
-                          </a:solidFill>
-                          <a:latin typeface="Calibri"/>
-                        </a:rPr>
-                        <a:t>DiffEq.jl (Tsit5)</a:t>
-                      </a:r>
-                    </a:p>
-                  </a:txBody>
-                  <a:tcPr>
-                    <a:solidFill>
-                      <a:srgbClr val="FFFFFF"/>
-                    </a:solidFill>
-                  </a:tcPr>
-                </a:tc>
-                <a:tc>
-                  <a:txBody>
-                    <a:bodyPr/>
-                    <a:lstStyle/>
-                    <a:p>
-                      <a:r>
-                        <a:rPr sz="1250" b="0">
-                          <a:solidFill>
-                            <a:srgbClr val="232A2E"/>
+                            <a:srgbClr val="20282C"/>
                           </a:solidFill>
                           <a:latin typeface="Calibri"/>
                         </a:rPr>
@@ -4200,35 +6246,13 @@
                     <a:lstStyle/>
                     <a:p>
                       <a:r>
-                        <a:rPr sz="1250" b="0">
+                        <a:rPr sz="1900" b="0" i="0">
                           <a:solidFill>
-                            <a:srgbClr val="232A2E"/>
+                            <a:srgbClr val="20282C"/>
                           </a:solidFill>
                           <a:latin typeface="Calibri"/>
                         </a:rPr>
-                        <a:t>~940 MB</a:t>
-                      </a:r>
-                    </a:p>
-                  </a:txBody>
-                  <a:tcPr>
-                    <a:solidFill>
-                      <a:srgbClr val="FFFFFF"/>
-                    </a:solidFill>
-                  </a:tcPr>
-                </a:tc>
-                <a:tc>
-                  <a:txBody>
-                    <a:bodyPr/>
-                    <a:lstStyle/>
-                    <a:p>
-                      <a:r>
-                        <a:rPr sz="1250" b="0">
-                          <a:solidFill>
-                            <a:srgbClr val="232A2E"/>
-                          </a:solidFill>
-                          <a:latin typeface="Calibri"/>
-                        </a:rPr>
-                        <a:t>cel mai rapid, dar cold-start JIT ~1 s</a:t>
+                        <a:t>rapid; cold-start JIT ~1 s</a:t>
                       </a:r>
                     </a:p>
                   </a:txBody>
@@ -4239,14 +6263,14 @@
                   </a:tcPr>
                 </a:tc>
               </a:tr>
-              <a:tr h="594360">
+              <a:tr h="685800">
                 <a:tc>
                   <a:txBody>
                     <a:bodyPr/>
                     <a:lstStyle/>
                     <a:p>
                       <a:r>
-                        <a:rPr sz="1250" b="1">
+                        <a:rPr sz="1900" b="1" i="0">
                           <a:solidFill>
                             <a:srgbClr val="124A63"/>
                           </a:solidFill>
@@ -4268,31 +6292,9 @@
                     <a:lstStyle/>
                     <a:p>
                       <a:r>
-                        <a:rPr sz="1250" b="0">
+                        <a:rPr sz="1900" b="0" i="0">
                           <a:solidFill>
-                            <a:srgbClr val="232A2E"/>
-                          </a:solidFill>
-                          <a:latin typeface="Calibri"/>
-                        </a:rPr>
-                        <a:t>SciPy solve_ivp (RK45)</a:t>
-                      </a:r>
-                    </a:p>
-                  </a:txBody>
-                  <a:tcPr>
-                    <a:solidFill>
-                      <a:srgbClr val="EFF4F6"/>
-                    </a:solidFill>
-                  </a:tcPr>
-                </a:tc>
-                <a:tc>
-                  <a:txBody>
-                    <a:bodyPr/>
-                    <a:lstStyle/>
-                    <a:p>
-                      <a:r>
-                        <a:rPr sz="1250" b="0">
-                          <a:solidFill>
-                            <a:srgbClr val="232A2E"/>
+                            <a:srgbClr val="20282C"/>
                           </a:solidFill>
                           <a:latin typeface="Calibri"/>
                         </a:rPr>
@@ -4312,35 +6314,13 @@
                     <a:lstStyle/>
                     <a:p>
                       <a:r>
-                        <a:rPr sz="1250" b="0">
+                        <a:rPr sz="1900" b="0" i="0">
                           <a:solidFill>
-                            <a:srgbClr val="232A2E"/>
+                            <a:srgbClr val="20282C"/>
                           </a:solidFill>
                           <a:latin typeface="Calibri"/>
                         </a:rPr>
-                        <a:t>&lt;100 MB</a:t>
-                      </a:r>
-                    </a:p>
-                  </a:txBody>
-                  <a:tcPr>
-                    <a:solidFill>
-                      <a:srgbClr val="EFF4F6"/>
-                    </a:solidFill>
-                  </a:tcPr>
-                </a:tc>
-                <a:tc>
-                  <a:txBody>
-                    <a:bodyPr/>
-                    <a:lstStyle/>
-                    <a:p>
-                      <a:r>
-                        <a:rPr sz="1250" b="0">
-                          <a:solidFill>
-                            <a:srgbClr val="232A2E"/>
-                          </a:solidFill>
-                          <a:latin typeface="Calibri"/>
-                        </a:rPr>
-                        <a:t>cel mai stabil, fără cold-start</a:t>
+                        <a:t>stabil, fără cold-start</a:t>
                       </a:r>
                     </a:p>
                   </a:txBody>
@@ -4351,14 +6331,14 @@
                   </a:tcPr>
                 </a:tc>
               </a:tr>
-              <a:tr h="594360">
+              <a:tr h="685800">
                 <a:tc>
                   <a:txBody>
                     <a:bodyPr/>
                     <a:lstStyle/>
                     <a:p>
                       <a:r>
-                        <a:rPr sz="1250" b="1">
+                        <a:rPr sz="1900" b="1" i="0">
                           <a:solidFill>
                             <a:srgbClr val="124A63"/>
                           </a:solidFill>
@@ -4380,13 +6360,13 @@
                     <a:lstStyle/>
                     <a:p>
                       <a:r>
-                        <a:rPr sz="1250" b="0">
+                        <a:rPr sz="1900" b="0" i="0">
                           <a:solidFill>
-                            <a:srgbClr val="232A2E"/>
+                            <a:srgbClr val="20282C"/>
                           </a:solidFill>
                           <a:latin typeface="Calibri"/>
                         </a:rPr>
-                        <a:t>deSolve (RK4)</a:t>
+                        <a:t>0,7–1,3 s</a:t>
                       </a:r>
                     </a:p>
                   </a:txBody>
@@ -4402,57 +6382,13 @@
                     <a:lstStyle/>
                     <a:p>
                       <a:r>
-                        <a:rPr sz="1250" b="0">
+                        <a:rPr sz="1900" b="0" i="0">
                           <a:solidFill>
-                            <a:srgbClr val="232A2E"/>
+                            <a:srgbClr val="20282C"/>
                           </a:solidFill>
                           <a:latin typeface="Calibri"/>
                         </a:rPr>
-                        <a:t>665–1327 ms</a:t>
-                      </a:r>
-                    </a:p>
-                  </a:txBody>
-                  <a:tcPr>
-                    <a:solidFill>
-                      <a:srgbClr val="FFFFFF"/>
-                    </a:solidFill>
-                  </a:tcPr>
-                </a:tc>
-                <a:tc>
-                  <a:txBody>
-                    <a:bodyPr/>
-                    <a:lstStyle/>
-                    <a:p>
-                      <a:r>
-                        <a:rPr sz="1250" b="0">
-                          <a:solidFill>
-                            <a:srgbClr val="232A2E"/>
-                          </a:solidFill>
-                          <a:latin typeface="Calibri"/>
-                        </a:rPr>
-                        <a:t>&lt;135 MB</a:t>
-                      </a:r>
-                    </a:p>
-                  </a:txBody>
-                  <a:tcPr>
-                    <a:solidFill>
-                      <a:srgbClr val="FFFFFF"/>
-                    </a:solidFill>
-                  </a:tcPr>
-                </a:tc>
-                <a:tc>
-                  <a:txBody>
-                    <a:bodyPr/>
-                    <a:lstStyle/>
-                    <a:p>
-                      <a:r>
-                        <a:rPr sz="1250" b="0">
-                          <a:solidFill>
-                            <a:srgbClr val="232A2E"/>
-                          </a:solidFill>
-                          <a:latin typeface="Calibri"/>
-                        </a:rPr>
-                        <a:t>lent la orizonturi mari (inserții DB, nu solverul)</a:t>
+                        <a:t>inserții DB, nu solverul</a:t>
                       </a:r>
                     </a:p>
                   </a:txBody>
@@ -4475,8 +6411,8 @@
         </p:nvSpPr>
         <p:spPr>
           <a:xfrm>
-            <a:off x="594360" y="4572000"/>
-            <a:ext cx="11018520" cy="1645920"/>
+            <a:off x="11247120" y="6437376"/>
+            <a:ext cx="822960" cy="365760"/>
           </a:xfrm>
           <a:prstGeom prst="rect">
             <a:avLst/>
@@ -4484,945 +6420,14 @@
           <a:noFill/>
         </p:spPr>
         <p:txBody>
-          <a:bodyPr wrap="square" anchor="t" lIns="45720" rIns="45720" tIns="18288" bIns="18288">
+          <a:bodyPr wrap="square" anchor="t" lIns="36576" rIns="36576" tIns="36576" bIns="36576">
             <a:spAutoFit/>
           </a:bodyPr>
           <a:lstStyle/>
           <a:p>
-            <a:pPr>
-              <a:spcBef>
-                <a:spcPts val="0"/>
-              </a:spcBef>
-              <a:spcAft>
-                <a:spcPts val="900"/>
-              </a:spcAft>
-            </a:pPr>
-            <a:r>
-              <a:rPr sz="1500" b="1" i="0">
-                <a:solidFill>
-                  <a:srgbClr val="1E88A8"/>
-                </a:solidFill>
-                <a:latin typeface="Calibri"/>
-              </a:rPr>
-              <a:t>▸ </a:t>
-            </a:r>
-            <a:r>
-              <a:rPr sz="1500" b="0" i="0">
-                <a:solidFill>
-                  <a:srgbClr val="232A2E"/>
-                </a:solidFill>
-                <a:latin typeface="Calibri"/>
-              </a:rPr>
-              <a:t>Costul R nu vine de la deSolve, ci de la inserările rând-cu-rând în baza de date (punct de optimizare cunoscut).</a:t>
-            </a:r>
-          </a:p>
-          <a:p>
-            <a:pPr>
-              <a:spcBef>
-                <a:spcPts val="0"/>
-              </a:spcBef>
-              <a:spcAft>
-                <a:spcPts val="900"/>
-              </a:spcAft>
-            </a:pPr>
-            <a:r>
-              <a:rPr sz="1500" b="1" i="0">
-                <a:solidFill>
-                  <a:srgbClr val="1E88A8"/>
-                </a:solidFill>
-                <a:latin typeface="Calibri"/>
-              </a:rPr>
-              <a:t>▸ </a:t>
-            </a:r>
-            <a:r>
-              <a:rPr sz="1500" b="0" i="0">
-                <a:solidFill>
-                  <a:srgbClr val="232A2E"/>
-                </a:solidFill>
-                <a:latin typeface="Calibri"/>
-              </a:rPr>
-              <a:t>Decizia practică: Python ca implicit interactiv; Julia pentru orizonturi lungi / calibrare (JIT amortizat).</a:t>
-            </a:r>
-          </a:p>
-        </p:txBody>
-      </p:sp>
-      <p:sp>
-        <p:nvSpPr>
-          <p:cNvPr id="8" name="TextBox 7"/>
-          <p:cNvSpPr txBox="1"/>
-          <p:nvPr/>
-        </p:nvSpPr>
-        <p:spPr>
-          <a:xfrm>
-            <a:off x="502920" y="6419088"/>
-            <a:ext cx="8229600" cy="365760"/>
-          </a:xfrm>
-          <a:prstGeom prst="rect">
-            <a:avLst/>
-          </a:prstGeom>
-          <a:noFill/>
-        </p:spPr>
-        <p:txBody>
-          <a:bodyPr wrap="square" anchor="t" lIns="45720" rIns="45720" tIns="18288" bIns="18288">
-            <a:spAutoFit/>
-          </a:bodyPr>
-          <a:lstStyle/>
-          <a:p>
-            <a:r>
-              <a:rPr sz="900" b="0" i="0">
-                <a:solidFill>
-                  <a:srgbClr val="6B767C"/>
-                </a:solidFill>
-                <a:latin typeface="Calibri"/>
-              </a:rPr>
-              <a:t>Sisteme e-medicine pentru date epidemiologice  ·  Geană Tudor-Bogdan</a:t>
-            </a:r>
-          </a:p>
-        </p:txBody>
-      </p:sp>
-      <p:sp>
-        <p:nvSpPr>
-          <p:cNvPr id="9" name="TextBox 8"/>
-          <p:cNvSpPr txBox="1"/>
-          <p:nvPr/>
-        </p:nvSpPr>
-        <p:spPr>
-          <a:xfrm>
-            <a:off x="11155680" y="6419088"/>
-            <a:ext cx="822960" cy="365760"/>
-          </a:xfrm>
-          <a:prstGeom prst="rect">
-            <a:avLst/>
-          </a:prstGeom>
-          <a:noFill/>
-        </p:spPr>
-        <p:txBody>
-          <a:bodyPr wrap="square" anchor="t" lIns="45720" rIns="45720" tIns="18288" bIns="18288">
-            <a:spAutoFit/>
-          </a:bodyPr>
-          <a:lstStyle/>
-          <a:p>
             <a:pPr algn="r"/>
             <a:r>
-              <a:rPr sz="1000" b="1" i="0">
-                <a:solidFill>
-                  <a:srgbClr val="6B767C"/>
-                </a:solidFill>
-                <a:latin typeface="Calibri"/>
-              </a:rPr>
-              <a:t>10</a:t>
-            </a:r>
-          </a:p>
-        </p:txBody>
-      </p:sp>
-    </p:spTree>
-  </p:cSld>
-  <p:clrMapOvr>
-    <a:masterClrMapping/>
-  </p:clrMapOvr>
-</p:sld>
-</file>
-
-<file path=ppt/slides/slide12.xml><?xml version="1.0" encoding="utf-8"?>
-<p:sld xmlns:a="http://schemas.openxmlformats.org/drawingml/2006/main" xmlns:p="http://schemas.openxmlformats.org/presentationml/2006/main" xmlns:r="http://schemas.openxmlformats.org/officeDocument/2006/relationships">
-  <p:cSld>
-    <p:spTree>
-      <p:nvGrpSpPr>
-        <p:cNvPr id="1" name=""/>
-        <p:cNvGrpSpPr/>
-        <p:nvPr/>
-      </p:nvGrpSpPr>
-      <p:grpSpPr/>
-      <p:sp>
-        <p:nvSpPr>
-          <p:cNvPr id="2" name="Rectangle 1"/>
-          <p:cNvSpPr/>
-          <p:nvPr/>
-        </p:nvSpPr>
-        <p:spPr>
-          <a:xfrm>
-            <a:off x="0" y="0"/>
-            <a:ext cx="12191695" cy="1051560"/>
-          </a:xfrm>
-          <a:prstGeom prst="rect">
-            <a:avLst/>
-          </a:prstGeom>
-          <a:solidFill>
-            <a:srgbClr val="124A63"/>
-          </a:solidFill>
-          <a:ln>
-            <a:noFill/>
-          </a:ln>
-          <a:effectLst/>
-        </p:spPr>
-        <p:style>
-          <a:lnRef idx="1">
-            <a:schemeClr val="accent1"/>
-          </a:lnRef>
-          <a:fillRef idx="3">
-            <a:schemeClr val="accent1"/>
-          </a:fillRef>
-          <a:effectRef idx="2">
-            <a:schemeClr val="accent1"/>
-          </a:effectRef>
-          <a:fontRef idx="minor">
-            <a:schemeClr val="lt1"/>
-          </a:fontRef>
-        </p:style>
-        <p:txBody>
-          <a:bodyPr rtlCol="0" anchor="ctr"/>
-          <a:lstStyle/>
-          <a:p>
-            <a:pPr algn="ctr"/>
-          </a:p>
-        </p:txBody>
-      </p:sp>
-      <p:sp>
-        <p:nvSpPr>
-          <p:cNvPr id="3" name="Rectangle 2"/>
-          <p:cNvSpPr/>
-          <p:nvPr/>
-        </p:nvSpPr>
-        <p:spPr>
-          <a:xfrm>
-            <a:off x="0" y="1051560"/>
-            <a:ext cx="12191695" cy="50292"/>
-          </a:xfrm>
-          <a:prstGeom prst="rect">
-            <a:avLst/>
-          </a:prstGeom>
-          <a:solidFill>
-            <a:srgbClr val="1E88A8"/>
-          </a:solidFill>
-          <a:ln>
-            <a:noFill/>
-          </a:ln>
-          <a:effectLst/>
-        </p:spPr>
-        <p:style>
-          <a:lnRef idx="1">
-            <a:schemeClr val="accent1"/>
-          </a:lnRef>
-          <a:fillRef idx="3">
-            <a:schemeClr val="accent1"/>
-          </a:fillRef>
-          <a:effectRef idx="2">
-            <a:schemeClr val="accent1"/>
-          </a:effectRef>
-          <a:fontRef idx="minor">
-            <a:schemeClr val="lt1"/>
-          </a:fontRef>
-        </p:style>
-        <p:txBody>
-          <a:bodyPr rtlCol="0" anchor="ctr"/>
-          <a:lstStyle/>
-          <a:p>
-            <a:pPr algn="ctr"/>
-          </a:p>
-        </p:txBody>
-      </p:sp>
-      <p:sp>
-        <p:nvSpPr>
-          <p:cNvPr id="4" name="TextBox 3"/>
-          <p:cNvSpPr txBox="1"/>
-          <p:nvPr/>
-        </p:nvSpPr>
-        <p:spPr>
-          <a:xfrm>
-            <a:off x="502920" y="109728"/>
-            <a:ext cx="11155680" cy="868680"/>
-          </a:xfrm>
-          <a:prstGeom prst="rect">
-            <a:avLst/>
-          </a:prstGeom>
-          <a:noFill/>
-        </p:spPr>
-        <p:txBody>
-          <a:bodyPr wrap="square" anchor="ctr" lIns="45720" rIns="45720" tIns="18288" bIns="18288">
-            <a:spAutoFit/>
-          </a:bodyPr>
-          <a:lstStyle/>
-          <a:p>
-            <a:r>
               <a:rPr sz="1200" b="1" i="0">
-                <a:solidFill>
-                  <a:srgbClr val="BFDDE6"/>
-                </a:solidFill>
-                <a:latin typeface="Calibri"/>
-              </a:rPr>
-              <a:t>Evaluare</a:t>
-            </a:r>
-          </a:p>
-          <a:p>
-            <a:r>
-              <a:rPr sz="2700" b="1" i="0">
-                <a:solidFill>
-                  <a:srgbClr val="FFFFFF"/>
-                </a:solidFill>
-                <a:latin typeface="Calibri"/>
-              </a:rPr>
-              <a:t>Scalare și acuratețe numerică</a:t>
-            </a:r>
-          </a:p>
-        </p:txBody>
-      </p:sp>
-      <p:pic>
-        <p:nvPicPr>
-          <p:cNvPr id="5" name="Picture 4" descr="scaling_wall_time.png"/>
-          <p:cNvPicPr>
-            <a:picLocks noChangeAspect="1"/>
-          </p:cNvPicPr>
-          <p:nvPr/>
-        </p:nvPicPr>
-        <p:blipFill>
-          <a:blip r:embed="rId2"/>
-          <a:stretch>
-            <a:fillRect/>
-          </a:stretch>
-        </p:blipFill>
-        <p:spPr>
-          <a:xfrm>
-            <a:off x="457200" y="2290218"/>
-            <a:ext cx="7040880" cy="2917643"/>
-          </a:xfrm>
-          <a:prstGeom prst="rect">
-            <a:avLst/>
-          </a:prstGeom>
-        </p:spPr>
-      </p:pic>
-      <p:sp>
-        <p:nvSpPr>
-          <p:cNvPr id="6" name="TextBox 5"/>
-          <p:cNvSpPr txBox="1"/>
-          <p:nvPr/>
-        </p:nvSpPr>
-        <p:spPr>
-          <a:xfrm>
-            <a:off x="7635240" y="1554480"/>
-            <a:ext cx="4206240" cy="4572000"/>
-          </a:xfrm>
-          <a:prstGeom prst="rect">
-            <a:avLst/>
-          </a:prstGeom>
-          <a:noFill/>
-        </p:spPr>
-        <p:txBody>
-          <a:bodyPr wrap="square" anchor="t" lIns="45720" rIns="45720" tIns="18288" bIns="18288">
-            <a:spAutoFit/>
-          </a:bodyPr>
-          <a:lstStyle/>
-          <a:p>
-            <a:pPr>
-              <a:spcBef>
-                <a:spcPts val="0"/>
-              </a:spcBef>
-              <a:spcAft>
-                <a:spcPts val="1100"/>
-              </a:spcAft>
-            </a:pPr>
-            <a:r>
-              <a:rPr sz="1500" b="1" i="0">
-                <a:solidFill>
-                  <a:srgbClr val="1E88A8"/>
-                </a:solidFill>
-                <a:latin typeface="Calibri"/>
-              </a:rPr>
-              <a:t>▸ </a:t>
-            </a:r>
-            <a:r>
-              <a:rPr sz="1500" b="0" i="0">
-                <a:solidFill>
-                  <a:srgbClr val="232A2E"/>
-                </a:solidFill>
-                <a:latin typeface="Calibri"/>
-              </a:rPr>
-              <a:t>Scalare wall-time vs. t_max (SIDARTHE): trei regimuri vizibile pe scară log-log.</a:t>
-            </a:r>
-          </a:p>
-          <a:p>
-            <a:pPr>
-              <a:spcBef>
-                <a:spcPts val="0"/>
-              </a:spcBef>
-              <a:spcAft>
-                <a:spcPts val="1100"/>
-              </a:spcAft>
-            </a:pPr>
-            <a:r>
-              <a:rPr sz="1500" b="1" i="0">
-                <a:solidFill>
-                  <a:srgbClr val="1E88A8"/>
-                </a:solidFill>
-                <a:latin typeface="Calibri"/>
-              </a:rPr>
-              <a:t>▸ </a:t>
-            </a:r>
-            <a:r>
-              <a:rPr sz="1500" b="0" i="0">
-                <a:solidFill>
-                  <a:srgbClr val="232A2E"/>
-                </a:solidFill>
-                <a:latin typeface="Calibri"/>
-              </a:rPr>
-              <a:t>Verificare de regresie cross-limbaj:</a:t>
-            </a:r>
-          </a:p>
-          <a:p>
-            <a:pPr lvl="1">
-              <a:spcBef>
-                <a:spcPts val="0"/>
-              </a:spcBef>
-              <a:spcAft>
-                <a:spcPts val="1100"/>
-              </a:spcAft>
-            </a:pPr>
-            <a:r>
-              <a:rPr sz="1300" b="1" i="0">
-                <a:solidFill>
-                  <a:srgbClr val="6B767C"/>
-                </a:solidFill>
-                <a:latin typeface="Calibri"/>
-              </a:rPr>
-              <a:t>–  </a:t>
-            </a:r>
-            <a:r>
-              <a:rPr sz="1300" b="0" i="0">
-                <a:solidFill>
-                  <a:srgbClr val="444C50"/>
-                </a:solidFill>
-                <a:latin typeface="Calibri"/>
-              </a:rPr>
-              <a:t>Julia ≈ Python la ~10⁻⁸·N (limita flotantă);</a:t>
-            </a:r>
-          </a:p>
-          <a:p>
-            <a:pPr lvl="1">
-              <a:spcBef>
-                <a:spcPts val="0"/>
-              </a:spcBef>
-              <a:spcAft>
-                <a:spcPts val="1100"/>
-              </a:spcAft>
-            </a:pPr>
-            <a:r>
-              <a:rPr sz="1300" b="1" i="0">
-                <a:solidFill>
-                  <a:srgbClr val="6B767C"/>
-                </a:solidFill>
-                <a:latin typeface="Calibri"/>
-              </a:rPr>
-              <a:t>–  </a:t>
-            </a:r>
-            <a:r>
-              <a:rPr sz="1300" b="0" i="0">
-                <a:solidFill>
-                  <a:srgbClr val="444C50"/>
-                </a:solidFill>
-                <a:latin typeface="Calibri"/>
-              </a:rPr>
-              <a:t>R deviază cu ~10⁻⁴·N (0,013% din populație) — RK4 cu pas fix.</a:t>
-            </a:r>
-          </a:p>
-          <a:p>
-            <a:pPr>
-              <a:spcBef>
-                <a:spcPts val="0"/>
-              </a:spcBef>
-              <a:spcAft>
-                <a:spcPts val="1100"/>
-              </a:spcAft>
-            </a:pPr>
-            <a:r>
-              <a:rPr sz="1500" b="1" i="0">
-                <a:solidFill>
-                  <a:srgbClr val="1E88A8"/>
-                </a:solidFill>
-                <a:latin typeface="Calibri"/>
-              </a:rPr>
-              <a:t>▸ </a:t>
-            </a:r>
-            <a:r>
-              <a:rPr sz="1500" b="0" i="0">
-                <a:solidFill>
-                  <a:srgbClr val="232A2E"/>
-                </a:solidFill>
-                <a:latin typeface="Calibri"/>
-              </a:rPr>
-              <a:t>Implementări compatibile funcțional, cu o limită cantitativă explicită a interschimbabilității.</a:t>
-            </a:r>
-          </a:p>
-        </p:txBody>
-      </p:sp>
-      <p:sp>
-        <p:nvSpPr>
-          <p:cNvPr id="7" name="TextBox 6"/>
-          <p:cNvSpPr txBox="1"/>
-          <p:nvPr/>
-        </p:nvSpPr>
-        <p:spPr>
-          <a:xfrm>
-            <a:off x="502920" y="6419088"/>
-            <a:ext cx="8229600" cy="365760"/>
-          </a:xfrm>
-          <a:prstGeom prst="rect">
-            <a:avLst/>
-          </a:prstGeom>
-          <a:noFill/>
-        </p:spPr>
-        <p:txBody>
-          <a:bodyPr wrap="square" anchor="t" lIns="45720" rIns="45720" tIns="18288" bIns="18288">
-            <a:spAutoFit/>
-          </a:bodyPr>
-          <a:lstStyle/>
-          <a:p>
-            <a:r>
-              <a:rPr sz="900" b="0" i="0">
-                <a:solidFill>
-                  <a:srgbClr val="6B767C"/>
-                </a:solidFill>
-                <a:latin typeface="Calibri"/>
-              </a:rPr>
-              <a:t>Sisteme e-medicine pentru date epidemiologice  ·  Geană Tudor-Bogdan</a:t>
-            </a:r>
-          </a:p>
-        </p:txBody>
-      </p:sp>
-      <p:sp>
-        <p:nvSpPr>
-          <p:cNvPr id="8" name="TextBox 7"/>
-          <p:cNvSpPr txBox="1"/>
-          <p:nvPr/>
-        </p:nvSpPr>
-        <p:spPr>
-          <a:xfrm>
-            <a:off x="11155680" y="6419088"/>
-            <a:ext cx="822960" cy="365760"/>
-          </a:xfrm>
-          <a:prstGeom prst="rect">
-            <a:avLst/>
-          </a:prstGeom>
-          <a:noFill/>
-        </p:spPr>
-        <p:txBody>
-          <a:bodyPr wrap="square" anchor="t" lIns="45720" rIns="45720" tIns="18288" bIns="18288">
-            <a:spAutoFit/>
-          </a:bodyPr>
-          <a:lstStyle/>
-          <a:p>
-            <a:pPr algn="r"/>
-            <a:r>
-              <a:rPr sz="1000" b="1" i="0">
-                <a:solidFill>
-                  <a:srgbClr val="6B767C"/>
-                </a:solidFill>
-                <a:latin typeface="Calibri"/>
-              </a:rPr>
-              <a:t>11</a:t>
-            </a:r>
-          </a:p>
-        </p:txBody>
-      </p:sp>
-    </p:spTree>
-  </p:cSld>
-  <p:clrMapOvr>
-    <a:masterClrMapping/>
-  </p:clrMapOvr>
-</p:sld>
-</file>
-
-<file path=ppt/slides/slide13.xml><?xml version="1.0" encoding="utf-8"?>
-<p:sld xmlns:a="http://schemas.openxmlformats.org/drawingml/2006/main" xmlns:p="http://schemas.openxmlformats.org/presentationml/2006/main" xmlns:r="http://schemas.openxmlformats.org/officeDocument/2006/relationships">
-  <p:cSld>
-    <p:spTree>
-      <p:nvGrpSpPr>
-        <p:cNvPr id="1" name=""/>
-        <p:cNvGrpSpPr/>
-        <p:nvPr/>
-      </p:nvGrpSpPr>
-      <p:grpSpPr/>
-      <p:sp>
-        <p:nvSpPr>
-          <p:cNvPr id="2" name="Rectangle 1"/>
-          <p:cNvSpPr/>
-          <p:nvPr/>
-        </p:nvSpPr>
-        <p:spPr>
-          <a:xfrm>
-            <a:off x="0" y="0"/>
-            <a:ext cx="12191695" cy="1051560"/>
-          </a:xfrm>
-          <a:prstGeom prst="rect">
-            <a:avLst/>
-          </a:prstGeom>
-          <a:solidFill>
-            <a:srgbClr val="124A63"/>
-          </a:solidFill>
-          <a:ln>
-            <a:noFill/>
-          </a:ln>
-          <a:effectLst/>
-        </p:spPr>
-        <p:style>
-          <a:lnRef idx="1">
-            <a:schemeClr val="accent1"/>
-          </a:lnRef>
-          <a:fillRef idx="3">
-            <a:schemeClr val="accent1"/>
-          </a:fillRef>
-          <a:effectRef idx="2">
-            <a:schemeClr val="accent1"/>
-          </a:effectRef>
-          <a:fontRef idx="minor">
-            <a:schemeClr val="lt1"/>
-          </a:fontRef>
-        </p:style>
-        <p:txBody>
-          <a:bodyPr rtlCol="0" anchor="ctr"/>
-          <a:lstStyle/>
-          <a:p>
-            <a:pPr algn="ctr"/>
-          </a:p>
-        </p:txBody>
-      </p:sp>
-      <p:sp>
-        <p:nvSpPr>
-          <p:cNvPr id="3" name="Rectangle 2"/>
-          <p:cNvSpPr/>
-          <p:nvPr/>
-        </p:nvSpPr>
-        <p:spPr>
-          <a:xfrm>
-            <a:off x="0" y="1051560"/>
-            <a:ext cx="12191695" cy="50292"/>
-          </a:xfrm>
-          <a:prstGeom prst="rect">
-            <a:avLst/>
-          </a:prstGeom>
-          <a:solidFill>
-            <a:srgbClr val="1E88A8"/>
-          </a:solidFill>
-          <a:ln>
-            <a:noFill/>
-          </a:ln>
-          <a:effectLst/>
-        </p:spPr>
-        <p:style>
-          <a:lnRef idx="1">
-            <a:schemeClr val="accent1"/>
-          </a:lnRef>
-          <a:fillRef idx="3">
-            <a:schemeClr val="accent1"/>
-          </a:fillRef>
-          <a:effectRef idx="2">
-            <a:schemeClr val="accent1"/>
-          </a:effectRef>
-          <a:fontRef idx="minor">
-            <a:schemeClr val="lt1"/>
-          </a:fontRef>
-        </p:style>
-        <p:txBody>
-          <a:bodyPr rtlCol="0" anchor="ctr"/>
-          <a:lstStyle/>
-          <a:p>
-            <a:pPr algn="ctr"/>
-          </a:p>
-        </p:txBody>
-      </p:sp>
-      <p:sp>
-        <p:nvSpPr>
-          <p:cNvPr id="4" name="TextBox 3"/>
-          <p:cNvSpPr txBox="1"/>
-          <p:nvPr/>
-        </p:nvSpPr>
-        <p:spPr>
-          <a:xfrm>
-            <a:off x="502920" y="109728"/>
-            <a:ext cx="11155680" cy="868680"/>
-          </a:xfrm>
-          <a:prstGeom prst="rect">
-            <a:avLst/>
-          </a:prstGeom>
-          <a:noFill/>
-        </p:spPr>
-        <p:txBody>
-          <a:bodyPr wrap="square" anchor="ctr" lIns="45720" rIns="45720" tIns="18288" bIns="18288">
-            <a:spAutoFit/>
-          </a:bodyPr>
-          <a:lstStyle/>
-          <a:p>
-            <a:r>
-              <a:rPr sz="1200" b="1" i="0">
-                <a:solidFill>
-                  <a:srgbClr val="BFDDE6"/>
-                </a:solidFill>
-                <a:latin typeface="Calibri"/>
-              </a:rPr>
-              <a:t>Sistem colaborativ</a:t>
-            </a:r>
-          </a:p>
-          <a:p>
-            <a:r>
-              <a:rPr sz="2700" b="1" i="0">
-                <a:solidFill>
-                  <a:srgbClr val="FFFFFF"/>
-                </a:solidFill>
-                <a:latin typeface="Calibri"/>
-              </a:rPr>
-              <a:t>Aplicația web E-Medicine</a:t>
-            </a:r>
-          </a:p>
-        </p:txBody>
-      </p:sp>
-      <p:sp>
-        <p:nvSpPr>
-          <p:cNvPr id="5" name="TextBox 4"/>
-          <p:cNvSpPr txBox="1"/>
-          <p:nvPr/>
-        </p:nvSpPr>
-        <p:spPr>
-          <a:xfrm>
-            <a:off x="594360" y="1371600"/>
-            <a:ext cx="10972800" cy="4754880"/>
-          </a:xfrm>
-          <a:prstGeom prst="rect">
-            <a:avLst/>
-          </a:prstGeom>
-          <a:noFill/>
-        </p:spPr>
-        <p:txBody>
-          <a:bodyPr wrap="square" anchor="t" lIns="45720" rIns="45720" tIns="18288" bIns="18288">
-            <a:spAutoFit/>
-          </a:bodyPr>
-          <a:lstStyle/>
-          <a:p>
-            <a:pPr>
-              <a:spcBef>
-                <a:spcPts val="0"/>
-              </a:spcBef>
-              <a:spcAft>
-                <a:spcPts val="1000"/>
-              </a:spcAft>
-            </a:pPr>
-            <a:r>
-              <a:rPr sz="1800" b="1" i="0">
-                <a:solidFill>
-                  <a:srgbClr val="1E88A8"/>
-                </a:solidFill>
-                <a:latin typeface="Calibri"/>
-              </a:rPr>
-              <a:t>▸ </a:t>
-            </a:r>
-            <a:r>
-              <a:rPr sz="1800" b="0" i="0">
-                <a:solidFill>
-                  <a:srgbClr val="232A2E"/>
-                </a:solidFill>
-                <a:latin typeface="Calibri"/>
-              </a:rPr>
-              <a:t>Două interfețe Vue 3 separate: aplicația cercetătorilor și consola super-admin.</a:t>
-            </a:r>
-          </a:p>
-          <a:p>
-            <a:pPr>
-              <a:spcBef>
-                <a:spcPts val="0"/>
-              </a:spcBef>
-              <a:spcAft>
-                <a:spcPts val="1000"/>
-              </a:spcAft>
-            </a:pPr>
-            <a:r>
-              <a:rPr sz="1800" b="1" i="0">
-                <a:solidFill>
-                  <a:srgbClr val="1E88A8"/>
-                </a:solidFill>
-                <a:latin typeface="Calibri"/>
-              </a:rPr>
-              <a:t>▸ </a:t>
-            </a:r>
-            <a:r>
-              <a:rPr sz="1800" b="0" i="0">
-                <a:solidFill>
-                  <a:srgbClr val="232A2E"/>
-                </a:solidFill>
-                <a:latin typeface="Calibri"/>
-              </a:rPr>
-              <a:t>Control acces bazat pe roluri (RBAC) la nivel de studiu: admin / researcher / contributor / viewer + super-admin.</a:t>
-            </a:r>
-          </a:p>
-          <a:p>
-            <a:pPr>
-              <a:spcBef>
-                <a:spcPts val="0"/>
-              </a:spcBef>
-              <a:spcAft>
-                <a:spcPts val="1000"/>
-              </a:spcAft>
-            </a:pPr>
-            <a:r>
-              <a:rPr sz="1800" b="1" i="0">
-                <a:solidFill>
-                  <a:srgbClr val="1E88A8"/>
-                </a:solidFill>
-                <a:latin typeface="Calibri"/>
-              </a:rPr>
-              <a:t>▸ </a:t>
-            </a:r>
-            <a:r>
-              <a:rPr sz="1800" b="0" i="0">
-                <a:solidFill>
-                  <a:srgbClr val="232A2E"/>
-                </a:solidFill>
-                <a:latin typeface="Calibri"/>
-              </a:rPr>
-              <a:t>Flux end-to-end: creare studiu → roluri → încărcare dataset → alegere model → execuție asincronă → vizualizare traiectorii.</a:t>
-            </a:r>
-          </a:p>
-          <a:p>
-            <a:pPr>
-              <a:spcBef>
-                <a:spcPts val="0"/>
-              </a:spcBef>
-              <a:spcAft>
-                <a:spcPts val="1000"/>
-              </a:spcAft>
-            </a:pPr>
-            <a:r>
-              <a:rPr sz="1800" b="1" i="0">
-                <a:solidFill>
-                  <a:srgbClr val="1E88A8"/>
-                </a:solidFill>
-                <a:latin typeface="Calibri"/>
-              </a:rPr>
-              <a:t>▸ </a:t>
-            </a:r>
-            <a:r>
-              <a:rPr sz="1800" b="0" i="0">
-                <a:solidFill>
-                  <a:srgbClr val="232A2E"/>
-                </a:solidFill>
-                <a:latin typeface="Calibri"/>
-              </a:rPr>
-              <a:t>Securitate ca cerință funcțională:</a:t>
-            </a:r>
-          </a:p>
-          <a:p>
-            <a:pPr lvl="1">
-              <a:spcBef>
-                <a:spcPts val="0"/>
-              </a:spcBef>
-              <a:spcAft>
-                <a:spcPts val="1000"/>
-              </a:spcAft>
-            </a:pPr>
-            <a:r>
-              <a:rPr sz="1600" b="1" i="0">
-                <a:solidFill>
-                  <a:srgbClr val="6B767C"/>
-                </a:solidFill>
-                <a:latin typeface="Calibri"/>
-              </a:rPr>
-              <a:t>–  </a:t>
-            </a:r>
-            <a:r>
-              <a:rPr sz="1600" b="0" i="0">
-                <a:solidFill>
-                  <a:srgbClr val="444C50"/>
-                </a:solidFill>
-                <a:latin typeface="Calibri"/>
-              </a:rPr>
-              <a:t>JWT (HS256, anti alg-confusion), parole bcrypt (cost 12);</a:t>
-            </a:r>
-          </a:p>
-          <a:p>
-            <a:pPr lvl="1">
-              <a:spcBef>
-                <a:spcPts val="0"/>
-              </a:spcBef>
-              <a:spcAft>
-                <a:spcPts val="1000"/>
-              </a:spcAft>
-            </a:pPr>
-            <a:r>
-              <a:rPr sz="1600" b="1" i="0">
-                <a:solidFill>
-                  <a:srgbClr val="6B767C"/>
-                </a:solidFill>
-                <a:latin typeface="Calibri"/>
-              </a:rPr>
-              <a:t>–  </a:t>
-            </a:r>
-            <a:r>
-              <a:rPr sz="1600" b="0" i="0">
-                <a:solidFill>
-                  <a:srgbClr val="444C50"/>
-                </a:solidFill>
-                <a:latin typeface="Calibri"/>
-              </a:rPr>
-              <a:t>izolare anti-IDOR pe studiu, SQL 100% parametrizat, upload plafonat.</a:t>
-            </a:r>
-          </a:p>
-        </p:txBody>
-      </p:sp>
-      <p:sp>
-        <p:nvSpPr>
-          <p:cNvPr id="6" name="TextBox 5"/>
-          <p:cNvSpPr txBox="1"/>
-          <p:nvPr/>
-        </p:nvSpPr>
-        <p:spPr>
-          <a:xfrm>
-            <a:off x="502920" y="6419088"/>
-            <a:ext cx="8229600" cy="365760"/>
-          </a:xfrm>
-          <a:prstGeom prst="rect">
-            <a:avLst/>
-          </a:prstGeom>
-          <a:noFill/>
-        </p:spPr>
-        <p:txBody>
-          <a:bodyPr wrap="square" anchor="t" lIns="45720" rIns="45720" tIns="18288" bIns="18288">
-            <a:spAutoFit/>
-          </a:bodyPr>
-          <a:lstStyle/>
-          <a:p>
-            <a:r>
-              <a:rPr sz="900" b="0" i="0">
-                <a:solidFill>
-                  <a:srgbClr val="6B767C"/>
-                </a:solidFill>
-                <a:latin typeface="Calibri"/>
-              </a:rPr>
-              <a:t>Sisteme e-medicine pentru date epidemiologice  ·  Geană Tudor-Bogdan</a:t>
-            </a:r>
-          </a:p>
-        </p:txBody>
-      </p:sp>
-      <p:sp>
-        <p:nvSpPr>
-          <p:cNvPr id="7" name="TextBox 6"/>
-          <p:cNvSpPr txBox="1"/>
-          <p:nvPr/>
-        </p:nvSpPr>
-        <p:spPr>
-          <a:xfrm>
-            <a:off x="11155680" y="6419088"/>
-            <a:ext cx="822960" cy="365760"/>
-          </a:xfrm>
-          <a:prstGeom prst="rect">
-            <a:avLst/>
-          </a:prstGeom>
-          <a:noFill/>
-        </p:spPr>
-        <p:txBody>
-          <a:bodyPr wrap="square" anchor="t" lIns="45720" rIns="45720" tIns="18288" bIns="18288">
-            <a:spAutoFit/>
-          </a:bodyPr>
-          <a:lstStyle/>
-          <a:p>
-            <a:pPr algn="r"/>
-            <a:r>
-              <a:rPr sz="1000" b="1" i="0">
                 <a:solidFill>
                   <a:srgbClr val="6B767C"/>
                 </a:solidFill>
@@ -5460,7 +6465,7 @@
         <p:spPr>
           <a:xfrm>
             <a:off x="0" y="0"/>
-            <a:ext cx="12191695" cy="1051560"/>
+            <a:ext cx="12191695" cy="960120"/>
           </a:xfrm>
           <a:prstGeom prst="rect">
             <a:avLst/>
@@ -5503,8 +6508,8 @@
         </p:nvSpPr>
         <p:spPr>
           <a:xfrm>
-            <a:off x="0" y="1051560"/>
-            <a:ext cx="12191695" cy="50292"/>
+            <a:off x="0" y="960120"/>
+            <a:ext cx="12191695" cy="45720"/>
           </a:xfrm>
           <a:prstGeom prst="rect">
             <a:avLst/>
@@ -5547,8 +6552,8 @@
         </p:nvSpPr>
         <p:spPr>
           <a:xfrm>
-            <a:off x="502920" y="109728"/>
-            <a:ext cx="11155680" cy="868680"/>
+            <a:off x="502920" y="73152"/>
+            <a:ext cx="11155680" cy="822960"/>
           </a:xfrm>
           <a:prstGeom prst="rect">
             <a:avLst/>
@@ -5556,44 +6561,68 @@
           <a:noFill/>
         </p:spPr>
         <p:txBody>
-          <a:bodyPr wrap="square" anchor="ctr" lIns="45720" rIns="45720" tIns="18288" bIns="18288">
+          <a:bodyPr wrap="square" anchor="ctr" lIns="36576" rIns="36576" tIns="36576" bIns="36576">
             <a:spAutoFit/>
           </a:bodyPr>
           <a:lstStyle/>
           <a:p>
             <a:r>
-              <a:rPr sz="1200" b="1" i="0">
+              <a:rPr sz="1300" b="1" i="0">
                 <a:solidFill>
                   <a:srgbClr val="BFDDE6"/>
                 </a:solidFill>
                 <a:latin typeface="Calibri"/>
               </a:rPr>
-              <a:t>Extensibilitate</a:t>
-            </a:r>
-          </a:p>
-          <a:p>
-            <a:r>
-              <a:rPr sz="2700" b="1" i="0">
+              <a:t>Evaluare</a:t>
+            </a:r>
+          </a:p>
+          <a:p>
+            <a:r>
+              <a:rPr sz="3000" b="1" i="0">
                 <a:solidFill>
                   <a:srgbClr val="FFFFFF"/>
                 </a:solidFill>
                 <a:latin typeface="Calibri"/>
               </a:rPr>
-              <a:t>Contribuție: sistem de plug-in-uri</a:t>
-            </a:r>
-          </a:p>
-        </p:txBody>
-      </p:sp>
-      <p:sp>
-        <p:nvSpPr>
-          <p:cNvPr id="5" name="TextBox 4"/>
+              <a:t>Scalare wall-time cu orizontul</a:t>
+            </a:r>
+          </a:p>
+        </p:txBody>
+      </p:sp>
+      <p:pic>
+        <p:nvPicPr>
+          <p:cNvPr id="5" name="Picture 4" descr="scaling_wall_time.png"/>
+          <p:cNvPicPr>
+            <a:picLocks noChangeAspect="1"/>
+          </p:cNvPicPr>
+          <p:nvPr/>
+        </p:nvPicPr>
+        <p:blipFill>
+          <a:blip r:embed="rId2"/>
+          <a:stretch>
+            <a:fillRect/>
+          </a:stretch>
+        </p:blipFill>
+        <p:spPr>
+          <a:xfrm>
+            <a:off x="320040" y="1332709"/>
+            <a:ext cx="11548872" cy="4786941"/>
+          </a:xfrm>
+          <a:prstGeom prst="rect">
+            <a:avLst/>
+          </a:prstGeom>
+        </p:spPr>
+      </p:pic>
+      <p:sp>
+        <p:nvSpPr>
+          <p:cNvPr id="6" name="TextBox 5"/>
           <p:cNvSpPr txBox="1"/>
           <p:nvPr/>
         </p:nvSpPr>
         <p:spPr>
           <a:xfrm>
-            <a:off x="594360" y="1371600"/>
-            <a:ext cx="10972800" cy="4754880"/>
+            <a:off x="457200" y="6327648"/>
+            <a:ext cx="10515600" cy="411480"/>
           </a:xfrm>
           <a:prstGeom prst="rect">
             <a:avLst/>
@@ -5601,190 +6630,34 @@
           <a:noFill/>
         </p:spPr>
         <p:txBody>
-          <a:bodyPr wrap="square" anchor="t" lIns="45720" rIns="45720" tIns="18288" bIns="18288">
+          <a:bodyPr wrap="square" anchor="t" lIns="36576" rIns="36576" tIns="36576" bIns="36576">
             <a:spAutoFit/>
           </a:bodyPr>
           <a:lstStyle/>
           <a:p>
-            <a:pPr>
-              <a:spcBef>
-                <a:spcPts val="0"/>
-              </a:spcBef>
-              <a:spcAft>
-                <a:spcPts val="1000"/>
-              </a:spcAft>
-            </a:pPr>
-            <a:r>
-              <a:rPr sz="1800" b="1" i="0">
-                <a:solidFill>
-                  <a:srgbClr val="1E88A8"/>
-                </a:solidFill>
-                <a:latin typeface="Calibri"/>
-              </a:rPr>
-              <a:t>▸ </a:t>
-            </a:r>
-            <a:r>
-              <a:rPr sz="1800" b="0" i="0">
-                <a:solidFill>
-                  <a:srgbClr val="232A2E"/>
-                </a:solidFill>
-                <a:latin typeface="Calibri"/>
-              </a:rPr>
-              <a:t>Un super-admin poate înregistra într-un studiu:</a:t>
-            </a:r>
-          </a:p>
-          <a:p>
-            <a:pPr lvl="1">
-              <a:spcBef>
-                <a:spcPts val="0"/>
-              </a:spcBef>
-              <a:spcAft>
-                <a:spcPts val="1000"/>
-              </a:spcAft>
-            </a:pPr>
-            <a:r>
-              <a:rPr sz="1600" b="1" i="0">
+            <a:pPr algn="ctr"/>
+            <a:r>
+              <a:rPr sz="1400" b="0" i="1">
                 <a:solidFill>
                   <a:srgbClr val="6B767C"/>
                 </a:solidFill>
                 <a:latin typeface="Calibri"/>
               </a:rPr>
-              <a:t>–  </a:t>
-            </a:r>
-            <a:r>
-              <a:rPr sz="1600" b="0" i="0">
-                <a:solidFill>
-                  <a:srgbClr val="444C50"/>
-                </a:solidFill>
-                <a:latin typeface="Calibri"/>
-              </a:rPr>
-              <a:t>un script Python (rulat de un container generic partajat), sau</a:t>
-            </a:r>
-          </a:p>
-          <a:p>
-            <a:pPr lvl="1">
-              <a:spcBef>
-                <a:spcPts val="0"/>
-              </a:spcBef>
-              <a:spcAft>
-                <a:spcPts val="1000"/>
-              </a:spcAft>
-            </a:pPr>
-            <a:r>
-              <a:rPr sz="1600" b="1" i="0">
-                <a:solidFill>
-                  <a:srgbClr val="6B767C"/>
-                </a:solidFill>
-                <a:latin typeface="Calibri"/>
-              </a:rPr>
-              <a:t>–  </a:t>
-            </a:r>
-            <a:r>
-              <a:rPr sz="1600" b="0" i="0">
-                <a:solidFill>
-                  <a:srgbClr val="444C50"/>
-                </a:solidFill>
-                <a:latin typeface="Calibri"/>
-              </a:rPr>
-              <a:t>o referință către o imagine container construită extern, în orice limbaj.</a:t>
-            </a:r>
-          </a:p>
-          <a:p>
-            <a:pPr>
-              <a:spcBef>
-                <a:spcPts val="0"/>
-              </a:spcBef>
-              <a:spcAft>
-                <a:spcPts val="1000"/>
-              </a:spcAft>
-            </a:pPr>
-            <a:r>
-              <a:rPr sz="1800" b="1" i="0">
-                <a:solidFill>
-                  <a:srgbClr val="1E88A8"/>
-                </a:solidFill>
-                <a:latin typeface="Calibri"/>
-              </a:rPr>
-              <a:t>▸ </a:t>
-            </a:r>
-            <a:r>
-              <a:rPr sz="1800" b="0" i="0">
-                <a:solidFill>
-                  <a:srgbClr val="232A2E"/>
-                </a:solidFill>
-                <a:latin typeface="Calibri"/>
-              </a:rPr>
-              <a:t>API-ul provisionează automat un Deployment Kubernetes dedicat pentru runner-ul plug-in.</a:t>
-            </a:r>
-          </a:p>
-          <a:p>
-            <a:pPr>
-              <a:spcBef>
-                <a:spcPts val="0"/>
-              </a:spcBef>
-              <a:spcAft>
-                <a:spcPts val="1000"/>
-              </a:spcAft>
-            </a:pPr>
-            <a:r>
-              <a:rPr sz="1800" b="1" i="0">
-                <a:solidFill>
-                  <a:srgbClr val="1E88A8"/>
-                </a:solidFill>
-                <a:latin typeface="Calibri"/>
-              </a:rPr>
-              <a:t>▸ </a:t>
-            </a:r>
-            <a:r>
-              <a:rPr sz="1800" b="0" i="0">
-                <a:solidFill>
-                  <a:srgbClr val="232A2E"/>
-                </a:solidFill>
-                <a:latin typeface="Calibri"/>
-              </a:rPr>
-              <a:t>Editor de cod în interfață (Monaco, ca VS Code): cercetătorul scrie și rulează algoritmi ad-hoc end-to-end, fără a construi imagini.</a:t>
-            </a:r>
-          </a:p>
-          <a:p>
-            <a:pPr>
-              <a:spcBef>
-                <a:spcPts val="0"/>
-              </a:spcBef>
-              <a:spcAft>
-                <a:spcPts val="1000"/>
-              </a:spcAft>
-            </a:pPr>
-            <a:r>
-              <a:rPr sz="1800" b="1" i="0">
-                <a:solidFill>
-                  <a:srgbClr val="1E88A8"/>
-                </a:solidFill>
-                <a:latin typeface="Calibri"/>
-              </a:rPr>
-              <a:t>▸ </a:t>
-            </a:r>
-            <a:r>
-              <a:rPr sz="1800" b="0" i="0">
-                <a:solidFill>
-                  <a:srgbClr val="232A2E"/>
-                </a:solidFill>
-                <a:latin typeface="Calibri"/>
-              </a:rPr>
-              <a:t>Efect: sistemul se deschide de la 5 modele + LSTM la ORICE algoritm care respectă un contract minimal de I/O — fără modificări la API sau la schema bazei de date.</a:t>
-            </a:r>
-          </a:p>
-        </p:txBody>
-      </p:sp>
-      <p:sp>
-        <p:nvSpPr>
-          <p:cNvPr id="6" name="TextBox 5"/>
+              <a:t>Trei regimuri pe scară log-log · R dominat de inserțiile în DB</a:t>
+            </a:r>
+          </a:p>
+        </p:txBody>
+      </p:sp>
+      <p:sp>
+        <p:nvSpPr>
+          <p:cNvPr id="7" name="TextBox 6"/>
           <p:cNvSpPr txBox="1"/>
           <p:nvPr/>
         </p:nvSpPr>
         <p:spPr>
           <a:xfrm>
-            <a:off x="502920" y="6419088"/>
-            <a:ext cx="8229600" cy="365760"/>
+            <a:off x="11247120" y="6437376"/>
+            <a:ext cx="822960" cy="365760"/>
           </a:xfrm>
           <a:prstGeom prst="rect">
             <a:avLst/>
@@ -5792,48 +6665,14 @@
           <a:noFill/>
         </p:spPr>
         <p:txBody>
-          <a:bodyPr wrap="square" anchor="t" lIns="45720" rIns="45720" tIns="18288" bIns="18288">
+          <a:bodyPr wrap="square" anchor="t" lIns="36576" rIns="36576" tIns="36576" bIns="36576">
             <a:spAutoFit/>
           </a:bodyPr>
           <a:lstStyle/>
           <a:p>
-            <a:r>
-              <a:rPr sz="900" b="0" i="0">
-                <a:solidFill>
-                  <a:srgbClr val="6B767C"/>
-                </a:solidFill>
-                <a:latin typeface="Calibri"/>
-              </a:rPr>
-              <a:t>Sisteme e-medicine pentru date epidemiologice  ·  Geană Tudor-Bogdan</a:t>
-            </a:r>
-          </a:p>
-        </p:txBody>
-      </p:sp>
-      <p:sp>
-        <p:nvSpPr>
-          <p:cNvPr id="7" name="TextBox 6"/>
-          <p:cNvSpPr txBox="1"/>
-          <p:nvPr/>
-        </p:nvSpPr>
-        <p:spPr>
-          <a:xfrm>
-            <a:off x="11155680" y="6419088"/>
-            <a:ext cx="822960" cy="365760"/>
-          </a:xfrm>
-          <a:prstGeom prst="rect">
-            <a:avLst/>
-          </a:prstGeom>
-          <a:noFill/>
-        </p:spPr>
-        <p:txBody>
-          <a:bodyPr wrap="square" anchor="t" lIns="45720" rIns="45720" tIns="18288" bIns="18288">
-            <a:spAutoFit/>
-          </a:bodyPr>
-          <a:lstStyle/>
-          <a:p>
             <a:pPr algn="r"/>
             <a:r>
-              <a:rPr sz="1000" b="1" i="0">
+              <a:rPr sz="1200" b="1" i="0">
                 <a:solidFill>
                   <a:srgbClr val="6B767C"/>
                 </a:solidFill>
@@ -5871,7 +6710,7 @@
         <p:spPr>
           <a:xfrm>
             <a:off x="0" y="0"/>
-            <a:ext cx="12191695" cy="1051560"/>
+            <a:ext cx="12191695" cy="960120"/>
           </a:xfrm>
           <a:prstGeom prst="rect">
             <a:avLst/>
@@ -5914,8 +6753,8 @@
         </p:nvSpPr>
         <p:spPr>
           <a:xfrm>
-            <a:off x="0" y="1051560"/>
-            <a:ext cx="12191695" cy="50292"/>
+            <a:off x="0" y="960120"/>
+            <a:ext cx="12191695" cy="45720"/>
           </a:xfrm>
           <a:prstGeom prst="rect">
             <a:avLst/>
@@ -5958,8 +6797,8 @@
         </p:nvSpPr>
         <p:spPr>
           <a:xfrm>
-            <a:off x="502920" y="109728"/>
-            <a:ext cx="11155680" cy="868680"/>
+            <a:off x="502920" y="73152"/>
+            <a:ext cx="11155680" cy="822960"/>
           </a:xfrm>
           <a:prstGeom prst="rect">
             <a:avLst/>
@@ -5967,68 +6806,44 @@
           <a:noFill/>
         </p:spPr>
         <p:txBody>
-          <a:bodyPr wrap="square" anchor="ctr" lIns="45720" rIns="45720" tIns="18288" bIns="18288">
+          <a:bodyPr wrap="square" anchor="ctr" lIns="36576" rIns="36576" tIns="36576" bIns="36576">
             <a:spAutoFit/>
           </a:bodyPr>
           <a:lstStyle/>
           <a:p>
             <a:r>
-              <a:rPr sz="1200" b="1" i="0">
+              <a:rPr sz="1300" b="1" i="0">
                 <a:solidFill>
                   <a:srgbClr val="BFDDE6"/>
                 </a:solidFill>
                 <a:latin typeface="Calibri"/>
               </a:rPr>
-              <a:t>Infrastructură reală</a:t>
-            </a:r>
-          </a:p>
-          <a:p>
-            <a:r>
-              <a:rPr sz="2700" b="1" i="0">
+              <a:t>Sistem colaborativ</a:t>
+            </a:r>
+          </a:p>
+          <a:p>
+            <a:r>
+              <a:rPr sz="3000" b="1" i="0">
                 <a:solidFill>
                   <a:srgbClr val="FFFFFF"/>
                 </a:solidFill>
                 <a:latin typeface="Calibri"/>
               </a:rPr>
-              <a:t>Deployment pe Kubernetes</a:t>
-            </a:r>
-          </a:p>
-        </p:txBody>
-      </p:sp>
-      <p:pic>
-        <p:nvPicPr>
-          <p:cNvPr id="5" name="Picture 4" descr="k8s_topology.png"/>
-          <p:cNvPicPr>
-            <a:picLocks noChangeAspect="1"/>
-          </p:cNvPicPr>
-          <p:nvPr/>
-        </p:nvPicPr>
-        <p:blipFill>
-          <a:blip r:embed="rId2"/>
-          <a:stretch>
-            <a:fillRect/>
-          </a:stretch>
-        </p:blipFill>
-        <p:spPr>
-          <a:xfrm>
-            <a:off x="457200" y="1350644"/>
-            <a:ext cx="7498079" cy="4796792"/>
-          </a:xfrm>
-          <a:prstGeom prst="rect">
-            <a:avLst/>
-          </a:prstGeom>
-        </p:spPr>
-      </p:pic>
-      <p:sp>
-        <p:nvSpPr>
-          <p:cNvPr id="6" name="TextBox 5"/>
+              <a:t>Aplicația web</a:t>
+            </a:r>
+          </a:p>
+        </p:txBody>
+      </p:sp>
+      <p:sp>
+        <p:nvSpPr>
+          <p:cNvPr id="5" name="TextBox 4"/>
           <p:cNvSpPr txBox="1"/>
           <p:nvPr/>
         </p:nvSpPr>
         <p:spPr>
           <a:xfrm>
-            <a:off x="8092440" y="1554480"/>
-            <a:ext cx="3794760" cy="4572000"/>
+            <a:off x="731520" y="1371600"/>
+            <a:ext cx="10789920" cy="4754880"/>
           </a:xfrm>
           <a:prstGeom prst="rect">
             <a:avLst/>
@@ -6036,7 +6851,7 @@
           <a:noFill/>
         </p:spPr>
         <p:txBody>
-          <a:bodyPr wrap="square" anchor="t" lIns="45720" rIns="45720" tIns="18288" bIns="18288">
+          <a:bodyPr wrap="square" anchor="ctr" lIns="36576" rIns="36576" tIns="36576" bIns="36576">
             <a:spAutoFit/>
           </a:bodyPr>
           <a:lstStyle/>
@@ -6046,26 +6861,26 @@
                 <a:spcPts val="0"/>
               </a:spcBef>
               <a:spcAft>
-                <a:spcPts val="1200"/>
+                <a:spcPts val="1800"/>
               </a:spcAft>
             </a:pPr>
             <a:r>
-              <a:rPr sz="1400" b="1" i="0">
+              <a:rPr sz="2700" b="1" i="0">
                 <a:solidFill>
                   <a:srgbClr val="1E88A8"/>
                 </a:solidFill>
                 <a:latin typeface="Calibri"/>
               </a:rPr>
-              <a:t>▸ </a:t>
-            </a:r>
-            <a:r>
-              <a:rPr sz="1400" b="0" i="0">
-                <a:solidFill>
-                  <a:srgbClr val="232A2E"/>
-                </a:solidFill>
-                <a:latin typeface="Calibri"/>
-              </a:rPr>
-              <a:t>Cluster real kube-4kdhb: 3 noduri control-plane + 3 worker (OpenStack).</a:t>
+              <a:t>▸  </a:t>
+            </a:r>
+            <a:r>
+              <a:rPr sz="2700" b="0" i="0">
+                <a:solidFill>
+                  <a:srgbClr val="20282C"/>
+                </a:solidFill>
+                <a:latin typeface="Calibri"/>
+              </a:rPr>
+              <a:t>2 interfețe Vue 3: cercetători + super-admin</a:t>
             </a:r>
           </a:p>
           <a:p>
@@ -6074,26 +6889,26 @@
                 <a:spcPts val="0"/>
               </a:spcBef>
               <a:spcAft>
-                <a:spcPts val="1200"/>
+                <a:spcPts val="1800"/>
               </a:spcAft>
             </a:pPr>
             <a:r>
-              <a:rPr sz="1400" b="1" i="0">
+              <a:rPr sz="2700" b="1" i="0">
                 <a:solidFill>
                   <a:srgbClr val="1E88A8"/>
                 </a:solidFill>
                 <a:latin typeface="Calibri"/>
               </a:rPr>
-              <a:t>▸ </a:t>
-            </a:r>
-            <a:r>
-              <a:rPr sz="1400" b="0" i="0">
-                <a:solidFill>
-                  <a:srgbClr val="232A2E"/>
-                </a:solidFill>
-                <a:latin typeface="Calibri"/>
-              </a:rPr>
-              <a:t>YugabyteDB cu factor de replicare 3, gestionat prin Helm.</a:t>
+              <a:t>▸  </a:t>
+            </a:r>
+            <a:r>
+              <a:rPr sz="2700" b="0" i="0">
+                <a:solidFill>
+                  <a:srgbClr val="20282C"/>
+                </a:solidFill>
+                <a:latin typeface="Calibri"/>
+              </a:rPr>
+              <a:t>RBAC pe studii: 4 roluri + super-admin</a:t>
             </a:r>
           </a:p>
           <a:p>
@@ -6102,26 +6917,26 @@
                 <a:spcPts val="0"/>
               </a:spcBef>
               <a:spcAft>
-                <a:spcPts val="1200"/>
+                <a:spcPts val="1800"/>
               </a:spcAft>
             </a:pPr>
             <a:r>
-              <a:rPr sz="1400" b="1" i="0">
+              <a:rPr sz="2700" b="1" i="0">
                 <a:solidFill>
                   <a:srgbClr val="1E88A8"/>
                 </a:solidFill>
                 <a:latin typeface="Calibri"/>
               </a:rPr>
-              <a:t>▸ </a:t>
-            </a:r>
-            <a:r>
-              <a:rPr sz="1400" b="0" i="0">
-                <a:solidFill>
-                  <a:srgbClr val="232A2E"/>
-                </a:solidFill>
-                <a:latin typeface="Calibri"/>
-              </a:rPr>
-              <a:t>Imagini construite pentru linux/amd64, publicate pe GHCR.</a:t>
+              <a:t>▸  </a:t>
+            </a:r>
+            <a:r>
+              <a:rPr sz="2700" b="0" i="0">
+                <a:solidFill>
+                  <a:srgbClr val="20282C"/>
+                </a:solidFill>
+                <a:latin typeface="Calibri"/>
+              </a:rPr>
+              <a:t>Flux asincron: studiu → dataset → model → rezultate</a:t>
             </a:r>
           </a:p>
           <a:p>
@@ -6130,40 +6945,40 @@
                 <a:spcPts val="0"/>
               </a:spcBef>
               <a:spcAft>
-                <a:spcPts val="1200"/>
+                <a:spcPts val="1800"/>
               </a:spcAft>
             </a:pPr>
             <a:r>
-              <a:rPr sz="1400" b="1" i="0">
+              <a:rPr sz="2700" b="1" i="0">
                 <a:solidFill>
                   <a:srgbClr val="1E88A8"/>
                 </a:solidFill>
                 <a:latin typeface="Calibri"/>
               </a:rPr>
-              <a:t>▸ </a:t>
-            </a:r>
-            <a:r>
-              <a:rPr sz="1400" b="0" i="0">
-                <a:solidFill>
-                  <a:srgbClr val="232A2E"/>
-                </a:solidFill>
-                <a:latin typeface="Calibri"/>
-              </a:rPr>
-              <a:t>Confirmă portabilitatea arhitecturii într-un mediu distribuit real.</a:t>
-            </a:r>
-          </a:p>
-        </p:txBody>
-      </p:sp>
-      <p:sp>
-        <p:nvSpPr>
-          <p:cNvPr id="7" name="TextBox 6"/>
+              <a:t>▸  </a:t>
+            </a:r>
+            <a:r>
+              <a:rPr sz="2700" b="0" i="0">
+                <a:solidFill>
+                  <a:srgbClr val="20282C"/>
+                </a:solidFill>
+                <a:latin typeface="Calibri"/>
+              </a:rPr>
+              <a:t>Securitate: JWT · bcrypt · anti-IDOR · SQL parametrizat</a:t>
+            </a:r>
+          </a:p>
+        </p:txBody>
+      </p:sp>
+      <p:sp>
+        <p:nvSpPr>
+          <p:cNvPr id="6" name="TextBox 5"/>
           <p:cNvSpPr txBox="1"/>
           <p:nvPr/>
         </p:nvSpPr>
         <p:spPr>
           <a:xfrm>
-            <a:off x="502920" y="6419088"/>
-            <a:ext cx="8229600" cy="365760"/>
+            <a:off x="11247120" y="6437376"/>
+            <a:ext cx="822960" cy="365760"/>
           </a:xfrm>
           <a:prstGeom prst="rect">
             <a:avLst/>
@@ -6171,48 +6986,14 @@
           <a:noFill/>
         </p:spPr>
         <p:txBody>
-          <a:bodyPr wrap="square" anchor="t" lIns="45720" rIns="45720" tIns="18288" bIns="18288">
+          <a:bodyPr wrap="square" anchor="t" lIns="36576" rIns="36576" tIns="36576" bIns="36576">
             <a:spAutoFit/>
           </a:bodyPr>
           <a:lstStyle/>
           <a:p>
-            <a:r>
-              <a:rPr sz="900" b="0" i="0">
-                <a:solidFill>
-                  <a:srgbClr val="6B767C"/>
-                </a:solidFill>
-                <a:latin typeface="Calibri"/>
-              </a:rPr>
-              <a:t>Sisteme e-medicine pentru date epidemiologice  ·  Geană Tudor-Bogdan</a:t>
-            </a:r>
-          </a:p>
-        </p:txBody>
-      </p:sp>
-      <p:sp>
-        <p:nvSpPr>
-          <p:cNvPr id="8" name="TextBox 7"/>
-          <p:cNvSpPr txBox="1"/>
-          <p:nvPr/>
-        </p:nvSpPr>
-        <p:spPr>
-          <a:xfrm>
-            <a:off x="11155680" y="6419088"/>
-            <a:ext cx="822960" cy="365760"/>
-          </a:xfrm>
-          <a:prstGeom prst="rect">
-            <a:avLst/>
-          </a:prstGeom>
-          <a:noFill/>
-        </p:spPr>
-        <p:txBody>
-          <a:bodyPr wrap="square" anchor="t" lIns="45720" rIns="45720" tIns="18288" bIns="18288">
-            <a:spAutoFit/>
-          </a:bodyPr>
-          <a:lstStyle/>
-          <a:p>
             <a:pPr algn="r"/>
             <a:r>
-              <a:rPr sz="1000" b="1" i="0">
+              <a:rPr sz="1200" b="1" i="0">
                 <a:solidFill>
                   <a:srgbClr val="6B767C"/>
                 </a:solidFill>
@@ -6250,7 +7031,7 @@
         <p:spPr>
           <a:xfrm>
             <a:off x="0" y="0"/>
-            <a:ext cx="12191695" cy="1051560"/>
+            <a:ext cx="12191695" cy="960120"/>
           </a:xfrm>
           <a:prstGeom prst="rect">
             <a:avLst/>
@@ -6293,8 +7074,8 @@
         </p:nvSpPr>
         <p:spPr>
           <a:xfrm>
-            <a:off x="0" y="1051560"/>
-            <a:ext cx="12191695" cy="50292"/>
+            <a:off x="0" y="960120"/>
+            <a:ext cx="12191695" cy="45720"/>
           </a:xfrm>
           <a:prstGeom prst="rect">
             <a:avLst/>
@@ -6337,8 +7118,8 @@
         </p:nvSpPr>
         <p:spPr>
           <a:xfrm>
-            <a:off x="502920" y="109728"/>
-            <a:ext cx="11155680" cy="868680"/>
+            <a:off x="502920" y="73152"/>
+            <a:ext cx="11155680" cy="822960"/>
           </a:xfrm>
           <a:prstGeom prst="rect">
             <a:avLst/>
@@ -6346,44 +7127,68 @@
           <a:noFill/>
         </p:spPr>
         <p:txBody>
-          <a:bodyPr wrap="square" anchor="ctr" lIns="45720" rIns="45720" tIns="18288" bIns="18288">
+          <a:bodyPr wrap="square" anchor="ctr" lIns="36576" rIns="36576" tIns="36576" bIns="36576">
             <a:spAutoFit/>
           </a:bodyPr>
           <a:lstStyle/>
           <a:p>
             <a:r>
-              <a:rPr sz="1200" b="1" i="0">
+              <a:rPr sz="1300" b="1" i="0">
                 <a:solidFill>
                   <a:srgbClr val="BFDDE6"/>
                 </a:solidFill>
                 <a:latin typeface="Calibri"/>
               </a:rPr>
-              <a:t>Sinteză</a:t>
-            </a:r>
-          </a:p>
-          <a:p>
-            <a:r>
-              <a:rPr sz="2700" b="1" i="0">
+              <a:t>Infrastructură</a:t>
+            </a:r>
+          </a:p>
+          <a:p>
+            <a:r>
+              <a:rPr sz="3000" b="1" i="0">
                 <a:solidFill>
                   <a:srgbClr val="FFFFFF"/>
                 </a:solidFill>
                 <a:latin typeface="Calibri"/>
               </a:rPr>
-              <a:t>Concluzii</a:t>
-            </a:r>
-          </a:p>
-        </p:txBody>
-      </p:sp>
-      <p:sp>
-        <p:nvSpPr>
-          <p:cNvPr id="5" name="TextBox 4"/>
+              <a:t>Deployment pe Kubernetes</a:t>
+            </a:r>
+          </a:p>
+        </p:txBody>
+      </p:sp>
+      <p:pic>
+        <p:nvPicPr>
+          <p:cNvPr id="5" name="Picture 4" descr="k8s_topology.png"/>
+          <p:cNvPicPr>
+            <a:picLocks noChangeAspect="1"/>
+          </p:cNvPicPr>
+          <p:nvPr/>
+        </p:nvPicPr>
+        <p:blipFill>
+          <a:blip r:embed="rId2"/>
+          <a:stretch>
+            <a:fillRect/>
+          </a:stretch>
+        </p:blipFill>
+        <p:spPr>
+          <a:xfrm>
+            <a:off x="2126970" y="1188720"/>
+            <a:ext cx="7935012" cy="5074920"/>
+          </a:xfrm>
+          <a:prstGeom prst="rect">
+            <a:avLst/>
+          </a:prstGeom>
+        </p:spPr>
+      </p:pic>
+      <p:sp>
+        <p:nvSpPr>
+          <p:cNvPr id="6" name="TextBox 5"/>
           <p:cNvSpPr txBox="1"/>
           <p:nvPr/>
         </p:nvSpPr>
         <p:spPr>
           <a:xfrm>
-            <a:off x="594360" y="1371600"/>
-            <a:ext cx="10972800" cy="4754880"/>
+            <a:off x="457200" y="6327648"/>
+            <a:ext cx="10515600" cy="411480"/>
           </a:xfrm>
           <a:prstGeom prst="rect">
             <a:avLst/>
@@ -6391,218 +7196,34 @@
           <a:noFill/>
         </p:spPr>
         <p:txBody>
-          <a:bodyPr wrap="square" anchor="t" lIns="45720" rIns="45720" tIns="18288" bIns="18288">
+          <a:bodyPr wrap="square" anchor="t" lIns="36576" rIns="36576" tIns="36576" bIns="36576">
             <a:spAutoFit/>
           </a:bodyPr>
           <a:lstStyle/>
           <a:p>
-            <a:pPr>
-              <a:spcBef>
-                <a:spcPts val="0"/>
-              </a:spcBef>
-              <a:spcAft>
-                <a:spcPts val="1000"/>
-              </a:spcAft>
-            </a:pPr>
-            <a:r>
-              <a:rPr sz="1800" b="1" i="0">
-                <a:solidFill>
-                  <a:srgbClr val="1E88A8"/>
-                </a:solidFill>
-                <a:latin typeface="Calibri"/>
-              </a:rPr>
-              <a:t>▸ </a:t>
-            </a:r>
-            <a:r>
-              <a:rPr sz="1800" b="0" i="0">
-                <a:solidFill>
-                  <a:srgbClr val="232A2E"/>
-                </a:solidFill>
-                <a:latin typeface="Calibri"/>
-              </a:rPr>
-              <a:t>Sistem complet care leagă modelarea matematică (SIDARTHE + familia SIR) de o implementare software funcțională.</a:t>
-            </a:r>
-          </a:p>
-          <a:p>
-            <a:pPr>
-              <a:spcBef>
-                <a:spcPts val="0"/>
-              </a:spcBef>
-              <a:spcAft>
-                <a:spcPts val="1000"/>
-              </a:spcAft>
-            </a:pPr>
-            <a:r>
-              <a:rPr sz="1800" b="1" i="0">
-                <a:solidFill>
-                  <a:srgbClr val="1E88A8"/>
-                </a:solidFill>
-                <a:latin typeface="Calibri"/>
-              </a:rPr>
-              <a:t>▸ </a:t>
-            </a:r>
-            <a:r>
-              <a:rPr sz="1800" b="0" i="0">
-                <a:solidFill>
-                  <a:srgbClr val="232A2E"/>
-                </a:solidFill>
-                <a:latin typeface="Calibri"/>
-              </a:rPr>
-              <a:t>Cele patru obiective au fost atinse și validate empiric:</a:t>
-            </a:r>
-          </a:p>
-          <a:p>
-            <a:pPr lvl="1">
-              <a:spcBef>
-                <a:spcPts val="0"/>
-              </a:spcBef>
-              <a:spcAft>
-                <a:spcPts val="1000"/>
-              </a:spcAft>
-            </a:pPr>
-            <a:r>
-              <a:rPr sz="1600" b="1" i="0">
+            <a:pPr algn="ctr"/>
+            <a:r>
+              <a:rPr sz="1400" b="0" i="1">
                 <a:solidFill>
                   <a:srgbClr val="6B767C"/>
                 </a:solidFill>
                 <a:latin typeface="Calibri"/>
               </a:rPr>
-              <a:t>–  </a:t>
-            </a:r>
-            <a:r>
-              <a:rPr sz="1600" b="0" i="0">
-                <a:solidFill>
-                  <a:srgbClr val="444C50"/>
-                </a:solidFill>
-                <a:latin typeface="Calibri"/>
-              </a:rPr>
-              <a:t>același contract de simulare în R / Julia / Python, verificat numeric;</a:t>
-            </a:r>
-          </a:p>
-          <a:p>
-            <a:pPr lvl="1">
-              <a:spcBef>
-                <a:spcPts val="0"/>
-              </a:spcBef>
-              <a:spcAft>
-                <a:spcPts val="1000"/>
-              </a:spcAft>
-            </a:pPr>
-            <a:r>
-              <a:rPr sz="1600" b="1" i="0">
-                <a:solidFill>
-                  <a:srgbClr val="6B767C"/>
-                </a:solidFill>
-                <a:latin typeface="Calibri"/>
-              </a:rPr>
-              <a:t>–  </a:t>
-            </a:r>
-            <a:r>
-              <a:rPr sz="1600" b="0" i="0">
-                <a:solidFill>
-                  <a:srgbClr val="444C50"/>
-                </a:solidFill>
-                <a:latin typeface="Calibri"/>
-              </a:rPr>
-              <a:t>campanie reală de benchmark (180 ODE + 4 LSTM) pe cluster Kubernetes;</a:t>
-            </a:r>
-          </a:p>
-          <a:p>
-            <a:pPr lvl="1">
-              <a:spcBef>
-                <a:spcPts val="0"/>
-              </a:spcBef>
-              <a:spcAft>
-                <a:spcPts val="1000"/>
-              </a:spcAft>
-            </a:pPr>
-            <a:r>
-              <a:rPr sz="1600" b="1" i="0">
-                <a:solidFill>
-                  <a:srgbClr val="6B767C"/>
-                </a:solidFill>
-                <a:latin typeface="Calibri"/>
-              </a:rPr>
-              <a:t>–  </a:t>
-            </a:r>
-            <a:r>
-              <a:rPr sz="1600" b="0" i="0">
-                <a:solidFill>
-                  <a:srgbClr val="444C50"/>
-                </a:solidFill>
-                <a:latin typeface="Calibri"/>
-              </a:rPr>
-              <a:t>calibrare SIR pe date reale, cross-regiune, cu analiză de identifiabilitate;</a:t>
-            </a:r>
-          </a:p>
-          <a:p>
-            <a:pPr lvl="1">
-              <a:spcBef>
-                <a:spcPts val="0"/>
-              </a:spcBef>
-              <a:spcAft>
-                <a:spcPts val="1000"/>
-              </a:spcAft>
-            </a:pPr>
-            <a:r>
-              <a:rPr sz="1600" b="1" i="0">
-                <a:solidFill>
-                  <a:srgbClr val="6B767C"/>
-                </a:solidFill>
-                <a:latin typeface="Calibri"/>
-              </a:rPr>
-              <a:t>–  </a:t>
-            </a:r>
-            <a:r>
-              <a:rPr sz="1600" b="0" i="0">
-                <a:solidFill>
-                  <a:srgbClr val="444C50"/>
-                </a:solidFill>
-                <a:latin typeface="Calibri"/>
-              </a:rPr>
-              <a:t>componentă LSTM evaluată onest față de repere triviale.</a:t>
-            </a:r>
-          </a:p>
-          <a:p>
-            <a:pPr>
-              <a:spcBef>
-                <a:spcPts val="0"/>
-              </a:spcBef>
-              <a:spcAft>
-                <a:spcPts val="1000"/>
-              </a:spcAft>
-            </a:pPr>
-            <a:r>
-              <a:rPr sz="1800" b="1" i="0">
-                <a:solidFill>
-                  <a:srgbClr val="1E88A8"/>
-                </a:solidFill>
-                <a:latin typeface="Calibri"/>
-              </a:rPr>
-              <a:t>▸ </a:t>
-            </a:r>
-            <a:r>
-              <a:rPr sz="1800" b="0" i="0">
-                <a:solidFill>
-                  <a:srgbClr val="232A2E"/>
-                </a:solidFill>
-                <a:latin typeface="Calibri"/>
-              </a:rPr>
-              <a:t>Contribuție distinctă: benchmarking cross-limbaj + platformă web cu RBAC + sistem de plug-in-uri extensibil.</a:t>
-            </a:r>
-          </a:p>
-        </p:txBody>
-      </p:sp>
-      <p:sp>
-        <p:nvSpPr>
-          <p:cNvPr id="6" name="TextBox 5"/>
+              <a:t>Cluster real kube-4kdhb · 3 control-plane + 3 worker · YugabyteDB RF = 3</a:t>
+            </a:r>
+          </a:p>
+        </p:txBody>
+      </p:sp>
+      <p:sp>
+        <p:nvSpPr>
+          <p:cNvPr id="7" name="TextBox 6"/>
           <p:cNvSpPr txBox="1"/>
           <p:nvPr/>
         </p:nvSpPr>
         <p:spPr>
           <a:xfrm>
-            <a:off x="502920" y="6419088"/>
-            <a:ext cx="8229600" cy="365760"/>
+            <a:off x="11247120" y="6437376"/>
+            <a:ext cx="822960" cy="365760"/>
           </a:xfrm>
           <a:prstGeom prst="rect">
             <a:avLst/>
@@ -6610,48 +7231,14 @@
           <a:noFill/>
         </p:spPr>
         <p:txBody>
-          <a:bodyPr wrap="square" anchor="t" lIns="45720" rIns="45720" tIns="18288" bIns="18288">
+          <a:bodyPr wrap="square" anchor="t" lIns="36576" rIns="36576" tIns="36576" bIns="36576">
             <a:spAutoFit/>
           </a:bodyPr>
           <a:lstStyle/>
           <a:p>
-            <a:r>
-              <a:rPr sz="900" b="0" i="0">
-                <a:solidFill>
-                  <a:srgbClr val="6B767C"/>
-                </a:solidFill>
-                <a:latin typeface="Calibri"/>
-              </a:rPr>
-              <a:t>Sisteme e-medicine pentru date epidemiologice  ·  Geană Tudor-Bogdan</a:t>
-            </a:r>
-          </a:p>
-        </p:txBody>
-      </p:sp>
-      <p:sp>
-        <p:nvSpPr>
-          <p:cNvPr id="7" name="TextBox 6"/>
-          <p:cNvSpPr txBox="1"/>
-          <p:nvPr/>
-        </p:nvSpPr>
-        <p:spPr>
-          <a:xfrm>
-            <a:off x="11155680" y="6419088"/>
-            <a:ext cx="822960" cy="365760"/>
-          </a:xfrm>
-          <a:prstGeom prst="rect">
-            <a:avLst/>
-          </a:prstGeom>
-          <a:noFill/>
-        </p:spPr>
-        <p:txBody>
-          <a:bodyPr wrap="square" anchor="t" lIns="45720" rIns="45720" tIns="18288" bIns="18288">
-            <a:spAutoFit/>
-          </a:bodyPr>
-          <a:lstStyle/>
-          <a:p>
             <a:pPr algn="r"/>
             <a:r>
-              <a:rPr sz="1000" b="1" i="0">
+              <a:rPr sz="1200" b="1" i="0">
                 <a:solidFill>
                   <a:srgbClr val="6B767C"/>
                 </a:solidFill>
@@ -6689,7 +7276,7 @@
         <p:spPr>
           <a:xfrm>
             <a:off x="0" y="0"/>
-            <a:ext cx="12191695" cy="1051560"/>
+            <a:ext cx="12191695" cy="960120"/>
           </a:xfrm>
           <a:prstGeom prst="rect">
             <a:avLst/>
@@ -6732,8 +7319,8 @@
         </p:nvSpPr>
         <p:spPr>
           <a:xfrm>
-            <a:off x="0" y="1051560"/>
-            <a:ext cx="12191695" cy="50292"/>
+            <a:off x="0" y="960120"/>
+            <a:ext cx="12191695" cy="45720"/>
           </a:xfrm>
           <a:prstGeom prst="rect">
             <a:avLst/>
@@ -6776,8 +7363,8 @@
         </p:nvSpPr>
         <p:spPr>
           <a:xfrm>
-            <a:off x="502920" y="109728"/>
-            <a:ext cx="11155680" cy="868680"/>
+            <a:off x="502920" y="73152"/>
+            <a:ext cx="11155680" cy="822960"/>
           </a:xfrm>
           <a:prstGeom prst="rect">
             <a:avLst/>
@@ -6785,30 +7372,30 @@
           <a:noFill/>
         </p:spPr>
         <p:txBody>
-          <a:bodyPr wrap="square" anchor="ctr" lIns="45720" rIns="45720" tIns="18288" bIns="18288">
+          <a:bodyPr wrap="square" anchor="ctr" lIns="36576" rIns="36576" tIns="36576" bIns="36576">
             <a:spAutoFit/>
           </a:bodyPr>
           <a:lstStyle/>
           <a:p>
             <a:r>
-              <a:rPr sz="1200" b="1" i="0">
+              <a:rPr sz="1300" b="1" i="0">
                 <a:solidFill>
                   <a:srgbClr val="BFDDE6"/>
                 </a:solidFill>
                 <a:latin typeface="Calibri"/>
               </a:rPr>
-              <a:t>Perspective</a:t>
-            </a:r>
-          </a:p>
-          <a:p>
-            <a:r>
-              <a:rPr sz="2700" b="1" i="0">
+              <a:t>Sinteză</a:t>
+            </a:r>
+          </a:p>
+          <a:p>
+            <a:r>
+              <a:rPr sz="3000" b="1" i="0">
                 <a:solidFill>
                   <a:srgbClr val="FFFFFF"/>
                 </a:solidFill>
                 <a:latin typeface="Calibri"/>
               </a:rPr>
-              <a:t>Limitări și direcții viitoare</a:t>
+              <a:t>Concluzii</a:t>
             </a:r>
           </a:p>
         </p:txBody>
@@ -6821,8 +7408,8 @@
         </p:nvSpPr>
         <p:spPr>
           <a:xfrm>
-            <a:off x="594360" y="1371600"/>
-            <a:ext cx="10972800" cy="2743200"/>
+            <a:off x="731520" y="1371600"/>
+            <a:ext cx="10789920" cy="4754880"/>
           </a:xfrm>
           <a:prstGeom prst="rect">
             <a:avLst/>
@@ -6830,7 +7417,7 @@
           <a:noFill/>
         </p:spPr>
         <p:txBody>
-          <a:bodyPr wrap="square" anchor="t" lIns="45720" rIns="45720" tIns="18288" bIns="18288">
+          <a:bodyPr wrap="square" anchor="ctr" lIns="36576" rIns="36576" tIns="36576" bIns="36576">
             <a:spAutoFit/>
           </a:bodyPr>
           <a:lstStyle/>
@@ -6840,26 +7427,26 @@
                 <a:spcPts val="0"/>
               </a:spcBef>
               <a:spcAft>
-                <a:spcPts val="1000"/>
+                <a:spcPts val="1800"/>
               </a:spcAft>
             </a:pPr>
             <a:r>
-              <a:rPr sz="1700" b="1" i="0">
+              <a:rPr sz="2700" b="1" i="0">
                 <a:solidFill>
                   <a:srgbClr val="1E88A8"/>
                 </a:solidFill>
                 <a:latin typeface="Calibri"/>
               </a:rPr>
-              <a:t>▸ </a:t>
-            </a:r>
-            <a:r>
-              <a:rPr sz="1700" b="0" i="0">
-                <a:solidFill>
-                  <a:srgbClr val="232A2E"/>
-                </a:solidFill>
-                <a:latin typeface="Calibri"/>
-              </a:rPr>
-              <a:t>Calibrarea SIDARTHE pe date mai bogate (testare, spitalizare, terapie intensivă) cu operatori de observație multipli.</a:t>
+              <a:t>▸  </a:t>
+            </a:r>
+            <a:r>
+              <a:rPr sz="2700" b="0" i="0">
+                <a:solidFill>
+                  <a:srgbClr val="20282C"/>
+                </a:solidFill>
+                <a:latin typeface="Calibri"/>
+              </a:rPr>
+              <a:t>Lanț complet: modelare → implementare → arhitectură</a:t>
             </a:r>
           </a:p>
           <a:p>
@@ -6868,26 +7455,26 @@
                 <a:spcPts val="0"/>
               </a:spcBef>
               <a:spcAft>
-                <a:spcPts val="1000"/>
+                <a:spcPts val="1800"/>
               </a:spcAft>
             </a:pPr>
             <a:r>
-              <a:rPr sz="1700" b="1" i="0">
+              <a:rPr sz="2700" b="1" i="0">
                 <a:solidFill>
                   <a:srgbClr val="1E88A8"/>
                 </a:solidFill>
                 <a:latin typeface="Calibri"/>
               </a:rPr>
-              <a:t>▸ </a:t>
-            </a:r>
-            <a:r>
-              <a:rPr sz="1700" b="0" i="0">
-                <a:solidFill>
-                  <a:srgbClr val="232A2E"/>
-                </a:solidFill>
-                <a:latin typeface="Calibri"/>
-              </a:rPr>
-              <a:t>Promovarea calibrării într-un job asincron în aplicație; varianta hibridă LSTM peste reziduuri.</a:t>
+              <a:t>▸  </a:t>
+            </a:r>
+            <a:r>
+              <a:rPr sz="2700" b="0" i="0">
+                <a:solidFill>
+                  <a:srgbClr val="20282C"/>
+                </a:solidFill>
+                <a:latin typeface="Calibri"/>
+              </a:rPr>
+              <a:t>Validat empiric: benchmark + calibrare pe date reale</a:t>
             </a:r>
           </a:p>
           <a:p>
@@ -6896,26 +7483,26 @@
                 <a:spcPts val="0"/>
               </a:spcBef>
               <a:spcAft>
-                <a:spcPts val="1000"/>
+                <a:spcPts val="1800"/>
               </a:spcAft>
             </a:pPr>
             <a:r>
-              <a:rPr sz="1700" b="1" i="0">
+              <a:rPr sz="2700" b="1" i="0">
                 <a:solidFill>
                   <a:srgbClr val="1E88A8"/>
                 </a:solidFill>
                 <a:latin typeface="Calibri"/>
               </a:rPr>
-              <a:t>▸ </a:t>
-            </a:r>
-            <a:r>
-              <a:rPr sz="1700" b="0" i="0">
-                <a:solidFill>
-                  <a:srgbClr val="232A2E"/>
-                </a:solidFill>
-                <a:latin typeface="Calibri"/>
-              </a:rPr>
-              <a:t>Extinderea campaniei de benchmark pe alte profile hardware (inclusiv GPU pentru LSTM).</a:t>
+              <a:t>▸  </a:t>
+            </a:r>
+            <a:r>
+              <a:rPr sz="2700" b="0" i="0">
+                <a:solidFill>
+                  <a:srgbClr val="20282C"/>
+                </a:solidFill>
+                <a:latin typeface="Calibri"/>
+              </a:rPr>
+              <a:t>Componentă LSTM evaluată onest</a:t>
             </a:r>
           </a:p>
           <a:p>
@@ -6924,40 +7511,93 @@
                 <a:spcPts val="0"/>
               </a:spcBef>
               <a:spcAft>
-                <a:spcPts val="1000"/>
+                <a:spcPts val="1800"/>
               </a:spcAft>
             </a:pPr>
             <a:r>
-              <a:rPr sz="1700" b="1" i="0">
+              <a:rPr sz="2700" b="1" i="0">
                 <a:solidFill>
                   <a:srgbClr val="1E88A8"/>
                 </a:solidFill>
                 <a:latin typeface="Calibri"/>
               </a:rPr>
-              <a:t>▸ </a:t>
-            </a:r>
-            <a:r>
-              <a:rPr sz="1700" b="0" i="0">
-                <a:solidFill>
-                  <a:srgbClr val="232A2E"/>
-                </a:solidFill>
-                <a:latin typeface="Calibri"/>
-              </a:rPr>
-              <a:t>Suită de teste automate end-to-end, rate limiting, autoscalare (HPA) și observabilitate.</a:t>
-            </a:r>
-          </a:p>
-        </p:txBody>
-      </p:sp>
-      <p:sp>
-        <p:nvSpPr>
-          <p:cNvPr id="6" name="Rectangle 5"/>
+              <a:t>▸  </a:t>
+            </a:r>
+            <a:r>
+              <a:rPr sz="2700" b="0" i="0">
+                <a:solidFill>
+                  <a:srgbClr val="20282C"/>
+                </a:solidFill>
+                <a:latin typeface="Calibri"/>
+              </a:rPr>
+              <a:t>Deployat pe cluster Kubernetes real</a:t>
+            </a:r>
+          </a:p>
+        </p:txBody>
+      </p:sp>
+      <p:sp>
+        <p:nvSpPr>
+          <p:cNvPr id="6" name="TextBox 5"/>
+          <p:cNvSpPr txBox="1"/>
+          <p:nvPr/>
+        </p:nvSpPr>
+        <p:spPr>
+          <a:xfrm>
+            <a:off x="11247120" y="6437376"/>
+            <a:ext cx="822960" cy="365760"/>
+          </a:xfrm>
+          <a:prstGeom prst="rect">
+            <a:avLst/>
+          </a:prstGeom>
+          <a:noFill/>
+        </p:spPr>
+        <p:txBody>
+          <a:bodyPr wrap="square" anchor="t" lIns="36576" rIns="36576" tIns="36576" bIns="36576">
+            <a:spAutoFit/>
+          </a:bodyPr>
+          <a:lstStyle/>
+          <a:p>
+            <a:pPr algn="r"/>
+            <a:r>
+              <a:rPr sz="1200" b="1" i="0">
+                <a:solidFill>
+                  <a:srgbClr val="6B767C"/>
+                </a:solidFill>
+                <a:latin typeface="Calibri"/>
+              </a:rPr>
+              <a:t>16</a:t>
+            </a:r>
+          </a:p>
+        </p:txBody>
+      </p:sp>
+    </p:spTree>
+  </p:cSld>
+  <p:clrMapOvr>
+    <a:masterClrMapping/>
+  </p:clrMapOvr>
+</p:sld>
+</file>
+
+<file path=ppt/slides/slide18.xml><?xml version="1.0" encoding="utf-8"?>
+<p:sld xmlns:a="http://schemas.openxmlformats.org/drawingml/2006/main" xmlns:p="http://schemas.openxmlformats.org/presentationml/2006/main" xmlns:r="http://schemas.openxmlformats.org/officeDocument/2006/relationships">
+  <p:cSld>
+    <p:spTree>
+      <p:nvGrpSpPr>
+        <p:cNvPr id="1" name=""/>
+        <p:cNvGrpSpPr/>
+        <p:nvPr/>
+      </p:nvGrpSpPr>
+      <p:grpSpPr/>
+      <p:sp>
+        <p:nvSpPr>
+          <p:cNvPr id="2" name="Rectangle 1"/>
           <p:cNvSpPr/>
           <p:nvPr/>
         </p:nvSpPr>
         <p:spPr>
           <a:xfrm>
-            <a:off x="594360" y="4434840"/>
-            <a:ext cx="11018520" cy="1600200"/>
+            <a:off x="0" y="0"/>
+            <a:ext cx="12191695" cy="960120"/>
           </a:xfrm>
           <a:prstGeom prst="rect">
             <a:avLst/>
@@ -6994,14 +7634,58 @@
       </p:sp>
       <p:sp>
         <p:nvSpPr>
-          <p:cNvPr id="7" name="TextBox 6"/>
+          <p:cNvPr id="3" name="Rectangle 2"/>
+          <p:cNvSpPr/>
+          <p:nvPr/>
+        </p:nvSpPr>
+        <p:spPr>
+          <a:xfrm>
+            <a:off x="0" y="960120"/>
+            <a:ext cx="12191695" cy="45720"/>
+          </a:xfrm>
+          <a:prstGeom prst="rect">
+            <a:avLst/>
+          </a:prstGeom>
+          <a:solidFill>
+            <a:srgbClr val="1E88A8"/>
+          </a:solidFill>
+          <a:ln>
+            <a:noFill/>
+          </a:ln>
+          <a:effectLst/>
+        </p:spPr>
+        <p:style>
+          <a:lnRef idx="1">
+            <a:schemeClr val="accent1"/>
+          </a:lnRef>
+          <a:fillRef idx="3">
+            <a:schemeClr val="accent1"/>
+          </a:fillRef>
+          <a:effectRef idx="2">
+            <a:schemeClr val="accent1"/>
+          </a:effectRef>
+          <a:fontRef idx="minor">
+            <a:schemeClr val="lt1"/>
+          </a:fontRef>
+        </p:style>
+        <p:txBody>
+          <a:bodyPr rtlCol="0" anchor="ctr"/>
+          <a:lstStyle/>
+          <a:p>
+            <a:pPr algn="ctr"/>
+          </a:p>
+        </p:txBody>
+      </p:sp>
+      <p:sp>
+        <p:nvSpPr>
+          <p:cNvPr id="4" name="TextBox 3"/>
           <p:cNvSpPr txBox="1"/>
           <p:nvPr/>
         </p:nvSpPr>
         <p:spPr>
           <a:xfrm>
-            <a:off x="594360" y="4434840"/>
-            <a:ext cx="11018520" cy="1600200"/>
+            <a:off x="502920" y="73152"/>
+            <a:ext cx="11155680" cy="822960"/>
           </a:xfrm>
           <a:prstGeom prst="rect">
             <a:avLst/>
@@ -7009,50 +7693,44 @@
           <a:noFill/>
         </p:spPr>
         <p:txBody>
-          <a:bodyPr wrap="square" anchor="ctr" lIns="45720" rIns="45720" tIns="18288" bIns="18288">
+          <a:bodyPr wrap="square" anchor="ctr" lIns="36576" rIns="36576" tIns="36576" bIns="36576">
             <a:spAutoFit/>
           </a:bodyPr>
           <a:lstStyle/>
           <a:p>
-            <a:pPr algn="ctr"/>
-            <a:r>
-              <a:rPr sz="2600" b="1" i="0">
+            <a:r>
+              <a:rPr sz="1300" b="1" i="0">
+                <a:solidFill>
+                  <a:srgbClr val="BFDDE6"/>
+                </a:solidFill>
+                <a:latin typeface="Calibri"/>
+              </a:rPr>
+              <a:t>Aport personal</a:t>
+            </a:r>
+          </a:p>
+          <a:p>
+            <a:r>
+              <a:rPr sz="3000" b="1" i="0">
                 <a:solidFill>
                   <a:srgbClr val="FFFFFF"/>
                 </a:solidFill>
                 <a:latin typeface="Calibri"/>
               </a:rPr>
-              <a:t>Vă mulțumesc!  Întrebări?</a:t>
-            </a:r>
-          </a:p>
-          <a:p>
-            <a:pPr algn="ctr">
-              <a:spcBef>
-                <a:spcPts val="600"/>
-              </a:spcBef>
-            </a:pPr>
-            <a:r>
-              <a:rPr sz="1300" b="0" i="0">
-                <a:solidFill>
-                  <a:srgbClr val="CFE6EE"/>
-                </a:solidFill>
-                <a:latin typeface="Calibri"/>
-              </a:rPr>
-              <a:t>Geană Tudor-Bogdan  ·  Coordonator: Prof. Radu Rădescu</a:t>
-            </a:r>
-          </a:p>
-        </p:txBody>
-      </p:sp>
-      <p:sp>
-        <p:nvSpPr>
-          <p:cNvPr id="8" name="TextBox 7"/>
+              <a:t>Contribuții originale</a:t>
+            </a:r>
+          </a:p>
+        </p:txBody>
+      </p:sp>
+      <p:sp>
+        <p:nvSpPr>
+          <p:cNvPr id="5" name="TextBox 4"/>
           <p:cNvSpPr txBox="1"/>
           <p:nvPr/>
         </p:nvSpPr>
         <p:spPr>
           <a:xfrm>
-            <a:off x="502920" y="6419088"/>
-            <a:ext cx="8229600" cy="365760"/>
+            <a:off x="731520" y="1371600"/>
+            <a:ext cx="10789920" cy="4754880"/>
           </a:xfrm>
           <a:prstGeom prst="rect">
             <a:avLst/>
@@ -7060,32 +7738,161 @@
           <a:noFill/>
         </p:spPr>
         <p:txBody>
-          <a:bodyPr wrap="square" anchor="t" lIns="45720" rIns="45720" tIns="18288" bIns="18288">
+          <a:bodyPr wrap="square" anchor="ctr" lIns="36576" rIns="36576" tIns="36576" bIns="36576">
             <a:spAutoFit/>
           </a:bodyPr>
           <a:lstStyle/>
           <a:p>
-            <a:r>
-              <a:rPr sz="900" b="0" i="0">
-                <a:solidFill>
-                  <a:srgbClr val="6B767C"/>
-                </a:solidFill>
-                <a:latin typeface="Calibri"/>
-              </a:rPr>
-              <a:t>Sisteme e-medicine pentru date epidemiologice  ·  Geană Tudor-Bogdan</a:t>
-            </a:r>
-          </a:p>
-        </p:txBody>
-      </p:sp>
-      <p:sp>
-        <p:nvSpPr>
-          <p:cNvPr id="9" name="TextBox 8"/>
+            <a:pPr>
+              <a:spcBef>
+                <a:spcPts val="0"/>
+              </a:spcBef>
+              <a:spcAft>
+                <a:spcPts val="1600"/>
+              </a:spcAft>
+            </a:pPr>
+            <a:r>
+              <a:rPr sz="2400" b="1" i="0">
+                <a:solidFill>
+                  <a:srgbClr val="1E88A8"/>
+                </a:solidFill>
+                <a:latin typeface="Calibri"/>
+              </a:rPr>
+              <a:t>▸  </a:t>
+            </a:r>
+            <a:r>
+              <a:rPr sz="2400" b="0" i="0">
+                <a:solidFill>
+                  <a:srgbClr val="20282C"/>
+                </a:solidFill>
+                <a:latin typeface="Calibri"/>
+              </a:rPr>
+              <a:t>Benchmarking cross-limbaj al aceluiași model (R / Julia / Python)</a:t>
+            </a:r>
+          </a:p>
+          <a:p>
+            <a:pPr>
+              <a:spcBef>
+                <a:spcPts val="0"/>
+              </a:spcBef>
+              <a:spcAft>
+                <a:spcPts val="1600"/>
+              </a:spcAft>
+            </a:pPr>
+            <a:r>
+              <a:rPr sz="2400" b="1" i="0">
+                <a:solidFill>
+                  <a:srgbClr val="1E88A8"/>
+                </a:solidFill>
+                <a:latin typeface="Calibri"/>
+              </a:rPr>
+              <a:t>▸  </a:t>
+            </a:r>
+            <a:r>
+              <a:rPr sz="2400" b="0" i="0">
+                <a:solidFill>
+                  <a:srgbClr val="20282C"/>
+                </a:solidFill>
+                <a:latin typeface="Calibri"/>
+              </a:rPr>
+              <a:t>Metodologie unitară de colectare a metricilor (aceeași schemă DB)</a:t>
+            </a:r>
+          </a:p>
+          <a:p>
+            <a:pPr>
+              <a:spcBef>
+                <a:spcPts val="0"/>
+              </a:spcBef>
+              <a:spcAft>
+                <a:spcPts val="1600"/>
+              </a:spcAft>
+            </a:pPr>
+            <a:r>
+              <a:rPr sz="2400" b="1" i="0">
+                <a:solidFill>
+                  <a:srgbClr val="1E88A8"/>
+                </a:solidFill>
+                <a:latin typeface="Calibri"/>
+              </a:rPr>
+              <a:t>▸  </a:t>
+            </a:r>
+            <a:r>
+              <a:rPr sz="2400" b="0" i="0">
+                <a:solidFill>
+                  <a:srgbClr val="20282C"/>
+                </a:solidFill>
+                <a:latin typeface="Calibri"/>
+              </a:rPr>
+              <a:t>Separarea comparației epidemiologice de cea software + operatori de observație</a:t>
+            </a:r>
+          </a:p>
+          <a:p>
+            <a:pPr>
+              <a:spcBef>
+                <a:spcPts val="0"/>
+              </a:spcBef>
+              <a:spcAft>
+                <a:spcPts val="1600"/>
+              </a:spcAft>
+            </a:pPr>
+            <a:r>
+              <a:rPr sz="2400" b="1" i="0">
+                <a:solidFill>
+                  <a:srgbClr val="1E88A8"/>
+                </a:solidFill>
+                <a:latin typeface="Calibri"/>
+              </a:rPr>
+              <a:t>▸  </a:t>
+            </a:r>
+            <a:r>
+              <a:rPr sz="2400" b="0" i="0">
+                <a:solidFill>
+                  <a:srgbClr val="20282C"/>
+                </a:solidFill>
+                <a:latin typeface="Calibri"/>
+              </a:rPr>
+              <a:t>Platformă web colaborativă cu RBAC pe studii</a:t>
+            </a:r>
+          </a:p>
+          <a:p>
+            <a:pPr>
+              <a:spcBef>
+                <a:spcPts val="0"/>
+              </a:spcBef>
+              <a:spcAft>
+                <a:spcPts val="1600"/>
+              </a:spcAft>
+            </a:pPr>
+            <a:r>
+              <a:rPr sz="2400" b="1" i="0">
+                <a:solidFill>
+                  <a:srgbClr val="1E88A8"/>
+                </a:solidFill>
+                <a:latin typeface="Calibri"/>
+              </a:rPr>
+              <a:t>▸  </a:t>
+            </a:r>
+            <a:r>
+              <a:rPr sz="2400" b="0" i="0">
+                <a:solidFill>
+                  <a:srgbClr val="20282C"/>
+                </a:solidFill>
+                <a:latin typeface="Calibri"/>
+              </a:rPr>
+              <a:t>Sistem de plug-in-uri: script Python / imagine container → Deployment K8s automat</a:t>
+            </a:r>
+          </a:p>
+        </p:txBody>
+      </p:sp>
+      <p:sp>
+        <p:nvSpPr>
+          <p:cNvPr id="6" name="TextBox 5"/>
           <p:cNvSpPr txBox="1"/>
           <p:nvPr/>
         </p:nvSpPr>
         <p:spPr>
           <a:xfrm>
-            <a:off x="11155680" y="6419088"/>
+            <a:off x="11247120" y="6437376"/>
             <a:ext cx="822960" cy="365760"/>
           </a:xfrm>
           <a:prstGeom prst="rect">
@@ -7094,20 +7901,177 @@
           <a:noFill/>
         </p:spPr>
         <p:txBody>
-          <a:bodyPr wrap="square" anchor="t" lIns="45720" rIns="45720" tIns="18288" bIns="18288">
+          <a:bodyPr wrap="square" anchor="t" lIns="36576" rIns="36576" tIns="36576" bIns="36576">
             <a:spAutoFit/>
           </a:bodyPr>
           <a:lstStyle/>
           <a:p>
             <a:pPr algn="r"/>
             <a:r>
-              <a:rPr sz="1000" b="1" i="0">
+              <a:rPr sz="1200" b="1" i="0">
                 <a:solidFill>
                   <a:srgbClr val="6B767C"/>
                 </a:solidFill>
                 <a:latin typeface="Calibri"/>
               </a:rPr>
-              <a:t>16</a:t>
+              <a:t>17</a:t>
+            </a:r>
+          </a:p>
+        </p:txBody>
+      </p:sp>
+    </p:spTree>
+  </p:cSld>
+  <p:clrMapOvr>
+    <a:masterClrMapping/>
+  </p:clrMapOvr>
+</p:sld>
+</file>
+
+<file path=ppt/slides/slide19.xml><?xml version="1.0" encoding="utf-8"?>
+<p:sld xmlns:a="http://schemas.openxmlformats.org/drawingml/2006/main" xmlns:p="http://schemas.openxmlformats.org/presentationml/2006/main" xmlns:r="http://schemas.openxmlformats.org/officeDocument/2006/relationships">
+  <p:cSld>
+    <p:spTree>
+      <p:nvGrpSpPr>
+        <p:cNvPr id="1" name=""/>
+        <p:cNvGrpSpPr/>
+        <p:nvPr/>
+      </p:nvGrpSpPr>
+      <p:grpSpPr/>
+      <p:sp>
+        <p:nvSpPr>
+          <p:cNvPr id="2" name="Rectangle 1"/>
+          <p:cNvSpPr/>
+          <p:nvPr/>
+        </p:nvSpPr>
+        <p:spPr>
+          <a:xfrm>
+            <a:off x="0" y="0"/>
+            <a:ext cx="12191695" cy="6858000"/>
+          </a:xfrm>
+          <a:prstGeom prst="rect">
+            <a:avLst/>
+          </a:prstGeom>
+          <a:solidFill>
+            <a:srgbClr val="FFFFFF"/>
+          </a:solidFill>
+          <a:ln>
+            <a:noFill/>
+          </a:ln>
+          <a:effectLst/>
+        </p:spPr>
+        <p:style>
+          <a:lnRef idx="1">
+            <a:schemeClr val="accent1"/>
+          </a:lnRef>
+          <a:fillRef idx="3">
+            <a:schemeClr val="accent1"/>
+          </a:fillRef>
+          <a:effectRef idx="2">
+            <a:schemeClr val="accent1"/>
+          </a:effectRef>
+          <a:fontRef idx="minor">
+            <a:schemeClr val="lt1"/>
+          </a:fontRef>
+        </p:style>
+        <p:txBody>
+          <a:bodyPr rtlCol="0" anchor="ctr"/>
+          <a:lstStyle/>
+          <a:p>
+            <a:pPr algn="ctr"/>
+          </a:p>
+        </p:txBody>
+      </p:sp>
+      <p:sp>
+        <p:nvSpPr>
+          <p:cNvPr id="3" name="Rectangle 2"/>
+          <p:cNvSpPr/>
+          <p:nvPr/>
+        </p:nvSpPr>
+        <p:spPr>
+          <a:xfrm>
+            <a:off x="0" y="2468880"/>
+            <a:ext cx="12191695" cy="1920240"/>
+          </a:xfrm>
+          <a:prstGeom prst="rect">
+            <a:avLst/>
+          </a:prstGeom>
+          <a:solidFill>
+            <a:srgbClr val="124A63"/>
+          </a:solidFill>
+          <a:ln>
+            <a:noFill/>
+          </a:ln>
+          <a:effectLst/>
+        </p:spPr>
+        <p:style>
+          <a:lnRef idx="1">
+            <a:schemeClr val="accent1"/>
+          </a:lnRef>
+          <a:fillRef idx="3">
+            <a:schemeClr val="accent1"/>
+          </a:fillRef>
+          <a:effectRef idx="2">
+            <a:schemeClr val="accent1"/>
+          </a:effectRef>
+          <a:fontRef idx="minor">
+            <a:schemeClr val="lt1"/>
+          </a:fontRef>
+        </p:style>
+        <p:txBody>
+          <a:bodyPr rtlCol="0" anchor="ctr"/>
+          <a:lstStyle/>
+          <a:p>
+            <a:pPr algn="ctr"/>
+          </a:p>
+        </p:txBody>
+      </p:sp>
+      <p:sp>
+        <p:nvSpPr>
+          <p:cNvPr id="4" name="TextBox 3"/>
+          <p:cNvSpPr txBox="1"/>
+          <p:nvPr/>
+        </p:nvSpPr>
+        <p:spPr>
+          <a:xfrm>
+            <a:off x="640080" y="2468880"/>
+            <a:ext cx="10972800" cy="1920240"/>
+          </a:xfrm>
+          <a:prstGeom prst="rect">
+            <a:avLst/>
+          </a:prstGeom>
+          <a:noFill/>
+        </p:spPr>
+        <p:txBody>
+          <a:bodyPr wrap="square" anchor="ctr" lIns="36576" rIns="36576" tIns="36576" bIns="36576">
+            <a:spAutoFit/>
+          </a:bodyPr>
+          <a:lstStyle/>
+          <a:p>
+            <a:pPr algn="ctr"/>
+            <a:r>
+              <a:rPr sz="4000" b="1" i="0">
+                <a:solidFill>
+                  <a:srgbClr val="FFFFFF"/>
+                </a:solidFill>
+                <a:latin typeface="Calibri"/>
+              </a:rPr>
+              <a:t>Vă mulțumesc!   Întrebări?</a:t>
+            </a:r>
+          </a:p>
+          <a:p>
+            <a:pPr algn="ctr">
+              <a:spcBef>
+                <a:spcPts val="1000"/>
+              </a:spcBef>
+            </a:pPr>
+            <a:r>
+              <a:rPr sz="1600" b="0" i="0">
+                <a:solidFill>
+                  <a:srgbClr val="CFE6EE"/>
+                </a:solidFill>
+                <a:latin typeface="Calibri"/>
+              </a:rPr>
+              <a:t>Geană Tudor-Bogdan  ·  Coordonator: Prof. Radu Rădescu</a:t>
             </a:r>
           </a:p>
         </p:txBody>
@@ -7139,7 +8103,7 @@
         <p:spPr>
           <a:xfrm>
             <a:off x="0" y="0"/>
-            <a:ext cx="12191695" cy="1051560"/>
+            <a:ext cx="12191695" cy="960120"/>
           </a:xfrm>
           <a:prstGeom prst="rect">
             <a:avLst/>
@@ -7182,8 +8146,8 @@
         </p:nvSpPr>
         <p:spPr>
           <a:xfrm>
-            <a:off x="0" y="1051560"/>
-            <a:ext cx="12191695" cy="50292"/>
+            <a:off x="0" y="960120"/>
+            <a:ext cx="12191695" cy="45720"/>
           </a:xfrm>
           <a:prstGeom prst="rect">
             <a:avLst/>
@@ -7226,8 +8190,8 @@
         </p:nvSpPr>
         <p:spPr>
           <a:xfrm>
-            <a:off x="502920" y="109728"/>
-            <a:ext cx="11155680" cy="868680"/>
+            <a:off x="502920" y="73152"/>
+            <a:ext cx="11155680" cy="822960"/>
           </a:xfrm>
           <a:prstGeom prst="rect">
             <a:avLst/>
@@ -7235,13 +8199,13 @@
           <a:noFill/>
         </p:spPr>
         <p:txBody>
-          <a:bodyPr wrap="square" anchor="ctr" lIns="45720" rIns="45720" tIns="18288" bIns="18288">
+          <a:bodyPr wrap="square" anchor="ctr" lIns="36576" rIns="36576" tIns="36576" bIns="36576">
             <a:spAutoFit/>
           </a:bodyPr>
           <a:lstStyle/>
           <a:p>
             <a:r>
-              <a:rPr sz="1200" b="1" i="0">
+              <a:rPr sz="1300" b="1" i="0">
                 <a:solidFill>
                   <a:srgbClr val="BFDDE6"/>
                 </a:solidFill>
@@ -7252,7 +8216,7 @@
           </a:p>
           <a:p>
             <a:r>
-              <a:rPr sz="2700" b="1" i="0">
+              <a:rPr sz="3000" b="1" i="0">
                 <a:solidFill>
                   <a:srgbClr val="FFFFFF"/>
                 </a:solidFill>
@@ -7271,8 +8235,8 @@
         </p:nvSpPr>
         <p:spPr>
           <a:xfrm>
-            <a:off x="594360" y="1371600"/>
-            <a:ext cx="10972800" cy="4754880"/>
+            <a:off x="731520" y="1371600"/>
+            <a:ext cx="10789920" cy="4754880"/>
           </a:xfrm>
           <a:prstGeom prst="rect">
             <a:avLst/>
@@ -7280,7 +8244,7 @@
           <a:noFill/>
         </p:spPr>
         <p:txBody>
-          <a:bodyPr wrap="square" anchor="t" lIns="45720" rIns="45720" tIns="18288" bIns="18288">
+          <a:bodyPr wrap="square" anchor="ctr" lIns="36576" rIns="36576" tIns="36576" bIns="36576">
             <a:spAutoFit/>
           </a:bodyPr>
           <a:lstStyle/>
@@ -7290,26 +8254,26 @@
                 <a:spcPts val="0"/>
               </a:spcBef>
               <a:spcAft>
-                <a:spcPts val="1100"/>
+                <a:spcPts val="1800"/>
               </a:spcAft>
             </a:pPr>
             <a:r>
-              <a:rPr sz="1800" b="1" i="0">
+              <a:rPr sz="2700" b="1" i="0">
                 <a:solidFill>
                   <a:srgbClr val="1E88A8"/>
                 </a:solidFill>
                 <a:latin typeface="Calibri"/>
               </a:rPr>
-              <a:t>▸ </a:t>
-            </a:r>
-            <a:r>
-              <a:rPr sz="1800" b="0" i="0">
-                <a:solidFill>
-                  <a:srgbClr val="232A2E"/>
-                </a:solidFill>
-                <a:latin typeface="Calibri"/>
-              </a:rPr>
-              <a:t>Bolile infecțioase sunt un proces populațional, nu doar clinic — pandemiile din 1918, SARS 2003 și COVID-19 o confirmă.</a:t>
+              <a:t>▸  </a:t>
+            </a:r>
+            <a:r>
+              <a:rPr sz="2700" b="0" i="0">
+                <a:solidFill>
+                  <a:srgbClr val="20282C"/>
+                </a:solidFill>
+                <a:latin typeface="Calibri"/>
+              </a:rPr>
+              <a:t>Boli infecțioase = proces populațional, nu doar clinic</a:t>
             </a:r>
           </a:p>
           <a:p>
@@ -7318,26 +8282,26 @@
                 <a:spcPts val="0"/>
               </a:spcBef>
               <a:spcAft>
-                <a:spcPts val="1100"/>
+                <a:spcPts val="1800"/>
               </a:spcAft>
             </a:pPr>
             <a:r>
-              <a:rPr sz="1800" b="1" i="0">
+              <a:rPr sz="2700" b="1" i="0">
                 <a:solidFill>
                   <a:srgbClr val="1E88A8"/>
                 </a:solidFill>
                 <a:latin typeface="Calibri"/>
               </a:rPr>
-              <a:t>▸ </a:t>
-            </a:r>
-            <a:r>
-              <a:rPr sz="1800" b="0" i="0">
-                <a:solidFill>
-                  <a:srgbClr val="232A2E"/>
-                </a:solidFill>
-                <a:latin typeface="Calibri"/>
-              </a:rPr>
-              <a:t>Modelele compartimentale oferă un limbaj matematic riguros (SIR, Kermack–McKendrick, 1927) pentru dinamica transmiterii.</a:t>
+              <a:t>▸  </a:t>
+            </a:r>
+            <a:r>
+              <a:rPr sz="2700" b="0" i="0">
+                <a:solidFill>
+                  <a:srgbClr val="20282C"/>
+                </a:solidFill>
+                <a:latin typeface="Calibri"/>
+              </a:rPr>
+              <a:t>Modele compartimentale: limbaj matematic riguros (SIR, 1927)</a:t>
             </a:r>
           </a:p>
           <a:p>
@@ -7346,82 +8310,26 @@
                 <a:spcPts val="0"/>
               </a:spcBef>
               <a:spcAft>
-                <a:spcPts val="1100"/>
+                <a:spcPts val="1800"/>
               </a:spcAft>
             </a:pPr>
             <a:r>
-              <a:rPr sz="1800" b="1" i="0">
+              <a:rPr sz="2700" b="1" i="0">
                 <a:solidFill>
                   <a:srgbClr val="1E88A8"/>
                 </a:solidFill>
                 <a:latin typeface="Calibri"/>
               </a:rPr>
-              <a:t>▸ </a:t>
-            </a:r>
-            <a:r>
-              <a:rPr sz="1800" b="0" i="0">
-                <a:solidFill>
-                  <a:srgbClr val="232A2E"/>
-                </a:solidFill>
-                <a:latin typeface="Calibri"/>
-              </a:rPr>
-              <a:t>Problema reală nu se oprește la ecuații:</a:t>
-            </a:r>
-          </a:p>
-          <a:p>
-            <a:pPr lvl="1">
-              <a:spcBef>
-                <a:spcPts val="0"/>
-              </a:spcBef>
-              <a:spcAft>
-                <a:spcPts val="1100"/>
-              </a:spcAft>
-            </a:pPr>
-            <a:r>
-              <a:rPr sz="1600" b="1" i="0">
-                <a:solidFill>
-                  <a:srgbClr val="6B767C"/>
-                </a:solidFill>
-                <a:latin typeface="Calibri"/>
-              </a:rPr>
-              <a:t>–  </a:t>
-            </a:r>
-            <a:r>
-              <a:rPr sz="1600" b="0" i="0">
-                <a:solidFill>
-                  <a:srgbClr val="444C50"/>
-                </a:solidFill>
-                <a:latin typeface="Calibri"/>
-              </a:rPr>
-              <a:t>datele epidemiologice sunt eterogene, cu goluri și corecții administrative;</a:t>
-            </a:r>
-          </a:p>
-          <a:p>
-            <a:pPr lvl="1">
-              <a:spcBef>
-                <a:spcPts val="0"/>
-              </a:spcBef>
-              <a:spcAft>
-                <a:spcPts val="1100"/>
-              </a:spcAft>
-            </a:pPr>
-            <a:r>
-              <a:rPr sz="1600" b="1" i="0">
-                <a:solidFill>
-                  <a:srgbClr val="6B767C"/>
-                </a:solidFill>
-                <a:latin typeface="Calibri"/>
-              </a:rPr>
-              <a:t>–  </a:t>
-            </a:r>
-            <a:r>
-              <a:rPr sz="1600" b="0" i="0">
-                <a:solidFill>
-                  <a:srgbClr val="444C50"/>
-                </a:solidFill>
-                <a:latin typeface="Calibri"/>
-              </a:rPr>
-              <a:t>alegerea limbajului de implementare (R / Julia / Python) influențează timpul, memoria, integrarea și reproductibilitatea.</a:t>
+              <a:t>▸  </a:t>
+            </a:r>
+            <a:r>
+              <a:rPr sz="2700" b="0" i="0">
+                <a:solidFill>
+                  <a:srgbClr val="20282C"/>
+                </a:solidFill>
+                <a:latin typeface="Calibri"/>
+              </a:rPr>
+              <a:t>Costul implementării depinde de limbaj — R / Julia / Python</a:t>
             </a:r>
           </a:p>
           <a:p>
@@ -7430,26 +8338,26 @@
                 <a:spcPts val="0"/>
               </a:spcBef>
               <a:spcAft>
-                <a:spcPts val="1100"/>
+                <a:spcPts val="1800"/>
               </a:spcAft>
             </a:pPr>
             <a:r>
-              <a:rPr sz="1800" b="1" i="0">
+              <a:rPr sz="2700" b="1" i="0">
                 <a:solidFill>
                   <a:srgbClr val="1E88A8"/>
                 </a:solidFill>
                 <a:latin typeface="Calibri"/>
               </a:rPr>
-              <a:t>▸ </a:t>
-            </a:r>
-            <a:r>
-              <a:rPr sz="1800" b="0" i="0">
-                <a:solidFill>
-                  <a:srgbClr val="232A2E"/>
-                </a:solidFill>
-                <a:latin typeface="Calibri"/>
-              </a:rPr>
-              <a:t>Nevoie: un sistem care leagă explicit modelarea matematică de implementarea software, într-un cadru reproductibil.</a:t>
+              <a:t>▸  </a:t>
+            </a:r>
+            <a:r>
+              <a:rPr sz="2700" b="0" i="0">
+                <a:solidFill>
+                  <a:srgbClr val="20282C"/>
+                </a:solidFill>
+                <a:latin typeface="Calibri"/>
+              </a:rPr>
+              <a:t>Nevoie: sistem care leagă modelarea ↔ implementarea software</a:t>
             </a:r>
           </a:p>
         </p:txBody>
@@ -7462,8 +8370,8 @@
         </p:nvSpPr>
         <p:spPr>
           <a:xfrm>
-            <a:off x="502920" y="6419088"/>
-            <a:ext cx="8229600" cy="365760"/>
+            <a:off x="11247120" y="6437376"/>
+            <a:ext cx="822960" cy="365760"/>
           </a:xfrm>
           <a:prstGeom prst="rect">
             <a:avLst/>
@@ -7471,48 +8379,14 @@
           <a:noFill/>
         </p:spPr>
         <p:txBody>
-          <a:bodyPr wrap="square" anchor="t" lIns="45720" rIns="45720" tIns="18288" bIns="18288">
+          <a:bodyPr wrap="square" anchor="t" lIns="36576" rIns="36576" tIns="36576" bIns="36576">
             <a:spAutoFit/>
           </a:bodyPr>
           <a:lstStyle/>
           <a:p>
-            <a:r>
-              <a:rPr sz="900" b="0" i="0">
-                <a:solidFill>
-                  <a:srgbClr val="6B767C"/>
-                </a:solidFill>
-                <a:latin typeface="Calibri"/>
-              </a:rPr>
-              <a:t>Sisteme e-medicine pentru date epidemiologice  ·  Geană Tudor-Bogdan</a:t>
-            </a:r>
-          </a:p>
-        </p:txBody>
-      </p:sp>
-      <p:sp>
-        <p:nvSpPr>
-          <p:cNvPr id="7" name="TextBox 6"/>
-          <p:cNvSpPr txBox="1"/>
-          <p:nvPr/>
-        </p:nvSpPr>
-        <p:spPr>
-          <a:xfrm>
-            <a:off x="11155680" y="6419088"/>
-            <a:ext cx="822960" cy="365760"/>
-          </a:xfrm>
-          <a:prstGeom prst="rect">
-            <a:avLst/>
-          </a:prstGeom>
-          <a:noFill/>
-        </p:spPr>
-        <p:txBody>
-          <a:bodyPr wrap="square" anchor="t" lIns="45720" rIns="45720" tIns="18288" bIns="18288">
-            <a:spAutoFit/>
-          </a:bodyPr>
-          <a:lstStyle/>
-          <a:p>
             <a:pPr algn="r"/>
             <a:r>
-              <a:rPr sz="1000" b="1" i="0">
+              <a:rPr sz="1200" b="1" i="0">
                 <a:solidFill>
                   <a:srgbClr val="6B767C"/>
                 </a:solidFill>
@@ -7550,7 +8424,7 @@
         <p:spPr>
           <a:xfrm>
             <a:off x="0" y="0"/>
-            <a:ext cx="12191695" cy="1051560"/>
+            <a:ext cx="12191695" cy="960120"/>
           </a:xfrm>
           <a:prstGeom prst="rect">
             <a:avLst/>
@@ -7593,8 +8467,8 @@
         </p:nvSpPr>
         <p:spPr>
           <a:xfrm>
-            <a:off x="0" y="1051560"/>
-            <a:ext cx="12191695" cy="50292"/>
+            <a:off x="0" y="960120"/>
+            <a:ext cx="12191695" cy="45720"/>
           </a:xfrm>
           <a:prstGeom prst="rect">
             <a:avLst/>
@@ -7637,8 +8511,8 @@
         </p:nvSpPr>
         <p:spPr>
           <a:xfrm>
-            <a:off x="502920" y="109728"/>
-            <a:ext cx="11155680" cy="868680"/>
+            <a:off x="502920" y="73152"/>
+            <a:ext cx="11155680" cy="822960"/>
           </a:xfrm>
           <a:prstGeom prst="rect">
             <a:avLst/>
@@ -7646,13 +8520,13 @@
           <a:noFill/>
         </p:spPr>
         <p:txBody>
-          <a:bodyPr wrap="square" anchor="ctr" lIns="45720" rIns="45720" tIns="18288" bIns="18288">
+          <a:bodyPr wrap="square" anchor="ctr" lIns="36576" rIns="36576" tIns="36576" bIns="36576">
             <a:spAutoFit/>
           </a:bodyPr>
           <a:lstStyle/>
           <a:p>
             <a:r>
-              <a:rPr sz="1200" b="1" i="0">
+              <a:rPr sz="1300" b="1" i="0">
                 <a:solidFill>
                   <a:srgbClr val="BFDDE6"/>
                 </a:solidFill>
@@ -7663,13 +8537,13 @@
           </a:p>
           <a:p>
             <a:r>
-              <a:rPr sz="2700" b="1" i="0">
+              <a:rPr sz="3000" b="1" i="0">
                 <a:solidFill>
                   <a:srgbClr val="FFFFFF"/>
                 </a:solidFill>
                 <a:latin typeface="Calibri"/>
               </a:rPr>
-              <a:t>Obiective și contribuții</a:t>
+              <a:t>Obiective</a:t>
             </a:r>
           </a:p>
         </p:txBody>
@@ -7682,8 +8556,8 @@
         </p:nvSpPr>
         <p:spPr>
           <a:xfrm>
-            <a:off x="594360" y="1325880"/>
-            <a:ext cx="10972800" cy="2926080"/>
+            <a:off x="731520" y="1371600"/>
+            <a:ext cx="10789920" cy="4754880"/>
           </a:xfrm>
           <a:prstGeom prst="rect">
             <a:avLst/>
@@ -7691,7 +8565,7 @@
           <a:noFill/>
         </p:spPr>
         <p:txBody>
-          <a:bodyPr wrap="square" anchor="t" lIns="45720" rIns="45720" tIns="18288" bIns="18288">
+          <a:bodyPr wrap="square" anchor="ctr" lIns="36576" rIns="36576" tIns="36576" bIns="36576">
             <a:spAutoFit/>
           </a:bodyPr>
           <a:lstStyle/>
@@ -7701,26 +8575,26 @@
                 <a:spcPts val="0"/>
               </a:spcBef>
               <a:spcAft>
-                <a:spcPts val="1000"/>
+                <a:spcPts val="1800"/>
               </a:spcAft>
             </a:pPr>
             <a:r>
-              <a:rPr sz="1800" b="1" i="0">
+              <a:rPr sz="2700" b="1" i="0">
                 <a:solidFill>
                   <a:srgbClr val="1E88A8"/>
                 </a:solidFill>
                 <a:latin typeface="Calibri"/>
               </a:rPr>
-              <a:t>▸ </a:t>
-            </a:r>
-            <a:r>
-              <a:rPr sz="1800" b="0" i="0">
-                <a:solidFill>
-                  <a:srgbClr val="232A2E"/>
-                </a:solidFill>
-                <a:latin typeface="Calibri"/>
-              </a:rPr>
-              <a:t>O1 — Sistem care leagă modelarea de software: SIDARTHE ca model clinic principal; SIR / SIS / SEIR / SIRS ca repere.</a:t>
+              <a:t>▸  </a:t>
+            </a:r>
+            <a:r>
+              <a:rPr sz="2700" b="0" i="0">
+                <a:solidFill>
+                  <a:srgbClr val="20282C"/>
+                </a:solidFill>
+                <a:latin typeface="Calibri"/>
+              </a:rPr>
+              <a:t>Sistem cu SIDARTHE principal + familia SIR/SIS/SEIR/SIRS</a:t>
             </a:r>
           </a:p>
           <a:p>
@@ -7729,26 +8603,26 @@
                 <a:spcPts val="0"/>
               </a:spcBef>
               <a:spcAft>
-                <a:spcPts val="1000"/>
+                <a:spcPts val="1800"/>
               </a:spcAft>
             </a:pPr>
             <a:r>
-              <a:rPr sz="1800" b="1" i="0">
+              <a:rPr sz="2700" b="1" i="0">
                 <a:solidFill>
                   <a:srgbClr val="1E88A8"/>
                 </a:solidFill>
                 <a:latin typeface="Calibri"/>
               </a:rPr>
-              <a:t>▸ </a:t>
-            </a:r>
-            <a:r>
-              <a:rPr sz="1800" b="0" i="0">
-                <a:solidFill>
-                  <a:srgbClr val="232A2E"/>
-                </a:solidFill>
-                <a:latin typeface="Calibri"/>
-              </a:rPr>
-              <a:t>O2 — Același contract de simulare în R, Julia și Python, cu comparație de cost (timp, CPU, memorie, integrare DB).</a:t>
+              <a:t>▸  </a:t>
+            </a:r>
+            <a:r>
+              <a:rPr sz="2700" b="0" i="0">
+                <a:solidFill>
+                  <a:srgbClr val="20282C"/>
+                </a:solidFill>
+                <a:latin typeface="Calibri"/>
+              </a:rPr>
+              <a:t>Același contract de simulare în R, Julia, Python</a:t>
             </a:r>
           </a:p>
           <a:p>
@@ -7757,26 +8631,26 @@
                 <a:spcPts val="0"/>
               </a:spcBef>
               <a:spcAft>
-                <a:spcPts val="1000"/>
+                <a:spcPts val="1800"/>
               </a:spcAft>
             </a:pPr>
             <a:r>
-              <a:rPr sz="1800" b="1" i="0">
+              <a:rPr sz="2700" b="1" i="0">
                 <a:solidFill>
                   <a:srgbClr val="1E88A8"/>
                 </a:solidFill>
                 <a:latin typeface="Calibri"/>
               </a:rPr>
-              <a:t>▸ </a:t>
-            </a:r>
-            <a:r>
-              <a:rPr sz="1800" b="0" i="0">
-                <a:solidFill>
-                  <a:srgbClr val="232A2E"/>
-                </a:solidFill>
-                <a:latin typeface="Calibri"/>
-              </a:rPr>
-              <a:t>O3 — Metodologie explicită de comparație și calibrare: operatori de observație, MAE / RMSE, separare antrenare/test.</a:t>
+              <a:t>▸  </a:t>
+            </a:r>
+            <a:r>
+              <a:rPr sz="2700" b="0" i="0">
+                <a:solidFill>
+                  <a:srgbClr val="20282C"/>
+                </a:solidFill>
+                <a:latin typeface="Calibri"/>
+              </a:rPr>
+              <a:t>Metodologie de comparație și calibrare</a:t>
             </a:r>
           </a:p>
           <a:p>
@@ -7785,84 +8659,40 @@
                 <a:spcPts val="0"/>
               </a:spcBef>
               <a:spcAft>
-                <a:spcPts val="1000"/>
+                <a:spcPts val="1800"/>
               </a:spcAft>
             </a:pPr>
             <a:r>
-              <a:rPr sz="1800" b="1" i="0">
+              <a:rPr sz="2700" b="1" i="0">
                 <a:solidFill>
                   <a:srgbClr val="1E88A8"/>
                 </a:solidFill>
                 <a:latin typeface="Calibri"/>
               </a:rPr>
-              <a:t>▸ </a:t>
-            </a:r>
-            <a:r>
-              <a:rPr sz="1800" b="0" i="0">
-                <a:solidFill>
-                  <a:srgbClr val="232A2E"/>
-                </a:solidFill>
-                <a:latin typeface="Calibri"/>
-              </a:rPr>
-              <a:t>O4 — Extensie predictivă bazată pe LSTM pentru prognoză pe termen scurt.</a:t>
-            </a:r>
-          </a:p>
-        </p:txBody>
-      </p:sp>
-      <p:sp>
-        <p:nvSpPr>
-          <p:cNvPr id="6" name="Rectangle 5"/>
-          <p:cNvSpPr/>
-          <p:nvPr/>
-        </p:nvSpPr>
-        <p:spPr>
-          <a:xfrm>
-            <a:off x="594360" y="4572000"/>
-            <a:ext cx="11018520" cy="1554480"/>
-          </a:xfrm>
-          <a:prstGeom prst="rect">
-            <a:avLst/>
-          </a:prstGeom>
-          <a:solidFill>
-            <a:srgbClr val="EFF4F6"/>
-          </a:solidFill>
-          <a:ln>
-            <a:noFill/>
-          </a:ln>
-          <a:effectLst/>
-        </p:spPr>
-        <p:style>
-          <a:lnRef idx="1">
-            <a:schemeClr val="accent1"/>
-          </a:lnRef>
-          <a:fillRef idx="3">
-            <a:schemeClr val="accent1"/>
-          </a:fillRef>
-          <a:effectRef idx="2">
-            <a:schemeClr val="accent1"/>
-          </a:effectRef>
-          <a:fontRef idx="minor">
-            <a:schemeClr val="lt1"/>
-          </a:fontRef>
-        </p:style>
-        <p:txBody>
-          <a:bodyPr rtlCol="0" anchor="ctr"/>
-          <a:lstStyle/>
-          <a:p>
-            <a:pPr algn="ctr"/>
-          </a:p>
-        </p:txBody>
-      </p:sp>
-      <p:sp>
-        <p:nvSpPr>
-          <p:cNvPr id="7" name="TextBox 6"/>
+              <a:t>▸  </a:t>
+            </a:r>
+            <a:r>
+              <a:rPr sz="2700" b="0" i="0">
+                <a:solidFill>
+                  <a:srgbClr val="20282C"/>
+                </a:solidFill>
+                <a:latin typeface="Calibri"/>
+              </a:rPr>
+              <a:t>Extensie predictivă LSTM</a:t>
+            </a:r>
+          </a:p>
+        </p:txBody>
+      </p:sp>
+      <p:sp>
+        <p:nvSpPr>
+          <p:cNvPr id="6" name="TextBox 5"/>
           <p:cNvSpPr txBox="1"/>
           <p:nvPr/>
         </p:nvSpPr>
         <p:spPr>
           <a:xfrm>
-            <a:off x="868680" y="4709160"/>
-            <a:ext cx="10515600" cy="1371600"/>
+            <a:off x="11247120" y="6437376"/>
+            <a:ext cx="822960" cy="365760"/>
           </a:xfrm>
           <a:prstGeom prst="rect">
             <a:avLst/>
@@ -7870,127 +8700,14 @@
           <a:noFill/>
         </p:spPr>
         <p:txBody>
-          <a:bodyPr wrap="square" anchor="t" lIns="45720" rIns="45720" tIns="18288" bIns="18288">
+          <a:bodyPr wrap="square" anchor="t" lIns="36576" rIns="36576" tIns="36576" bIns="36576">
             <a:spAutoFit/>
           </a:bodyPr>
           <a:lstStyle/>
           <a:p>
-            <a:pPr>
-              <a:spcBef>
-                <a:spcPts val="0"/>
-              </a:spcBef>
-              <a:spcAft>
-                <a:spcPts val="700"/>
-              </a:spcAft>
-            </a:pPr>
-            <a:r>
-              <a:rPr sz="1500" b="1" i="0">
-                <a:solidFill>
-                  <a:srgbClr val="1E88A8"/>
-                </a:solidFill>
-                <a:latin typeface="Calibri"/>
-              </a:rPr>
-              <a:t>▸ </a:t>
-            </a:r>
-            <a:r>
-              <a:rPr sz="1500" b="0" i="0">
-                <a:solidFill>
-                  <a:srgbClr val="232A2E"/>
-                </a:solidFill>
-                <a:latin typeface="Calibri"/>
-              </a:rPr>
-              <a:t>Contribuție arhitecturală: sistem de plug-in-uri pentru algoritmi (script Python sau imagine container → Deployment K8s automat).</a:t>
-            </a:r>
-          </a:p>
-          <a:p>
-            <a:pPr>
-              <a:spcBef>
-                <a:spcPts val="0"/>
-              </a:spcBef>
-              <a:spcAft>
-                <a:spcPts val="700"/>
-              </a:spcAft>
-            </a:pPr>
-            <a:r>
-              <a:rPr sz="1500" b="1" i="0">
-                <a:solidFill>
-                  <a:srgbClr val="1E88A8"/>
-                </a:solidFill>
-                <a:latin typeface="Calibri"/>
-              </a:rPr>
-              <a:t>▸ </a:t>
-            </a:r>
-            <a:r>
-              <a:rPr sz="1500" b="0" i="0">
-                <a:solidFill>
-                  <a:srgbClr val="232A2E"/>
-                </a:solidFill>
-                <a:latin typeface="Calibri"/>
-              </a:rPr>
-              <a:t>Contribuție empirică: benchmarking comparativ cross-limbaj al aceluiași model, integrat într-o platformă web colaborativă.</a:t>
-            </a:r>
-          </a:p>
-        </p:txBody>
-      </p:sp>
-      <p:sp>
-        <p:nvSpPr>
-          <p:cNvPr id="8" name="TextBox 7"/>
-          <p:cNvSpPr txBox="1"/>
-          <p:nvPr/>
-        </p:nvSpPr>
-        <p:spPr>
-          <a:xfrm>
-            <a:off x="502920" y="6419088"/>
-            <a:ext cx="8229600" cy="365760"/>
-          </a:xfrm>
-          <a:prstGeom prst="rect">
-            <a:avLst/>
-          </a:prstGeom>
-          <a:noFill/>
-        </p:spPr>
-        <p:txBody>
-          <a:bodyPr wrap="square" anchor="t" lIns="45720" rIns="45720" tIns="18288" bIns="18288">
-            <a:spAutoFit/>
-          </a:bodyPr>
-          <a:lstStyle/>
-          <a:p>
-            <a:r>
-              <a:rPr sz="900" b="0" i="0">
-                <a:solidFill>
-                  <a:srgbClr val="6B767C"/>
-                </a:solidFill>
-                <a:latin typeface="Calibri"/>
-              </a:rPr>
-              <a:t>Sisteme e-medicine pentru date epidemiologice  ·  Geană Tudor-Bogdan</a:t>
-            </a:r>
-          </a:p>
-        </p:txBody>
-      </p:sp>
-      <p:sp>
-        <p:nvSpPr>
-          <p:cNvPr id="9" name="TextBox 8"/>
-          <p:cNvSpPr txBox="1"/>
-          <p:nvPr/>
-        </p:nvSpPr>
-        <p:spPr>
-          <a:xfrm>
-            <a:off x="11155680" y="6419088"/>
-            <a:ext cx="822960" cy="365760"/>
-          </a:xfrm>
-          <a:prstGeom prst="rect">
-            <a:avLst/>
-          </a:prstGeom>
-          <a:noFill/>
-        </p:spPr>
-        <p:txBody>
-          <a:bodyPr wrap="square" anchor="t" lIns="45720" rIns="45720" tIns="18288" bIns="18288">
-            <a:spAutoFit/>
-          </a:bodyPr>
-          <a:lstStyle/>
-          <a:p>
             <a:pPr algn="r"/>
             <a:r>
-              <a:rPr sz="1000" b="1" i="0">
+              <a:rPr sz="1200" b="1" i="0">
                 <a:solidFill>
                   <a:srgbClr val="6B767C"/>
                 </a:solidFill>
@@ -8028,7 +8745,7 @@
         <p:spPr>
           <a:xfrm>
             <a:off x="0" y="0"/>
-            <a:ext cx="12191695" cy="1051560"/>
+            <a:ext cx="12191695" cy="960120"/>
           </a:xfrm>
           <a:prstGeom prst="rect">
             <a:avLst/>
@@ -8071,8 +8788,8 @@
         </p:nvSpPr>
         <p:spPr>
           <a:xfrm>
-            <a:off x="0" y="1051560"/>
-            <a:ext cx="12191695" cy="50292"/>
+            <a:off x="0" y="960120"/>
+            <a:ext cx="12191695" cy="45720"/>
           </a:xfrm>
           <a:prstGeom prst="rect">
             <a:avLst/>
@@ -8115,8 +8832,8 @@
         </p:nvSpPr>
         <p:spPr>
           <a:xfrm>
-            <a:off x="502920" y="109728"/>
-            <a:ext cx="11155680" cy="868680"/>
+            <a:off x="502920" y="73152"/>
+            <a:ext cx="11155680" cy="822960"/>
           </a:xfrm>
           <a:prstGeom prst="rect">
             <a:avLst/>
@@ -8124,24 +8841,24 @@
           <a:noFill/>
         </p:spPr>
         <p:txBody>
-          <a:bodyPr wrap="square" anchor="ctr" lIns="45720" rIns="45720" tIns="18288" bIns="18288">
+          <a:bodyPr wrap="square" anchor="ctr" lIns="36576" rIns="36576" tIns="36576" bIns="36576">
             <a:spAutoFit/>
           </a:bodyPr>
           <a:lstStyle/>
           <a:p>
             <a:r>
-              <a:rPr sz="1200" b="1" i="0">
+              <a:rPr sz="1300" b="1" i="0">
                 <a:solidFill>
                   <a:srgbClr val="BFDDE6"/>
                 </a:solidFill>
                 <a:latin typeface="Calibri"/>
               </a:rPr>
-              <a:t>Fundamente teoretice</a:t>
-            </a:r>
-          </a:p>
-          <a:p>
-            <a:r>
-              <a:rPr sz="2700" b="1" i="0">
+              <a:t>Fundamente</a:t>
+            </a:r>
+          </a:p>
+          <a:p>
+            <a:r>
+              <a:rPr sz="3000" b="1" i="0">
                 <a:solidFill>
                   <a:srgbClr val="FFFFFF"/>
                 </a:solidFill>
@@ -8160,8 +8877,8 @@
         </p:nvSpPr>
         <p:spPr>
           <a:xfrm>
-            <a:off x="594360" y="1371600"/>
-            <a:ext cx="5486400" cy="3200400"/>
+            <a:off x="731520" y="1371600"/>
+            <a:ext cx="10789920" cy="4754880"/>
           </a:xfrm>
           <a:prstGeom prst="rect">
             <a:avLst/>
@@ -8169,7 +8886,7 @@
           <a:noFill/>
         </p:spPr>
         <p:txBody>
-          <a:bodyPr wrap="square" anchor="t" lIns="45720" rIns="45720" tIns="18288" bIns="18288">
+          <a:bodyPr wrap="square" anchor="ctr" lIns="36576" rIns="36576" tIns="36576" bIns="36576">
             <a:spAutoFit/>
           </a:bodyPr>
           <a:lstStyle/>
@@ -8179,26 +8896,26 @@
                 <a:spcPts val="0"/>
               </a:spcBef>
               <a:spcAft>
-                <a:spcPts val="1000"/>
+                <a:spcPts val="1800"/>
               </a:spcAft>
             </a:pPr>
             <a:r>
-              <a:rPr sz="1700" b="1" i="0">
+              <a:rPr sz="2700" b="1" i="0">
                 <a:solidFill>
                   <a:srgbClr val="1E88A8"/>
                 </a:solidFill>
                 <a:latin typeface="Calibri"/>
               </a:rPr>
-              <a:t>▸ </a:t>
-            </a:r>
-            <a:r>
-              <a:rPr sz="1700" b="0" i="0">
-                <a:solidFill>
-                  <a:srgbClr val="232A2E"/>
-                </a:solidFill>
-                <a:latin typeface="Calibri"/>
-              </a:rPr>
-              <a:t>Populația e împărțită în compartimente (stări epidemiologice); tranzițiile sunt ecuații diferențiale.</a:t>
+              <a:t>▸  </a:t>
+            </a:r>
+            <a:r>
+              <a:rPr sz="2700" b="0" i="0">
+                <a:solidFill>
+                  <a:srgbClr val="20282C"/>
+                </a:solidFill>
+                <a:latin typeface="Calibri"/>
+              </a:rPr>
+              <a:t>Familia SIR / SIS / SEIR / SIRS — repere</a:t>
             </a:r>
           </a:p>
           <a:p>
@@ -8207,26 +8924,26 @@
                 <a:spcPts val="0"/>
               </a:spcBef>
               <a:spcAft>
-                <a:spcPts val="1000"/>
+                <a:spcPts val="1800"/>
               </a:spcAft>
             </a:pPr>
             <a:r>
-              <a:rPr sz="1700" b="1" i="0">
+              <a:rPr sz="2700" b="1" i="0">
                 <a:solidFill>
                   <a:srgbClr val="1E88A8"/>
                 </a:solidFill>
                 <a:latin typeface="Calibri"/>
               </a:rPr>
-              <a:t>▸ </a:t>
-            </a:r>
-            <a:r>
-              <a:rPr sz="1700" b="0" i="0">
-                <a:solidFill>
-                  <a:srgbClr val="232A2E"/>
-                </a:solidFill>
-                <a:latin typeface="Calibri"/>
-              </a:rPr>
-              <a:t>Familia de bază: SIS, SIR, SEIR, SIRS — repere matematice și de regresie numerică.</a:t>
+              <a:t>▸  </a:t>
+            </a:r>
+            <a:r>
+              <a:rPr sz="2700" b="0" i="0">
+                <a:solidFill>
+                  <a:srgbClr val="20282C"/>
+                </a:solidFill>
+                <a:latin typeface="Calibri"/>
+              </a:rPr>
+              <a:t>Prag epidemic:  R₀ = β / γ   (epidemie dacă R₀ &gt; 1)</a:t>
             </a:r>
           </a:p>
           <a:p>
@@ -8235,26 +8952,54 @@
                 <a:spcPts val="0"/>
               </a:spcBef>
               <a:spcAft>
-                <a:spcPts val="1000"/>
+                <a:spcPts val="1800"/>
               </a:spcAft>
             </a:pPr>
             <a:r>
-              <a:rPr sz="1700" b="1" i="0">
+              <a:rPr sz="2700" b="1" i="0">
                 <a:solidFill>
                   <a:srgbClr val="1E88A8"/>
                 </a:solidFill>
                 <a:latin typeface="Calibri"/>
               </a:rPr>
-              <a:t>▸ </a:t>
-            </a:r>
-            <a:r>
-              <a:rPr sz="1700" b="0" i="0">
-                <a:solidFill>
-                  <a:srgbClr val="232A2E"/>
-                </a:solidFill>
-                <a:latin typeface="Calibri"/>
-              </a:rPr>
-              <a:t>Prag epidemic prin numărul de reproducere de bază:</a:t>
+              <a:t>▸  </a:t>
+            </a:r>
+            <a:r>
+              <a:rPr sz="2700" b="0" i="0">
+                <a:solidFill>
+                  <a:srgbClr val="20282C"/>
+                </a:solidFill>
+                <a:latin typeface="Calibri"/>
+              </a:rPr>
+              <a:t>Proprietăți demonstrate pentru SIR:</a:t>
+            </a:r>
+          </a:p>
+          <a:p>
+            <a:pPr lvl="1">
+              <a:spcBef>
+                <a:spcPts val="0"/>
+              </a:spcBef>
+              <a:spcAft>
+                <a:spcPts val="1800"/>
+              </a:spcAft>
+            </a:pPr>
+            <a:r>
+              <a:rPr sz="2300" b="1" i="0">
+                <a:solidFill>
+                  <a:srgbClr val="6B767C"/>
+                </a:solidFill>
+                <a:latin typeface="Calibri"/>
+              </a:rPr>
+              <a:t>–  </a:t>
+            </a:r>
+            <a:r>
+              <a:rPr sz="2300" b="0" i="0">
+                <a:solidFill>
+                  <a:srgbClr val="444C50"/>
+                </a:solidFill>
+                <a:latin typeface="Calibri"/>
+              </a:rPr>
+              <a:t>conservarea populației, pozitivitate, dimensiunea finală</a:t>
             </a:r>
           </a:p>
         </p:txBody>
@@ -8267,8 +9012,8 @@
         </p:nvSpPr>
         <p:spPr>
           <a:xfrm>
-            <a:off x="822960" y="3657600"/>
-            <a:ext cx="5029200" cy="731520"/>
+            <a:off x="11247120" y="6437376"/>
+            <a:ext cx="822960" cy="365760"/>
           </a:xfrm>
           <a:prstGeom prst="rect">
             <a:avLst/>
@@ -8276,192 +9021,14 @@
           <a:noFill/>
         </p:spPr>
         <p:txBody>
-          <a:bodyPr wrap="square" anchor="t" lIns="45720" rIns="45720" tIns="18288" bIns="18288">
+          <a:bodyPr wrap="square" anchor="t" lIns="36576" rIns="36576" tIns="36576" bIns="36576">
             <a:spAutoFit/>
           </a:bodyPr>
           <a:lstStyle/>
           <a:p>
-            <a:r>
-              <a:rPr sz="2000" b="1" i="0">
-                <a:solidFill>
-                  <a:srgbClr val="124A63"/>
-                </a:solidFill>
-                <a:latin typeface="Calibri"/>
-              </a:rPr>
-              <a:t>R₀ = β / γ      (epidemie dacă R₀ &gt; 1)</a:t>
-            </a:r>
-          </a:p>
-        </p:txBody>
-      </p:sp>
-      <p:sp>
-        <p:nvSpPr>
-          <p:cNvPr id="7" name="TextBox 6"/>
-          <p:cNvSpPr txBox="1"/>
-          <p:nvPr/>
-        </p:nvSpPr>
-        <p:spPr>
-          <a:xfrm>
-            <a:off x="594360" y="4480560"/>
-            <a:ext cx="5486400" cy="1645920"/>
-          </a:xfrm>
-          <a:prstGeom prst="rect">
-            <a:avLst/>
-          </a:prstGeom>
-          <a:noFill/>
-        </p:spPr>
-        <p:txBody>
-          <a:bodyPr wrap="square" anchor="t" lIns="45720" rIns="45720" tIns="18288" bIns="18288">
-            <a:spAutoFit/>
-          </a:bodyPr>
-          <a:lstStyle/>
-          <a:p>
-            <a:pPr>
-              <a:spcBef>
-                <a:spcPts val="0"/>
-              </a:spcBef>
-              <a:spcAft>
-                <a:spcPts val="800"/>
-              </a:spcAft>
-            </a:pPr>
-            <a:r>
-              <a:rPr sz="1500" b="1" i="0">
-                <a:solidFill>
-                  <a:srgbClr val="1E88A8"/>
-                </a:solidFill>
-                <a:latin typeface="Calibri"/>
-              </a:rPr>
-              <a:t>▸ </a:t>
-            </a:r>
-            <a:r>
-              <a:rPr sz="1500" b="0" i="0">
-                <a:solidFill>
-                  <a:srgbClr val="232A2E"/>
-                </a:solidFill>
-                <a:latin typeface="Calibri"/>
-              </a:rPr>
-              <a:t>Proprietăți demonstrate pentru SIR: existență/unicitate, conservarea populației, pozitivitate, dimensiunea finală a epidemiei.</a:t>
-            </a:r>
-          </a:p>
-        </p:txBody>
-      </p:sp>
-      <p:pic>
-        <p:nvPicPr>
-          <p:cNvPr id="8" name="Picture 7" descr="sir_diagram.png"/>
-          <p:cNvPicPr>
-            <a:picLocks noChangeAspect="1"/>
-          </p:cNvPicPr>
-          <p:nvPr/>
-        </p:nvPicPr>
-        <p:blipFill>
-          <a:blip r:embed="rId2"/>
-          <a:stretch>
-            <a:fillRect/>
-          </a:stretch>
-        </p:blipFill>
-        <p:spPr>
-          <a:xfrm>
-            <a:off x="6400800" y="3001408"/>
-            <a:ext cx="5394960" cy="763744"/>
-          </a:xfrm>
-          <a:prstGeom prst="rect">
-            <a:avLst/>
-          </a:prstGeom>
-        </p:spPr>
-      </p:pic>
-      <p:sp>
-        <p:nvSpPr>
-          <p:cNvPr id="9" name="TextBox 8"/>
-          <p:cNvSpPr txBox="1"/>
-          <p:nvPr/>
-        </p:nvSpPr>
-        <p:spPr>
-          <a:xfrm>
-            <a:off x="6400800" y="4617720"/>
-            <a:ext cx="5394960" cy="365760"/>
-          </a:xfrm>
-          <a:prstGeom prst="rect">
-            <a:avLst/>
-          </a:prstGeom>
-          <a:noFill/>
-        </p:spPr>
-        <p:txBody>
-          <a:bodyPr wrap="square" anchor="t" lIns="45720" rIns="45720" tIns="18288" bIns="18288">
-            <a:spAutoFit/>
-          </a:bodyPr>
-          <a:lstStyle/>
-          <a:p>
-            <a:pPr algn="ctr"/>
-            <a:r>
-              <a:rPr sz="1100" b="0" i="1">
-                <a:solidFill>
-                  <a:srgbClr val="6B767C"/>
-                </a:solidFill>
-                <a:latin typeface="Calibri"/>
-              </a:rPr>
-              <a:t>Fluxul compartimentelor modelului SIR</a:t>
-            </a:r>
-          </a:p>
-        </p:txBody>
-      </p:sp>
-      <p:sp>
-        <p:nvSpPr>
-          <p:cNvPr id="10" name="TextBox 9"/>
-          <p:cNvSpPr txBox="1"/>
-          <p:nvPr/>
-        </p:nvSpPr>
-        <p:spPr>
-          <a:xfrm>
-            <a:off x="502920" y="6419088"/>
-            <a:ext cx="8229600" cy="365760"/>
-          </a:xfrm>
-          <a:prstGeom prst="rect">
-            <a:avLst/>
-          </a:prstGeom>
-          <a:noFill/>
-        </p:spPr>
-        <p:txBody>
-          <a:bodyPr wrap="square" anchor="t" lIns="45720" rIns="45720" tIns="18288" bIns="18288">
-            <a:spAutoFit/>
-          </a:bodyPr>
-          <a:lstStyle/>
-          <a:p>
-            <a:r>
-              <a:rPr sz="900" b="0" i="0">
-                <a:solidFill>
-                  <a:srgbClr val="6B767C"/>
-                </a:solidFill>
-                <a:latin typeface="Calibri"/>
-              </a:rPr>
-              <a:t>Sisteme e-medicine pentru date epidemiologice  ·  Geană Tudor-Bogdan</a:t>
-            </a:r>
-          </a:p>
-        </p:txBody>
-      </p:sp>
-      <p:sp>
-        <p:nvSpPr>
-          <p:cNvPr id="11" name="TextBox 10"/>
-          <p:cNvSpPr txBox="1"/>
-          <p:nvPr/>
-        </p:nvSpPr>
-        <p:spPr>
-          <a:xfrm>
-            <a:off x="11155680" y="6419088"/>
-            <a:ext cx="822960" cy="365760"/>
-          </a:xfrm>
-          <a:prstGeom prst="rect">
-            <a:avLst/>
-          </a:prstGeom>
-          <a:noFill/>
-        </p:spPr>
-        <p:txBody>
-          <a:bodyPr wrap="square" anchor="t" lIns="45720" rIns="45720" tIns="18288" bIns="18288">
-            <a:spAutoFit/>
-          </a:bodyPr>
-          <a:lstStyle/>
-          <a:p>
             <a:pPr algn="r"/>
             <a:r>
-              <a:rPr sz="1000" b="1" i="0">
+              <a:rPr sz="1200" b="1" i="0">
                 <a:solidFill>
                   <a:srgbClr val="6B767C"/>
                 </a:solidFill>
@@ -8499,7 +9066,7 @@
         <p:spPr>
           <a:xfrm>
             <a:off x="0" y="0"/>
-            <a:ext cx="12191695" cy="1051560"/>
+            <a:ext cx="12191695" cy="960120"/>
           </a:xfrm>
           <a:prstGeom prst="rect">
             <a:avLst/>
@@ -8542,8 +9109,8 @@
         </p:nvSpPr>
         <p:spPr>
           <a:xfrm>
-            <a:off x="0" y="1051560"/>
-            <a:ext cx="12191695" cy="50292"/>
+            <a:off x="0" y="960120"/>
+            <a:ext cx="12191695" cy="45720"/>
           </a:xfrm>
           <a:prstGeom prst="rect">
             <a:avLst/>
@@ -8586,8 +9153,8 @@
         </p:nvSpPr>
         <p:spPr>
           <a:xfrm>
-            <a:off x="502920" y="109728"/>
-            <a:ext cx="11155680" cy="868680"/>
+            <a:off x="502920" y="73152"/>
+            <a:ext cx="11155680" cy="822960"/>
           </a:xfrm>
           <a:prstGeom prst="rect">
             <a:avLst/>
@@ -8595,44 +9162,68 @@
           <a:noFill/>
         </p:spPr>
         <p:txBody>
-          <a:bodyPr wrap="square" anchor="ctr" lIns="45720" rIns="45720" tIns="18288" bIns="18288">
+          <a:bodyPr wrap="square" anchor="ctr" lIns="36576" rIns="36576" tIns="36576" bIns="36576">
             <a:spAutoFit/>
           </a:bodyPr>
           <a:lstStyle/>
           <a:p>
             <a:r>
-              <a:rPr sz="1200" b="1" i="0">
+              <a:rPr sz="1300" b="1" i="0">
                 <a:solidFill>
                   <a:srgbClr val="BFDDE6"/>
                 </a:solidFill>
                 <a:latin typeface="Calibri"/>
               </a:rPr>
-              <a:t>Model clinic principal</a:t>
-            </a:r>
-          </a:p>
-          <a:p>
-            <a:r>
-              <a:rPr sz="2700" b="1" i="0">
+              <a:t>Fundamente</a:t>
+            </a:r>
+          </a:p>
+          <a:p>
+            <a:r>
+              <a:rPr sz="3000" b="1" i="0">
                 <a:solidFill>
                   <a:srgbClr val="FFFFFF"/>
                 </a:solidFill>
                 <a:latin typeface="Calibri"/>
               </a:rPr>
-              <a:t>Modelul SIDARTHE</a:t>
-            </a:r>
-          </a:p>
-        </p:txBody>
-      </p:sp>
-      <p:sp>
-        <p:nvSpPr>
-          <p:cNvPr id="5" name="TextBox 4"/>
+              <a:t>Diagrama modelului SIR</a:t>
+            </a:r>
+          </a:p>
+        </p:txBody>
+      </p:sp>
+      <p:pic>
+        <p:nvPicPr>
+          <p:cNvPr id="5" name="Picture 4" descr="sir_diagram.png"/>
+          <p:cNvPicPr>
+            <a:picLocks noChangeAspect="1"/>
+          </p:cNvPicPr>
+          <p:nvPr/>
+        </p:nvPicPr>
+        <p:blipFill>
+          <a:blip r:embed="rId2"/>
+          <a:stretch>
+            <a:fillRect/>
+          </a:stretch>
+        </p:blipFill>
+        <p:spPr>
+          <a:xfrm>
+            <a:off x="320040" y="2906782"/>
+            <a:ext cx="11548872" cy="1638795"/>
+          </a:xfrm>
+          <a:prstGeom prst="rect">
+            <a:avLst/>
+          </a:prstGeom>
+        </p:spPr>
+      </p:pic>
+      <p:sp>
+        <p:nvSpPr>
+          <p:cNvPr id="6" name="TextBox 5"/>
           <p:cNvSpPr txBox="1"/>
           <p:nvPr/>
         </p:nvSpPr>
         <p:spPr>
           <a:xfrm>
-            <a:off x="594360" y="1371600"/>
-            <a:ext cx="10972800" cy="4754880"/>
+            <a:off x="457200" y="6327648"/>
+            <a:ext cx="10515600" cy="411480"/>
           </a:xfrm>
           <a:prstGeom prst="rect">
             <a:avLst/>
@@ -8640,246 +9231,34 @@
           <a:noFill/>
         </p:spPr>
         <p:txBody>
-          <a:bodyPr wrap="square" anchor="t" lIns="45720" rIns="45720" tIns="18288" bIns="18288">
+          <a:bodyPr wrap="square" anchor="t" lIns="36576" rIns="36576" tIns="36576" bIns="36576">
             <a:spAutoFit/>
           </a:bodyPr>
           <a:lstStyle/>
           <a:p>
-            <a:pPr>
-              <a:spcBef>
-                <a:spcPts val="0"/>
-              </a:spcBef>
-              <a:spcAft>
-                <a:spcPts val="900"/>
-              </a:spcAft>
-            </a:pPr>
-            <a:r>
-              <a:rPr sz="1700" b="1" i="0">
-                <a:solidFill>
-                  <a:srgbClr val="1E88A8"/>
-                </a:solidFill>
-                <a:latin typeface="Calibri"/>
-              </a:rPr>
-              <a:t>▸ </a:t>
-            </a:r>
-            <a:r>
-              <a:rPr sz="1700" b="0" i="0">
-                <a:solidFill>
-                  <a:srgbClr val="232A2E"/>
-                </a:solidFill>
-                <a:latin typeface="Calibri"/>
-              </a:rPr>
-              <a:t>8 compartimente: S, I, D, A, R, T, H, E — și 16 rate de tranziție.</a:t>
-            </a:r>
-          </a:p>
-          <a:p>
-            <a:pPr>
-              <a:spcBef>
-                <a:spcPts val="0"/>
-              </a:spcBef>
-              <a:spcAft>
-                <a:spcPts val="900"/>
-              </a:spcAft>
-            </a:pPr>
-            <a:r>
-              <a:rPr sz="1700" b="1" i="0">
-                <a:solidFill>
-                  <a:srgbClr val="1E88A8"/>
-                </a:solidFill>
-                <a:latin typeface="Calibri"/>
-              </a:rPr>
-              <a:t>▸ </a:t>
-            </a:r>
-            <a:r>
-              <a:rPr sz="1700" b="0" i="0">
-                <a:solidFill>
-                  <a:srgbClr val="232A2E"/>
-                </a:solidFill>
-                <a:latin typeface="Calibri"/>
-              </a:rPr>
-              <a:t>Separă dimensiuni absente din SIR:</a:t>
-            </a:r>
-          </a:p>
-          <a:p>
-            <a:pPr lvl="1">
-              <a:spcBef>
-                <a:spcPts val="0"/>
-              </a:spcBef>
-              <a:spcAft>
-                <a:spcPts val="900"/>
-              </a:spcAft>
-            </a:pPr>
-            <a:r>
-              <a:rPr sz="1500" b="1" i="0">
+            <a:pPr algn="ctr"/>
+            <a:r>
+              <a:rPr sz="1400" b="0" i="1">
                 <a:solidFill>
                   <a:srgbClr val="6B767C"/>
                 </a:solidFill>
                 <a:latin typeface="Calibri"/>
               </a:rPr>
-              <a:t>–  </a:t>
-            </a:r>
-            <a:r>
-              <a:rPr sz="1500" b="0" i="0">
-                <a:solidFill>
-                  <a:srgbClr val="444C50"/>
-                </a:solidFill>
-                <a:latin typeface="Calibri"/>
-              </a:rPr>
-              <a:t>infectați nedepistați (I) vs. diagnosticați (D, R);</a:t>
-            </a:r>
-          </a:p>
-          <a:p>
-            <a:pPr lvl="1">
-              <a:spcBef>
-                <a:spcPts val="0"/>
-              </a:spcBef>
-              <a:spcAft>
-                <a:spcPts val="900"/>
-              </a:spcAft>
-            </a:pPr>
-            <a:r>
-              <a:rPr sz="1500" b="1" i="0">
-                <a:solidFill>
-                  <a:srgbClr val="6B767C"/>
-                </a:solidFill>
-                <a:latin typeface="Calibri"/>
-              </a:rPr>
-              <a:t>–  </a:t>
-            </a:r>
-            <a:r>
-              <a:rPr sz="1500" b="0" i="0">
-                <a:solidFill>
-                  <a:srgbClr val="444C50"/>
-                </a:solidFill>
-                <a:latin typeface="Calibri"/>
-              </a:rPr>
-              <a:t>forme simptomatice (A) vs. severe (T);</a:t>
-            </a:r>
-          </a:p>
-          <a:p>
-            <a:pPr lvl="1">
-              <a:spcBef>
-                <a:spcPts val="0"/>
-              </a:spcBef>
-              <a:spcAft>
-                <a:spcPts val="900"/>
-              </a:spcAft>
-            </a:pPr>
-            <a:r>
-              <a:rPr sz="1500" b="1" i="0">
-                <a:solidFill>
-                  <a:srgbClr val="6B767C"/>
-                </a:solidFill>
-                <a:latin typeface="Calibri"/>
-              </a:rPr>
-              <a:t>–  </a:t>
-            </a:r>
-            <a:r>
-              <a:rPr sz="1500" b="0" i="0">
-                <a:solidFill>
-                  <a:srgbClr val="444C50"/>
-                </a:solidFill>
-                <a:latin typeface="Calibri"/>
-              </a:rPr>
-              <a:t>vindecări (H) vs. decese (E), tratate explicit.</a:t>
-            </a:r>
-          </a:p>
-          <a:p>
-            <a:pPr>
-              <a:spcBef>
-                <a:spcPts val="0"/>
-              </a:spcBef>
-              <a:spcAft>
-                <a:spcPts val="900"/>
-              </a:spcAft>
-            </a:pPr>
-            <a:r>
-              <a:rPr sz="1700" b="1" i="0">
-                <a:solidFill>
-                  <a:srgbClr val="1E88A8"/>
-                </a:solidFill>
-                <a:latin typeface="Calibri"/>
-              </a:rPr>
-              <a:t>▸ </a:t>
-            </a:r>
-            <a:r>
-              <a:rPr sz="1700" b="0" i="0">
-                <a:solidFill>
-                  <a:srgbClr val="232A2E"/>
-                </a:solidFill>
-                <a:latin typeface="Calibri"/>
-              </a:rPr>
-              <a:t>Mai apropiat de structura reală a raportării (testare, diagnostic, severitate).</a:t>
-            </a:r>
-          </a:p>
-          <a:p>
-            <a:pPr>
-              <a:spcBef>
-                <a:spcPts val="0"/>
-              </a:spcBef>
-              <a:spcAft>
-                <a:spcPts val="900"/>
-              </a:spcAft>
-            </a:pPr>
-            <a:r>
-              <a:rPr sz="1700" b="1" i="0">
-                <a:solidFill>
-                  <a:srgbClr val="1E88A8"/>
-                </a:solidFill>
-                <a:latin typeface="Calibri"/>
-              </a:rPr>
-              <a:t>▸ </a:t>
-            </a:r>
-            <a:r>
-              <a:rPr sz="1700" b="0" i="0">
-                <a:solidFill>
-                  <a:srgbClr val="232A2E"/>
-                </a:solidFill>
-                <a:latin typeface="Calibri"/>
-              </a:rPr>
-              <a:t>Conservarea populației și pozitivitatea soluției — demonstrate analitic.</a:t>
-            </a:r>
-          </a:p>
-          <a:p>
-            <a:pPr>
-              <a:spcBef>
-                <a:spcPts val="0"/>
-              </a:spcBef>
-              <a:spcAft>
-                <a:spcPts val="900"/>
-              </a:spcAft>
-            </a:pPr>
-            <a:r>
-              <a:rPr sz="1700" b="1" i="0">
-                <a:solidFill>
-                  <a:srgbClr val="1E88A8"/>
-                </a:solidFill>
-                <a:latin typeface="Calibri"/>
-              </a:rPr>
-              <a:t>▸ </a:t>
-            </a:r>
-            <a:r>
-              <a:rPr sz="1700" b="0" i="0">
-                <a:solidFill>
-                  <a:srgbClr val="232A2E"/>
-                </a:solidFill>
-                <a:latin typeface="Calibri"/>
-              </a:rPr>
-              <a:t>Cost: mai mulți parametri ⇒ calibrare mai dificilă (compromis interpretabilitate ↔ identificabilitate).</a:t>
-            </a:r>
-          </a:p>
-        </p:txBody>
-      </p:sp>
-      <p:sp>
-        <p:nvSpPr>
-          <p:cNvPr id="6" name="TextBox 5"/>
+              <a:t>Fluxul compartimentelor: S → I → R</a:t>
+            </a:r>
+          </a:p>
+        </p:txBody>
+      </p:sp>
+      <p:sp>
+        <p:nvSpPr>
+          <p:cNvPr id="7" name="TextBox 6"/>
           <p:cNvSpPr txBox="1"/>
           <p:nvPr/>
         </p:nvSpPr>
         <p:spPr>
           <a:xfrm>
-            <a:off x="502920" y="6419088"/>
-            <a:ext cx="8229600" cy="365760"/>
+            <a:off x="11247120" y="6437376"/>
+            <a:ext cx="822960" cy="365760"/>
           </a:xfrm>
           <a:prstGeom prst="rect">
             <a:avLst/>
@@ -8887,48 +9266,14 @@
           <a:noFill/>
         </p:spPr>
         <p:txBody>
-          <a:bodyPr wrap="square" anchor="t" lIns="45720" rIns="45720" tIns="18288" bIns="18288">
+          <a:bodyPr wrap="square" anchor="t" lIns="36576" rIns="36576" tIns="36576" bIns="36576">
             <a:spAutoFit/>
           </a:bodyPr>
           <a:lstStyle/>
           <a:p>
-            <a:r>
-              <a:rPr sz="900" b="0" i="0">
-                <a:solidFill>
-                  <a:srgbClr val="6B767C"/>
-                </a:solidFill>
-                <a:latin typeface="Calibri"/>
-              </a:rPr>
-              <a:t>Sisteme e-medicine pentru date epidemiologice  ·  Geană Tudor-Bogdan</a:t>
-            </a:r>
-          </a:p>
-        </p:txBody>
-      </p:sp>
-      <p:sp>
-        <p:nvSpPr>
-          <p:cNvPr id="7" name="TextBox 6"/>
-          <p:cNvSpPr txBox="1"/>
-          <p:nvPr/>
-        </p:nvSpPr>
-        <p:spPr>
-          <a:xfrm>
-            <a:off x="11155680" y="6419088"/>
-            <a:ext cx="822960" cy="365760"/>
-          </a:xfrm>
-          <a:prstGeom prst="rect">
-            <a:avLst/>
-          </a:prstGeom>
-          <a:noFill/>
-        </p:spPr>
-        <p:txBody>
-          <a:bodyPr wrap="square" anchor="t" lIns="45720" rIns="45720" tIns="18288" bIns="18288">
-            <a:spAutoFit/>
-          </a:bodyPr>
-          <a:lstStyle/>
-          <a:p>
             <a:pPr algn="r"/>
             <a:r>
-              <a:rPr sz="1000" b="1" i="0">
+              <a:rPr sz="1200" b="1" i="0">
                 <a:solidFill>
                   <a:srgbClr val="6B767C"/>
                 </a:solidFill>
@@ -8966,7 +9311,7 @@
         <p:spPr>
           <a:xfrm>
             <a:off x="0" y="0"/>
-            <a:ext cx="12191695" cy="1051560"/>
+            <a:ext cx="12191695" cy="960120"/>
           </a:xfrm>
           <a:prstGeom prst="rect">
             <a:avLst/>
@@ -9009,8 +9354,8 @@
         </p:nvSpPr>
         <p:spPr>
           <a:xfrm>
-            <a:off x="0" y="1051560"/>
-            <a:ext cx="12191695" cy="50292"/>
+            <a:off x="0" y="960120"/>
+            <a:ext cx="12191695" cy="45720"/>
           </a:xfrm>
           <a:prstGeom prst="rect">
             <a:avLst/>
@@ -9053,8 +9398,8 @@
         </p:nvSpPr>
         <p:spPr>
           <a:xfrm>
-            <a:off x="502920" y="109728"/>
-            <a:ext cx="11155680" cy="868680"/>
+            <a:off x="502920" y="73152"/>
+            <a:ext cx="11155680" cy="822960"/>
           </a:xfrm>
           <a:prstGeom prst="rect">
             <a:avLst/>
@@ -9062,68 +9407,44 @@
           <a:noFill/>
         </p:spPr>
         <p:txBody>
-          <a:bodyPr wrap="square" anchor="ctr" lIns="45720" rIns="45720" tIns="18288" bIns="18288">
+          <a:bodyPr wrap="square" anchor="ctr" lIns="36576" rIns="36576" tIns="36576" bIns="36576">
             <a:spAutoFit/>
           </a:bodyPr>
           <a:lstStyle/>
           <a:p>
             <a:r>
-              <a:rPr sz="1200" b="1" i="0">
+              <a:rPr sz="1300" b="1" i="0">
                 <a:solidFill>
                   <a:srgbClr val="BFDDE6"/>
                 </a:solidFill>
                 <a:latin typeface="Calibri"/>
               </a:rPr>
-              <a:t>Proiectare</a:t>
-            </a:r>
-          </a:p>
-          <a:p>
-            <a:r>
-              <a:rPr sz="2700" b="1" i="0">
+              <a:t>Model clinic principal</a:t>
+            </a:r>
+          </a:p>
+          <a:p>
+            <a:r>
+              <a:rPr sz="3000" b="1" i="0">
                 <a:solidFill>
                   <a:srgbClr val="FFFFFF"/>
                 </a:solidFill>
                 <a:latin typeface="Calibri"/>
               </a:rPr>
-              <a:t>Arhitectura sistemului</a:t>
-            </a:r>
-          </a:p>
-        </p:txBody>
-      </p:sp>
-      <p:pic>
-        <p:nvPicPr>
-          <p:cNvPr id="5" name="Picture 4" descr="arhitectura.png"/>
-          <p:cNvPicPr>
-            <a:picLocks noChangeAspect="1"/>
-          </p:cNvPicPr>
-          <p:nvPr/>
-        </p:nvPicPr>
-        <p:blipFill>
-          <a:blip r:embed="rId2"/>
-          <a:stretch>
-            <a:fillRect/>
-          </a:stretch>
-        </p:blipFill>
-        <p:spPr>
-          <a:xfrm>
-            <a:off x="457200" y="1317226"/>
-            <a:ext cx="7680960" cy="4955067"/>
-          </a:xfrm>
-          <a:prstGeom prst="rect">
-            <a:avLst/>
-          </a:prstGeom>
-        </p:spPr>
-      </p:pic>
-      <p:sp>
-        <p:nvSpPr>
-          <p:cNvPr id="6" name="TextBox 5"/>
+              <a:t>Modelul SIDARTHE</a:t>
+            </a:r>
+          </a:p>
+        </p:txBody>
+      </p:sp>
+      <p:sp>
+        <p:nvSpPr>
+          <p:cNvPr id="5" name="TextBox 4"/>
           <p:cNvSpPr txBox="1"/>
           <p:nvPr/>
         </p:nvSpPr>
         <p:spPr>
           <a:xfrm>
-            <a:off x="8321040" y="1463040"/>
-            <a:ext cx="3566160" cy="4572000"/>
+            <a:off x="731520" y="1371600"/>
+            <a:ext cx="10789920" cy="4754880"/>
           </a:xfrm>
           <a:prstGeom prst="rect">
             <a:avLst/>
@@ -9131,7 +9452,7 @@
           <a:noFill/>
         </p:spPr>
         <p:txBody>
-          <a:bodyPr wrap="square" anchor="t" lIns="45720" rIns="45720" tIns="18288" bIns="18288">
+          <a:bodyPr wrap="square" anchor="ctr" lIns="36576" rIns="36576" tIns="36576" bIns="36576">
             <a:spAutoFit/>
           </a:bodyPr>
           <a:lstStyle/>
@@ -9141,26 +9462,26 @@
                 <a:spcPts val="0"/>
               </a:spcBef>
               <a:spcAft>
-                <a:spcPts val="1200"/>
+                <a:spcPts val="1800"/>
               </a:spcAft>
             </a:pPr>
             <a:r>
-              <a:rPr sz="1500" b="1" i="0">
+              <a:rPr sz="2700" b="1" i="0">
                 <a:solidFill>
                   <a:srgbClr val="1E88A8"/>
                 </a:solidFill>
                 <a:latin typeface="Calibri"/>
               </a:rPr>
-              <a:t>▸ </a:t>
-            </a:r>
-            <a:r>
-              <a:rPr sz="1500" b="0" i="0">
-                <a:solidFill>
-                  <a:srgbClr val="232A2E"/>
-                </a:solidFill>
-                <a:latin typeface="Calibri"/>
-              </a:rPr>
-              <a:t>API Go: REST, JWT, RBAC pe studii.</a:t>
+              <a:t>▸  </a:t>
+            </a:r>
+            <a:r>
+              <a:rPr sz="2700" b="0" i="0">
+                <a:solidFill>
+                  <a:srgbClr val="20282C"/>
+                </a:solidFill>
+                <a:latin typeface="Calibri"/>
+              </a:rPr>
+              <a:t>8 compartimente · 16 rate</a:t>
             </a:r>
           </a:p>
           <a:p>
@@ -9169,26 +9490,26 @@
                 <a:spcPts val="0"/>
               </a:spcBef>
               <a:spcAft>
-                <a:spcPts val="1200"/>
+                <a:spcPts val="1800"/>
               </a:spcAft>
             </a:pPr>
             <a:r>
-              <a:rPr sz="1500" b="1" i="0">
+              <a:rPr sz="2700" b="1" i="0">
                 <a:solidFill>
                   <a:srgbClr val="1E88A8"/>
                 </a:solidFill>
                 <a:latin typeface="Calibri"/>
               </a:rPr>
-              <a:t>▸ </a:t>
-            </a:r>
-            <a:r>
-              <a:rPr sz="1500" b="0" i="0">
-                <a:solidFill>
-                  <a:srgbClr val="232A2E"/>
-                </a:solidFill>
-                <a:latin typeface="Calibri"/>
-              </a:rPr>
-              <a:t>Redis: coadă de job-uri (decuplare).</a:t>
+              <a:t>▸  </a:t>
+            </a:r>
+            <a:r>
+              <a:rPr sz="2700" b="0" i="0">
+                <a:solidFill>
+                  <a:srgbClr val="20282C"/>
+                </a:solidFill>
+                <a:latin typeface="Calibri"/>
+              </a:rPr>
+              <a:t>Separă: nedepistați vs diagnosticați</a:t>
             </a:r>
           </a:p>
           <a:p>
@@ -9197,26 +9518,26 @@
                 <a:spcPts val="0"/>
               </a:spcBef>
               <a:spcAft>
-                <a:spcPts val="1200"/>
+                <a:spcPts val="1800"/>
               </a:spcAft>
             </a:pPr>
             <a:r>
-              <a:rPr sz="1500" b="1" i="0">
+              <a:rPr sz="2700" b="1" i="0">
                 <a:solidFill>
                   <a:srgbClr val="1E88A8"/>
                 </a:solidFill>
                 <a:latin typeface="Calibri"/>
               </a:rPr>
-              <a:t>▸ </a:t>
-            </a:r>
-            <a:r>
-              <a:rPr sz="1500" b="0" i="0">
-                <a:solidFill>
-                  <a:srgbClr val="232A2E"/>
-                </a:solidFill>
-                <a:latin typeface="Calibri"/>
-              </a:rPr>
-              <a:t>3 runnere: R / Julia / Python.</a:t>
+              <a:t>▸  </a:t>
+            </a:r>
+            <a:r>
+              <a:rPr sz="2700" b="0" i="0">
+                <a:solidFill>
+                  <a:srgbClr val="20282C"/>
+                </a:solidFill>
+                <a:latin typeface="Calibri"/>
+              </a:rPr>
+              <a:t>forme ușoare vs severe · vindecări vs decese</a:t>
             </a:r>
           </a:p>
           <a:p>
@@ -9225,26 +9546,26 @@
                 <a:spcPts val="0"/>
               </a:spcBef>
               <a:spcAft>
-                <a:spcPts val="1200"/>
+                <a:spcPts val="1800"/>
               </a:spcAft>
             </a:pPr>
             <a:r>
-              <a:rPr sz="1500" b="1" i="0">
+              <a:rPr sz="2700" b="1" i="0">
                 <a:solidFill>
                   <a:srgbClr val="1E88A8"/>
                 </a:solidFill>
                 <a:latin typeface="Calibri"/>
               </a:rPr>
-              <a:t>▸ </a:t>
-            </a:r>
-            <a:r>
-              <a:rPr sz="1500" b="0" i="0">
-                <a:solidFill>
-                  <a:srgbClr val="232A2E"/>
-                </a:solidFill>
-                <a:latin typeface="Calibri"/>
-              </a:rPr>
-              <a:t>YugabyteDB: SQL distribuit, RF = 3.</a:t>
+              <a:t>▸  </a:t>
+            </a:r>
+            <a:r>
+              <a:rPr sz="2700" b="0" i="0">
+                <a:solidFill>
+                  <a:srgbClr val="20282C"/>
+                </a:solidFill>
+                <a:latin typeface="Calibri"/>
+              </a:rPr>
+              <a:t>Mai aproape de raportarea clinică reală</a:t>
             </a:r>
           </a:p>
           <a:p>
@@ -9253,68 +9574,40 @@
                 <a:spcPts val="0"/>
               </a:spcBef>
               <a:spcAft>
-                <a:spcPts val="1200"/>
+                <a:spcPts val="1800"/>
               </a:spcAft>
             </a:pPr>
             <a:r>
-              <a:rPr sz="1500" b="1" i="0">
+              <a:rPr sz="2700" b="1" i="0">
                 <a:solidFill>
                   <a:srgbClr val="1E88A8"/>
                 </a:solidFill>
                 <a:latin typeface="Calibri"/>
               </a:rPr>
-              <a:t>▸ </a:t>
-            </a:r>
-            <a:r>
-              <a:rPr sz="1500" b="0" i="0">
-                <a:solidFill>
-                  <a:srgbClr val="232A2E"/>
-                </a:solidFill>
-                <a:latin typeface="Calibri"/>
-              </a:rPr>
-              <a:t>2 interfețe Vue.js: cercetători + super-admin.</a:t>
-            </a:r>
-          </a:p>
-          <a:p>
-            <a:pPr>
-              <a:spcBef>
-                <a:spcPts val="0"/>
-              </a:spcBef>
-              <a:spcAft>
-                <a:spcPts val="1200"/>
-              </a:spcAft>
-            </a:pPr>
-            <a:r>
-              <a:rPr sz="1500" b="1" i="0">
-                <a:solidFill>
-                  <a:srgbClr val="1E88A8"/>
-                </a:solidFill>
-                <a:latin typeface="Calibri"/>
-              </a:rPr>
-              <a:t>▸ </a:t>
-            </a:r>
-            <a:r>
-              <a:rPr sz="1500" b="0" i="0">
-                <a:solidFill>
-                  <a:srgbClr val="232A2E"/>
-                </a:solidFill>
-                <a:latin typeface="Calibri"/>
-              </a:rPr>
-              <a:t>Flux complet de simulare, asincron.</a:t>
-            </a:r>
-          </a:p>
-        </p:txBody>
-      </p:sp>
-      <p:sp>
-        <p:nvSpPr>
-          <p:cNvPr id="7" name="TextBox 6"/>
+              <a:t>▸  </a:t>
+            </a:r>
+            <a:r>
+              <a:rPr sz="2700" b="0" i="0">
+                <a:solidFill>
+                  <a:srgbClr val="20282C"/>
+                </a:solidFill>
+                <a:latin typeface="Calibri"/>
+              </a:rPr>
+              <a:t>Conservare + pozitivitate — demonstrate</a:t>
+            </a:r>
+          </a:p>
+        </p:txBody>
+      </p:sp>
+      <p:sp>
+        <p:nvSpPr>
+          <p:cNvPr id="6" name="TextBox 5"/>
           <p:cNvSpPr txBox="1"/>
           <p:nvPr/>
         </p:nvSpPr>
         <p:spPr>
           <a:xfrm>
-            <a:off x="502920" y="6419088"/>
-            <a:ext cx="8229600" cy="365760"/>
+            <a:off x="11247120" y="6437376"/>
+            <a:ext cx="822960" cy="365760"/>
           </a:xfrm>
           <a:prstGeom prst="rect">
             <a:avLst/>
@@ -9322,48 +9615,14 @@
           <a:noFill/>
         </p:spPr>
         <p:txBody>
-          <a:bodyPr wrap="square" anchor="t" lIns="45720" rIns="45720" tIns="18288" bIns="18288">
+          <a:bodyPr wrap="square" anchor="t" lIns="36576" rIns="36576" tIns="36576" bIns="36576">
             <a:spAutoFit/>
           </a:bodyPr>
           <a:lstStyle/>
           <a:p>
-            <a:r>
-              <a:rPr sz="900" b="0" i="0">
-                <a:solidFill>
-                  <a:srgbClr val="6B767C"/>
-                </a:solidFill>
-                <a:latin typeface="Calibri"/>
-              </a:rPr>
-              <a:t>Sisteme e-medicine pentru date epidemiologice  ·  Geană Tudor-Bogdan</a:t>
-            </a:r>
-          </a:p>
-        </p:txBody>
-      </p:sp>
-      <p:sp>
-        <p:nvSpPr>
-          <p:cNvPr id="8" name="TextBox 7"/>
-          <p:cNvSpPr txBox="1"/>
-          <p:nvPr/>
-        </p:nvSpPr>
-        <p:spPr>
-          <a:xfrm>
-            <a:off x="11155680" y="6419088"/>
-            <a:ext cx="822960" cy="365760"/>
-          </a:xfrm>
-          <a:prstGeom prst="rect">
-            <a:avLst/>
-          </a:prstGeom>
-          <a:noFill/>
-        </p:spPr>
-        <p:txBody>
-          <a:bodyPr wrap="square" anchor="t" lIns="45720" rIns="45720" tIns="18288" bIns="18288">
-            <a:spAutoFit/>
-          </a:bodyPr>
-          <a:lstStyle/>
-          <a:p>
             <a:pPr algn="r"/>
             <a:r>
-              <a:rPr sz="1000" b="1" i="0">
+              <a:rPr sz="1200" b="1" i="0">
                 <a:solidFill>
                   <a:srgbClr val="6B767C"/>
                 </a:solidFill>
@@ -9401,7 +9660,7 @@
         <p:spPr>
           <a:xfrm>
             <a:off x="0" y="0"/>
-            <a:ext cx="12191695" cy="1051560"/>
+            <a:ext cx="12191695" cy="960120"/>
           </a:xfrm>
           <a:prstGeom prst="rect">
             <a:avLst/>
@@ -9444,8 +9703,8 @@
         </p:nvSpPr>
         <p:spPr>
           <a:xfrm>
-            <a:off x="0" y="1051560"/>
-            <a:ext cx="12191695" cy="50292"/>
+            <a:off x="0" y="960120"/>
+            <a:ext cx="12191695" cy="45720"/>
           </a:xfrm>
           <a:prstGeom prst="rect">
             <a:avLst/>
@@ -9488,8 +9747,8 @@
         </p:nvSpPr>
         <p:spPr>
           <a:xfrm>
-            <a:off x="502920" y="109728"/>
-            <a:ext cx="11155680" cy="868680"/>
+            <a:off x="502920" y="73152"/>
+            <a:ext cx="11155680" cy="822960"/>
           </a:xfrm>
           <a:prstGeom prst="rect">
             <a:avLst/>
@@ -9497,44 +9756,68 @@
           <a:noFill/>
         </p:spPr>
         <p:txBody>
-          <a:bodyPr wrap="square" anchor="ctr" lIns="45720" rIns="45720" tIns="18288" bIns="18288">
+          <a:bodyPr wrap="square" anchor="ctr" lIns="36576" rIns="36576" tIns="36576" bIns="36576">
             <a:spAutoFit/>
           </a:bodyPr>
           <a:lstStyle/>
           <a:p>
             <a:r>
-              <a:rPr sz="1200" b="1" i="0">
+              <a:rPr sz="1300" b="1" i="0">
                 <a:solidFill>
                   <a:srgbClr val="BFDDE6"/>
                 </a:solidFill>
                 <a:latin typeface="Calibri"/>
               </a:rPr>
-              <a:t>Implementare</a:t>
-            </a:r>
-          </a:p>
-          <a:p>
-            <a:r>
-              <a:rPr sz="2700" b="1" i="0">
+              <a:t>Proiectare</a:t>
+            </a:r>
+          </a:p>
+          <a:p>
+            <a:r>
+              <a:rPr sz="3000" b="1" i="0">
                 <a:solidFill>
                   <a:srgbClr val="FFFFFF"/>
                 </a:solidFill>
                 <a:latin typeface="Calibri"/>
               </a:rPr>
-              <a:t>Trei limbaje, un contract comun</a:t>
-            </a:r>
-          </a:p>
-        </p:txBody>
-      </p:sp>
-      <p:sp>
-        <p:nvSpPr>
-          <p:cNvPr id="5" name="TextBox 4"/>
+              <a:t>Arhitectura sistemului</a:t>
+            </a:r>
+          </a:p>
+        </p:txBody>
+      </p:sp>
+      <p:pic>
+        <p:nvPicPr>
+          <p:cNvPr id="5" name="Picture 4" descr="arhitectura.png"/>
+          <p:cNvPicPr>
+            <a:picLocks noChangeAspect="1"/>
+          </p:cNvPicPr>
+          <p:nvPr/>
+        </p:nvPicPr>
+        <p:blipFill>
+          <a:blip r:embed="rId2"/>
+          <a:stretch>
+            <a:fillRect/>
+          </a:stretch>
+        </p:blipFill>
+        <p:spPr>
+          <a:xfrm>
+            <a:off x="4360881" y="1188720"/>
+            <a:ext cx="3467190" cy="5074920"/>
+          </a:xfrm>
+          <a:prstGeom prst="rect">
+            <a:avLst/>
+          </a:prstGeom>
+        </p:spPr>
+      </p:pic>
+      <p:sp>
+        <p:nvSpPr>
+          <p:cNvPr id="6" name="TextBox 5"/>
           <p:cNvSpPr txBox="1"/>
           <p:nvPr/>
         </p:nvSpPr>
         <p:spPr>
           <a:xfrm>
-            <a:off x="594360" y="1371600"/>
-            <a:ext cx="10972800" cy="4754880"/>
+            <a:off x="457200" y="6327648"/>
+            <a:ext cx="10515600" cy="411480"/>
           </a:xfrm>
           <a:prstGeom prst="rect">
             <a:avLst/>
@@ -9542,218 +9825,34 @@
           <a:noFill/>
         </p:spPr>
         <p:txBody>
-          <a:bodyPr wrap="square" anchor="t" lIns="45720" rIns="45720" tIns="18288" bIns="18288">
+          <a:bodyPr wrap="square" anchor="t" lIns="36576" rIns="36576" tIns="36576" bIns="36576">
             <a:spAutoFit/>
           </a:bodyPr>
           <a:lstStyle/>
           <a:p>
-            <a:pPr>
-              <a:spcBef>
-                <a:spcPts val="0"/>
-              </a:spcBef>
-              <a:spcAft>
-                <a:spcPts val="1100"/>
-              </a:spcAft>
-            </a:pPr>
-            <a:r>
-              <a:rPr sz="1800" b="1" i="0">
-                <a:solidFill>
-                  <a:srgbClr val="1E88A8"/>
-                </a:solidFill>
-                <a:latin typeface="Calibri"/>
-              </a:rPr>
-              <a:t>▸ </a:t>
-            </a:r>
-            <a:r>
-              <a:rPr sz="1800" b="0" i="0">
-                <a:solidFill>
-                  <a:srgbClr val="232A2E"/>
-                </a:solidFill>
-                <a:latin typeface="Calibri"/>
-              </a:rPr>
-              <a:t>Același contract de simulare în trei ecosisteme, cu biblioteca uzuală a fiecăruia:</a:t>
-            </a:r>
-          </a:p>
-          <a:p>
-            <a:pPr lvl="1">
-              <a:spcBef>
-                <a:spcPts val="0"/>
-              </a:spcBef>
-              <a:spcAft>
-                <a:spcPts val="1100"/>
-              </a:spcAft>
-            </a:pPr>
-            <a:r>
-              <a:rPr sz="1600" b="1" i="0">
+            <a:pPr algn="ctr"/>
+            <a:r>
+              <a:rPr sz="1400" b="0" i="1">
                 <a:solidFill>
                   <a:srgbClr val="6B767C"/>
                 </a:solidFill>
                 <a:latin typeface="Calibri"/>
               </a:rPr>
-              <a:t>–  </a:t>
-            </a:r>
-            <a:r>
-              <a:rPr sz="1600" b="0" i="0">
-                <a:solidFill>
-                  <a:srgbClr val="444C50"/>
-                </a:solidFill>
-                <a:latin typeface="Calibri"/>
-              </a:rPr>
-              <a:t>R — deSolve (RK4, pas fix h = 1);</a:t>
-            </a:r>
-          </a:p>
-          <a:p>
-            <a:pPr lvl="1">
-              <a:spcBef>
-                <a:spcPts val="0"/>
-              </a:spcBef>
-              <a:spcAft>
-                <a:spcPts val="1100"/>
-              </a:spcAft>
-            </a:pPr>
-            <a:r>
-              <a:rPr sz="1600" b="1" i="0">
-                <a:solidFill>
-                  <a:srgbClr val="6B767C"/>
-                </a:solidFill>
-                <a:latin typeface="Calibri"/>
-              </a:rPr>
-              <a:t>–  </a:t>
-            </a:r>
-            <a:r>
-              <a:rPr sz="1600" b="0" i="0">
-                <a:solidFill>
-                  <a:srgbClr val="444C50"/>
-                </a:solidFill>
-                <a:latin typeface="Calibri"/>
-              </a:rPr>
-              <a:t>Julia — DifferentialEquations.jl (Tsit5, adaptiv);</a:t>
-            </a:r>
-          </a:p>
-          <a:p>
-            <a:pPr lvl="1">
-              <a:spcBef>
-                <a:spcPts val="0"/>
-              </a:spcBef>
-              <a:spcAft>
-                <a:spcPts val="1100"/>
-              </a:spcAft>
-            </a:pPr>
-            <a:r>
-              <a:rPr sz="1600" b="1" i="0">
-                <a:solidFill>
-                  <a:srgbClr val="6B767C"/>
-                </a:solidFill>
-                <a:latin typeface="Calibri"/>
-              </a:rPr>
-              <a:t>–  </a:t>
-            </a:r>
-            <a:r>
-              <a:rPr sz="1600" b="0" i="0">
-                <a:solidFill>
-                  <a:srgbClr val="444C50"/>
-                </a:solidFill>
-                <a:latin typeface="Calibri"/>
-              </a:rPr>
-              <a:t>Python — SciPy solve_ivp (RK45, adaptiv).</a:t>
-            </a:r>
-          </a:p>
-          <a:p>
-            <a:pPr>
-              <a:spcBef>
-                <a:spcPts val="0"/>
-              </a:spcBef>
-              <a:spcAft>
-                <a:spcPts val="1100"/>
-              </a:spcAft>
-            </a:pPr>
-            <a:r>
-              <a:rPr sz="1800" b="1" i="0">
-                <a:solidFill>
-                  <a:srgbClr val="1E88A8"/>
-                </a:solidFill>
-                <a:latin typeface="Calibri"/>
-              </a:rPr>
-              <a:t>▸ </a:t>
-            </a:r>
-            <a:r>
-              <a:rPr sz="1800" b="0" i="0">
-                <a:solidFill>
-                  <a:srgbClr val="232A2E"/>
-                </a:solidFill>
-                <a:latin typeface="Calibri"/>
-              </a:rPr>
-              <a:t>Comunică prin același mesaj Redis și scriu în aceeași schemă de rezultate (JSONB compartments).</a:t>
-            </a:r>
-          </a:p>
-          <a:p>
-            <a:pPr>
-              <a:spcBef>
-                <a:spcPts val="0"/>
-              </a:spcBef>
-              <a:spcAft>
-                <a:spcPts val="1100"/>
-              </a:spcAft>
-            </a:pPr>
-            <a:r>
-              <a:rPr sz="1800" b="1" i="0">
-                <a:solidFill>
-                  <a:srgbClr val="1E88A8"/>
-                </a:solidFill>
-                <a:latin typeface="Calibri"/>
-              </a:rPr>
-              <a:t>▸ </a:t>
-            </a:r>
-            <a:r>
-              <a:rPr sz="1800" b="0" i="0">
-                <a:solidFill>
-                  <a:srgbClr val="232A2E"/>
-                </a:solidFill>
-                <a:latin typeface="Calibri"/>
-              </a:rPr>
-              <a:t>Sunt interschimbabile și evaluate în condiții identice — comparație între ecosisteme, nu doar sintaxe.</a:t>
-            </a:r>
-          </a:p>
-          <a:p>
-            <a:pPr>
-              <a:spcBef>
-                <a:spcPts val="0"/>
-              </a:spcBef>
-              <a:spcAft>
-                <a:spcPts val="1100"/>
-              </a:spcAft>
-            </a:pPr>
-            <a:r>
-              <a:rPr sz="1800" b="1" i="0">
-                <a:solidFill>
-                  <a:srgbClr val="1E88A8"/>
-                </a:solidFill>
-                <a:latin typeface="Calibri"/>
-              </a:rPr>
-              <a:t>▸ </a:t>
-            </a:r>
-            <a:r>
-              <a:rPr sz="1800" b="0" i="0">
-                <a:solidFill>
-                  <a:srgbClr val="232A2E"/>
-                </a:solidFill>
-                <a:latin typeface="Calibri"/>
-              </a:rPr>
-              <a:t>Aceeași disciplină de colectare a metricilor (wall-time, CPU, memorie) pentru fiecare rulare.</a:t>
-            </a:r>
-          </a:p>
-        </p:txBody>
-      </p:sp>
-      <p:sp>
-        <p:nvSpPr>
-          <p:cNvPr id="6" name="TextBox 5"/>
+              <a:t>Flux de simulare asincron · 2 interfețe Vue.js peste același API</a:t>
+            </a:r>
+          </a:p>
+        </p:txBody>
+      </p:sp>
+      <p:sp>
+        <p:nvSpPr>
+          <p:cNvPr id="7" name="TextBox 6"/>
           <p:cNvSpPr txBox="1"/>
           <p:nvPr/>
         </p:nvSpPr>
         <p:spPr>
           <a:xfrm>
-            <a:off x="502920" y="6419088"/>
-            <a:ext cx="8229600" cy="365760"/>
+            <a:off x="11247120" y="6437376"/>
+            <a:ext cx="822960" cy="365760"/>
           </a:xfrm>
           <a:prstGeom prst="rect">
             <a:avLst/>
@@ -9761,48 +9860,14 @@
           <a:noFill/>
         </p:spPr>
         <p:txBody>
-          <a:bodyPr wrap="square" anchor="t" lIns="45720" rIns="45720" tIns="18288" bIns="18288">
+          <a:bodyPr wrap="square" anchor="t" lIns="36576" rIns="36576" tIns="36576" bIns="36576">
             <a:spAutoFit/>
           </a:bodyPr>
           <a:lstStyle/>
           <a:p>
-            <a:r>
-              <a:rPr sz="900" b="0" i="0">
-                <a:solidFill>
-                  <a:srgbClr val="6B767C"/>
-                </a:solidFill>
-                <a:latin typeface="Calibri"/>
-              </a:rPr>
-              <a:t>Sisteme e-medicine pentru date epidemiologice  ·  Geană Tudor-Bogdan</a:t>
-            </a:r>
-          </a:p>
-        </p:txBody>
-      </p:sp>
-      <p:sp>
-        <p:nvSpPr>
-          <p:cNvPr id="7" name="TextBox 6"/>
-          <p:cNvSpPr txBox="1"/>
-          <p:nvPr/>
-        </p:nvSpPr>
-        <p:spPr>
-          <a:xfrm>
-            <a:off x="11155680" y="6419088"/>
-            <a:ext cx="822960" cy="365760"/>
-          </a:xfrm>
-          <a:prstGeom prst="rect">
-            <a:avLst/>
-          </a:prstGeom>
-          <a:noFill/>
-        </p:spPr>
-        <p:txBody>
-          <a:bodyPr wrap="square" anchor="t" lIns="45720" rIns="45720" tIns="18288" bIns="18288">
-            <a:spAutoFit/>
-          </a:bodyPr>
-          <a:lstStyle/>
-          <a:p>
             <a:pPr algn="r"/>
             <a:r>
-              <a:rPr sz="1000" b="1" i="0">
+              <a:rPr sz="1200" b="1" i="0">
                 <a:solidFill>
                   <a:srgbClr val="6B767C"/>
                 </a:solidFill>
@@ -9840,7 +9905,7 @@
         <p:spPr>
           <a:xfrm>
             <a:off x="0" y="0"/>
-            <a:ext cx="12191695" cy="1051560"/>
+            <a:ext cx="12191695" cy="960120"/>
           </a:xfrm>
           <a:prstGeom prst="rect">
             <a:avLst/>
@@ -9883,8 +9948,8 @@
         </p:nvSpPr>
         <p:spPr>
           <a:xfrm>
-            <a:off x="0" y="1051560"/>
-            <a:ext cx="12191695" cy="50292"/>
+            <a:off x="0" y="960120"/>
+            <a:ext cx="12191695" cy="45720"/>
           </a:xfrm>
           <a:prstGeom prst="rect">
             <a:avLst/>
@@ -9927,8 +9992,8 @@
         </p:nvSpPr>
         <p:spPr>
           <a:xfrm>
-            <a:off x="502920" y="109728"/>
-            <a:ext cx="11155680" cy="868680"/>
+            <a:off x="502920" y="73152"/>
+            <a:ext cx="11155680" cy="822960"/>
           </a:xfrm>
           <a:prstGeom prst="rect">
             <a:avLst/>
@@ -9936,30 +10001,30 @@
           <a:noFill/>
         </p:spPr>
         <p:txBody>
-          <a:bodyPr wrap="square" anchor="ctr" lIns="45720" rIns="45720" tIns="18288" bIns="18288">
+          <a:bodyPr wrap="square" anchor="ctr" lIns="36576" rIns="36576" tIns="36576" bIns="36576">
             <a:spAutoFit/>
           </a:bodyPr>
           <a:lstStyle/>
           <a:p>
             <a:r>
-              <a:rPr sz="1200" b="1" i="0">
+              <a:rPr sz="1300" b="1" i="0">
                 <a:solidFill>
                   <a:srgbClr val="BFDDE6"/>
                 </a:solidFill>
                 <a:latin typeface="Calibri"/>
               </a:rPr>
-              <a:t>Extensie predictivă</a:t>
-            </a:r>
-          </a:p>
-          <a:p>
-            <a:r>
-              <a:rPr sz="2700" b="1" i="0">
+              <a:t>Implementare</a:t>
+            </a:r>
+          </a:p>
+          <a:p>
+            <a:r>
+              <a:rPr sz="3000" b="1" i="0">
                 <a:solidFill>
                   <a:srgbClr val="FFFFFF"/>
                 </a:solidFill>
                 <a:latin typeface="Calibri"/>
               </a:rPr>
-              <a:t>Predicție epidemiologică cu LSTM</a:t>
+              <a:t>Trei limbaje, un contract</a:t>
             </a:r>
           </a:p>
         </p:txBody>
@@ -9972,8 +10037,8 @@
         </p:nvSpPr>
         <p:spPr>
           <a:xfrm>
-            <a:off x="594360" y="1371600"/>
-            <a:ext cx="10972800" cy="4754880"/>
+            <a:off x="731520" y="1371600"/>
+            <a:ext cx="10789920" cy="4754880"/>
           </a:xfrm>
           <a:prstGeom prst="rect">
             <a:avLst/>
@@ -9981,7 +10046,7 @@
           <a:noFill/>
         </p:spPr>
         <p:txBody>
-          <a:bodyPr wrap="square" anchor="t" lIns="45720" rIns="45720" tIns="18288" bIns="18288">
+          <a:bodyPr wrap="square" anchor="ctr" lIns="36576" rIns="36576" tIns="36576" bIns="36576">
             <a:spAutoFit/>
           </a:bodyPr>
           <a:lstStyle/>
@@ -9991,26 +10056,26 @@
                 <a:spcPts val="0"/>
               </a:spcBef>
               <a:spcAft>
-                <a:spcPts val="1100"/>
+                <a:spcPts val="1800"/>
               </a:spcAft>
             </a:pPr>
             <a:r>
-              <a:rPr sz="1800" b="1" i="0">
+              <a:rPr sz="2700" b="1" i="0">
                 <a:solidFill>
                   <a:srgbClr val="1E88A8"/>
                 </a:solidFill>
                 <a:latin typeface="Calibri"/>
               </a:rPr>
-              <a:t>▸ </a:t>
-            </a:r>
-            <a:r>
-              <a:rPr sz="1800" b="0" i="0">
-                <a:solidFill>
-                  <a:srgbClr val="232A2E"/>
-                </a:solidFill>
-                <a:latin typeface="Calibri"/>
-              </a:rPr>
-              <a:t>Celulă LSTM implementată manual în NumPy (3 porți, BPTT, coborâre pe gradient stochastic cu clipping).</a:t>
+              <a:t>▸  </a:t>
+            </a:r>
+            <a:r>
+              <a:rPr sz="2700" b="0" i="0">
+                <a:solidFill>
+                  <a:srgbClr val="20282C"/>
+                </a:solidFill>
+                <a:latin typeface="Calibri"/>
+              </a:rPr>
+              <a:t>R — deSolve (RK4)</a:t>
             </a:r>
           </a:p>
           <a:p>
@@ -10019,26 +10084,26 @@
                 <a:spcPts val="0"/>
               </a:spcBef>
               <a:spcAft>
-                <a:spcPts val="1100"/>
+                <a:spcPts val="1800"/>
               </a:spcAft>
             </a:pPr>
             <a:r>
-              <a:rPr sz="1800" b="1" i="0">
+              <a:rPr sz="2700" b="1" i="0">
                 <a:solidFill>
                   <a:srgbClr val="1E88A8"/>
                 </a:solidFill>
                 <a:latin typeface="Calibri"/>
               </a:rPr>
-              <a:t>▸ </a:t>
-            </a:r>
-            <a:r>
-              <a:rPr sz="1800" b="0" i="0">
-                <a:solidFill>
-                  <a:srgbClr val="232A2E"/>
-                </a:solidFill>
-                <a:latin typeface="Calibri"/>
-              </a:rPr>
-              <a:t>Univariată și independentă de modelele compartimentale; rulată de un runner dedicat, izolat.</a:t>
+              <a:t>▸  </a:t>
+            </a:r>
+            <a:r>
+              <a:rPr sz="2700" b="0" i="0">
+                <a:solidFill>
+                  <a:srgbClr val="20282C"/>
+                </a:solidFill>
+                <a:latin typeface="Calibri"/>
+              </a:rPr>
+              <a:t>Julia — DifferentialEquations.jl (Tsit5)</a:t>
             </a:r>
           </a:p>
           <a:p>
@@ -10047,82 +10112,26 @@
                 <a:spcPts val="0"/>
               </a:spcBef>
               <a:spcAft>
-                <a:spcPts val="1100"/>
+                <a:spcPts val="1800"/>
               </a:spcAft>
             </a:pPr>
             <a:r>
-              <a:rPr sz="1800" b="1" i="0">
+              <a:rPr sz="2700" b="1" i="0">
                 <a:solidFill>
                   <a:srgbClr val="1E88A8"/>
                 </a:solidFill>
                 <a:latin typeface="Calibri"/>
               </a:rPr>
-              <a:t>▸ </a:t>
-            </a:r>
-            <a:r>
-              <a:rPr sz="1800" b="0" i="0">
-                <a:solidFill>
-                  <a:srgbClr val="232A2E"/>
-                </a:solidFill>
-                <a:latin typeface="Calibri"/>
-              </a:rPr>
-              <a:t>Validare ONESTĂ față de repere triviale, pe seria României:</a:t>
-            </a:r>
-          </a:p>
-          <a:p>
-            <a:pPr lvl="1">
-              <a:spcBef>
-                <a:spcPts val="0"/>
-              </a:spcBef>
-              <a:spcAft>
-                <a:spcPts val="1100"/>
-              </a:spcAft>
-            </a:pPr>
-            <a:r>
-              <a:rPr sz="1600" b="1" i="0">
-                <a:solidFill>
-                  <a:srgbClr val="6B767C"/>
-                </a:solidFill>
-                <a:latin typeface="Calibri"/>
-              </a:rPr>
-              <a:t>–  </a:t>
-            </a:r>
-            <a:r>
-              <a:rPr sz="1600" b="0" i="0">
-                <a:solidFill>
-                  <a:srgbClr val="444C50"/>
-                </a:solidFill>
-                <a:latin typeface="Calibri"/>
-              </a:rPr>
-              <a:t>persistența domină LSTM la orizontul de 1 zi (MAE 251 vs. 755);</a:t>
-            </a:r>
-          </a:p>
-          <a:p>
-            <a:pPr lvl="1">
-              <a:spcBef>
-                <a:spcPts val="0"/>
-              </a:spcBef>
-              <a:spcAft>
-                <a:spcPts val="1100"/>
-              </a:spcAft>
-            </a:pPr>
-            <a:r>
-              <a:rPr sz="1600" b="1" i="0">
-                <a:solidFill>
-                  <a:srgbClr val="6B767C"/>
-                </a:solidFill>
-                <a:latin typeface="Calibri"/>
-              </a:rPr>
-              <a:t>–  </a:t>
-            </a:r>
-            <a:r>
-              <a:rPr sz="1600" b="0" i="0">
-                <a:solidFill>
-                  <a:srgbClr val="444C50"/>
-                </a:solidFill>
-                <a:latin typeface="Calibri"/>
-              </a:rPr>
-              <a:t>85% din zilele de test sunt plate (raportare săptămânală OWID).</a:t>
+              <a:t>▸  </a:t>
+            </a:r>
+            <a:r>
+              <a:rPr sz="2700" b="0" i="0">
+                <a:solidFill>
+                  <a:srgbClr val="20282C"/>
+                </a:solidFill>
+                <a:latin typeface="Calibri"/>
+              </a:rPr>
+              <a:t>Python — SciPy solve_ivp (RK45)</a:t>
             </a:r>
           </a:p>
           <a:p>
@@ -10131,26 +10140,26 @@
                 <a:spcPts val="0"/>
               </a:spcBef>
               <a:spcAft>
-                <a:spcPts val="1100"/>
+                <a:spcPts val="1800"/>
               </a:spcAft>
             </a:pPr>
             <a:r>
-              <a:rPr sz="1800" b="1" i="0">
+              <a:rPr sz="2700" b="1" i="0">
                 <a:solidFill>
                   <a:srgbClr val="1E88A8"/>
                 </a:solidFill>
                 <a:latin typeface="Calibri"/>
               </a:rPr>
-              <a:t>▸ </a:t>
-            </a:r>
-            <a:r>
-              <a:rPr sz="1800" b="0" i="0">
-                <a:solidFill>
-                  <a:srgbClr val="232A2E"/>
-                </a:solidFill>
-                <a:latin typeface="Calibri"/>
-              </a:rPr>
-              <a:t>Concluzie: rol delimitat la prognoză pe termen scurt și corecție de reziduuri, nu înlocuitor al modelelor.</a:t>
+              <a:t>▸  </a:t>
+            </a:r>
+            <a:r>
+              <a:rPr sz="2700" b="0" i="0">
+                <a:solidFill>
+                  <a:srgbClr val="20282C"/>
+                </a:solidFill>
+                <a:latin typeface="Calibri"/>
+              </a:rPr>
+              <a:t>Aceeași coadă Redis + schemă JSONB → interschimbabile</a:t>
             </a:r>
           </a:p>
         </p:txBody>
@@ -10163,8 +10172,8 @@
         </p:nvSpPr>
         <p:spPr>
           <a:xfrm>
-            <a:off x="502920" y="6419088"/>
-            <a:ext cx="8229600" cy="365760"/>
+            <a:off x="11247120" y="6437376"/>
+            <a:ext cx="822960" cy="365760"/>
           </a:xfrm>
           <a:prstGeom prst="rect">
             <a:avLst/>
@@ -10172,48 +10181,14 @@
           <a:noFill/>
         </p:spPr>
         <p:txBody>
-          <a:bodyPr wrap="square" anchor="t" lIns="45720" rIns="45720" tIns="18288" bIns="18288">
+          <a:bodyPr wrap="square" anchor="t" lIns="36576" rIns="36576" tIns="36576" bIns="36576">
             <a:spAutoFit/>
           </a:bodyPr>
           <a:lstStyle/>
           <a:p>
-            <a:r>
-              <a:rPr sz="900" b="0" i="0">
-                <a:solidFill>
-                  <a:srgbClr val="6B767C"/>
-                </a:solidFill>
-                <a:latin typeface="Calibri"/>
-              </a:rPr>
-              <a:t>Sisteme e-medicine pentru date epidemiologice  ·  Geană Tudor-Bogdan</a:t>
-            </a:r>
-          </a:p>
-        </p:txBody>
-      </p:sp>
-      <p:sp>
-        <p:nvSpPr>
-          <p:cNvPr id="7" name="TextBox 6"/>
-          <p:cNvSpPr txBox="1"/>
-          <p:nvPr/>
-        </p:nvSpPr>
-        <p:spPr>
-          <a:xfrm>
-            <a:off x="11155680" y="6419088"/>
-            <a:ext cx="822960" cy="365760"/>
-          </a:xfrm>
-          <a:prstGeom prst="rect">
-            <a:avLst/>
-          </a:prstGeom>
-          <a:noFill/>
-        </p:spPr>
-        <p:txBody>
-          <a:bodyPr wrap="square" anchor="t" lIns="45720" rIns="45720" tIns="18288" bIns="18288">
-            <a:spAutoFit/>
-          </a:bodyPr>
-          <a:lstStyle/>
-          <a:p>
             <a:pPr algn="r"/>
             <a:r>
-              <a:rPr sz="1000" b="1" i="0">
+              <a:rPr sz="1200" b="1" i="0">
                 <a:solidFill>
                   <a:srgbClr val="6B767C"/>
                 </a:solidFill>
@@ -10251,7 +10226,7 @@
         <p:spPr>
           <a:xfrm>
             <a:off x="0" y="0"/>
-            <a:ext cx="12191695" cy="1051560"/>
+            <a:ext cx="12191695" cy="960120"/>
           </a:xfrm>
           <a:prstGeom prst="rect">
             <a:avLst/>
@@ -10294,8 +10269,8 @@
         </p:nvSpPr>
         <p:spPr>
           <a:xfrm>
-            <a:off x="0" y="1051560"/>
-            <a:ext cx="12191695" cy="50292"/>
+            <a:off x="0" y="960120"/>
+            <a:ext cx="12191695" cy="45720"/>
           </a:xfrm>
           <a:prstGeom prst="rect">
             <a:avLst/>
@@ -10338,8 +10313,8 @@
         </p:nvSpPr>
         <p:spPr>
           <a:xfrm>
-            <a:off x="502920" y="109728"/>
-            <a:ext cx="11155680" cy="868680"/>
+            <a:off x="502920" y="73152"/>
+            <a:ext cx="11155680" cy="822960"/>
           </a:xfrm>
           <a:prstGeom prst="rect">
             <a:avLst/>
@@ -10347,30 +10322,30 @@
           <a:noFill/>
         </p:spPr>
         <p:txBody>
-          <a:bodyPr wrap="square" anchor="ctr" lIns="45720" rIns="45720" tIns="18288" bIns="18288">
+          <a:bodyPr wrap="square" anchor="ctr" lIns="36576" rIns="36576" tIns="36576" bIns="36576">
             <a:spAutoFit/>
           </a:bodyPr>
           <a:lstStyle/>
           <a:p>
             <a:r>
-              <a:rPr sz="1200" b="1" i="0">
+              <a:rPr sz="1300" b="1" i="0">
                 <a:solidFill>
                   <a:srgbClr val="BFDDE6"/>
                 </a:solidFill>
                 <a:latin typeface="Calibri"/>
               </a:rPr>
-              <a:t>Metodologie</a:t>
-            </a:r>
-          </a:p>
-          <a:p>
-            <a:r>
-              <a:rPr sz="2700" b="1" i="0">
+              <a:t>Extensie predictivă</a:t>
+            </a:r>
+          </a:p>
+          <a:p>
+            <a:r>
+              <a:rPr sz="3000" b="1" i="0">
                 <a:solidFill>
                   <a:srgbClr val="FFFFFF"/>
                 </a:solidFill>
                 <a:latin typeface="Calibri"/>
               </a:rPr>
-              <a:t>Comparație și calibrare</a:t>
+              <a:t>Predicție LSTM</a:t>
             </a:r>
           </a:p>
         </p:txBody>
@@ -10383,8 +10358,8 @@
         </p:nvSpPr>
         <p:spPr>
           <a:xfrm>
-            <a:off x="594360" y="1371600"/>
-            <a:ext cx="10972800" cy="4754880"/>
+            <a:off x="731520" y="1371600"/>
+            <a:ext cx="10789920" cy="4754880"/>
           </a:xfrm>
           <a:prstGeom prst="rect">
             <a:avLst/>
@@ -10392,7 +10367,7 @@
           <a:noFill/>
         </p:spPr>
         <p:txBody>
-          <a:bodyPr wrap="square" anchor="t" lIns="45720" rIns="45720" tIns="18288" bIns="18288">
+          <a:bodyPr wrap="square" anchor="ctr" lIns="36576" rIns="36576" tIns="36576" bIns="36576">
             <a:spAutoFit/>
           </a:bodyPr>
           <a:lstStyle/>
@@ -10402,26 +10377,26 @@
                 <a:spcPts val="0"/>
               </a:spcBef>
               <a:spcAft>
-                <a:spcPts val="1000"/>
+                <a:spcPts val="1800"/>
               </a:spcAft>
             </a:pPr>
             <a:r>
-              <a:rPr sz="1800" b="1" i="0">
+              <a:rPr sz="2700" b="1" i="0">
                 <a:solidFill>
                   <a:srgbClr val="1E88A8"/>
                 </a:solidFill>
                 <a:latin typeface="Calibri"/>
               </a:rPr>
-              <a:t>▸ </a:t>
-            </a:r>
-            <a:r>
-              <a:rPr sz="1800" b="0" i="0">
-                <a:solidFill>
-                  <a:srgbClr val="232A2E"/>
-                </a:solidFill>
-                <a:latin typeface="Calibri"/>
-              </a:rPr>
-              <a:t>Operator de observație g_m(x): transformă starea internă a modelului în mărimi comparabile cu datele.</a:t>
+              <a:t>▸  </a:t>
+            </a:r>
+            <a:r>
+              <a:rPr sz="2700" b="0" i="0">
+                <a:solidFill>
+                  <a:srgbClr val="20282C"/>
+                </a:solidFill>
+                <a:latin typeface="Calibri"/>
+              </a:rPr>
+              <a:t>LSTM hand-rolled în NumPy (BPTT, SGD)</a:t>
             </a:r>
           </a:p>
           <a:p>
@@ -10430,26 +10405,26 @@
                 <a:spcPts val="0"/>
               </a:spcBef>
               <a:spcAft>
-                <a:spcPts val="1000"/>
+                <a:spcPts val="1800"/>
               </a:spcAft>
             </a:pPr>
             <a:r>
-              <a:rPr sz="1800" b="1" i="0">
+              <a:rPr sz="2700" b="1" i="0">
                 <a:solidFill>
                   <a:srgbClr val="1E88A8"/>
                 </a:solidFill>
                 <a:latin typeface="Calibri"/>
               </a:rPr>
-              <a:t>▸ </a:t>
-            </a:r>
-            <a:r>
-              <a:rPr sz="1800" b="0" i="0">
-                <a:solidFill>
-                  <a:srgbClr val="232A2E"/>
-                </a:solidFill>
-                <a:latin typeface="Calibri"/>
-              </a:rPr>
-              <a:t>Metrici de eroare pe ferestre separate de antrenare și test: MAE, RMSE, nRMSE.</a:t>
+              <a:t>▸  </a:t>
+            </a:r>
+            <a:r>
+              <a:rPr sz="2700" b="0" i="0">
+                <a:solidFill>
+                  <a:srgbClr val="20282C"/>
+                </a:solidFill>
+                <a:latin typeface="Calibri"/>
+              </a:rPr>
+              <a:t>Univariată, independentă de modele</a:t>
             </a:r>
           </a:p>
           <a:p>
@@ -10458,26 +10433,54 @@
                 <a:spcPts val="0"/>
               </a:spcBef>
               <a:spcAft>
-                <a:spcPts val="1000"/>
+                <a:spcPts val="1800"/>
               </a:spcAft>
             </a:pPr>
             <a:r>
-              <a:rPr sz="1800" b="1" i="0">
+              <a:rPr sz="2700" b="1" i="0">
                 <a:solidFill>
                   <a:srgbClr val="1E88A8"/>
                 </a:solidFill>
                 <a:latin typeface="Calibri"/>
               </a:rPr>
-              <a:t>▸ </a:t>
-            </a:r>
-            <a:r>
-              <a:rPr sz="1800" b="0" i="0">
-                <a:solidFill>
-                  <a:srgbClr val="232A2E"/>
-                </a:solidFill>
-                <a:latin typeface="Calibri"/>
-              </a:rPr>
-              <a:t>Calibrarea = problemă de optimizare pe parametri (Nelder–Mead, restartări multiple).</a:t>
+              <a:t>▸  </a:t>
+            </a:r>
+            <a:r>
+              <a:rPr sz="2700" b="0" i="0">
+                <a:solidFill>
+                  <a:srgbClr val="20282C"/>
+                </a:solidFill>
+                <a:latin typeface="Calibri"/>
+              </a:rPr>
+              <a:t>Rezultat onest: persistența domină la 1 zi</a:t>
+            </a:r>
+          </a:p>
+          <a:p>
+            <a:pPr lvl="1">
+              <a:spcBef>
+                <a:spcPts val="0"/>
+              </a:spcBef>
+              <a:spcAft>
+                <a:spcPts val="1800"/>
+              </a:spcAft>
+            </a:pPr>
+            <a:r>
+              <a:rPr sz="2300" b="1" i="0">
+                <a:solidFill>
+                  <a:srgbClr val="6B767C"/>
+                </a:solidFill>
+                <a:latin typeface="Calibri"/>
+              </a:rPr>
+              <a:t>–  </a:t>
+            </a:r>
+            <a:r>
+              <a:rPr sz="2300" b="0" i="0">
+                <a:solidFill>
+                  <a:srgbClr val="444C50"/>
+                </a:solidFill>
+                <a:latin typeface="Calibri"/>
+              </a:rPr>
+              <a:t>85% zile plate (raportare săptămânală)</a:t>
             </a:r>
           </a:p>
           <a:p>
@@ -10486,110 +10489,26 @@
                 <a:spcPts val="0"/>
               </a:spcBef>
               <a:spcAft>
-                <a:spcPts val="1000"/>
+                <a:spcPts val="1800"/>
               </a:spcAft>
             </a:pPr>
             <a:r>
-              <a:rPr sz="1800" b="1" i="0">
+              <a:rPr sz="2700" b="1" i="0">
                 <a:solidFill>
                   <a:srgbClr val="1E88A8"/>
                 </a:solidFill>
                 <a:latin typeface="Calibri"/>
               </a:rPr>
-              <a:t>▸ </a:t>
-            </a:r>
-            <a:r>
-              <a:rPr sz="1800" b="0" i="0">
-                <a:solidFill>
-                  <a:srgbClr val="232A2E"/>
-                </a:solidFill>
-                <a:latin typeface="Calibri"/>
-              </a:rPr>
-              <a:t>Separare deliberată a două planuri:</a:t>
-            </a:r>
-          </a:p>
-          <a:p>
-            <a:pPr lvl="1">
-              <a:spcBef>
-                <a:spcPts val="0"/>
-              </a:spcBef>
-              <a:spcAft>
-                <a:spcPts val="1000"/>
-              </a:spcAft>
-            </a:pPr>
-            <a:r>
-              <a:rPr sz="1600" b="1" i="0">
-                <a:solidFill>
-                  <a:srgbClr val="6B767C"/>
-                </a:solidFill>
-                <a:latin typeface="Calibri"/>
-              </a:rPr>
-              <a:t>–  </a:t>
-            </a:r>
-            <a:r>
-              <a:rPr sz="1600" b="0" i="0">
-                <a:solidFill>
-                  <a:srgbClr val="444C50"/>
-                </a:solidFill>
-                <a:latin typeface="Calibri"/>
-              </a:rPr>
-              <a:t>comparația epidemiologică (structură, ipoteze, acuratețe);</a:t>
-            </a:r>
-          </a:p>
-          <a:p>
-            <a:pPr lvl="1">
-              <a:spcBef>
-                <a:spcPts val="0"/>
-              </a:spcBef>
-              <a:spcAft>
-                <a:spcPts val="1000"/>
-              </a:spcAft>
-            </a:pPr>
-            <a:r>
-              <a:rPr sz="1600" b="1" i="0">
-                <a:solidFill>
-                  <a:srgbClr val="6B767C"/>
-                </a:solidFill>
-                <a:latin typeface="Calibri"/>
-              </a:rPr>
-              <a:t>–  </a:t>
-            </a:r>
-            <a:r>
-              <a:rPr sz="1600" b="0" i="0">
-                <a:solidFill>
-                  <a:srgbClr val="444C50"/>
-                </a:solidFill>
-                <a:latin typeface="Calibri"/>
-              </a:rPr>
-              <a:t>comparația software (timp, memorie, cost de integrare).</a:t>
-            </a:r>
-          </a:p>
-          <a:p>
-            <a:pPr>
-              <a:spcBef>
-                <a:spcPts val="0"/>
-              </a:spcBef>
-              <a:spcAft>
-                <a:spcPts val="1000"/>
-              </a:spcAft>
-            </a:pPr>
-            <a:r>
-              <a:rPr sz="1800" b="1" i="0">
-                <a:solidFill>
-                  <a:srgbClr val="1E88A8"/>
-                </a:solidFill>
-                <a:latin typeface="Calibri"/>
-              </a:rPr>
-              <a:t>▸ </a:t>
-            </a:r>
-            <a:r>
-              <a:rPr sz="1800" b="0" i="0">
-                <a:solidFill>
-                  <a:srgbClr val="232A2E"/>
-                </a:solidFill>
-                <a:latin typeface="Calibri"/>
-              </a:rPr>
-              <a:t>Costul software al calibrării este măsurat și raportat alături de eroarea numerică.</a:t>
+              <a:t>▸  </a:t>
+            </a:r>
+            <a:r>
+              <a:rPr sz="2700" b="0" i="0">
+                <a:solidFill>
+                  <a:srgbClr val="20282C"/>
+                </a:solidFill>
+                <a:latin typeface="Calibri"/>
+              </a:rPr>
+              <a:t>Rol: prognoză scurtă + corecție reziduuri</a:t>
             </a:r>
           </a:p>
         </p:txBody>
@@ -10602,8 +10521,8 @@
         </p:nvSpPr>
         <p:spPr>
           <a:xfrm>
-            <a:off x="502920" y="6419088"/>
-            <a:ext cx="8229600" cy="365760"/>
+            <a:off x="11247120" y="6437376"/>
+            <a:ext cx="822960" cy="365760"/>
           </a:xfrm>
           <a:prstGeom prst="rect">
             <a:avLst/>
@@ -10611,48 +10530,14 @@
           <a:noFill/>
         </p:spPr>
         <p:txBody>
-          <a:bodyPr wrap="square" anchor="t" lIns="45720" rIns="45720" tIns="18288" bIns="18288">
+          <a:bodyPr wrap="square" anchor="t" lIns="36576" rIns="36576" tIns="36576" bIns="36576">
             <a:spAutoFit/>
           </a:bodyPr>
           <a:lstStyle/>
           <a:p>
-            <a:r>
-              <a:rPr sz="900" b="0" i="0">
-                <a:solidFill>
-                  <a:srgbClr val="6B767C"/>
-                </a:solidFill>
-                <a:latin typeface="Calibri"/>
-              </a:rPr>
-              <a:t>Sisteme e-medicine pentru date epidemiologice  ·  Geană Tudor-Bogdan</a:t>
-            </a:r>
-          </a:p>
-        </p:txBody>
-      </p:sp>
-      <p:sp>
-        <p:nvSpPr>
-          <p:cNvPr id="7" name="TextBox 6"/>
-          <p:cNvSpPr txBox="1"/>
-          <p:nvPr/>
-        </p:nvSpPr>
-        <p:spPr>
-          <a:xfrm>
-            <a:off x="11155680" y="6419088"/>
-            <a:ext cx="822960" cy="365760"/>
-          </a:xfrm>
-          <a:prstGeom prst="rect">
-            <a:avLst/>
-          </a:prstGeom>
-          <a:noFill/>
-        </p:spPr>
-        <p:txBody>
-          <a:bodyPr wrap="square" anchor="t" lIns="45720" rIns="45720" tIns="18288" bIns="18288">
-            <a:spAutoFit/>
-          </a:bodyPr>
-          <a:lstStyle/>
-          <a:p>
             <a:pPr algn="r"/>
             <a:r>
-              <a:rPr sz="1000" b="1" i="0">
+              <a:rPr sz="1200" b="1" i="0">
                 <a:solidFill>
                   <a:srgbClr val="6B767C"/>
                 </a:solidFill>
@@ -10989,4 +10874,324 @@
   </a:objectDefaults>
   <a:extraClrSchemeLst/>
 </a:theme>
+</file>
+
+<file path=ppt/theme/theme2.xml><?xml version="1.0" encoding="utf-8"?>
+<a:theme xmlns:a="http://schemas.openxmlformats.org/drawingml/2006/main" name="Office Theme">
+  <a:themeElements>
+    <a:clrScheme name="Office">
+      <a:dk1>
+        <a:sysClr val="windowText" lastClr="000000"/>
+      </a:dk1>
+      <a:lt1>
+        <a:sysClr val="window" lastClr="FFFFFF"/>
+      </a:lt1>
+      <a:dk2>
+        <a:srgbClr val="1F497D"/>
+      </a:dk2>
+      <a:lt2>
+        <a:srgbClr val="EEECE1"/>
+      </a:lt2>
+      <a:accent1>
+        <a:srgbClr val="4F81BD"/>
+      </a:accent1>
+      <a:accent2>
+        <a:srgbClr val="C0504D"/>
+      </a:accent2>
+      <a:accent3>
+        <a:srgbClr val="9BBB59"/>
+      </a:accent3>
+      <a:accent4>
+        <a:srgbClr val="8064A2"/>
+      </a:accent4>
+      <a:accent5>
+        <a:srgbClr val="4BACC6"/>
+      </a:accent5>
+      <a:accent6>
+        <a:srgbClr val="F79646"/>
+      </a:accent6>
+      <a:hlink>
+        <a:srgbClr val="0000FF"/>
+      </a:hlink>
+      <a:folHlink>
+        <a:srgbClr val="800080"/>
+      </a:folHlink>
+    </a:clrScheme>
+    <a:fontScheme name="Office">
+      <a:majorFont>
+        <a:latin typeface="Calibri"/>
+        <a:ea typeface=""/>
+        <a:cs typeface=""/>
+        <a:font script="Jpan" typeface="ＭＳ Ｐゴシック"/>
+        <a:font script="Hang" typeface="맑은 고딕"/>
+        <a:font script="Hans" typeface="宋体"/>
+        <a:font script="Hant" typeface="新細明體"/>
+        <a:font script="Arab" typeface="Times New Roman"/>
+        <a:font script="Hebr" typeface="Times New Roman"/>
+        <a:font script="Thai" typeface="Angsana New"/>
+        <a:font script="Ethi" typeface="Nyala"/>
+        <a:font script="Beng" typeface="Vrinda"/>
+        <a:font script="Gujr" typeface="Shruti"/>
+        <a:font script="Khmr" typeface="MoolBoran"/>
+        <a:font script="Knda" typeface="Tunga"/>
+        <a:font script="Guru" typeface="Raavi"/>
+        <a:font script="Cans" typeface="Euphemia"/>
+        <a:font script="Cher" typeface="Plantagenet Cherokee"/>
+        <a:font script="Yiii" typeface="Microsoft Yi Baiti"/>
+        <a:font script="Tibt" typeface="Microsoft Himalaya"/>
+        <a:font script="Thaa" typeface="MV Boli"/>
+        <a:font script="Deva" typeface="Mangal"/>
+        <a:font script="Telu" typeface="Gautami"/>
+        <a:font script="Taml" typeface="Latha"/>
+        <a:font script="Syrc" typeface="Estrangelo Edessa"/>
+        <a:font script="Orya" typeface="Kalinga"/>
+        <a:font script="Mlym" typeface="Kartika"/>
+        <a:font script="Laoo" typeface="DokChampa"/>
+        <a:font script="Sinh" typeface="Iskoola Pota"/>
+        <a:font script="Mong" typeface="Mongolian Baiti"/>
+        <a:font script="Viet" typeface="Times New Roman"/>
+        <a:font script="Uigh" typeface="Microsoft Uighur"/>
+        <a:font script="Geor" typeface="Sylfaen"/>
+      </a:majorFont>
+      <a:minorFont>
+        <a:latin typeface="Calibri"/>
+        <a:ea typeface=""/>
+        <a:cs typeface=""/>
+        <a:font script="Jpan" typeface="ＭＳ Ｐゴシック"/>
+        <a:font script="Hang" typeface="맑은 고딕"/>
+        <a:font script="Hans" typeface="宋体"/>
+        <a:font script="Hant" typeface="新細明體"/>
+        <a:font script="Arab" typeface="Arial"/>
+        <a:font script="Hebr" typeface="Arial"/>
+        <a:font script="Thai" typeface="Cordia New"/>
+        <a:font script="Ethi" typeface="Nyala"/>
+        <a:font script="Beng" typeface="Vrinda"/>
+        <a:font script="Gujr" typeface="Shruti"/>
+        <a:font script="Khmr" typeface="DaunPenh"/>
+        <a:font script="Knda" typeface="Tunga"/>
+        <a:font script="Guru" typeface="Raavi"/>
+        <a:font script="Cans" typeface="Euphemia"/>
+        <a:font script="Cher" typeface="Plantagenet Cherokee"/>
+        <a:font script="Yiii" typeface="Microsoft Yi Baiti"/>
+        <a:font script="Tibt" typeface="Microsoft Himalaya"/>
+        <a:font script="Thaa" typeface="MV Boli"/>
+        <a:font script="Deva" typeface="Mangal"/>
+        <a:font script="Telu" typeface="Gautami"/>
+        <a:font script="Taml" typeface="Latha"/>
+        <a:font script="Syrc" typeface="Estrangelo Edessa"/>
+        <a:font script="Orya" typeface="Kalinga"/>
+        <a:font script="Mlym" typeface="Kartika"/>
+        <a:font script="Laoo" typeface="DokChampa"/>
+        <a:font script="Sinh" typeface="Iskoola Pota"/>
+        <a:font script="Mong" typeface="Mongolian Baiti"/>
+        <a:font script="Viet" typeface="Arial"/>
+        <a:font script="Uigh" typeface="Microsoft Uighur"/>
+        <a:font script="Geor" typeface="Sylfaen"/>
+      </a:minorFont>
+    </a:fontScheme>
+    <a:fmtScheme name="Office">
+      <a:fillStyleLst>
+        <a:solidFill>
+          <a:schemeClr val="phClr"/>
+        </a:solidFill>
+        <a:gradFill rotWithShape="1">
+          <a:gsLst>
+            <a:gs pos="0">
+              <a:schemeClr val="phClr">
+                <a:tint val="50000"/>
+                <a:satMod val="300000"/>
+              </a:schemeClr>
+            </a:gs>
+            <a:gs pos="35000">
+              <a:schemeClr val="phClr">
+                <a:tint val="37000"/>
+                <a:satMod val="300000"/>
+              </a:schemeClr>
+            </a:gs>
+            <a:gs pos="100000">
+              <a:schemeClr val="phClr">
+                <a:tint val="15000"/>
+                <a:satMod val="350000"/>
+              </a:schemeClr>
+            </a:gs>
+          </a:gsLst>
+          <a:lin ang="16200000" scaled="1"/>
+        </a:gradFill>
+        <a:gradFill rotWithShape="1">
+          <a:gsLst>
+            <a:gs pos="0">
+              <a:schemeClr val="phClr">
+                <a:tint val="100000"/>
+                <a:shade val="100000"/>
+                <a:satMod val="130000"/>
+              </a:schemeClr>
+            </a:gs>
+            <a:gs pos="100000">
+              <a:schemeClr val="phClr">
+                <a:tint val="50000"/>
+                <a:shade val="100000"/>
+                <a:satMod val="350000"/>
+              </a:schemeClr>
+            </a:gs>
+          </a:gsLst>
+          <a:lin ang="16200000" scaled="0"/>
+        </a:gradFill>
+      </a:fillStyleLst>
+      <a:lnStyleLst>
+        <a:ln w="9525" cap="flat" cmpd="sng" algn="ctr">
+          <a:solidFill>
+            <a:schemeClr val="phClr">
+              <a:shade val="95000"/>
+              <a:satMod val="105000"/>
+            </a:schemeClr>
+          </a:solidFill>
+          <a:prstDash val="solid"/>
+        </a:ln>
+        <a:ln w="25400" cap="flat" cmpd="sng" algn="ctr">
+          <a:solidFill>
+            <a:schemeClr val="phClr"/>
+          </a:solidFill>
+          <a:prstDash val="solid"/>
+        </a:ln>
+        <a:ln w="38100" cap="flat" cmpd="sng" algn="ctr">
+          <a:solidFill>
+            <a:schemeClr val="phClr"/>
+          </a:solidFill>
+          <a:prstDash val="solid"/>
+        </a:ln>
+      </a:lnStyleLst>
+      <a:effectStyleLst>
+        <a:effectStyle>
+          <a:effectLst>
+            <a:outerShdw blurRad="40000" dist="20000" dir="5400000" rotWithShape="0">
+              <a:srgbClr val="000000">
+                <a:alpha val="38000"/>
+              </a:srgbClr>
+            </a:outerShdw>
+          </a:effectLst>
+        </a:effectStyle>
+        <a:effectStyle>
+          <a:effectLst>
+            <a:outerShdw blurRad="40000" dist="23000" dir="5400000" rotWithShape="0">
+              <a:srgbClr val="000000">
+                <a:alpha val="35000"/>
+              </a:srgbClr>
+            </a:outerShdw>
+          </a:effectLst>
+        </a:effectStyle>
+        <a:effectStyle>
+          <a:effectLst>
+            <a:outerShdw blurRad="40000" dist="23000" dir="5400000" rotWithShape="0">
+              <a:srgbClr val="000000">
+                <a:alpha val="35000"/>
+              </a:srgbClr>
+            </a:outerShdw>
+          </a:effectLst>
+          <a:scene3d>
+            <a:camera prst="orthographicFront">
+              <a:rot lat="0" lon="0" rev="0"/>
+            </a:camera>
+            <a:lightRig rig="threePt" dir="t">
+              <a:rot lat="0" lon="0" rev="1200000"/>
+            </a:lightRig>
+          </a:scene3d>
+          <a:sp3d>
+            <a:bevelT w="63500" h="25400"/>
+          </a:sp3d>
+        </a:effectStyle>
+      </a:effectStyleLst>
+      <a:bgFillStyleLst>
+        <a:solidFill>
+          <a:schemeClr val="phClr"/>
+        </a:solidFill>
+        <a:gradFill rotWithShape="1">
+          <a:gsLst>
+            <a:gs pos="0">
+              <a:schemeClr val="phClr">
+                <a:tint val="40000"/>
+                <a:satMod val="350000"/>
+              </a:schemeClr>
+            </a:gs>
+            <a:gs pos="40000">
+              <a:schemeClr val="phClr">
+                <a:tint val="45000"/>
+                <a:shade val="99000"/>
+                <a:satMod val="350000"/>
+              </a:schemeClr>
+            </a:gs>
+            <a:gs pos="100000">
+              <a:schemeClr val="phClr">
+                <a:shade val="20000"/>
+                <a:satMod val="255000"/>
+              </a:schemeClr>
+            </a:gs>
+          </a:gsLst>
+          <a:path path="circle">
+            <a:fillToRect l="50000" t="-80000" r="50000" b="180000"/>
+          </a:path>
+        </a:gradFill>
+        <a:gradFill rotWithShape="1">
+          <a:gsLst>
+            <a:gs pos="0">
+              <a:schemeClr val="phClr">
+                <a:tint val="80000"/>
+                <a:satMod val="300000"/>
+              </a:schemeClr>
+            </a:gs>
+            <a:gs pos="100000">
+              <a:schemeClr val="phClr">
+                <a:shade val="30000"/>
+                <a:satMod val="200000"/>
+              </a:schemeClr>
+            </a:gs>
+          </a:gsLst>
+          <a:path path="circle">
+            <a:fillToRect l="50000" t="50000" r="50000" b="50000"/>
+          </a:path>
+        </a:gradFill>
+      </a:bgFillStyleLst>
+    </a:fmtScheme>
+  </a:themeElements>
+  <a:objectDefaults>
+    <a:spDef>
+      <a:spPr/>
+      <a:bodyPr/>
+      <a:lstStyle/>
+      <a:style>
+        <a:lnRef idx="1">
+          <a:schemeClr val="accent1"/>
+        </a:lnRef>
+        <a:fillRef idx="3">
+          <a:schemeClr val="accent1"/>
+        </a:fillRef>
+        <a:effectRef idx="2">
+          <a:schemeClr val="accent1"/>
+        </a:effectRef>
+        <a:fontRef idx="minor">
+          <a:schemeClr val="lt1"/>
+        </a:fontRef>
+      </a:style>
+    </a:spDef>
+    <a:lnDef>
+      <a:spPr/>
+      <a:bodyPr/>
+      <a:lstStyle/>
+      <a:style>
+        <a:lnRef idx="2">
+          <a:schemeClr val="accent1"/>
+        </a:lnRef>
+        <a:fillRef idx="0">
+          <a:schemeClr val="accent1"/>
+        </a:fillRef>
+        <a:effectRef idx="1">
+          <a:schemeClr val="accent1"/>
+        </a:effectRef>
+        <a:fontRef idx="minor">
+          <a:schemeClr val="tx1"/>
+        </a:fontRef>
+      </a:style>
+    </a:lnDef>
+  </a:objectDefaults>
+  <a:extraClrSchemeLst/>
+</a:theme>
 </file>
--- a/docs/Disertatie_prezentare.pptx
+++ b/docs/Disertatie_prezentare.pptx
@@ -24,6 +24,8 @@
     <p:sldId id="272" r:id="rId23"/>
     <p:sldId id="273" r:id="rId24"/>
     <p:sldId id="274" r:id="rId25"/>
+    <p:sldId id="275" r:id="rId26"/>
+    <p:sldId id="276" r:id="rId27"/>
   </p:sldIdLst>
   <p:sldSz cx="12191695" cy="6858000" type="screen4x3"/>
   <p:notesSz cx="6858000" cy="9144000"/>
@@ -1220,7 +1222,7 @@
           <a:lstStyle/>
           <a:p>
             <a:r>
-              <a:t>Cu aceasta închei prezentarea. Vă mulțumesc pentru atenție și sunt pregătit să răspund la întrebările dumneavoastră. Vă stau la dispoziție pentru orice clarificare legată de modelele matematice, de implementarea în cele trei limbaje sau de rezultatele experimentale.</a:t>
+              <a:t>Lucrarea deschide mai multe direcții de cercetare. Cea mai importantă este calibrarea modelului SIDARTHE pe date mai bogate — testare, spitalizare, terapie intensivă — folosind operatori de observație multipli, ca să pot constrânge separat grupuri de parametri. Un prim pas concret, deja pregătit de îmbogățirea schemei de date, este calibrarea bivariată, care fitează simultan cazurile și decesele și rupe valea de identifiabilitate slabă pe care am arătat-o la SIR. Pe partea predictivă, direcția naturală este varianta hibridă, în care LSTM-ul învață reziduurile modelului compartimental, testată pe toate cele 38 de țări din setul OWID. Tehnic, urmează promovarea calibrării într-un job asincron în aplicație, extinderea benchmark-ului pe alt hardware, inclusiv GPU pentru LSTM, și, pe partea operațională, o suită de teste end-to-end, autoscalare orizontală și un stack de observabilitate cu Prometheus și Grafana.</a:t>
             </a:r>
           </a:p>
         </p:txBody>
@@ -1291,6 +1293,146 @@
           <a:p>
             <a:r>
               <a:t>Pornesc de la o observație simplă, dar importantă: bolile infecțioase nu sunt doar un fenomen clinic, ci unul populațional. Felul în care se răspândește un agent patogen depinde de contacte, de mobilitate, de modul de raportare și de capacitatea de răspuns a sistemului sanitar. Pandemiile recente — gripa din 1918, SARS-ul din 2003, COVID-19 — au arătat asta foarte clar. Modelele compartimentale, începând cu modelul SIR formulat de Kermack și McKendrick în 1927, ne oferă un limbaj matematic riguros pentru a descrie această dinamică prin ecuații diferențiale. Însă în practica reală problema nu se oprește la scrierea ecuațiilor. Datele epidemiologice vin din surse eterogene, au goluri și corecții administrative. Iar implementarea numerică poate fi făcută în limbaje diferite — R, Julia, Python — fiecare cu costuri proprii de timp, de memorie și de reproductibilitate. De aceea, ideea centrală a lucrării este să leg explicit partea de modelare matematică de partea de implementare software, într-un cadru unitar și reproductibil.</a:t>
+            </a:r>
+          </a:p>
+        </p:txBody>
+      </p:sp>
+      <p:sp>
+        <p:nvSpPr>
+          <p:cNvPr id="4" name="Slide Number Placeholder 3"/>
+          <p:cNvSpPr>
+            <a:spLocks noGrp="1"/>
+          </p:cNvSpPr>
+          <p:nvPr>
+            <p:ph type="sldNum" idx="5" sz="quarter"/>
+          </p:nvPr>
+        </p:nvSpPr>
+        <p:spPr/>
+      </p:sp>
+    </p:spTree>
+  </p:cSld>
+  <p:clrMapOvr>
+    <a:masterClrMapping/>
+  </p:clrMapOvr>
+</p:notes>
+</file>
+
+<file path=ppt/notesSlides/notesSlide20.xml><?xml version="1.0" encoding="utf-8"?>
+<p:notes xmlns:a="http://schemas.openxmlformats.org/drawingml/2006/main" xmlns:p="http://schemas.openxmlformats.org/presentationml/2006/main" xmlns:r="http://schemas.openxmlformats.org/officeDocument/2006/relationships">
+  <p:cSld>
+    <p:spTree>
+      <p:nvGrpSpPr>
+        <p:cNvPr id="1" name=""/>
+        <p:cNvGrpSpPr/>
+        <p:nvPr/>
+      </p:nvGrpSpPr>
+      <p:grpSpPr>
+        <a:xfrm>
+          <a:off x="0" y="0"/>
+          <a:ext cx="0" cy="0"/>
+          <a:chOff x="0" y="0"/>
+          <a:chExt cx="0" cy="0"/>
+        </a:xfrm>
+      </p:grpSpPr>
+      <p:sp>
+        <p:nvSpPr>
+          <p:cNvPr id="2" name="Slide Image Placeholder 1"/>
+          <p:cNvSpPr>
+            <a:spLocks noGrp="1"/>
+          </p:cNvSpPr>
+          <p:nvPr>
+            <p:ph type="sldImg" idx="2"/>
+          </p:nvPr>
+        </p:nvSpPr>
+        <p:spPr/>
+      </p:sp>
+      <p:sp>
+        <p:nvSpPr>
+          <p:cNvPr id="3" name="Notes Placeholder 2"/>
+          <p:cNvSpPr>
+            <a:spLocks noGrp="1"/>
+          </p:cNvSpPr>
+          <p:nvPr>
+            <p:ph type="body" idx="3" sz="quarter"/>
+          </p:nvPr>
+        </p:nvSpPr>
+        <p:spPr/>
+        <p:txBody>
+          <a:bodyPr/>
+          <a:lstStyle/>
+          <a:p>
+            <a:r>
+              <a:t>În final, principalele referințe ale lucrării. Pe partea de modelare epidemiologică: articolul clasic Kermack și McKendrick din 1927, care introduce modelul SIR; articolul Giordano și colaboratorii din 2020 din Nature Medicine, care propune modelul SIDARTHE; sinteza lui Hethcote despre matematica bolilor infecțioase; și Diekmann, pentru definiția riguroasă a numărului de reproducere prin matricea generației următoare. Pe partea numerică: perechea Dormand-Prince, pentru metoda RK45, și documentația celor trei biblioteci de solvere folosite — deSolve, DifferentialEquations.jl și SciPy. Iar pentru componenta predictivă, articolul original Hochreiter și Schmidhuber, care introduce rețelele LSTM. Lista completă, de peste treizeci de referințe, se află în bibliografia tezei.</a:t>
+            </a:r>
+          </a:p>
+        </p:txBody>
+      </p:sp>
+      <p:sp>
+        <p:nvSpPr>
+          <p:cNvPr id="4" name="Slide Number Placeholder 3"/>
+          <p:cNvSpPr>
+            <a:spLocks noGrp="1"/>
+          </p:cNvSpPr>
+          <p:nvPr>
+            <p:ph type="sldNum" idx="5" sz="quarter"/>
+          </p:nvPr>
+        </p:nvSpPr>
+        <p:spPr/>
+      </p:sp>
+    </p:spTree>
+  </p:cSld>
+  <p:clrMapOvr>
+    <a:masterClrMapping/>
+  </p:clrMapOvr>
+</p:notes>
+</file>
+
+<file path=ppt/notesSlides/notesSlide21.xml><?xml version="1.0" encoding="utf-8"?>
+<p:notes xmlns:a="http://schemas.openxmlformats.org/drawingml/2006/main" xmlns:p="http://schemas.openxmlformats.org/presentationml/2006/main" xmlns:r="http://schemas.openxmlformats.org/officeDocument/2006/relationships">
+  <p:cSld>
+    <p:spTree>
+      <p:nvGrpSpPr>
+        <p:cNvPr id="1" name=""/>
+        <p:cNvGrpSpPr/>
+        <p:nvPr/>
+      </p:nvGrpSpPr>
+      <p:grpSpPr>
+        <a:xfrm>
+          <a:off x="0" y="0"/>
+          <a:ext cx="0" cy="0"/>
+          <a:chOff x="0" y="0"/>
+          <a:chExt cx="0" cy="0"/>
+        </a:xfrm>
+      </p:grpSpPr>
+      <p:sp>
+        <p:nvSpPr>
+          <p:cNvPr id="2" name="Slide Image Placeholder 1"/>
+          <p:cNvSpPr>
+            <a:spLocks noGrp="1"/>
+          </p:cNvSpPr>
+          <p:nvPr>
+            <p:ph type="sldImg" idx="2"/>
+          </p:nvPr>
+        </p:nvSpPr>
+        <p:spPr/>
+      </p:sp>
+      <p:sp>
+        <p:nvSpPr>
+          <p:cNvPr id="3" name="Notes Placeholder 2"/>
+          <p:cNvSpPr>
+            <a:spLocks noGrp="1"/>
+          </p:cNvSpPr>
+          <p:nvPr>
+            <p:ph type="body" idx="3" sz="quarter"/>
+          </p:nvPr>
+        </p:nvSpPr>
+        <p:spPr/>
+        <p:txBody>
+          <a:bodyPr/>
+          <a:lstStyle/>
+          <a:p>
+            <a:r>
+              <a:t>Cu aceasta închei prezentarea. Vă mulțumesc pentru atenție și sunt pregătit să răspund la întrebările dumneavoastră. Vă stau la dispoziție pentru orice clarificare legată de modelele matematice, de implementarea în cele trei limbaje sau de rezultatele experimentale.</a:t>
             </a:r>
           </a:p>
         </p:txBody>
@@ -7946,51 +8088,7 @@
         <p:spPr>
           <a:xfrm>
             <a:off x="0" y="0"/>
-            <a:ext cx="12191695" cy="6858000"/>
-          </a:xfrm>
-          <a:prstGeom prst="rect">
-            <a:avLst/>
-          </a:prstGeom>
-          <a:solidFill>
-            <a:srgbClr val="FFFFFF"/>
-          </a:solidFill>
-          <a:ln>
-            <a:noFill/>
-          </a:ln>
-          <a:effectLst/>
-        </p:spPr>
-        <p:style>
-          <a:lnRef idx="1">
-            <a:schemeClr val="accent1"/>
-          </a:lnRef>
-          <a:fillRef idx="3">
-            <a:schemeClr val="accent1"/>
-          </a:fillRef>
-          <a:effectRef idx="2">
-            <a:schemeClr val="accent1"/>
-          </a:effectRef>
-          <a:fontRef idx="minor">
-            <a:schemeClr val="lt1"/>
-          </a:fontRef>
-        </p:style>
-        <p:txBody>
-          <a:bodyPr rtlCol="0" anchor="ctr"/>
-          <a:lstStyle/>
-          <a:p>
-            <a:pPr algn="ctr"/>
-          </a:p>
-        </p:txBody>
-      </p:sp>
-      <p:sp>
-        <p:nvSpPr>
-          <p:cNvPr id="3" name="Rectangle 2"/>
-          <p:cNvSpPr/>
-          <p:nvPr/>
-        </p:nvSpPr>
-        <p:spPr>
-          <a:xfrm>
-            <a:off x="0" y="2468880"/>
-            <a:ext cx="12191695" cy="1920240"/>
+            <a:ext cx="12191695" cy="960120"/>
           </a:xfrm>
           <a:prstGeom prst="rect">
             <a:avLst/>
@@ -8027,14 +8125,58 @@
       </p:sp>
       <p:sp>
         <p:nvSpPr>
+          <p:cNvPr id="3" name="Rectangle 2"/>
+          <p:cNvSpPr/>
+          <p:nvPr/>
+        </p:nvSpPr>
+        <p:spPr>
+          <a:xfrm>
+            <a:off x="0" y="960120"/>
+            <a:ext cx="12191695" cy="45720"/>
+          </a:xfrm>
+          <a:prstGeom prst="rect">
+            <a:avLst/>
+          </a:prstGeom>
+          <a:solidFill>
+            <a:srgbClr val="1E88A8"/>
+          </a:solidFill>
+          <a:ln>
+            <a:noFill/>
+          </a:ln>
+          <a:effectLst/>
+        </p:spPr>
+        <p:style>
+          <a:lnRef idx="1">
+            <a:schemeClr val="accent1"/>
+          </a:lnRef>
+          <a:fillRef idx="3">
+            <a:schemeClr val="accent1"/>
+          </a:fillRef>
+          <a:effectRef idx="2">
+            <a:schemeClr val="accent1"/>
+          </a:effectRef>
+          <a:fontRef idx="minor">
+            <a:schemeClr val="lt1"/>
+          </a:fontRef>
+        </p:style>
+        <p:txBody>
+          <a:bodyPr rtlCol="0" anchor="ctr"/>
+          <a:lstStyle/>
+          <a:p>
+            <a:pPr algn="ctr"/>
+          </a:p>
+        </p:txBody>
+      </p:sp>
+      <p:sp>
+        <p:nvSpPr>
           <p:cNvPr id="4" name="TextBox 3"/>
           <p:cNvSpPr txBox="1"/>
           <p:nvPr/>
         </p:nvSpPr>
         <p:spPr>
           <a:xfrm>
-            <a:off x="640080" y="2468880"/>
-            <a:ext cx="10972800" cy="1920240"/>
+            <a:off x="502920" y="73152"/>
+            <a:ext cx="11155680" cy="822960"/>
           </a:xfrm>
           <a:prstGeom prst="rect">
             <a:avLst/>
@@ -8047,31 +8189,251 @@
           </a:bodyPr>
           <a:lstStyle/>
           <a:p>
-            <a:pPr algn="ctr"/>
-            <a:r>
-              <a:rPr sz="4000" b="1" i="0">
+            <a:r>
+              <a:rPr sz="1300" b="1" i="0">
+                <a:solidFill>
+                  <a:srgbClr val="BFDDE6"/>
+                </a:solidFill>
+                <a:latin typeface="Calibri"/>
+              </a:rPr>
+              <a:t>Perspective</a:t>
+            </a:r>
+          </a:p>
+          <a:p>
+            <a:r>
+              <a:rPr sz="3000" b="1" i="0">
                 <a:solidFill>
                   <a:srgbClr val="FFFFFF"/>
                 </a:solidFill>
                 <a:latin typeface="Calibri"/>
               </a:rPr>
-              <a:t>Vă mulțumesc!   Întrebări?</a:t>
-            </a:r>
-          </a:p>
-          <a:p>
-            <a:pPr algn="ctr">
+              <a:t>Direcții viitoare de cercetare</a:t>
+            </a:r>
+          </a:p>
+        </p:txBody>
+      </p:sp>
+      <p:sp>
+        <p:nvSpPr>
+          <p:cNvPr id="5" name="TextBox 4"/>
+          <p:cNvSpPr txBox="1"/>
+          <p:nvPr/>
+        </p:nvSpPr>
+        <p:spPr>
+          <a:xfrm>
+            <a:off x="731520" y="1371600"/>
+            <a:ext cx="10789920" cy="4754880"/>
+          </a:xfrm>
+          <a:prstGeom prst="rect">
+            <a:avLst/>
+          </a:prstGeom>
+          <a:noFill/>
+        </p:spPr>
+        <p:txBody>
+          <a:bodyPr wrap="square" anchor="ctr" lIns="36576" rIns="36576" tIns="36576" bIns="36576">
+            <a:spAutoFit/>
+          </a:bodyPr>
+          <a:lstStyle/>
+          <a:p>
+            <a:pPr>
               <a:spcBef>
-                <a:spcPts val="1000"/>
+                <a:spcPts val="0"/>
               </a:spcBef>
+              <a:spcAft>
+                <a:spcPts val="1400"/>
+              </a:spcAft>
             </a:pPr>
             <a:r>
-              <a:rPr sz="1600" b="0" i="0">
-                <a:solidFill>
-                  <a:srgbClr val="CFE6EE"/>
-                </a:solidFill>
-                <a:latin typeface="Calibri"/>
-              </a:rPr>
-              <a:t>Geană Tudor-Bogdan  ·  Coordonator: Prof. Radu Rădescu</a:t>
+              <a:rPr sz="2400" b="1" i="0">
+                <a:solidFill>
+                  <a:srgbClr val="1E88A8"/>
+                </a:solidFill>
+                <a:latin typeface="Calibri"/>
+              </a:rPr>
+              <a:t>▸  </a:t>
+            </a:r>
+            <a:r>
+              <a:rPr sz="2400" b="0" i="0">
+                <a:solidFill>
+                  <a:srgbClr val="20282C"/>
+                </a:solidFill>
+                <a:latin typeface="Calibri"/>
+              </a:rPr>
+              <a:t>Calibrare SIDARTHE pe date bogate (testare, spitalizare, ATI)</a:t>
+            </a:r>
+          </a:p>
+          <a:p>
+            <a:pPr>
+              <a:spcBef>
+                <a:spcPts val="0"/>
+              </a:spcBef>
+              <a:spcAft>
+                <a:spcPts val="1400"/>
+              </a:spcAft>
+            </a:pPr>
+            <a:r>
+              <a:rPr sz="2400" b="1" i="0">
+                <a:solidFill>
+                  <a:srgbClr val="1E88A8"/>
+                </a:solidFill>
+                <a:latin typeface="Calibri"/>
+              </a:rPr>
+              <a:t>▸  </a:t>
+            </a:r>
+            <a:r>
+              <a:rPr sz="2400" b="0" i="0">
+                <a:solidFill>
+                  <a:srgbClr val="20282C"/>
+                </a:solidFill>
+                <a:latin typeface="Calibri"/>
+              </a:rPr>
+              <a:t>Calibrare bivariată (I + D) — rupe valea de identifiabilitate</a:t>
+            </a:r>
+          </a:p>
+          <a:p>
+            <a:pPr>
+              <a:spcBef>
+                <a:spcPts val="0"/>
+              </a:spcBef>
+              <a:spcAft>
+                <a:spcPts val="1400"/>
+              </a:spcAft>
+            </a:pPr>
+            <a:r>
+              <a:rPr sz="2400" b="1" i="0">
+                <a:solidFill>
+                  <a:srgbClr val="1E88A8"/>
+                </a:solidFill>
+                <a:latin typeface="Calibri"/>
+              </a:rPr>
+              <a:t>▸  </a:t>
+            </a:r>
+            <a:r>
+              <a:rPr sz="2400" b="0" i="0">
+                <a:solidFill>
+                  <a:srgbClr val="20282C"/>
+                </a:solidFill>
+                <a:latin typeface="Calibri"/>
+              </a:rPr>
+              <a:t>LSTM hibrid peste reziduuri, pe toate cele 38 de țări OWID</a:t>
+            </a:r>
+          </a:p>
+          <a:p>
+            <a:pPr>
+              <a:spcBef>
+                <a:spcPts val="0"/>
+              </a:spcBef>
+              <a:spcAft>
+                <a:spcPts val="1400"/>
+              </a:spcAft>
+            </a:pPr>
+            <a:r>
+              <a:rPr sz="2400" b="1" i="0">
+                <a:solidFill>
+                  <a:srgbClr val="1E88A8"/>
+                </a:solidFill>
+                <a:latin typeface="Calibri"/>
+              </a:rPr>
+              <a:t>▸  </a:t>
+            </a:r>
+            <a:r>
+              <a:rPr sz="2400" b="0" i="0">
+                <a:solidFill>
+                  <a:srgbClr val="20282C"/>
+                </a:solidFill>
+                <a:latin typeface="Calibri"/>
+              </a:rPr>
+              <a:t>Calibrarea ca job asincron în aplicație</a:t>
+            </a:r>
+          </a:p>
+          <a:p>
+            <a:pPr>
+              <a:spcBef>
+                <a:spcPts val="0"/>
+              </a:spcBef>
+              <a:spcAft>
+                <a:spcPts val="1400"/>
+              </a:spcAft>
+            </a:pPr>
+            <a:r>
+              <a:rPr sz="2400" b="1" i="0">
+                <a:solidFill>
+                  <a:srgbClr val="1E88A8"/>
+                </a:solidFill>
+                <a:latin typeface="Calibri"/>
+              </a:rPr>
+              <a:t>▸  </a:t>
+            </a:r>
+            <a:r>
+              <a:rPr sz="2400" b="0" i="0">
+                <a:solidFill>
+                  <a:srgbClr val="20282C"/>
+                </a:solidFill>
+                <a:latin typeface="Calibri"/>
+              </a:rPr>
+              <a:t>Benchmark pe alt hardware (GPU pentru LSTM)</a:t>
+            </a:r>
+          </a:p>
+          <a:p>
+            <a:pPr>
+              <a:spcBef>
+                <a:spcPts val="0"/>
+              </a:spcBef>
+              <a:spcAft>
+                <a:spcPts val="1400"/>
+              </a:spcAft>
+            </a:pPr>
+            <a:r>
+              <a:rPr sz="2400" b="1" i="0">
+                <a:solidFill>
+                  <a:srgbClr val="1E88A8"/>
+                </a:solidFill>
+                <a:latin typeface="Calibri"/>
+              </a:rPr>
+              <a:t>▸  </a:t>
+            </a:r>
+            <a:r>
+              <a:rPr sz="2400" b="0" i="0">
+                <a:solidFill>
+                  <a:srgbClr val="20282C"/>
+                </a:solidFill>
+                <a:latin typeface="Calibri"/>
+              </a:rPr>
+              <a:t>Teste e2e · autoscalare (HPA) · observabilitate (Prometheus + Grafana)</a:t>
+            </a:r>
+          </a:p>
+        </p:txBody>
+      </p:sp>
+      <p:sp>
+        <p:nvSpPr>
+          <p:cNvPr id="6" name="TextBox 5"/>
+          <p:cNvSpPr txBox="1"/>
+          <p:nvPr/>
+        </p:nvSpPr>
+        <p:spPr>
+          <a:xfrm>
+            <a:off x="11247120" y="6437376"/>
+            <a:ext cx="822960" cy="365760"/>
+          </a:xfrm>
+          <a:prstGeom prst="rect">
+            <a:avLst/>
+          </a:prstGeom>
+          <a:noFill/>
+        </p:spPr>
+        <p:txBody>
+          <a:bodyPr wrap="square" anchor="t" lIns="36576" rIns="36576" tIns="36576" bIns="36576">
+            <a:spAutoFit/>
+          </a:bodyPr>
+          <a:lstStyle/>
+          <a:p>
+            <a:pPr algn="r"/>
+            <a:r>
+              <a:rPr sz="1200" b="1" i="0">
+                <a:solidFill>
+                  <a:srgbClr val="6B767C"/>
+                </a:solidFill>
+                <a:latin typeface="Calibri"/>
+              </a:rPr>
+              <a:t>18</a:t>
             </a:r>
           </a:p>
         </p:txBody>
@@ -8393,6 +8755,597 @@
                 <a:latin typeface="Calibri"/>
               </a:rPr>
               <a:t>1</a:t>
+            </a:r>
+          </a:p>
+        </p:txBody>
+      </p:sp>
+    </p:spTree>
+  </p:cSld>
+  <p:clrMapOvr>
+    <a:masterClrMapping/>
+  </p:clrMapOvr>
+</p:sld>
+</file>
+
+<file path=ppt/slides/slide20.xml><?xml version="1.0" encoding="utf-8"?>
+<p:sld xmlns:a="http://schemas.openxmlformats.org/drawingml/2006/main" xmlns:p="http://schemas.openxmlformats.org/presentationml/2006/main" xmlns:r="http://schemas.openxmlformats.org/officeDocument/2006/relationships">
+  <p:cSld>
+    <p:spTree>
+      <p:nvGrpSpPr>
+        <p:cNvPr id="1" name=""/>
+        <p:cNvGrpSpPr/>
+        <p:nvPr/>
+      </p:nvGrpSpPr>
+      <p:grpSpPr/>
+      <p:sp>
+        <p:nvSpPr>
+          <p:cNvPr id="2" name="Rectangle 1"/>
+          <p:cNvSpPr/>
+          <p:nvPr/>
+        </p:nvSpPr>
+        <p:spPr>
+          <a:xfrm>
+            <a:off x="0" y="0"/>
+            <a:ext cx="12191695" cy="960120"/>
+          </a:xfrm>
+          <a:prstGeom prst="rect">
+            <a:avLst/>
+          </a:prstGeom>
+          <a:solidFill>
+            <a:srgbClr val="124A63"/>
+          </a:solidFill>
+          <a:ln>
+            <a:noFill/>
+          </a:ln>
+          <a:effectLst/>
+        </p:spPr>
+        <p:style>
+          <a:lnRef idx="1">
+            <a:schemeClr val="accent1"/>
+          </a:lnRef>
+          <a:fillRef idx="3">
+            <a:schemeClr val="accent1"/>
+          </a:fillRef>
+          <a:effectRef idx="2">
+            <a:schemeClr val="accent1"/>
+          </a:effectRef>
+          <a:fontRef idx="minor">
+            <a:schemeClr val="lt1"/>
+          </a:fontRef>
+        </p:style>
+        <p:txBody>
+          <a:bodyPr rtlCol="0" anchor="ctr"/>
+          <a:lstStyle/>
+          <a:p>
+            <a:pPr algn="ctr"/>
+          </a:p>
+        </p:txBody>
+      </p:sp>
+      <p:sp>
+        <p:nvSpPr>
+          <p:cNvPr id="3" name="Rectangle 2"/>
+          <p:cNvSpPr/>
+          <p:nvPr/>
+        </p:nvSpPr>
+        <p:spPr>
+          <a:xfrm>
+            <a:off x="0" y="960120"/>
+            <a:ext cx="12191695" cy="45720"/>
+          </a:xfrm>
+          <a:prstGeom prst="rect">
+            <a:avLst/>
+          </a:prstGeom>
+          <a:solidFill>
+            <a:srgbClr val="1E88A8"/>
+          </a:solidFill>
+          <a:ln>
+            <a:noFill/>
+          </a:ln>
+          <a:effectLst/>
+        </p:spPr>
+        <p:style>
+          <a:lnRef idx="1">
+            <a:schemeClr val="accent1"/>
+          </a:lnRef>
+          <a:fillRef idx="3">
+            <a:schemeClr val="accent1"/>
+          </a:fillRef>
+          <a:effectRef idx="2">
+            <a:schemeClr val="accent1"/>
+          </a:effectRef>
+          <a:fontRef idx="minor">
+            <a:schemeClr val="lt1"/>
+          </a:fontRef>
+        </p:style>
+        <p:txBody>
+          <a:bodyPr rtlCol="0" anchor="ctr"/>
+          <a:lstStyle/>
+          <a:p>
+            <a:pPr algn="ctr"/>
+          </a:p>
+        </p:txBody>
+      </p:sp>
+      <p:sp>
+        <p:nvSpPr>
+          <p:cNvPr id="4" name="TextBox 3"/>
+          <p:cNvSpPr txBox="1"/>
+          <p:nvPr/>
+        </p:nvSpPr>
+        <p:spPr>
+          <a:xfrm>
+            <a:off x="502920" y="73152"/>
+            <a:ext cx="11155680" cy="822960"/>
+          </a:xfrm>
+          <a:prstGeom prst="rect">
+            <a:avLst/>
+          </a:prstGeom>
+          <a:noFill/>
+        </p:spPr>
+        <p:txBody>
+          <a:bodyPr wrap="square" anchor="ctr" lIns="36576" rIns="36576" tIns="36576" bIns="36576">
+            <a:spAutoFit/>
+          </a:bodyPr>
+          <a:lstStyle/>
+          <a:p>
+            <a:r>
+              <a:rPr sz="1300" b="1" i="0">
+                <a:solidFill>
+                  <a:srgbClr val="BFDDE6"/>
+                </a:solidFill>
+                <a:latin typeface="Calibri"/>
+              </a:rPr>
+              <a:t>Referințe</a:t>
+            </a:r>
+          </a:p>
+          <a:p>
+            <a:r>
+              <a:rPr sz="3000" b="1" i="0">
+                <a:solidFill>
+                  <a:srgbClr val="FFFFFF"/>
+                </a:solidFill>
+                <a:latin typeface="Calibri"/>
+              </a:rPr>
+              <a:t>Bibliografie selectivă</a:t>
+            </a:r>
+          </a:p>
+        </p:txBody>
+      </p:sp>
+      <p:sp>
+        <p:nvSpPr>
+          <p:cNvPr id="5" name="TextBox 4"/>
+          <p:cNvSpPr txBox="1"/>
+          <p:nvPr/>
+        </p:nvSpPr>
+        <p:spPr>
+          <a:xfrm>
+            <a:off x="640080" y="1234440"/>
+            <a:ext cx="10972800" cy="5212080"/>
+          </a:xfrm>
+          <a:prstGeom prst="rect">
+            <a:avLst/>
+          </a:prstGeom>
+          <a:noFill/>
+        </p:spPr>
+        <p:txBody>
+          <a:bodyPr wrap="square" anchor="t" lIns="36576" rIns="36576" tIns="36576" bIns="36576">
+            <a:spAutoFit/>
+          </a:bodyPr>
+          <a:lstStyle/>
+          <a:p>
+            <a:pPr>
+              <a:spcAft>
+                <a:spcPts val="900"/>
+              </a:spcAft>
+            </a:pPr>
+            <a:r>
+              <a:rPr sz="1500" b="1" i="0">
+                <a:solidFill>
+                  <a:srgbClr val="1E88A8"/>
+                </a:solidFill>
+                <a:latin typeface="Calibri"/>
+              </a:rPr>
+              <a:t>[1]  </a:t>
+            </a:r>
+            <a:r>
+              <a:rPr sz="1500" b="0" i="0">
+                <a:solidFill>
+                  <a:srgbClr val="20282C"/>
+                </a:solidFill>
+                <a:latin typeface="Calibri"/>
+              </a:rPr>
+              <a:t>Kermack, W. O., McKendrick, A. G. (1927). A Contribution to the Mathematical Theory of Epidemics. Proc. Royal Society A.</a:t>
+            </a:r>
+          </a:p>
+          <a:p>
+            <a:pPr>
+              <a:spcAft>
+                <a:spcPts val="900"/>
+              </a:spcAft>
+            </a:pPr>
+            <a:r>
+              <a:rPr sz="1500" b="1" i="0">
+                <a:solidFill>
+                  <a:srgbClr val="1E88A8"/>
+                </a:solidFill>
+                <a:latin typeface="Calibri"/>
+              </a:rPr>
+              <a:t>[2]  </a:t>
+            </a:r>
+            <a:r>
+              <a:rPr sz="1500" b="0" i="0">
+                <a:solidFill>
+                  <a:srgbClr val="20282C"/>
+                </a:solidFill>
+                <a:latin typeface="Calibri"/>
+              </a:rPr>
+              <a:t>Giordano, G. et al. (2020). Modelling the COVID-19 epidemic and implementation of population-wide interventions in Italy [SIDARTHE]. Nature Medicine.</a:t>
+            </a:r>
+          </a:p>
+          <a:p>
+            <a:pPr>
+              <a:spcAft>
+                <a:spcPts val="900"/>
+              </a:spcAft>
+            </a:pPr>
+            <a:r>
+              <a:rPr sz="1500" b="1" i="0">
+                <a:solidFill>
+                  <a:srgbClr val="1E88A8"/>
+                </a:solidFill>
+                <a:latin typeface="Calibri"/>
+              </a:rPr>
+              <a:t>[3]  </a:t>
+            </a:r>
+            <a:r>
+              <a:rPr sz="1500" b="0" i="0">
+                <a:solidFill>
+                  <a:srgbClr val="20282C"/>
+                </a:solidFill>
+                <a:latin typeface="Calibri"/>
+              </a:rPr>
+              <a:t>Hethcote, H. W. (2000). The Mathematics of Infectious Diseases. SIAM Review.</a:t>
+            </a:r>
+          </a:p>
+          <a:p>
+            <a:pPr>
+              <a:spcAft>
+                <a:spcPts val="900"/>
+              </a:spcAft>
+            </a:pPr>
+            <a:r>
+              <a:rPr sz="1500" b="1" i="0">
+                <a:solidFill>
+                  <a:srgbClr val="1E88A8"/>
+                </a:solidFill>
+                <a:latin typeface="Calibri"/>
+              </a:rPr>
+              <a:t>[4]  </a:t>
+            </a:r>
+            <a:r>
+              <a:rPr sz="1500" b="0" i="0">
+                <a:solidFill>
+                  <a:srgbClr val="20282C"/>
+                </a:solidFill>
+                <a:latin typeface="Calibri"/>
+              </a:rPr>
+              <a:t>Diekmann, O., Heesterbeek, J. A. P., Metz, J. A. J. (1990). On the Definition and the Computation of the Basic Reproduction Ratio R₀. J. Mathematical Biology.</a:t>
+            </a:r>
+          </a:p>
+          <a:p>
+            <a:pPr>
+              <a:spcAft>
+                <a:spcPts val="900"/>
+              </a:spcAft>
+            </a:pPr>
+            <a:r>
+              <a:rPr sz="1500" b="1" i="0">
+                <a:solidFill>
+                  <a:srgbClr val="1E88A8"/>
+                </a:solidFill>
+                <a:latin typeface="Calibri"/>
+              </a:rPr>
+              <a:t>[5]  </a:t>
+            </a:r>
+            <a:r>
+              <a:rPr sz="1500" b="0" i="0">
+                <a:solidFill>
+                  <a:srgbClr val="20282C"/>
+                </a:solidFill>
+                <a:latin typeface="Calibri"/>
+              </a:rPr>
+              <a:t>Hochreiter, S., Schmidhuber, J. (1997). Long Short-Term Memory. Neural Computation.</a:t>
+            </a:r>
+          </a:p>
+          <a:p>
+            <a:pPr>
+              <a:spcAft>
+                <a:spcPts val="900"/>
+              </a:spcAft>
+            </a:pPr>
+            <a:r>
+              <a:rPr sz="1500" b="1" i="0">
+                <a:solidFill>
+                  <a:srgbClr val="1E88A8"/>
+                </a:solidFill>
+                <a:latin typeface="Calibri"/>
+              </a:rPr>
+              <a:t>[6]  </a:t>
+            </a:r>
+            <a:r>
+              <a:rPr sz="1500" b="0" i="0">
+                <a:solidFill>
+                  <a:srgbClr val="20282C"/>
+                </a:solidFill>
+                <a:latin typeface="Calibri"/>
+              </a:rPr>
+              <a:t>Dormand, J. R., Prince, P. J. (1980). A Family of Embedded Runge-Kutta Formulae. J. Computational and Applied Mathematics.</a:t>
+            </a:r>
+          </a:p>
+          <a:p>
+            <a:pPr>
+              <a:spcAft>
+                <a:spcPts val="900"/>
+              </a:spcAft>
+            </a:pPr>
+            <a:r>
+              <a:rPr sz="1500" b="1" i="0">
+                <a:solidFill>
+                  <a:srgbClr val="1E88A8"/>
+                </a:solidFill>
+                <a:latin typeface="Calibri"/>
+              </a:rPr>
+              <a:t>[7]  </a:t>
+            </a:r>
+            <a:r>
+              <a:rPr sz="1500" b="0" i="0">
+                <a:solidFill>
+                  <a:srgbClr val="20282C"/>
+                </a:solidFill>
+                <a:latin typeface="Calibri"/>
+              </a:rPr>
+              <a:t>Soetaert, K., Petzoldt, T., Setzer, R. W. (2010). Solving Differential Equations in R: Package deSolve. J. Statistical Software.</a:t>
+            </a:r>
+          </a:p>
+          <a:p>
+            <a:pPr>
+              <a:spcAft>
+                <a:spcPts val="900"/>
+              </a:spcAft>
+            </a:pPr>
+            <a:r>
+              <a:rPr sz="1500" b="1" i="0">
+                <a:solidFill>
+                  <a:srgbClr val="1E88A8"/>
+                </a:solidFill>
+                <a:latin typeface="Calibri"/>
+              </a:rPr>
+              <a:t>[8]  </a:t>
+            </a:r>
+            <a:r>
+              <a:rPr sz="1500" b="0" i="0">
+                <a:solidFill>
+                  <a:srgbClr val="20282C"/>
+                </a:solidFill>
+                <a:latin typeface="Calibri"/>
+              </a:rPr>
+              <a:t>Rackauckas, C., Nie, Q. (2017). DifferentialEquations.jl — A Performant and Feature-Rich Ecosystem for Solving Differential Equations in Julia. J. Open Research Software.</a:t>
+            </a:r>
+          </a:p>
+          <a:p>
+            <a:pPr>
+              <a:spcAft>
+                <a:spcPts val="900"/>
+              </a:spcAft>
+            </a:pPr>
+            <a:r>
+              <a:rPr sz="1500" b="1" i="0">
+                <a:solidFill>
+                  <a:srgbClr val="1E88A8"/>
+                </a:solidFill>
+                <a:latin typeface="Calibri"/>
+              </a:rPr>
+              <a:t>[9]  </a:t>
+            </a:r>
+            <a:r>
+              <a:rPr sz="1500" b="0" i="0">
+                <a:solidFill>
+                  <a:srgbClr val="20282C"/>
+                </a:solidFill>
+                <a:latin typeface="Calibri"/>
+              </a:rPr>
+              <a:t>Virtanen, P. et al. (2020). SciPy 1.0: Fundamental Algorithms for Scientific Computing in Python. Nature Methods.</a:t>
+            </a:r>
+          </a:p>
+        </p:txBody>
+      </p:sp>
+      <p:sp>
+        <p:nvSpPr>
+          <p:cNvPr id="6" name="TextBox 5"/>
+          <p:cNvSpPr txBox="1"/>
+          <p:nvPr/>
+        </p:nvSpPr>
+        <p:spPr>
+          <a:xfrm>
+            <a:off x="11247120" y="6437376"/>
+            <a:ext cx="822960" cy="365760"/>
+          </a:xfrm>
+          <a:prstGeom prst="rect">
+            <a:avLst/>
+          </a:prstGeom>
+          <a:noFill/>
+        </p:spPr>
+        <p:txBody>
+          <a:bodyPr wrap="square" anchor="t" lIns="36576" rIns="36576" tIns="36576" bIns="36576">
+            <a:spAutoFit/>
+          </a:bodyPr>
+          <a:lstStyle/>
+          <a:p>
+            <a:pPr algn="r"/>
+            <a:r>
+              <a:rPr sz="1200" b="1" i="0">
+                <a:solidFill>
+                  <a:srgbClr val="6B767C"/>
+                </a:solidFill>
+                <a:latin typeface="Calibri"/>
+              </a:rPr>
+              <a:t>19</a:t>
+            </a:r>
+          </a:p>
+        </p:txBody>
+      </p:sp>
+    </p:spTree>
+  </p:cSld>
+  <p:clrMapOvr>
+    <a:masterClrMapping/>
+  </p:clrMapOvr>
+</p:sld>
+</file>
+
+<file path=ppt/slides/slide21.xml><?xml version="1.0" encoding="utf-8"?>
+<p:sld xmlns:a="http://schemas.openxmlformats.org/drawingml/2006/main" xmlns:p="http://schemas.openxmlformats.org/presentationml/2006/main" xmlns:r="http://schemas.openxmlformats.org/officeDocument/2006/relationships">
+  <p:cSld>
+    <p:spTree>
+      <p:nvGrpSpPr>
+        <p:cNvPr id="1" name=""/>
+        <p:cNvGrpSpPr/>
+        <p:nvPr/>
+      </p:nvGrpSpPr>
+      <p:grpSpPr/>
+      <p:sp>
+        <p:nvSpPr>
+          <p:cNvPr id="2" name="Rectangle 1"/>
+          <p:cNvSpPr/>
+          <p:nvPr/>
+        </p:nvSpPr>
+        <p:spPr>
+          <a:xfrm>
+            <a:off x="0" y="0"/>
+            <a:ext cx="12191695" cy="6858000"/>
+          </a:xfrm>
+          <a:prstGeom prst="rect">
+            <a:avLst/>
+          </a:prstGeom>
+          <a:solidFill>
+            <a:srgbClr val="FFFFFF"/>
+          </a:solidFill>
+          <a:ln>
+            <a:noFill/>
+          </a:ln>
+          <a:effectLst/>
+        </p:spPr>
+        <p:style>
+          <a:lnRef idx="1">
+            <a:schemeClr val="accent1"/>
+          </a:lnRef>
+          <a:fillRef idx="3">
+            <a:schemeClr val="accent1"/>
+          </a:fillRef>
+          <a:effectRef idx="2">
+            <a:schemeClr val="accent1"/>
+          </a:effectRef>
+          <a:fontRef idx="minor">
+            <a:schemeClr val="lt1"/>
+          </a:fontRef>
+        </p:style>
+        <p:txBody>
+          <a:bodyPr rtlCol="0" anchor="ctr"/>
+          <a:lstStyle/>
+          <a:p>
+            <a:pPr algn="ctr"/>
+          </a:p>
+        </p:txBody>
+      </p:sp>
+      <p:sp>
+        <p:nvSpPr>
+          <p:cNvPr id="3" name="Rectangle 2"/>
+          <p:cNvSpPr/>
+          <p:nvPr/>
+        </p:nvSpPr>
+        <p:spPr>
+          <a:xfrm>
+            <a:off x="0" y="2468880"/>
+            <a:ext cx="12191695" cy="1920240"/>
+          </a:xfrm>
+          <a:prstGeom prst="rect">
+            <a:avLst/>
+          </a:prstGeom>
+          <a:solidFill>
+            <a:srgbClr val="124A63"/>
+          </a:solidFill>
+          <a:ln>
+            <a:noFill/>
+          </a:ln>
+          <a:effectLst/>
+        </p:spPr>
+        <p:style>
+          <a:lnRef idx="1">
+            <a:schemeClr val="accent1"/>
+          </a:lnRef>
+          <a:fillRef idx="3">
+            <a:schemeClr val="accent1"/>
+          </a:fillRef>
+          <a:effectRef idx="2">
+            <a:schemeClr val="accent1"/>
+          </a:effectRef>
+          <a:fontRef idx="minor">
+            <a:schemeClr val="lt1"/>
+          </a:fontRef>
+        </p:style>
+        <p:txBody>
+          <a:bodyPr rtlCol="0" anchor="ctr"/>
+          <a:lstStyle/>
+          <a:p>
+            <a:pPr algn="ctr"/>
+          </a:p>
+        </p:txBody>
+      </p:sp>
+      <p:sp>
+        <p:nvSpPr>
+          <p:cNvPr id="4" name="TextBox 3"/>
+          <p:cNvSpPr txBox="1"/>
+          <p:nvPr/>
+        </p:nvSpPr>
+        <p:spPr>
+          <a:xfrm>
+            <a:off x="640080" y="2468880"/>
+            <a:ext cx="10972800" cy="1920240"/>
+          </a:xfrm>
+          <a:prstGeom prst="rect">
+            <a:avLst/>
+          </a:prstGeom>
+          <a:noFill/>
+        </p:spPr>
+        <p:txBody>
+          <a:bodyPr wrap="square" anchor="ctr" lIns="36576" rIns="36576" tIns="36576" bIns="36576">
+            <a:spAutoFit/>
+          </a:bodyPr>
+          <a:lstStyle/>
+          <a:p>
+            <a:pPr algn="ctr"/>
+            <a:r>
+              <a:rPr sz="4000" b="1" i="0">
+                <a:solidFill>
+                  <a:srgbClr val="FFFFFF"/>
+                </a:solidFill>
+                <a:latin typeface="Calibri"/>
+              </a:rPr>
+              <a:t>Vă mulțumesc!   Întrebări?</a:t>
+            </a:r>
+          </a:p>
+          <a:p>
+            <a:pPr algn="ctr">
+              <a:spcBef>
+                <a:spcPts val="1000"/>
+              </a:spcBef>
+            </a:pPr>
+            <a:r>
+              <a:rPr sz="1600" b="0" i="0">
+                <a:solidFill>
+                  <a:srgbClr val="CFE6EE"/>
+                </a:solidFill>
+                <a:latin typeface="Calibri"/>
+              </a:rPr>
+              <a:t>Geană Tudor-Bogdan  ·  Coordonator: Prof. Radu Rădescu</a:t>
             </a:r>
           </a:p>
         </p:txBody>
